--- a/lessons/lesson-03/slides.pptx
+++ b/lessons/lesson-03/slides.pptx
@@ -2,32 +2,33 @@
 <file path=ppt/presentation.xml><?xml version="1.0" encoding="utf-8"?>
 <p:presentation xmlns:p="http://schemas.openxmlformats.org/presentationml/2006/main">
   <p:sldMasterIdLst>
-    <p:sldMasterId xmlns:r="http://schemas.openxmlformats.org/officeDocument/2006/relationships" id="2147483648" r:id="Rba82150589e54d9e"/>
+    <p:sldMasterId xmlns:r="http://schemas.openxmlformats.org/officeDocument/2006/relationships" id="2147483648" r:id="Rff1214ba8a5d4aa9"/>
   </p:sldMasterIdLst>
   <p:notesMasterIdLst>
-    <p:notesMasterId xmlns:r="http://schemas.openxmlformats.org/officeDocument/2006/relationships" r:id="R26ea49e431294a57"/>
+    <p:notesMasterId xmlns:r="http://schemas.openxmlformats.org/officeDocument/2006/relationships" r:id="Rfa6c2cf486644b90"/>
   </p:notesMasterIdLst>
   <p:sldIdLst>
-    <p:sldId xmlns:r="http://schemas.openxmlformats.org/officeDocument/2006/relationships" id="256" r:id="Rc4359091daf6432e"/>
-    <p:sldId xmlns:r="http://schemas.openxmlformats.org/officeDocument/2006/relationships" id="257" r:id="R16419bbbe9e14e17"/>
-    <p:sldId xmlns:r="http://schemas.openxmlformats.org/officeDocument/2006/relationships" id="258" r:id="R6d043646a8d84f4d"/>
-    <p:sldId xmlns:r="http://schemas.openxmlformats.org/officeDocument/2006/relationships" id="259" r:id="R419cf11033bd4bde"/>
-    <p:sldId xmlns:r="http://schemas.openxmlformats.org/officeDocument/2006/relationships" id="260" r:id="R9f25d522d6d54694"/>
-    <p:sldId xmlns:r="http://schemas.openxmlformats.org/officeDocument/2006/relationships" id="261" r:id="R454458ae36974238"/>
-    <p:sldId xmlns:r="http://schemas.openxmlformats.org/officeDocument/2006/relationships" id="262" r:id="R34a5f3ca36374c33"/>
-    <p:sldId xmlns:r="http://schemas.openxmlformats.org/officeDocument/2006/relationships" id="263" r:id="R6a895ea1e1da4dce"/>
-    <p:sldId xmlns:r="http://schemas.openxmlformats.org/officeDocument/2006/relationships" id="264" r:id="Rb81d9bf41fd14dc4"/>
-    <p:sldId xmlns:r="http://schemas.openxmlformats.org/officeDocument/2006/relationships" id="265" r:id="Ra487f1b2ea86496b"/>
-    <p:sldId xmlns:r="http://schemas.openxmlformats.org/officeDocument/2006/relationships" id="266" r:id="Re748f59d7372428c"/>
-    <p:sldId xmlns:r="http://schemas.openxmlformats.org/officeDocument/2006/relationships" id="267" r:id="R93247f2f15d444d7"/>
-    <p:sldId xmlns:r="http://schemas.openxmlformats.org/officeDocument/2006/relationships" id="268" r:id="Rad6b8b391b9f4122"/>
-    <p:sldId xmlns:r="http://schemas.openxmlformats.org/officeDocument/2006/relationships" id="269" r:id="R32e7e3265c974419"/>
-    <p:sldId xmlns:r="http://schemas.openxmlformats.org/officeDocument/2006/relationships" id="270" r:id="R5377e450f9ad4c94"/>
-    <p:sldId xmlns:r="http://schemas.openxmlformats.org/officeDocument/2006/relationships" id="271" r:id="R301dc1f6fd634ca0"/>
-    <p:sldId xmlns:r="http://schemas.openxmlformats.org/officeDocument/2006/relationships" id="272" r:id="R5aea5d82d480492c"/>
-    <p:sldId xmlns:r="http://schemas.openxmlformats.org/officeDocument/2006/relationships" id="273" r:id="R59fb779febb84e66"/>
-    <p:sldId xmlns:r="http://schemas.openxmlformats.org/officeDocument/2006/relationships" id="274" r:id="R6d9b7bff6da64c03"/>
-    <p:sldId xmlns:r="http://schemas.openxmlformats.org/officeDocument/2006/relationships" id="275" r:id="R249ebedbcf87402f"/>
+    <p:sldId xmlns:r="http://schemas.openxmlformats.org/officeDocument/2006/relationships" id="256" r:id="R5c409d6ca2c34985"/>
+    <p:sldId xmlns:r="http://schemas.openxmlformats.org/officeDocument/2006/relationships" id="257" r:id="R0da66a559dc34fa4"/>
+    <p:sldId xmlns:r="http://schemas.openxmlformats.org/officeDocument/2006/relationships" id="258" r:id="R28fef564da054fa2"/>
+    <p:sldId xmlns:r="http://schemas.openxmlformats.org/officeDocument/2006/relationships" id="259" r:id="Rfbc394a9cae94a5e"/>
+    <p:sldId xmlns:r="http://schemas.openxmlformats.org/officeDocument/2006/relationships" id="260" r:id="R5b9e77ed1e1c42c1"/>
+    <p:sldId xmlns:r="http://schemas.openxmlformats.org/officeDocument/2006/relationships" id="261" r:id="R8f33f0f095b04d1d"/>
+    <p:sldId xmlns:r="http://schemas.openxmlformats.org/officeDocument/2006/relationships" id="262" r:id="R4750686cdfca4f16"/>
+    <p:sldId xmlns:r="http://schemas.openxmlformats.org/officeDocument/2006/relationships" id="263" r:id="Rd35c67d2cb924bb5"/>
+    <p:sldId xmlns:r="http://schemas.openxmlformats.org/officeDocument/2006/relationships" id="264" r:id="Rcf1e670c2c194b4c"/>
+    <p:sldId xmlns:r="http://schemas.openxmlformats.org/officeDocument/2006/relationships" id="265" r:id="R450365622417430c"/>
+    <p:sldId xmlns:r="http://schemas.openxmlformats.org/officeDocument/2006/relationships" id="266" r:id="R392e2b27fd8d4171"/>
+    <p:sldId xmlns:r="http://schemas.openxmlformats.org/officeDocument/2006/relationships" id="267" r:id="Rf4b4cb313e034899"/>
+    <p:sldId xmlns:r="http://schemas.openxmlformats.org/officeDocument/2006/relationships" id="268" r:id="R1d6439127b084dc4"/>
+    <p:sldId xmlns:r="http://schemas.openxmlformats.org/officeDocument/2006/relationships" id="269" r:id="R99fb97e2ae2745c3"/>
+    <p:sldId xmlns:r="http://schemas.openxmlformats.org/officeDocument/2006/relationships" id="270" r:id="R8ca1b7554ce24e91"/>
+    <p:sldId xmlns:r="http://schemas.openxmlformats.org/officeDocument/2006/relationships" id="271" r:id="Raa964466fc454dce"/>
+    <p:sldId xmlns:r="http://schemas.openxmlformats.org/officeDocument/2006/relationships" id="272" r:id="R8597b0ea6f544e99"/>
+    <p:sldId xmlns:r="http://schemas.openxmlformats.org/officeDocument/2006/relationships" id="273" r:id="R4d7f860d6ad140c1"/>
+    <p:sldId xmlns:r="http://schemas.openxmlformats.org/officeDocument/2006/relationships" id="274" r:id="R93649b378a1a4a59"/>
+    <p:sldId xmlns:r="http://schemas.openxmlformats.org/officeDocument/2006/relationships" id="275" r:id="R051f35c7f506402a"/>
+    <p:sldId xmlns:r="http://schemas.openxmlformats.org/officeDocument/2006/relationships" id="276" r:id="R3347daa0b3e844c6"/>
   </p:sldIdLst>
   <p:sldSz cx="12192000" cy="6858000"/>
   <p:notesSz cx="6858000" cy="9144000"/>
@@ -407,7 +408,7 @@
           <a:lstStyle xmlns:a="http://schemas.openxmlformats.org/drawingml/2006/main"/>
           <a:p xmlns:a="http://schemas.openxmlformats.org/drawingml/2006/main">
             <a:r>
-              <a:t>本课把检索从工具操作改写为可复盘的方法，并让每条材料有明确证据角色。</a:t>
+              <a:t>封面只完成课次与主题识别。进入下一页后再提出方法问题：怎样把检索过程变成可复盘的方法，并判断每条材料的证据角色。</a:t>
             </a:r>
           </a:p>
           <a:p xmlns:a="http://schemas.openxmlformats.org/drawingml/2006/main">
@@ -602,7 +603,7 @@
           <a:lstStyle xmlns:a="http://schemas.openxmlformats.org/drawingml/2006/main"/>
           <a:p xmlns:a="http://schemas.openxmlformats.org/drawingml/2006/main">
             <a:r>
-              <a:t>让学生把自己曾当成主证据的一条 AI 引文暂时归回探索线索。</a:t>
+              <a:t>回扣第 1 课：AI 输出成为证据或结论前必须回到原文。本课再拆开三个字段：预期角色回答“可能做什么”，核验状态回答“核到哪里”，筛选决定回答“是否保留”。</a:t>
             </a:r>
           </a:p>
           <a:p xmlns:a="http://schemas.openxmlformats.org/drawingml/2006/main">
@@ -697,7 +698,7 @@
           <a:lstStyle xmlns:a="http://schemas.openxmlformats.org/drawingml/2006/main"/>
           <a:p xmlns:a="http://schemas.openxmlformats.org/drawingml/2006/main">
             <a:r>
-              <a:t>逐条讲完七步，再进入演示。四态进入规则以 references/material-contracts.md 为准。</a:t>
+              <a:t>本课不是只查 DOI，也不是把完整精读塞进一页：入口核验必须包含身份和一条拟用主张，多主张结构、指标和局限由第 4 课深化。DOI 缺失、网络超时或限流只产生失败记录和 pending，不能自动写成 rejected。</a:t>
             </a:r>
           </a:p>
           <a:p xmlns:a="http://schemas.openxmlformats.org/drawingml/2006/main">
@@ -912,7 +913,7 @@
           </a:p>
           <a:p xmlns:a="http://schemas.openxmlformats.org/drawingml/2006/main">
             <a:r>
-              <a:t>- https://www.eecs.harvard.edu/~michaelm/postscripts/ReadPaper.pdf</a:t>
+              <a:t>- https://cs.uwaterloo.ca/~Brecht/courses/856/readings/how-to-read/keshav-paper-reading.pdf</a:t>
             </a:r>
           </a:p>
           <a:p xmlns:a="http://schemas.openxmlformats.org/drawingml/2006/main">
@@ -992,7 +993,7 @@
           <a:lstStyle xmlns:a="http://schemas.openxmlformats.org/drawingml/2006/main"/>
           <a:p xmlns:a="http://schemas.openxmlformats.org/drawingml/2006/main">
             <a:r>
-              <a:t>展示真实条目如何从来源审计进入候选文献表。状态选择 verified-with-caveat，是因为原文提供方法框架但没有受控效果实验。</a:t>
+              <a:t>展示真实条目如何从来源审计进入候选文献表：允许主张能定位到原文，但 Keshav 不直接回答“是否降低遗漏率”，状态 verified-with-caveat、角色仍是探索线索；改变问题或拟用主张时角色可变，状态不自动变。</a:t>
             </a:r>
           </a:p>
           <a:p xmlns:a="http://schemas.openxmlformats.org/drawingml/2006/main">
@@ -1087,7 +1088,7 @@
           <a:lstStyle xmlns:a="http://schemas.openxmlformats.org/drawingml/2006/main"/>
           <a:p xmlns:a="http://schemas.openxmlformats.org/drawingml/2006/main">
             <a:r>
-              <a:t>本页全部引用均为虚构失败案例，不得作为论文事实、DOI 或检索结果引用。请学生给出一条核验步骤，加入改写后的任务契约。</a:t>
+              <a:t>失败对象是教师自己的真实检索记录，不是构造样例：记忆与模型输出的 ID 必须逐条回正式来源核验，rejected 永不入候选表。结论不是“AI 不可用”，而是恢复路径留档后照样能找回正确文献。学生练习对象仍是讲义 §四·5 的虚构论文 A–E，避免练习变成演示复刻；该虚构表标注“不得引用”的纪律不变。请学生给出一条核验步骤，加入改写后的任务契约。</a:t>
             </a:r>
           </a:p>
           <a:p xmlns:a="http://schemas.openxmlformats.org/drawingml/2006/main">
@@ -1102,12 +1103,17 @@
           </a:p>
           <a:p xmlns:a="http://schemas.openxmlformats.org/drawingml/2006/main">
             <a:r>
-              <a:t>- lessons/lesson-03/slides.md</a:t>
-            </a:r>
-          </a:p>
-          <a:p xmlns:a="http://schemas.openxmlformats.org/drawingml/2006/main">
-            <a:r>
-              <a:t>- Fictional classroom placeholders; not real papers, DOI records, or empirical evidence.</a:t>
+              <a:t>- lessons/lesson-03/mi-search-trace-demo.md</a:t>
+            </a:r>
+          </a:p>
+          <a:p xmlns:a="http://schemas.openxmlformats.org/drawingml/2006/main">
+            <a:r>
+              <a:t>- lessons/lesson-03/handout.md</a:t>
+            </a:r>
+          </a:p>
+          <a:p xmlns:a="http://schemas.openxmlformats.org/drawingml/2006/main">
+            <a:r>
+              <a:t>- Real classroom trace on public arXiv metadata; student exercises use the fictional handout table (§四·5), which must not be cited.</a:t>
             </a:r>
           </a:p>
           <a:p xmlns:a="http://schemas.openxmlformats.org/drawingml/2006/main">
@@ -1467,7 +1473,7 @@
           <a:lstStyle xmlns:a="http://schemas.openxmlformats.org/drawingml/2006/main"/>
           <a:p xmlns:a="http://schemas.openxmlformats.org/drawingml/2006/main">
             <a:r>
-              <a:t>快问学生最近一次直接搬用 AI 引文是什么时候，只听回答，不评价。</a:t>
+              <a:t>回扣第 2 课：受限交互让 AI 的动作可审计，但没有解决材料本身是否可信的问题。本课用可修改的问题初稿进入阶段四，处理“材料从哪来、可能支持什么”；八阶段是方法链，不是授课顺序。</a:t>
             </a:r>
           </a:p>
           <a:p xmlns:a="http://schemas.openxmlformats.org/drawingml/2006/main">
@@ -1562,7 +1568,102 @@
           <a:lstStyle xmlns:a="http://schemas.openxmlformats.org/drawingml/2006/main"/>
           <a:p xmlns:a="http://schemas.openxmlformats.org/drawingml/2006/main">
             <a:r>
-              <a:t>回扣 P01：学生已有可复盘起点，不要求当堂完成综述。</a:t>
+              <a:t>用一条主链和三个判断层次收束本讲。强调角色、状态、决定不能合并；AI 可以提出建议，学生负责最终确认、纳入理由和冲突证据保留。</a:t>
+            </a:r>
+          </a:p>
+          <a:p xmlns:a="http://schemas.openxmlformats.org/drawingml/2006/main">
+            <a:r>
+              <a:t/>
+            </a:r>
+          </a:p>
+          <a:p xmlns:a="http://schemas.openxmlformats.org/drawingml/2006/main">
+            <a:r>
+              <a:t>[Sources]</a:t>
+            </a:r>
+          </a:p>
+          <a:p xmlns:a="http://schemas.openxmlformats.org/drawingml/2006/main">
+            <a:r>
+              <a:t>- lessons/lesson-03/handout.md</a:t>
+            </a:r>
+          </a:p>
+          <a:p xmlns:a="http://schemas.openxmlformats.org/drawingml/2006/main">
+            <a:r>
+              <a:t>- lessons/lesson-03/slides.md</a:t>
+            </a:r>
+          </a:p>
+          <a:p xmlns:a="http://schemas.openxmlformats.org/drawingml/2006/main">
+            <a:r>
+              <a:t>[/Sources]</a:t>
+            </a:r>
+          </a:p>
+        </p:txBody>
+      </p:sp>
+      <p:sp>
+        <p:nvSpPr>
+          <p:cNvPr id="4" name="Slide Number Placeholder 3"/>
+          <p:cNvSpPr>
+            <a:spLocks xmlns:a="http://schemas.openxmlformats.org/drawingml/2006/main" noGrp="1"/>
+          </p:cNvSpPr>
+          <p:nvPr>
+            <p:ph type="sldNum" idx="5"/>
+          </p:nvPr>
+        </p:nvSpPr>
+        <p:spPr/>
+        <p:txBody>
+          <a:bodyPr xmlns:a="http://schemas.openxmlformats.org/drawingml/2006/main"/>
+          <a:lstStyle xmlns:a="http://schemas.openxmlformats.org/drawingml/2006/main"/>
+          <a:p xmlns:a="http://schemas.openxmlformats.org/drawingml/2006/main"/>
+        </p:txBody>
+      </p:sp>
+    </p:spTree>
+  </p:cSld>
+  <p:clrMapOvr>
+    <a:masterClrMapping xmlns:a="http://schemas.openxmlformats.org/drawingml/2006/main"/>
+  </p:clrMapOvr>
+</p:notes>
+</file>
+
+<file path=ppt/notesSlides/notesSlide21.xml><?xml version="1.0" encoding="utf-8"?>
+<p:notes xmlns:p="http://schemas.openxmlformats.org/presentationml/2006/main">
+  <p:cSld>
+    <p:spTree>
+      <p:nvGrpSpPr>
+        <p:cNvPr id="1" name=""/>
+        <p:cNvGrpSpPr/>
+        <p:nvPr/>
+      </p:nvGrpSpPr>
+      <p:grpSpPr>
+        <a:xfrm xmlns:a="http://schemas.openxmlformats.org/drawingml/2006/main"/>
+      </p:grpSpPr>
+      <p:sp>
+        <p:nvSpPr>
+          <p:cNvPr id="2" name="Slide Image Placeholder 1"/>
+          <p:cNvSpPr>
+            <a:spLocks xmlns:a="http://schemas.openxmlformats.org/drawingml/2006/main" noGrp="1"/>
+          </p:cNvSpPr>
+          <p:nvPr>
+            <p:ph type="sldImg" idx="0"/>
+          </p:nvPr>
+        </p:nvSpPr>
+        <p:spPr/>
+      </p:sp>
+      <p:sp>
+        <p:nvSpPr>
+          <p:cNvPr id="3" name="Notes Placeholder 2"/>
+          <p:cNvSpPr>
+            <a:spLocks xmlns:a="http://schemas.openxmlformats.org/drawingml/2006/main" noGrp="1"/>
+          </p:cNvSpPr>
+          <p:nvPr>
+            <p:ph type="body" idx="1"/>
+          </p:nvPr>
+        </p:nvSpPr>
+        <p:spPr/>
+        <p:txBody>
+          <a:bodyPr xmlns:a="http://schemas.openxmlformats.org/drawingml/2006/main"/>
+          <a:lstStyle xmlns:a="http://schemas.openxmlformats.org/drawingml/2006/main"/>
+          <a:p xmlns:a="http://schemas.openxmlformats.org/drawingml/2006/main">
+            <a:r>
+              <a:t>学生已有可复盘起点，不要求当堂完成综述；记录卡点后进入第 4 课精读与主张核验。</a:t>
             </a:r>
           </a:p>
           <a:p xmlns:a="http://schemas.openxmlformats.org/drawingml/2006/main">
@@ -1852,7 +1953,7 @@
           <a:lstStyle xmlns:a="http://schemas.openxmlformats.org/drawingml/2006/main"/>
           <a:p xmlns:a="http://schemas.openxmlformats.org/drawingml/2006/main">
             <a:r>
-              <a:t>让学生指出自己项目里哪类材料最多、哪类最缺。</a:t>
+              <a:t>让学生指出自己项目里哪类材料最多、哪类最缺；来源类型不是证据角色分级。</a:t>
             </a:r>
           </a:p>
           <a:p xmlns:a="http://schemas.openxmlformats.org/drawingml/2006/main">
@@ -1947,7 +2048,7 @@
           <a:lstStyle xmlns:a="http://schemas.openxmlformats.org/drawingml/2006/main"/>
           <a:p xmlns:a="http://schemas.openxmlformats.org/drawingml/2006/main">
             <a:r>
-              <a:t>请学生从自己的问题抽三个词，并给一个同义词。</a:t>
+              <a:t>问题只是驱动第一轮检索的初稿，第 6 课再系统定稿；检索结果可以回写问题和关键词。请学生从自己的问题抽三个词，并给一个同义词。</a:t>
             </a:r>
           </a:p>
           <a:p xmlns:a="http://schemas.openxmlformats.org/drawingml/2006/main">
@@ -2232,7 +2333,7 @@
           <a:lstStyle xmlns:a="http://schemas.openxmlformats.org/drawingml/2006/main"/>
           <a:p xmlns:a="http://schemas.openxmlformats.org/drawingml/2006/main">
             <a:r>
-              <a:t>强调直接、一手、可核验三个限定。</a:t>
+              <a:t>主证据直接对应当前问题或拟用主张；学生此时不必已有正式机制假设，先标预期角色，第 4-5 课精读和整理后可修正。一条材料可以同时承担多角色，但每个角色都要写明参照的主张。</a:t>
             </a:r>
           </a:p>
           <a:p xmlns:a="http://schemas.openxmlformats.org/drawingml/2006/main">
@@ -2308,7 +2409,7 @@
           <p:nvPr/>
         </p:nvPicPr>
         <p:blipFill>
-          <a:blip xmlns:r="http://schemas.openxmlformats.org/officeDocument/2006/relationships" xmlns:a="http://schemas.openxmlformats.org/drawingml/2006/main" r:embed="Rb9aa56e747ec4977">
+          <a:blip xmlns:r="http://schemas.openxmlformats.org/officeDocument/2006/relationships" xmlns:a="http://schemas.openxmlformats.org/drawingml/2006/main" r:embed="R665a1496abc049d0">
             <a:duotone>
               <a:prstClr val="black"/>
               <a:schemeClr val="accent1">
@@ -2486,7 +2587,7 @@
           <p:nvPr/>
         </p:nvPicPr>
         <p:blipFill rotWithShape="1">
-          <a:blip xmlns:r="http://schemas.openxmlformats.org/officeDocument/2006/relationships" xmlns:a="http://schemas.openxmlformats.org/drawingml/2006/main" r:embed="R8447973dda704788"/>
+          <a:blip xmlns:r="http://schemas.openxmlformats.org/officeDocument/2006/relationships" xmlns:a="http://schemas.openxmlformats.org/drawingml/2006/main" r:embed="Rfcfdaedefac047ac"/>
           <a:srcRect xmlns:a="http://schemas.openxmlformats.org/drawingml/2006/main" l="74359" t="0" r="1346" b="0"/>
           <a:stretch xmlns:a="http://schemas.openxmlformats.org/drawingml/2006/main"/>
         </p:blipFill>
@@ -2509,7 +2610,7 @@
           <p:nvPr/>
         </p:nvPicPr>
         <p:blipFill rotWithShape="1">
-          <a:blip xmlns:r="http://schemas.openxmlformats.org/officeDocument/2006/relationships" xmlns:a="http://schemas.openxmlformats.org/drawingml/2006/main" r:embed="Rbe5d0cbb58564039">
+          <a:blip xmlns:r="http://schemas.openxmlformats.org/officeDocument/2006/relationships" xmlns:a="http://schemas.openxmlformats.org/drawingml/2006/main" r:embed="R6fcd0b3d53264bb1">
             <a:alphaModFix amt="35000"/>
           </a:blip>
           <a:srcRect xmlns:a="http://schemas.openxmlformats.org/drawingml/2006/main" l="0" t="9831" r="0" b="36385"/>
@@ -2771,7 +2872,7 @@
           <p:nvPr/>
         </p:nvPicPr>
         <p:blipFill>
-          <a:blip xmlns:r="http://schemas.openxmlformats.org/officeDocument/2006/relationships" xmlns:a="http://schemas.openxmlformats.org/drawingml/2006/main" r:embed="R5f7ff67bc6da4b2c"/>
+          <a:blip xmlns:r="http://schemas.openxmlformats.org/officeDocument/2006/relationships" xmlns:a="http://schemas.openxmlformats.org/drawingml/2006/main" r:embed="R4e679b424a1247e7"/>
           <a:srcRect xmlns:a="http://schemas.openxmlformats.org/drawingml/2006/main" l="0" t="0" r="54251" b="0"/>
           <a:stretch xmlns:a="http://schemas.openxmlformats.org/drawingml/2006/main"/>
         </p:blipFill>
@@ -3028,7 +3129,7 @@
           <p:nvPr/>
         </p:nvPicPr>
         <p:blipFill rotWithShape="1">
-          <a:blip xmlns:r="http://schemas.openxmlformats.org/officeDocument/2006/relationships" xmlns:a="http://schemas.openxmlformats.org/drawingml/2006/main" r:embed="Ra539ae04f2c74a22"/>
+          <a:blip xmlns:r="http://schemas.openxmlformats.org/officeDocument/2006/relationships" xmlns:a="http://schemas.openxmlformats.org/drawingml/2006/main" r:embed="R0b28e30dbfbc4ea9"/>
           <a:srcRect xmlns:a="http://schemas.openxmlformats.org/drawingml/2006/main" l="0" t="0" r="1346" b="0"/>
           <a:stretch xmlns:a="http://schemas.openxmlformats.org/drawingml/2006/main"/>
         </p:blipFill>
@@ -3211,7 +3312,7 @@
           <p:nvPr/>
         </p:nvPicPr>
         <p:blipFill>
-          <a:blip xmlns:r="http://schemas.openxmlformats.org/officeDocument/2006/relationships" xmlns:a="http://schemas.openxmlformats.org/drawingml/2006/main" r:embed="Rcad9459295df4605"/>
+          <a:blip xmlns:r="http://schemas.openxmlformats.org/officeDocument/2006/relationships" xmlns:a="http://schemas.openxmlformats.org/drawingml/2006/main" r:embed="R0de3dc864c3244ef"/>
           <a:stretch xmlns:a="http://schemas.openxmlformats.org/drawingml/2006/main">
             <a:fillRect l="0" t="0" r="0" b="0"/>
           </a:stretch>
@@ -3307,7 +3408,7 @@
           <p:nvPr/>
         </p:nvPicPr>
         <p:blipFill>
-          <a:blip xmlns:r="http://schemas.openxmlformats.org/officeDocument/2006/relationships" xmlns:a="http://schemas.openxmlformats.org/drawingml/2006/main" r:embed="R4875b4a94de841a3">
+          <a:blip xmlns:r="http://schemas.openxmlformats.org/officeDocument/2006/relationships" xmlns:a="http://schemas.openxmlformats.org/drawingml/2006/main" r:embed="R61d10c06529749ac">
             <a:duotone>
               <a:prstClr val="black"/>
               <a:schemeClr val="accent1">
@@ -3474,7 +3575,7 @@
           <p:nvPr/>
         </p:nvPicPr>
         <p:blipFill rotWithShape="1">
-          <a:blip xmlns:r="http://schemas.openxmlformats.org/officeDocument/2006/relationships" xmlns:a="http://schemas.openxmlformats.org/drawingml/2006/main" r:embed="Ra561ce828f7f41c0">
+          <a:blip xmlns:r="http://schemas.openxmlformats.org/officeDocument/2006/relationships" xmlns:a="http://schemas.openxmlformats.org/drawingml/2006/main" r:embed="R979bea7061ad4a5b">
             <a:alphaModFix amt="20000"/>
             <a:duotone>
               <a:schemeClr val="accent4">
@@ -3572,10 +3673,10 @@
   </p:cSld>
   <p:clrMap bg1="lt1" tx1="dk1" bg2="lt2" tx2="dk2" accent1="accent1" accent2="accent2" accent3="accent3" accent4="accent4" accent5="accent5" accent6="accent6" hlink="hlink" folHlink="folHlink"/>
   <p:sldLayoutIdLst>
-    <p:sldLayoutId xmlns:r="http://schemas.openxmlformats.org/officeDocument/2006/relationships" id="2147483649" r:id="Rc8bd6d867adf4910"/>
-    <p:sldLayoutId xmlns:r="http://schemas.openxmlformats.org/officeDocument/2006/relationships" id="2147483650" r:id="Re10c002ce0094dce"/>
-    <p:sldLayoutId xmlns:r="http://schemas.openxmlformats.org/officeDocument/2006/relationships" id="2147483651" r:id="Rc620658405534461"/>
-    <p:sldLayoutId xmlns:r="http://schemas.openxmlformats.org/officeDocument/2006/relationships" id="2147483652" r:id="Rdf8aac931cf64b47"/>
+    <p:sldLayoutId xmlns:r="http://schemas.openxmlformats.org/officeDocument/2006/relationships" id="2147483649" r:id="R989b44e456b449ad"/>
+    <p:sldLayoutId xmlns:r="http://schemas.openxmlformats.org/officeDocument/2006/relationships" id="2147483650" r:id="Rb1932fd579fc4297"/>
+    <p:sldLayoutId xmlns:r="http://schemas.openxmlformats.org/officeDocument/2006/relationships" id="2147483651" r:id="R655e06e363294da1"/>
+    <p:sldLayoutId xmlns:r="http://schemas.openxmlformats.org/officeDocument/2006/relationships" id="2147483652" r:id="R6f51be8300b2499b"/>
   </p:sldLayoutIdLst>
   <p:hf hdr="0" ftr="0" dt="0"/>
   <p:txStyles>
@@ -4108,120 +4209,6 @@
       </p:grpSpPr>
       <p:sp>
         <p:nvSpPr>
-          <p:cNvPr id="3" name="内容占位符 2">
-            <a:extLst xmlns:a="http://schemas.openxmlformats.org/drawingml/2006/main">
-              <a:ext uri="{FF2B5EF4-FFF2-40B4-BE49-F238E27FC236}">
-                <a16:creationId xmlns:a16="http://schemas.microsoft.com/office/drawing/2014/main" id="{D1D30E0E-D2D5-4C08-A919-2A1C2D5A8D02}"/>
-              </a:ext>
-            </a:extLst>
-          </p:cNvPr>
-          <p:cNvSpPr>
-            <a:spLocks xmlns:a="http://schemas.openxmlformats.org/drawingml/2006/main" noGrp="1"/>
-          </p:cNvSpPr>
-          <p:nvPr>
-            <p:ph idx="10"/>
-          </p:nvPr>
-        </p:nvSpPr>
-        <p:spPr>
-          <a:xfrm xmlns:a="http://schemas.openxmlformats.org/drawingml/2006/main">
-            <a:off x="1428750" y="3352800"/>
-            <a:ext cx="9334500" cy="2000250"/>
-          </a:xfrm>
-        </p:spPr>
-        <p:txBody>
-          <a:bodyPr xmlns:a="http://schemas.openxmlformats.org/drawingml/2006/main" lIns="0" tIns="0" rIns="0" bIns="0" anchor="ctr"/>
-          <a:lstStyle xmlns:a="http://schemas.openxmlformats.org/drawingml/2006/main"/>
-          <a:p xmlns:a="http://schemas.openxmlformats.org/drawingml/2006/main">
-            <a:pPr algn="ctr">
-              <a:lnSpc>
-                <a:spcPct val="125000"/>
-              </a:lnSpc>
-              <a:buNone/>
-            </a:pPr>
-            <a:r>
-              <a:rPr sz="1800" b="1">
-                <a:solidFill>
-                  <a:srgbClr val="18354E"/>
-                </a:solidFill>
-                <a:latin typeface="Microsoft YaHei"/>
-                <a:ea typeface="Microsoft YaHei"/>
-                <a:cs typeface="Microsoft YaHei"/>
-              </a:rPr>
-              <a:t>问题 → 关键词 → 检索式 → 来源审计 → 候选文献表</a:t>
-            </a:r>
-            <a:endParaRPr>
-              <a:latin typeface="+mn-ea"/>
-              <a:ea typeface="+mn-ea"/>
-              <a:cs typeface="+mn-ea"/>
-            </a:endParaRPr>
-          </a:p>
-          <a:p xmlns:a="http://schemas.openxmlformats.org/drawingml/2006/main">
-            <a:r>
-              <a:rPr>
-                <a:latin typeface="+mn-ea"/>
-                <a:ea typeface="+mn-ea"/>
-                <a:cs typeface="+mn-ea"/>
-              </a:rPr>
-              <a:t/>
-            </a:r>
-            <a:endParaRPr>
-              <a:latin typeface="+mn-ea"/>
-              <a:ea typeface="+mn-ea"/>
-              <a:cs typeface="+mn-ea"/>
-            </a:endParaRPr>
-          </a:p>
-          <a:p xmlns:a="http://schemas.openxmlformats.org/drawingml/2006/main">
-            <a:pPr algn="ctr">
-              <a:lnSpc>
-                <a:spcPct val="125000"/>
-              </a:lnSpc>
-              <a:buNone/>
-            </a:pPr>
-            <a:r>
-              <a:rPr sz="1800" b="1">
-                <a:solidFill>
-                  <a:srgbClr val="18354E"/>
-                </a:solidFill>
-                <a:latin typeface="Microsoft YaHei"/>
-                <a:ea typeface="Microsoft YaHei"/>
-                <a:cs typeface="Microsoft YaHei"/>
-              </a:rPr>
-              <a:t>检索不是搜得多，而是可复盘</a:t>
-            </a:r>
-            <a:endParaRPr>
-              <a:latin typeface="+mn-ea"/>
-              <a:ea typeface="+mn-ea"/>
-              <a:cs typeface="+mn-ea"/>
-            </a:endParaRPr>
-          </a:p>
-          <a:p xmlns:a="http://schemas.openxmlformats.org/drawingml/2006/main">
-            <a:pPr algn="ctr">
-              <a:lnSpc>
-                <a:spcPct val="125000"/>
-              </a:lnSpc>
-              <a:buNone/>
-            </a:pPr>
-            <a:r>
-              <a:rPr sz="1800" b="1">
-                <a:solidFill>
-                  <a:srgbClr val="18354E"/>
-                </a:solidFill>
-                <a:latin typeface="Microsoft YaHei"/>
-                <a:ea typeface="Microsoft YaHei"/>
-                <a:cs typeface="Microsoft YaHei"/>
-              </a:rPr>
-              <a:t>阶段四：外部输入摄取 → 阶段五：证据整理</a:t>
-            </a:r>
-            <a:endParaRPr>
-              <a:latin typeface="+mn-ea"/>
-              <a:ea typeface="+mn-ea"/>
-              <a:cs typeface="+mn-ea"/>
-            </a:endParaRPr>
-          </a:p>
-        </p:txBody>
-      </p:sp>
-      <p:sp>
-        <p:nvSpPr>
           <p:cNvPr id="2" name="矩形 11">
             <a:extLst xmlns:a="http://schemas.openxmlformats.org/drawingml/2006/main">
               <a:ext uri="{FF2B5EF4-FFF2-40B4-BE49-F238E27FC236}">
@@ -4236,8 +4223,8 @@
         </p:nvSpPr>
         <p:spPr>
           <a:xfrm xmlns:a="http://schemas.openxmlformats.org/drawingml/2006/main">
-            <a:off x="1714500" y="1428750"/>
-            <a:ext cx="8763000" cy="1645920"/>
+            <a:off x="1143000" y="1790700"/>
+            <a:ext cx="9906000" cy="1645920"/>
           </a:xfrm>
           <a:prstGeom xmlns:a="http://schemas.openxmlformats.org/drawingml/2006/main" prst="rect">
             <a:avLst/>
@@ -4256,7 +4243,7 @@
               <a:buNone/>
             </a:pPr>
             <a:r>
-              <a:rPr sz="3000" b="1">
+              <a:rPr sz="3300" b="1">
                 <a:solidFill>
                   <a:srgbClr val="C8161E"/>
                 </a:solidFill>
@@ -4264,7 +4251,7 @@
                 <a:ea typeface="Microsoft YaHei"/>
                 <a:cs typeface="Microsoft YaHei"/>
               </a:rPr>
-              <a:t>文献检索与证据角色</a:t>
+              <a:t>第3讲 文献检索与证据角色</a:t>
             </a:r>
             <a:endParaRPr sz="4000" b="1" kern="0" spc="20">
               <a:solidFill>
@@ -4374,7 +4361,7 @@
           <p:cNvPr id="6" name="p10-claim">
             <a:extLst xmlns:a="http://schemas.openxmlformats.org/drawingml/2006/main">
               <a:ext uri="{FF2B5EF4-FFF2-40B4-BE49-F238E27FC236}">
-                <a16:creationId xmlns:a16="http://schemas.microsoft.com/office/drawing/2014/main" id="{74ECA777-81EB-4BEA-88A9-239983A4041D}"/>
+                <a16:creationId xmlns:a16="http://schemas.microsoft.com/office/drawing/2014/main" id="{611EDAEC-3625-494F-B05B-E9BBA748E831}"/>
               </a:ext>
             </a:extLst>
           </p:cNvPr>
@@ -4429,7 +4416,7 @@
           <p:cNvPr id="7" name="p10-supp">
             <a:extLst xmlns:a="http://schemas.openxmlformats.org/drawingml/2006/main">
               <a:ext uri="{FF2B5EF4-FFF2-40B4-BE49-F238E27FC236}">
-                <a16:creationId xmlns:a16="http://schemas.microsoft.com/office/drawing/2014/main" id="{F42DFDB0-7D3A-460F-A9F1-ACBDB9740BC4}"/>
+                <a16:creationId xmlns:a16="http://schemas.microsoft.com/office/drawing/2014/main" id="{2E368FCA-9753-4C49-AF19-A82B04292604}"/>
               </a:ext>
             </a:extLst>
           </p:cNvPr>
@@ -4536,7 +4523,7 @@
           <p:cNvPr id="8" name="p10-contrast">
             <a:extLst xmlns:a="http://schemas.openxmlformats.org/drawingml/2006/main">
               <a:ext uri="{FF2B5EF4-FFF2-40B4-BE49-F238E27FC236}">
-                <a16:creationId xmlns:a16="http://schemas.microsoft.com/office/drawing/2014/main" id="{5370C0C4-D41B-42DF-AB66-60A745AD86C1}"/>
+                <a16:creationId xmlns:a16="http://schemas.microsoft.com/office/drawing/2014/main" id="{9DE2CE5A-BB77-48EB-A4BF-092D26F27D26}"/>
               </a:ext>
             </a:extLst>
           </p:cNvPr>
@@ -4643,7 +4630,7 @@
           <p:cNvPr id="9" name="p10-l1">
             <a:extLst xmlns:a="http://schemas.openxmlformats.org/drawingml/2006/main">
               <a:ext uri="{FF2B5EF4-FFF2-40B4-BE49-F238E27FC236}">
-                <a16:creationId xmlns:a16="http://schemas.microsoft.com/office/drawing/2014/main" id="{9D619E91-8CBF-4802-8804-AB4636C3FBE0}"/>
+                <a16:creationId xmlns:a16="http://schemas.microsoft.com/office/drawing/2014/main" id="{1E1319F3-1217-4D57-B203-D6D3711CF313}"/>
               </a:ext>
             </a:extLst>
           </p:cNvPr>
@@ -4674,7 +4661,7 @@
           <p:cNvPr id="10" name="p10-l2">
             <a:extLst xmlns:a="http://schemas.openxmlformats.org/drawingml/2006/main">
               <a:ext uri="{FF2B5EF4-FFF2-40B4-BE49-F238E27FC236}">
-                <a16:creationId xmlns:a16="http://schemas.microsoft.com/office/drawing/2014/main" id="{B376782D-2D37-4953-A3A4-3F7A5F3B4D46}"/>
+                <a16:creationId xmlns:a16="http://schemas.microsoft.com/office/drawing/2014/main" id="{91DC27C0-8F37-40CA-A311-FEC541B5C228}"/>
               </a:ext>
             </a:extLst>
           </p:cNvPr>
@@ -4705,7 +4692,7 @@
           <p:cNvPr id="11" name="p10-independent">
             <a:extLst xmlns:a="http://schemas.openxmlformats.org/drawingml/2006/main">
               <a:ext uri="{FF2B5EF4-FFF2-40B4-BE49-F238E27FC236}">
-                <a16:creationId xmlns:a16="http://schemas.microsoft.com/office/drawing/2014/main" id="{7C714B1D-B5FB-4A5F-B52E-8D8223AED8AC}"/>
+                <a16:creationId xmlns:a16="http://schemas.microsoft.com/office/drawing/2014/main" id="{BC78AE83-94C6-4FFB-B14A-A7CA0EFA5B76}"/>
               </a:ext>
             </a:extLst>
           </p:cNvPr>
@@ -4760,7 +4747,7 @@
           <p:cNvPr id="12" name="p10-conflict">
             <a:extLst xmlns:a="http://schemas.openxmlformats.org/drawingml/2006/main">
               <a:ext uri="{FF2B5EF4-FFF2-40B4-BE49-F238E27FC236}">
-                <a16:creationId xmlns:a16="http://schemas.microsoft.com/office/drawing/2014/main" id="{6F4AB0E2-306B-4E9D-93B2-AAEABE58A32C}"/>
+                <a16:creationId xmlns:a16="http://schemas.microsoft.com/office/drawing/2014/main" id="{D0ACFA43-4035-47CC-A900-AD5D27DD5EDD}"/>
               </a:ext>
             </a:extLst>
           </p:cNvPr>
@@ -4815,7 +4802,7 @@
           <p:cNvPr id="13" name="p10-note">
             <a:extLst xmlns:a="http://schemas.openxmlformats.org/drawingml/2006/main">
               <a:ext uri="{FF2B5EF4-FFF2-40B4-BE49-F238E27FC236}">
-                <a16:creationId xmlns:a16="http://schemas.microsoft.com/office/drawing/2014/main" id="{406F6E5A-263C-4A20-BD1C-0595A43146C2}"/>
+                <a16:creationId xmlns:a16="http://schemas.microsoft.com/office/drawing/2014/main" id="{3EC84649-BE2B-4F6B-ABEE-A65272727572}"/>
               </a:ext>
             </a:extLst>
           </p:cNvPr>
@@ -4960,18 +4947,18 @@
           <p:cNvPr id="6" name="p11-input">
             <a:extLst xmlns:a="http://schemas.openxmlformats.org/drawingml/2006/main">
               <a:ext uri="{FF2B5EF4-FFF2-40B4-BE49-F238E27FC236}">
-                <a16:creationId xmlns:a16="http://schemas.microsoft.com/office/drawing/2014/main" id="{583542F6-E3B4-412C-A613-280DE19E2773}"/>
-              </a:ext>
-            </a:extLst>
-          </p:cNvPr>
-          <p:cNvSpPr>
-            <a:spLocks xmlns:a="http://schemas.openxmlformats.org/drawingml/2006/main" noGrp="1"/>
-          </p:cNvSpPr>
-          <p:nvPr/>
-        </p:nvSpPr>
-        <p:spPr>
-          <a:xfrm xmlns:a="http://schemas.openxmlformats.org/drawingml/2006/main">
-            <a:off x="1143000" y="1809750"/>
+                <a16:creationId xmlns:a16="http://schemas.microsoft.com/office/drawing/2014/main" id="{F2E35C8F-26B3-4971-9B97-CB22F4ABABC7}"/>
+              </a:ext>
+            </a:extLst>
+          </p:cNvPr>
+          <p:cNvSpPr>
+            <a:spLocks xmlns:a="http://schemas.openxmlformats.org/drawingml/2006/main" noGrp="1"/>
+          </p:cNvSpPr>
+          <p:nvPr/>
+        </p:nvSpPr>
+        <p:spPr>
+          <a:xfrm xmlns:a="http://schemas.openxmlformats.org/drawingml/2006/main">
+            <a:off x="1143000" y="1524000"/>
             <a:ext cx="2857500" cy="990600"/>
           </a:xfrm>
           <a:prstGeom xmlns:a="http://schemas.openxmlformats.org/drawingml/2006/main" prst="rect">
@@ -5015,18 +5002,18 @@
           <p:cNvPr id="7" name="p11-a1">
             <a:extLst xmlns:a="http://schemas.openxmlformats.org/drawingml/2006/main">
               <a:ext uri="{FF2B5EF4-FFF2-40B4-BE49-F238E27FC236}">
-                <a16:creationId xmlns:a16="http://schemas.microsoft.com/office/drawing/2014/main" id="{45DB5917-6295-43AB-BEF9-F8297CDD9D39}"/>
-              </a:ext>
-            </a:extLst>
-          </p:cNvPr>
-          <p:cNvSpPr>
-            <a:spLocks xmlns:a="http://schemas.openxmlformats.org/drawingml/2006/main" noGrp="1"/>
-          </p:cNvSpPr>
-          <p:nvPr/>
-        </p:nvSpPr>
-        <p:spPr>
-          <a:xfrm xmlns:a="http://schemas.openxmlformats.org/drawingml/2006/main">
-            <a:off x="4267200" y="2076450"/>
+                <a16:creationId xmlns:a16="http://schemas.microsoft.com/office/drawing/2014/main" id="{1BDD8E3F-EE29-4224-AE9B-7F5589CF943C}"/>
+              </a:ext>
+            </a:extLst>
+          </p:cNvPr>
+          <p:cNvSpPr>
+            <a:spLocks xmlns:a="http://schemas.openxmlformats.org/drawingml/2006/main" noGrp="1"/>
+          </p:cNvSpPr>
+          <p:nvPr/>
+        </p:nvSpPr>
+        <p:spPr>
+          <a:xfrm xmlns:a="http://schemas.openxmlformats.org/drawingml/2006/main">
+            <a:off x="4267200" y="1790700"/>
             <a:ext cx="685800" cy="419100"/>
           </a:xfrm>
           <a:prstGeom xmlns:a="http://schemas.openxmlformats.org/drawingml/2006/main" prst="rect">
@@ -5068,18 +5055,18 @@
           <p:cNvPr id="8" name="p11-line">
             <a:extLst xmlns:a="http://schemas.openxmlformats.org/drawingml/2006/main">
               <a:ext uri="{FF2B5EF4-FFF2-40B4-BE49-F238E27FC236}">
-                <a16:creationId xmlns:a16="http://schemas.microsoft.com/office/drawing/2014/main" id="{840042EA-210C-4D00-8515-D575754357CE}"/>
-              </a:ext>
-            </a:extLst>
-          </p:cNvPr>
-          <p:cNvSpPr>
-            <a:spLocks xmlns:a="http://schemas.openxmlformats.org/drawingml/2006/main" noGrp="1"/>
-          </p:cNvSpPr>
-          <p:nvPr/>
-        </p:nvSpPr>
-        <p:spPr>
-          <a:xfrm xmlns:a="http://schemas.openxmlformats.org/drawingml/2006/main">
-            <a:off x="5181600" y="1809750"/>
+                <a16:creationId xmlns:a16="http://schemas.microsoft.com/office/drawing/2014/main" id="{7D78EB3C-6BA4-4EC8-BC42-CCB97812F0FF}"/>
+              </a:ext>
+            </a:extLst>
+          </p:cNvPr>
+          <p:cNvSpPr>
+            <a:spLocks xmlns:a="http://schemas.openxmlformats.org/drawingml/2006/main" noGrp="1"/>
+          </p:cNvSpPr>
+          <p:nvPr/>
+        </p:nvSpPr>
+        <p:spPr>
+          <a:xfrm xmlns:a="http://schemas.openxmlformats.org/drawingml/2006/main">
+            <a:off x="5181600" y="1524000"/>
             <a:ext cx="2857500" cy="990600"/>
           </a:xfrm>
           <a:prstGeom xmlns:a="http://schemas.openxmlformats.org/drawingml/2006/main" prst="rect">
@@ -5123,18 +5110,18 @@
           <p:cNvPr id="9" name="p11-a2">
             <a:extLst xmlns:a="http://schemas.openxmlformats.org/drawingml/2006/main">
               <a:ext uri="{FF2B5EF4-FFF2-40B4-BE49-F238E27FC236}">
-                <a16:creationId xmlns:a16="http://schemas.microsoft.com/office/drawing/2014/main" id="{4DCB82D5-076B-4D5B-A711-DCF57ABE430E}"/>
-              </a:ext>
-            </a:extLst>
-          </p:cNvPr>
-          <p:cNvSpPr>
-            <a:spLocks xmlns:a="http://schemas.openxmlformats.org/drawingml/2006/main" noGrp="1"/>
-          </p:cNvSpPr>
-          <p:nvPr/>
-        </p:nvSpPr>
-        <p:spPr>
-          <a:xfrm xmlns:a="http://schemas.openxmlformats.org/drawingml/2006/main">
-            <a:off x="8305800" y="2076450"/>
+                <a16:creationId xmlns:a16="http://schemas.microsoft.com/office/drawing/2014/main" id="{69863635-A64A-4197-935E-4E54B1B2775B}"/>
+              </a:ext>
+            </a:extLst>
+          </p:cNvPr>
+          <p:cNvSpPr>
+            <a:spLocks xmlns:a="http://schemas.openxmlformats.org/drawingml/2006/main" noGrp="1"/>
+          </p:cNvSpPr>
+          <p:nvPr/>
+        </p:nvSpPr>
+        <p:spPr>
+          <a:xfrm xmlns:a="http://schemas.openxmlformats.org/drawingml/2006/main">
+            <a:off x="8305800" y="1790700"/>
             <a:ext cx="685800" cy="419100"/>
           </a:xfrm>
           <a:prstGeom xmlns:a="http://schemas.openxmlformats.org/drawingml/2006/main" prst="rect">
@@ -5176,18 +5163,18 @@
           <p:cNvPr id="10" name="p11-source">
             <a:extLst xmlns:a="http://schemas.openxmlformats.org/drawingml/2006/main">
               <a:ext uri="{FF2B5EF4-FFF2-40B4-BE49-F238E27FC236}">
-                <a16:creationId xmlns:a16="http://schemas.microsoft.com/office/drawing/2014/main" id="{EC710780-E272-4C09-A195-611535794C21}"/>
-              </a:ext>
-            </a:extLst>
-          </p:cNvPr>
-          <p:cNvSpPr>
-            <a:spLocks xmlns:a="http://schemas.openxmlformats.org/drawingml/2006/main" noGrp="1"/>
-          </p:cNvSpPr>
-          <p:nvPr/>
-        </p:nvSpPr>
-        <p:spPr>
-          <a:xfrm xmlns:a="http://schemas.openxmlformats.org/drawingml/2006/main">
-            <a:off x="9182100" y="1809750"/>
+                <a16:creationId xmlns:a16="http://schemas.microsoft.com/office/drawing/2014/main" id="{7D1D6D0B-58CE-432B-9D6A-C8001DE97240}"/>
+              </a:ext>
+            </a:extLst>
+          </p:cNvPr>
+          <p:cNvSpPr>
+            <a:spLocks xmlns:a="http://schemas.openxmlformats.org/drawingml/2006/main" noGrp="1"/>
+          </p:cNvSpPr>
+          <p:nvPr/>
+        </p:nvSpPr>
+        <p:spPr>
+          <a:xfrm xmlns:a="http://schemas.openxmlformats.org/drawingml/2006/main">
+            <a:off x="9182100" y="1524000"/>
             <a:ext cx="2286000" cy="990600"/>
           </a:xfrm>
           <a:prstGeom xmlns:a="http://schemas.openxmlformats.org/drawingml/2006/main" prst="rect">
@@ -5231,19 +5218,19 @@
           <p:cNvPr id="11" name="p11-fields">
             <a:extLst xmlns:a="http://schemas.openxmlformats.org/drawingml/2006/main">
               <a:ext uri="{FF2B5EF4-FFF2-40B4-BE49-F238E27FC236}">
-                <a16:creationId xmlns:a16="http://schemas.microsoft.com/office/drawing/2014/main" id="{91D43E34-C21C-43F7-B6E5-EFA823630C34}"/>
-              </a:ext>
-            </a:extLst>
-          </p:cNvPr>
-          <p:cNvSpPr>
-            <a:spLocks xmlns:a="http://schemas.openxmlformats.org/drawingml/2006/main" noGrp="1"/>
-          </p:cNvSpPr>
-          <p:nvPr/>
-        </p:nvSpPr>
-        <p:spPr>
-          <a:xfrm xmlns:a="http://schemas.openxmlformats.org/drawingml/2006/main">
-            <a:off x="1562100" y="3543300"/>
-            <a:ext cx="9067800" cy="742950"/>
+                <a16:creationId xmlns:a16="http://schemas.microsoft.com/office/drawing/2014/main" id="{CD99604A-3FDD-4A5B-99B9-1E0A129826CA}"/>
+              </a:ext>
+            </a:extLst>
+          </p:cNvPr>
+          <p:cNvSpPr>
+            <a:spLocks xmlns:a="http://schemas.openxmlformats.org/drawingml/2006/main" noGrp="1"/>
+          </p:cNvSpPr>
+          <p:nvPr/>
+        </p:nvSpPr>
+        <p:spPr>
+          <a:xfrm xmlns:a="http://schemas.openxmlformats.org/drawingml/2006/main">
+            <a:off x="1238250" y="2952750"/>
+            <a:ext cx="9715500" cy="628650"/>
           </a:xfrm>
           <a:prstGeom xmlns:a="http://schemas.openxmlformats.org/drawingml/2006/main" prst="rect">
             <a:avLst/>
@@ -5261,14 +5248,14 @@
           <a:lstStyle xmlns:a="http://schemas.openxmlformats.org/drawingml/2006/main"/>
           <a:p xmlns:a="http://schemas.openxmlformats.org/drawingml/2006/main">
             <a:pPr algn="ctr">
-              <a:defRPr sz="1800" b="1">
+              <a:defRPr sz="1650" b="1">
                 <a:solidFill>
                   <a:srgbClr val="18354E"/>
                 </a:solidFill>
               </a:defRPr>
             </a:pPr>
             <a:r>
-              <a:rPr sz="1800" b="1">
+              <a:rPr sz="1650" b="1">
                 <a:solidFill>
                   <a:srgbClr val="18354E"/>
                 </a:solidFill>
@@ -5276,29 +5263,84 @@
                 <a:ea typeface="Microsoft YaHei"/>
                 <a:cs typeface="Microsoft YaHei"/>
               </a:rPr>
-              <a:t>题名　｜　作者　｜　DOI　｜　原文任务　｜　结果　｜　边界</a:t>
-            </a:r>
-          </a:p>
-        </p:txBody>
-      </p:sp>
-      <p:sp>
-        <p:nvSpPr>
-          <p:cNvPr id="12" name="p11-bottom">
-            <a:extLst xmlns:a="http://schemas.openxmlformats.org/drawingml/2006/main">
-              <a:ext uri="{FF2B5EF4-FFF2-40B4-BE49-F238E27FC236}">
-                <a16:creationId xmlns:a16="http://schemas.microsoft.com/office/drawing/2014/main" id="{22DF0D8A-E377-4583-A42F-6FBFDD2F0924}"/>
-              </a:ext>
-            </a:extLst>
-          </p:cNvPr>
-          <p:cNvSpPr>
-            <a:spLocks xmlns:a="http://schemas.openxmlformats.org/drawingml/2006/main" noGrp="1"/>
-          </p:cNvSpPr>
-          <p:nvPr/>
-        </p:nvSpPr>
-        <p:spPr>
-          <a:xfrm xmlns:a="http://schemas.openxmlformats.org/drawingml/2006/main">
-            <a:off x="2724150" y="4876800"/>
-            <a:ext cx="6743700" cy="590550"/>
+              <a:t>即使已核验，也可能不能直接回答当前问题；AI 检索结果默认归为探索线索</a:t>
+            </a:r>
+          </a:p>
+        </p:txBody>
+      </p:sp>
+      <p:sp>
+        <p:nvSpPr>
+          <p:cNvPr id="12" name="p11-split">
+            <a:extLst xmlns:a="http://schemas.openxmlformats.org/drawingml/2006/main">
+              <a:ext uri="{FF2B5EF4-FFF2-40B4-BE49-F238E27FC236}">
+                <a16:creationId xmlns:a16="http://schemas.microsoft.com/office/drawing/2014/main" id="{7A30B4E3-D07B-452E-8E29-80E8DE9165AC}"/>
+              </a:ext>
+            </a:extLst>
+          </p:cNvPr>
+          <p:cNvSpPr>
+            <a:spLocks xmlns:a="http://schemas.openxmlformats.org/drawingml/2006/main" noGrp="1"/>
+          </p:cNvSpPr>
+          <p:nvPr/>
+        </p:nvSpPr>
+        <p:spPr>
+          <a:xfrm xmlns:a="http://schemas.openxmlformats.org/drawingml/2006/main">
+            <a:off x="3238500" y="3829050"/>
+            <a:ext cx="5715000" cy="609600"/>
+          </a:xfrm>
+          <a:prstGeom xmlns:a="http://schemas.openxmlformats.org/drawingml/2006/main" prst="rect">
+            <a:avLst/>
+          </a:prstGeom>
+          <a:solidFill xmlns:a="http://schemas.openxmlformats.org/drawingml/2006/main">
+            <a:srgbClr val="18354E"/>
+          </a:solidFill>
+          <a:ln xmlns:a="http://schemas.openxmlformats.org/drawingml/2006/main" w="0">
+            <a:noFill/>
+            <a:prstDash val="solid"/>
+          </a:ln>
+        </p:spPr>
+        <p:txBody>
+          <a:bodyPr xmlns:a="http://schemas.openxmlformats.org/drawingml/2006/main" lIns="76200" tIns="38100" rIns="76200" bIns="38100" anchor="ctr"/>
+          <a:lstStyle xmlns:a="http://schemas.openxmlformats.org/drawingml/2006/main"/>
+          <a:p xmlns:a="http://schemas.openxmlformats.org/drawingml/2006/main">
+            <a:pPr algn="ctr">
+              <a:defRPr sz="2100" b="1">
+                <a:solidFill>
+                  <a:srgbClr val="FFFFFF"/>
+                </a:solidFill>
+              </a:defRPr>
+            </a:pPr>
+            <a:r>
+              <a:rPr sz="2100" b="1">
+                <a:solidFill>
+                  <a:srgbClr val="FFFFFF"/>
+                </a:solidFill>
+                <a:latin typeface="Microsoft YaHei"/>
+                <a:ea typeface="Microsoft YaHei"/>
+                <a:cs typeface="Microsoft YaHei"/>
+              </a:rPr>
+              <a:t>角色 ≠ 核验状态 ≠ 筛选决定</a:t>
+            </a:r>
+          </a:p>
+        </p:txBody>
+      </p:sp>
+      <p:sp>
+        <p:nvSpPr>
+          <p:cNvPr id="13" name="p11-bottom">
+            <a:extLst xmlns:a="http://schemas.openxmlformats.org/drawingml/2006/main">
+              <a:ext uri="{FF2B5EF4-FFF2-40B4-BE49-F238E27FC236}">
+                <a16:creationId xmlns:a16="http://schemas.microsoft.com/office/drawing/2014/main" id="{C92C386F-D8C8-4DD6-9A6C-080A31988FC8}"/>
+              </a:ext>
+            </a:extLst>
+          </p:cNvPr>
+          <p:cNvSpPr>
+            <a:spLocks xmlns:a="http://schemas.openxmlformats.org/drawingml/2006/main" noGrp="1"/>
+          </p:cNvSpPr>
+          <p:nvPr/>
+        </p:nvSpPr>
+        <p:spPr>
+          <a:xfrm xmlns:a="http://schemas.openxmlformats.org/drawingml/2006/main">
+            <a:off x="2552700" y="4838700"/>
+            <a:ext cx="7086600" cy="590550"/>
           </a:xfrm>
           <a:prstGeom xmlns:a="http://schemas.openxmlformats.org/drawingml/2006/main" prst="rect">
             <a:avLst/>
@@ -5314,14 +5356,14 @@
           <a:lstStyle xmlns:a="http://schemas.openxmlformats.org/drawingml/2006/main"/>
           <a:p xmlns:a="http://schemas.openxmlformats.org/drawingml/2006/main">
             <a:pPr algn="ctr">
-              <a:defRPr sz="2025" b="1">
+              <a:defRPr sz="1800" b="1">
                 <a:solidFill>
                   <a:srgbClr val="C8161E"/>
                 </a:solidFill>
               </a:defRPr>
             </a:pPr>
             <a:r>
-              <a:rPr sz="2025" b="1">
+              <a:rPr sz="1800" b="1">
                 <a:solidFill>
                   <a:srgbClr val="C8161E"/>
                 </a:solidFill>
@@ -5329,7 +5371,7 @@
                 <a:ea typeface="Microsoft YaHei"/>
                 <a:cs typeface="Microsoft YaHei"/>
               </a:rPr>
-              <a:t>人工核验前，不能进入主证据或补充证据。</a:t>
+              <a:t>一篇真实且已核验的论文，对当前问题仍可能只是探索线索。</a:t>
             </a:r>
           </a:p>
         </p:txBody>
@@ -5392,7 +5434,7 @@
                 <a:ea typeface="Microsoft YaHei"/>
                 <a:cs typeface="Microsoft YaHei"/>
               </a:rPr>
-              <a:t>AI 检索结果回原文核验</a:t>
+              <a:t>入口核验：身份 + 一条拟用主张</a:t>
             </a:r>
             <a:endParaRPr/>
           </a:p>
@@ -5428,22 +5470,22 @@
       </p:sp>
       <p:sp>
         <p:nvSpPr>
-          <p:cNvPr id="6" name="p12-n-0">
-            <a:extLst xmlns:a="http://schemas.openxmlformats.org/drawingml/2006/main">
-              <a:ext uri="{FF2B5EF4-FFF2-40B4-BE49-F238E27FC236}">
-                <a16:creationId xmlns:a16="http://schemas.microsoft.com/office/drawing/2014/main" id="{32090127-1A01-47F7-800E-70AAFC966194}"/>
-              </a:ext>
-            </a:extLst>
-          </p:cNvPr>
-          <p:cNvSpPr>
-            <a:spLocks xmlns:a="http://schemas.openxmlformats.org/drawingml/2006/main" noGrp="1"/>
-          </p:cNvSpPr>
-          <p:nvPr/>
-        </p:nvSpPr>
-        <p:spPr>
-          <a:xfrm xmlns:a="http://schemas.openxmlformats.org/drawingml/2006/main">
-            <a:off x="666750" y="971550"/>
-            <a:ext cx="457200" cy="457200"/>
+          <p:cNvPr id="6" name="p12-id-title">
+            <a:extLst xmlns:a="http://schemas.openxmlformats.org/drawingml/2006/main">
+              <a:ext uri="{FF2B5EF4-FFF2-40B4-BE49-F238E27FC236}">
+                <a16:creationId xmlns:a16="http://schemas.microsoft.com/office/drawing/2014/main" id="{B38DE2C3-2B13-433C-8269-2B35C8B79CD5}"/>
+              </a:ext>
+            </a:extLst>
+          </p:cNvPr>
+          <p:cNvSpPr>
+            <a:spLocks xmlns:a="http://schemas.openxmlformats.org/drawingml/2006/main" noGrp="1"/>
+          </p:cNvSpPr>
+          <p:nvPr/>
+        </p:nvSpPr>
+        <p:spPr>
+          <a:xfrm xmlns:a="http://schemas.openxmlformats.org/drawingml/2006/main">
+            <a:off x="666750" y="990600"/>
+            <a:ext cx="1524000" cy="457200"/>
           </a:xfrm>
           <a:prstGeom xmlns:a="http://schemas.openxmlformats.org/drawingml/2006/main" prst="rect">
             <a:avLst/>
@@ -5461,44 +5503,44 @@
           <a:lstStyle xmlns:a="http://schemas.openxmlformats.org/drawingml/2006/main"/>
           <a:p xmlns:a="http://schemas.openxmlformats.org/drawingml/2006/main">
             <a:pPr algn="ctr">
-              <a:defRPr sz="1575" b="1">
+              <a:defRPr sz="1725" b="1">
                 <a:solidFill>
                   <a:srgbClr val="FFFFFF"/>
                 </a:solidFill>
               </a:defRPr>
             </a:pPr>
             <a:r>
-              <a:rPr sz="1575" b="1">
+              <a:rPr sz="1725" b="1">
                 <a:solidFill>
                   <a:srgbClr val="FFFFFF"/>
                 </a:solidFill>
-                <a:latin typeface="Arial"/>
-                <a:ea typeface="Arial"/>
-                <a:cs typeface="Arial"/>
-              </a:rPr>
-              <a:t>1</a:t>
-            </a:r>
-          </a:p>
-        </p:txBody>
-      </p:sp>
-      <p:sp>
-        <p:nvSpPr>
-          <p:cNvPr id="7" name="p12-t-0">
-            <a:extLst xmlns:a="http://schemas.openxmlformats.org/drawingml/2006/main">
-              <a:ext uri="{FF2B5EF4-FFF2-40B4-BE49-F238E27FC236}">
-                <a16:creationId xmlns:a16="http://schemas.microsoft.com/office/drawing/2014/main" id="{F26A89A0-E957-46A7-86DD-25EF8399EFEE}"/>
-              </a:ext>
-            </a:extLst>
-          </p:cNvPr>
-          <p:cNvSpPr>
-            <a:spLocks xmlns:a="http://schemas.openxmlformats.org/drawingml/2006/main" noGrp="1"/>
-          </p:cNvSpPr>
-          <p:nvPr/>
-        </p:nvSpPr>
-        <p:spPr>
-          <a:xfrm xmlns:a="http://schemas.openxmlformats.org/drawingml/2006/main">
-            <a:off x="1276350" y="971550"/>
-            <a:ext cx="6191250" cy="457200"/>
+                <a:latin typeface="Microsoft YaHei"/>
+                <a:ea typeface="Microsoft YaHei"/>
+                <a:cs typeface="Microsoft YaHei"/>
+              </a:rPr>
+              <a:t>身份层</a:t>
+            </a:r>
+          </a:p>
+        </p:txBody>
+      </p:sp>
+      <p:sp>
+        <p:nvSpPr>
+          <p:cNvPr id="7" name="p12-id-body">
+            <a:extLst xmlns:a="http://schemas.openxmlformats.org/drawingml/2006/main">
+              <a:ext uri="{FF2B5EF4-FFF2-40B4-BE49-F238E27FC236}">
+                <a16:creationId xmlns:a16="http://schemas.microsoft.com/office/drawing/2014/main" id="{A6979ED5-8AB9-450E-83EA-84B2EF413BE1}"/>
+              </a:ext>
+            </a:extLst>
+          </p:cNvPr>
+          <p:cNvSpPr>
+            <a:spLocks xmlns:a="http://schemas.openxmlformats.org/drawingml/2006/main" noGrp="1"/>
+          </p:cNvSpPr>
+          <p:nvPr/>
+        </p:nvSpPr>
+        <p:spPr>
+          <a:xfrm xmlns:a="http://schemas.openxmlformats.org/drawingml/2006/main">
+            <a:off x="666750" y="1485900"/>
+            <a:ext cx="6667500" cy="533400"/>
           </a:xfrm>
           <a:prstGeom xmlns:a="http://schemas.openxmlformats.org/drawingml/2006/main" prst="rect">
             <a:avLst/>
@@ -5515,15 +5557,15 @@
           <a:bodyPr xmlns:a="http://schemas.openxmlformats.org/drawingml/2006/main" lIns="76200" tIns="38100" rIns="76200" bIns="38100" anchor="ctr"/>
           <a:lstStyle xmlns:a="http://schemas.openxmlformats.org/drawingml/2006/main"/>
           <a:p xmlns:a="http://schemas.openxmlformats.org/drawingml/2006/main">
-            <a:pPr algn="l">
-              <a:defRPr sz="1500" b="1">
+            <a:pPr algn="ctr">
+              <a:defRPr sz="1575" b="1">
                 <a:solidFill>
                   <a:srgbClr val="263746"/>
                 </a:solidFill>
               </a:defRPr>
             </a:pPr>
             <a:r>
-              <a:rPr sz="1500" b="1">
+              <a:rPr sz="1575" b="1">
                 <a:solidFill>
                   <a:srgbClr val="263746"/>
                 </a:solidFill>
@@ -5531,29 +5573,29 @@
                 <a:ea typeface="Microsoft YaHei"/>
                 <a:cs typeface="Microsoft YaHei"/>
               </a:rPr>
-              <a:t>存在性与元数据一致</a:t>
-            </a:r>
-          </a:p>
-        </p:txBody>
-      </p:sp>
-      <p:sp>
-        <p:nvSpPr>
-          <p:cNvPr id="8" name="p12-n-1">
-            <a:extLst xmlns:a="http://schemas.openxmlformats.org/drawingml/2006/main">
-              <a:ext uri="{FF2B5EF4-FFF2-40B4-BE49-F238E27FC236}">
-                <a16:creationId xmlns:a16="http://schemas.microsoft.com/office/drawing/2014/main" id="{BD39859D-5055-4766-9FB4-9919684501A9}"/>
-              </a:ext>
-            </a:extLst>
-          </p:cNvPr>
-          <p:cNvSpPr>
-            <a:spLocks xmlns:a="http://schemas.openxmlformats.org/drawingml/2006/main" noGrp="1"/>
-          </p:cNvSpPr>
-          <p:nvPr/>
-        </p:nvSpPr>
-        <p:spPr>
-          <a:xfrm xmlns:a="http://schemas.openxmlformats.org/drawingml/2006/main">
-            <a:off x="666750" y="1581150"/>
-            <a:ext cx="457200" cy="457200"/>
+              <a:t>题名　｜　作者　｜　年份　｜　刊会　｜　DOI / 稳定标识</a:t>
+            </a:r>
+          </a:p>
+        </p:txBody>
+      </p:sp>
+      <p:sp>
+        <p:nvSpPr>
+          <p:cNvPr id="8" name="p12-claim-title">
+            <a:extLst xmlns:a="http://schemas.openxmlformats.org/drawingml/2006/main">
+              <a:ext uri="{FF2B5EF4-FFF2-40B4-BE49-F238E27FC236}">
+                <a16:creationId xmlns:a16="http://schemas.microsoft.com/office/drawing/2014/main" id="{586E694D-1AE9-4260-9574-76DA89DFAEAF}"/>
+              </a:ext>
+            </a:extLst>
+          </p:cNvPr>
+          <p:cNvSpPr>
+            <a:spLocks xmlns:a="http://schemas.openxmlformats.org/drawingml/2006/main" noGrp="1"/>
+          </p:cNvSpPr>
+          <p:nvPr/>
+        </p:nvSpPr>
+        <p:spPr>
+          <a:xfrm xmlns:a="http://schemas.openxmlformats.org/drawingml/2006/main">
+            <a:off x="666750" y="2209800"/>
+            <a:ext cx="1524000" cy="457200"/>
           </a:xfrm>
           <a:prstGeom xmlns:a="http://schemas.openxmlformats.org/drawingml/2006/main" prst="rect">
             <a:avLst/>
@@ -5571,44 +5613,99 @@
           <a:lstStyle xmlns:a="http://schemas.openxmlformats.org/drawingml/2006/main"/>
           <a:p xmlns:a="http://schemas.openxmlformats.org/drawingml/2006/main">
             <a:pPr algn="ctr">
-              <a:defRPr sz="1575" b="1">
+              <a:defRPr sz="1725" b="1">
                 <a:solidFill>
                   <a:srgbClr val="FFFFFF"/>
                 </a:solidFill>
               </a:defRPr>
             </a:pPr>
             <a:r>
-              <a:rPr sz="1575" b="1">
+              <a:rPr sz="1725" b="1">
                 <a:solidFill>
                   <a:srgbClr val="FFFFFF"/>
                 </a:solidFill>
-                <a:latin typeface="Arial"/>
-                <a:ea typeface="Arial"/>
-                <a:cs typeface="Arial"/>
-              </a:rPr>
-              <a:t>2</a:t>
-            </a:r>
-          </a:p>
-        </p:txBody>
-      </p:sp>
-      <p:sp>
-        <p:nvSpPr>
-          <p:cNvPr id="9" name="p12-t-1">
-            <a:extLst xmlns:a="http://schemas.openxmlformats.org/drawingml/2006/main">
-              <a:ext uri="{FF2B5EF4-FFF2-40B4-BE49-F238E27FC236}">
-                <a16:creationId xmlns:a16="http://schemas.microsoft.com/office/drawing/2014/main" id="{6E8612A7-E9F6-4BFF-8C1F-E4023229F058}"/>
-              </a:ext>
-            </a:extLst>
-          </p:cNvPr>
-          <p:cNvSpPr>
-            <a:spLocks xmlns:a="http://schemas.openxmlformats.org/drawingml/2006/main" noGrp="1"/>
-          </p:cNvSpPr>
-          <p:nvPr/>
-        </p:nvSpPr>
-        <p:spPr>
-          <a:xfrm xmlns:a="http://schemas.openxmlformats.org/drawingml/2006/main">
-            <a:off x="1276350" y="1581150"/>
-            <a:ext cx="6191250" cy="457200"/>
+                <a:latin typeface="Microsoft YaHei"/>
+                <a:ea typeface="Microsoft YaHei"/>
+                <a:cs typeface="Microsoft YaHei"/>
+              </a:rPr>
+              <a:t>拟用主张层</a:t>
+            </a:r>
+          </a:p>
+        </p:txBody>
+      </p:sp>
+      <p:sp>
+        <p:nvSpPr>
+          <p:cNvPr id="9" name="p12-c-0">
+            <a:extLst xmlns:a="http://schemas.openxmlformats.org/drawingml/2006/main">
+              <a:ext uri="{FF2B5EF4-FFF2-40B4-BE49-F238E27FC236}">
+                <a16:creationId xmlns:a16="http://schemas.microsoft.com/office/drawing/2014/main" id="{0B76F9EE-30EB-43FF-AF63-48598110E8B6}"/>
+              </a:ext>
+            </a:extLst>
+          </p:cNvPr>
+          <p:cNvSpPr>
+            <a:spLocks xmlns:a="http://schemas.openxmlformats.org/drawingml/2006/main" noGrp="1"/>
+          </p:cNvSpPr>
+          <p:nvPr/>
+        </p:nvSpPr>
+        <p:spPr>
+          <a:xfrm xmlns:a="http://schemas.openxmlformats.org/drawingml/2006/main">
+            <a:off x="666750" y="2705100"/>
+            <a:ext cx="6667500" cy="457200"/>
+          </a:xfrm>
+          <a:prstGeom xmlns:a="http://schemas.openxmlformats.org/drawingml/2006/main" prst="rect">
+            <a:avLst/>
+          </a:prstGeom>
+          <a:solidFill xmlns:a="http://schemas.openxmlformats.org/drawingml/2006/main">
+            <a:srgbClr val="F3F6F7"/>
+          </a:solidFill>
+          <a:ln xmlns:a="http://schemas.openxmlformats.org/drawingml/2006/main" w="0">
+            <a:noFill/>
+            <a:prstDash val="solid"/>
+          </a:ln>
+        </p:spPr>
+        <p:txBody>
+          <a:bodyPr xmlns:a="http://schemas.openxmlformats.org/drawingml/2006/main" lIns="76200" tIns="38100" rIns="76200" bIns="38100" anchor="ctr"/>
+          <a:lstStyle xmlns:a="http://schemas.openxmlformats.org/drawingml/2006/main"/>
+          <a:p xmlns:a="http://schemas.openxmlformats.org/drawingml/2006/main">
+            <a:pPr algn="l">
+              <a:defRPr sz="1500" b="1">
+                <a:solidFill>
+                  <a:srgbClr val="263746"/>
+                </a:solidFill>
+              </a:defRPr>
+            </a:pPr>
+            <a:r>
+              <a:rPr sz="1500" b="1">
+                <a:solidFill>
+                  <a:srgbClr val="263746"/>
+                </a:solidFill>
+                <a:latin typeface="Microsoft YaHei"/>
+                <a:ea typeface="Microsoft YaHei"/>
+                <a:cs typeface="Microsoft YaHei"/>
+              </a:rPr>
+              <a:t>1. 先写准备用它支持什么</a:t>
+            </a:r>
+          </a:p>
+        </p:txBody>
+      </p:sp>
+      <p:sp>
+        <p:nvSpPr>
+          <p:cNvPr id="10" name="p12-c-1">
+            <a:extLst xmlns:a="http://schemas.openxmlformats.org/drawingml/2006/main">
+              <a:ext uri="{FF2B5EF4-FFF2-40B4-BE49-F238E27FC236}">
+                <a16:creationId xmlns:a16="http://schemas.microsoft.com/office/drawing/2014/main" id="{29CCE65A-6E83-41B1-97BC-C1B1919C1ED9}"/>
+              </a:ext>
+            </a:extLst>
+          </p:cNvPr>
+          <p:cNvSpPr>
+            <a:spLocks xmlns:a="http://schemas.openxmlformats.org/drawingml/2006/main" noGrp="1"/>
+          </p:cNvSpPr>
+          <p:nvPr/>
+        </p:nvSpPr>
+        <p:spPr>
+          <a:xfrm xmlns:a="http://schemas.openxmlformats.org/drawingml/2006/main">
+            <a:off x="666750" y="3219450"/>
+            <a:ext cx="6667500" cy="457200"/>
           </a:xfrm>
           <a:prstGeom xmlns:a="http://schemas.openxmlformats.org/drawingml/2006/main" prst="rect">
             <a:avLst/>
@@ -5641,84 +5738,29 @@
                 <a:ea typeface="Microsoft YaHei"/>
                 <a:cs typeface="Microsoft YaHei"/>
               </a:rPr>
-              <a:t>标题是否被改写 / 拼接</a:t>
-            </a:r>
-          </a:p>
-        </p:txBody>
-      </p:sp>
-      <p:sp>
-        <p:nvSpPr>
-          <p:cNvPr id="10" name="p12-n-2">
-            <a:extLst xmlns:a="http://schemas.openxmlformats.org/drawingml/2006/main">
-              <a:ext uri="{FF2B5EF4-FFF2-40B4-BE49-F238E27FC236}">
-                <a16:creationId xmlns:a16="http://schemas.microsoft.com/office/drawing/2014/main" id="{C955AFAE-97D0-4E36-9BD9-C84B8A0AB7A0}"/>
-              </a:ext>
-            </a:extLst>
-          </p:cNvPr>
-          <p:cNvSpPr>
-            <a:spLocks xmlns:a="http://schemas.openxmlformats.org/drawingml/2006/main" noGrp="1"/>
-          </p:cNvSpPr>
-          <p:nvPr/>
-        </p:nvSpPr>
-        <p:spPr>
-          <a:xfrm xmlns:a="http://schemas.openxmlformats.org/drawingml/2006/main">
-            <a:off x="666750" y="2190750"/>
-            <a:ext cx="457200" cy="457200"/>
-          </a:xfrm>
-          <a:prstGeom xmlns:a="http://schemas.openxmlformats.org/drawingml/2006/main" prst="rect">
-            <a:avLst/>
-          </a:prstGeom>
-          <a:solidFill xmlns:a="http://schemas.openxmlformats.org/drawingml/2006/main">
-            <a:srgbClr val="18354E"/>
-          </a:solidFill>
-          <a:ln xmlns:a="http://schemas.openxmlformats.org/drawingml/2006/main" w="0">
-            <a:noFill/>
-            <a:prstDash val="solid"/>
-          </a:ln>
-        </p:spPr>
-        <p:txBody>
-          <a:bodyPr xmlns:a="http://schemas.openxmlformats.org/drawingml/2006/main" lIns="76200" tIns="38100" rIns="76200" bIns="38100" anchor="ctr"/>
-          <a:lstStyle xmlns:a="http://schemas.openxmlformats.org/drawingml/2006/main"/>
-          <a:p xmlns:a="http://schemas.openxmlformats.org/drawingml/2006/main">
-            <a:pPr algn="ctr">
-              <a:defRPr sz="1575" b="1">
-                <a:solidFill>
-                  <a:srgbClr val="FFFFFF"/>
-                </a:solidFill>
-              </a:defRPr>
-            </a:pPr>
-            <a:r>
-              <a:rPr sz="1575" b="1">
-                <a:solidFill>
-                  <a:srgbClr val="FFFFFF"/>
-                </a:solidFill>
-                <a:latin typeface="Arial"/>
-                <a:ea typeface="Arial"/>
-                <a:cs typeface="Arial"/>
-              </a:rPr>
-              <a:t>3</a:t>
-            </a:r>
-          </a:p>
-        </p:txBody>
-      </p:sp>
-      <p:sp>
-        <p:nvSpPr>
-          <p:cNvPr id="11" name="p12-t-2">
-            <a:extLst xmlns:a="http://schemas.openxmlformats.org/drawingml/2006/main">
-              <a:ext uri="{FF2B5EF4-FFF2-40B4-BE49-F238E27FC236}">
-                <a16:creationId xmlns:a16="http://schemas.microsoft.com/office/drawing/2014/main" id="{9472BC8A-7A7B-4AEE-9FED-259988C06B28}"/>
-              </a:ext>
-            </a:extLst>
-          </p:cNvPr>
-          <p:cNvSpPr>
-            <a:spLocks xmlns:a="http://schemas.openxmlformats.org/drawingml/2006/main" noGrp="1"/>
-          </p:cNvSpPr>
-          <p:nvPr/>
-        </p:nvSpPr>
-        <p:spPr>
-          <a:xfrm xmlns:a="http://schemas.openxmlformats.org/drawingml/2006/main">
-            <a:off x="1276350" y="2190750"/>
-            <a:ext cx="6191250" cy="457200"/>
+              <a:t>2. 回到至少一个原文位置</a:t>
+            </a:r>
+          </a:p>
+        </p:txBody>
+      </p:sp>
+      <p:sp>
+        <p:nvSpPr>
+          <p:cNvPr id="11" name="p12-c-2">
+            <a:extLst xmlns:a="http://schemas.openxmlformats.org/drawingml/2006/main">
+              <a:ext uri="{FF2B5EF4-FFF2-40B4-BE49-F238E27FC236}">
+                <a16:creationId xmlns:a16="http://schemas.microsoft.com/office/drawing/2014/main" id="{CD3A18F7-5F71-4BC5-894A-B4B961CED02E}"/>
+              </a:ext>
+            </a:extLst>
+          </p:cNvPr>
+          <p:cNvSpPr>
+            <a:spLocks xmlns:a="http://schemas.openxmlformats.org/drawingml/2006/main" noGrp="1"/>
+          </p:cNvSpPr>
+          <p:nvPr/>
+        </p:nvSpPr>
+        <p:spPr>
+          <a:xfrm xmlns:a="http://schemas.openxmlformats.org/drawingml/2006/main">
+            <a:off x="666750" y="3733800"/>
+            <a:ext cx="6667500" cy="457200"/>
           </a:xfrm>
           <a:prstGeom xmlns:a="http://schemas.openxmlformats.org/drawingml/2006/main" prst="rect">
             <a:avLst/>
@@ -5751,522 +5793,29 @@
                 <a:ea typeface="Microsoft YaHei"/>
                 <a:cs typeface="Microsoft YaHei"/>
               </a:rPr>
-              <a:t>任务与设置是否可比</a:t>
-            </a:r>
-          </a:p>
-        </p:txBody>
-      </p:sp>
-      <p:sp>
-        <p:nvSpPr>
-          <p:cNvPr id="12" name="p12-n-3">
-            <a:extLst xmlns:a="http://schemas.openxmlformats.org/drawingml/2006/main">
-              <a:ext uri="{FF2B5EF4-FFF2-40B4-BE49-F238E27FC236}">
-                <a16:creationId xmlns:a16="http://schemas.microsoft.com/office/drawing/2014/main" id="{A613E0F5-57DF-4C5E-B981-DB9FB0E43721}"/>
-              </a:ext>
-            </a:extLst>
-          </p:cNvPr>
-          <p:cNvSpPr>
-            <a:spLocks xmlns:a="http://schemas.openxmlformats.org/drawingml/2006/main" noGrp="1"/>
-          </p:cNvSpPr>
-          <p:nvPr/>
-        </p:nvSpPr>
-        <p:spPr>
-          <a:xfrm xmlns:a="http://schemas.openxmlformats.org/drawingml/2006/main">
-            <a:off x="666750" y="2800350"/>
-            <a:ext cx="457200" cy="457200"/>
-          </a:xfrm>
-          <a:prstGeom xmlns:a="http://schemas.openxmlformats.org/drawingml/2006/main" prst="rect">
-            <a:avLst/>
-          </a:prstGeom>
-          <a:solidFill xmlns:a="http://schemas.openxmlformats.org/drawingml/2006/main">
-            <a:srgbClr val="18354E"/>
-          </a:solidFill>
-          <a:ln xmlns:a="http://schemas.openxmlformats.org/drawingml/2006/main" w="0">
-            <a:noFill/>
-            <a:prstDash val="solid"/>
-          </a:ln>
-        </p:spPr>
-        <p:txBody>
-          <a:bodyPr xmlns:a="http://schemas.openxmlformats.org/drawingml/2006/main" lIns="76200" tIns="38100" rIns="76200" bIns="38100" anchor="ctr"/>
-          <a:lstStyle xmlns:a="http://schemas.openxmlformats.org/drawingml/2006/main"/>
-          <a:p xmlns:a="http://schemas.openxmlformats.org/drawingml/2006/main">
-            <a:pPr algn="ctr">
-              <a:defRPr sz="1575" b="1">
-                <a:solidFill>
-                  <a:srgbClr val="FFFFFF"/>
-                </a:solidFill>
-              </a:defRPr>
-            </a:pPr>
-            <a:r>
-              <a:rPr sz="1575" b="1">
-                <a:solidFill>
-                  <a:srgbClr val="FFFFFF"/>
-                </a:solidFill>
-                <a:latin typeface="Arial"/>
-                <a:ea typeface="Arial"/>
-                <a:cs typeface="Arial"/>
-              </a:rPr>
-              <a:t>4</a:t>
-            </a:r>
-          </a:p>
-        </p:txBody>
-      </p:sp>
-      <p:sp>
-        <p:nvSpPr>
-          <p:cNvPr id="13" name="p12-t-3">
-            <a:extLst xmlns:a="http://schemas.openxmlformats.org/drawingml/2006/main">
-              <a:ext uri="{FF2B5EF4-FFF2-40B4-BE49-F238E27FC236}">
-                <a16:creationId xmlns:a16="http://schemas.microsoft.com/office/drawing/2014/main" id="{3842123E-7AD2-41A1-819D-F575F22543A0}"/>
-              </a:ext>
-            </a:extLst>
-          </p:cNvPr>
-          <p:cNvSpPr>
-            <a:spLocks xmlns:a="http://schemas.openxmlformats.org/drawingml/2006/main" noGrp="1"/>
-          </p:cNvSpPr>
-          <p:nvPr/>
-        </p:nvSpPr>
-        <p:spPr>
-          <a:xfrm xmlns:a="http://schemas.openxmlformats.org/drawingml/2006/main">
-            <a:off x="1276350" y="2800350"/>
-            <a:ext cx="6191250" cy="457200"/>
-          </a:xfrm>
-          <a:prstGeom xmlns:a="http://schemas.openxmlformats.org/drawingml/2006/main" prst="rect">
-            <a:avLst/>
-          </a:prstGeom>
-          <a:solidFill xmlns:a="http://schemas.openxmlformats.org/drawingml/2006/main">
-            <a:srgbClr val="FFFFFF"/>
-          </a:solidFill>
-          <a:ln xmlns:a="http://schemas.openxmlformats.org/drawingml/2006/main" w="0">
-            <a:noFill/>
-            <a:prstDash val="solid"/>
-          </a:ln>
-        </p:spPr>
-        <p:txBody>
-          <a:bodyPr xmlns:a="http://schemas.openxmlformats.org/drawingml/2006/main" lIns="76200" tIns="38100" rIns="76200" bIns="38100" anchor="ctr"/>
-          <a:lstStyle xmlns:a="http://schemas.openxmlformats.org/drawingml/2006/main"/>
-          <a:p xmlns:a="http://schemas.openxmlformats.org/drawingml/2006/main">
-            <a:pPr algn="l">
-              <a:defRPr sz="1500" b="1">
-                <a:solidFill>
-                  <a:srgbClr val="263746"/>
-                </a:solidFill>
-              </a:defRPr>
-            </a:pPr>
-            <a:r>
-              <a:rPr sz="1500" b="1">
-                <a:solidFill>
-                  <a:srgbClr val="263746"/>
-                </a:solidFill>
-                <a:latin typeface="Microsoft YaHei"/>
-                <a:ea typeface="Microsoft YaHei"/>
-                <a:cs typeface="Microsoft YaHei"/>
-              </a:rPr>
-              <a:t>措辞强度是否变化</a:t>
-            </a:r>
-          </a:p>
-        </p:txBody>
-      </p:sp>
-      <p:sp>
-        <p:nvSpPr>
-          <p:cNvPr id="14" name="p12-n-4">
-            <a:extLst xmlns:a="http://schemas.openxmlformats.org/drawingml/2006/main">
-              <a:ext uri="{FF2B5EF4-FFF2-40B4-BE49-F238E27FC236}">
-                <a16:creationId xmlns:a16="http://schemas.microsoft.com/office/drawing/2014/main" id="{9907F3FC-FB33-4C8F-ADAE-B9DB42C2281A}"/>
-              </a:ext>
-            </a:extLst>
-          </p:cNvPr>
-          <p:cNvSpPr>
-            <a:spLocks xmlns:a="http://schemas.openxmlformats.org/drawingml/2006/main" noGrp="1"/>
-          </p:cNvSpPr>
-          <p:nvPr/>
-        </p:nvSpPr>
-        <p:spPr>
-          <a:xfrm xmlns:a="http://schemas.openxmlformats.org/drawingml/2006/main">
-            <a:off x="666750" y="3409950"/>
-            <a:ext cx="457200" cy="457200"/>
-          </a:xfrm>
-          <a:prstGeom xmlns:a="http://schemas.openxmlformats.org/drawingml/2006/main" prst="rect">
-            <a:avLst/>
-          </a:prstGeom>
-          <a:solidFill xmlns:a="http://schemas.openxmlformats.org/drawingml/2006/main">
-            <a:srgbClr val="18354E"/>
-          </a:solidFill>
-          <a:ln xmlns:a="http://schemas.openxmlformats.org/drawingml/2006/main" w="0">
-            <a:noFill/>
-            <a:prstDash val="solid"/>
-          </a:ln>
-        </p:spPr>
-        <p:txBody>
-          <a:bodyPr xmlns:a="http://schemas.openxmlformats.org/drawingml/2006/main" lIns="76200" tIns="38100" rIns="76200" bIns="38100" anchor="ctr"/>
-          <a:lstStyle xmlns:a="http://schemas.openxmlformats.org/drawingml/2006/main"/>
-          <a:p xmlns:a="http://schemas.openxmlformats.org/drawingml/2006/main">
-            <a:pPr algn="ctr">
-              <a:defRPr sz="1575" b="1">
-                <a:solidFill>
-                  <a:srgbClr val="FFFFFF"/>
-                </a:solidFill>
-              </a:defRPr>
-            </a:pPr>
-            <a:r>
-              <a:rPr sz="1575" b="1">
-                <a:solidFill>
-                  <a:srgbClr val="FFFFFF"/>
-                </a:solidFill>
-                <a:latin typeface="Arial"/>
-                <a:ea typeface="Arial"/>
-                <a:cs typeface="Arial"/>
-              </a:rPr>
-              <a:t>5</a:t>
-            </a:r>
-          </a:p>
-        </p:txBody>
-      </p:sp>
-      <p:sp>
-        <p:nvSpPr>
-          <p:cNvPr id="15" name="p12-t-4">
-            <a:extLst xmlns:a="http://schemas.openxmlformats.org/drawingml/2006/main">
-              <a:ext uri="{FF2B5EF4-FFF2-40B4-BE49-F238E27FC236}">
-                <a16:creationId xmlns:a16="http://schemas.microsoft.com/office/drawing/2014/main" id="{FF40826A-CC85-4E0F-BB2B-F4AA65BBCFD3}"/>
-              </a:ext>
-            </a:extLst>
-          </p:cNvPr>
-          <p:cNvSpPr>
-            <a:spLocks xmlns:a="http://schemas.openxmlformats.org/drawingml/2006/main" noGrp="1"/>
-          </p:cNvSpPr>
-          <p:nvPr/>
-        </p:nvSpPr>
-        <p:spPr>
-          <a:xfrm xmlns:a="http://schemas.openxmlformats.org/drawingml/2006/main">
-            <a:off x="1276350" y="3409950"/>
-            <a:ext cx="6191250" cy="457200"/>
-          </a:xfrm>
-          <a:prstGeom xmlns:a="http://schemas.openxmlformats.org/drawingml/2006/main" prst="rect">
-            <a:avLst/>
-          </a:prstGeom>
-          <a:solidFill xmlns:a="http://schemas.openxmlformats.org/drawingml/2006/main">
-            <a:srgbClr val="F3F6F7"/>
-          </a:solidFill>
-          <a:ln xmlns:a="http://schemas.openxmlformats.org/drawingml/2006/main" w="0">
-            <a:noFill/>
-            <a:prstDash val="solid"/>
-          </a:ln>
-        </p:spPr>
-        <p:txBody>
-          <a:bodyPr xmlns:a="http://schemas.openxmlformats.org/drawingml/2006/main" lIns="76200" tIns="38100" rIns="76200" bIns="38100" anchor="ctr"/>
-          <a:lstStyle xmlns:a="http://schemas.openxmlformats.org/drawingml/2006/main"/>
-          <a:p xmlns:a="http://schemas.openxmlformats.org/drawingml/2006/main">
-            <a:pPr algn="l">
-              <a:defRPr sz="1500" b="1">
-                <a:solidFill>
-                  <a:srgbClr val="263746"/>
-                </a:solidFill>
-              </a:defRPr>
-            </a:pPr>
-            <a:r>
-              <a:rPr sz="1500" b="1">
-                <a:solidFill>
-                  <a:srgbClr val="263746"/>
-                </a:solidFill>
-                <a:latin typeface="Microsoft YaHei"/>
-                <a:ea typeface="Microsoft YaHei"/>
-                <a:cs typeface="Microsoft YaHei"/>
-              </a:rPr>
-              <a:t>指标、对照与评议状态</a:t>
-            </a:r>
-          </a:p>
-        </p:txBody>
-      </p:sp>
-      <p:sp>
-        <p:nvSpPr>
-          <p:cNvPr id="16" name="p12-n-5">
-            <a:extLst xmlns:a="http://schemas.openxmlformats.org/drawingml/2006/main">
-              <a:ext uri="{FF2B5EF4-FFF2-40B4-BE49-F238E27FC236}">
-                <a16:creationId xmlns:a16="http://schemas.microsoft.com/office/drawing/2014/main" id="{80AE4EB4-B75E-46A1-96C2-721E241ED99B}"/>
-              </a:ext>
-            </a:extLst>
-          </p:cNvPr>
-          <p:cNvSpPr>
-            <a:spLocks xmlns:a="http://schemas.openxmlformats.org/drawingml/2006/main" noGrp="1"/>
-          </p:cNvSpPr>
-          <p:nvPr/>
-        </p:nvSpPr>
-        <p:spPr>
-          <a:xfrm xmlns:a="http://schemas.openxmlformats.org/drawingml/2006/main">
-            <a:off x="666750" y="4019550"/>
-            <a:ext cx="457200" cy="457200"/>
-          </a:xfrm>
-          <a:prstGeom xmlns:a="http://schemas.openxmlformats.org/drawingml/2006/main" prst="rect">
-            <a:avLst/>
-          </a:prstGeom>
-          <a:solidFill xmlns:a="http://schemas.openxmlformats.org/drawingml/2006/main">
-            <a:srgbClr val="18354E"/>
-          </a:solidFill>
-          <a:ln xmlns:a="http://schemas.openxmlformats.org/drawingml/2006/main" w="0">
-            <a:noFill/>
-            <a:prstDash val="solid"/>
-          </a:ln>
-        </p:spPr>
-        <p:txBody>
-          <a:bodyPr xmlns:a="http://schemas.openxmlformats.org/drawingml/2006/main" lIns="76200" tIns="38100" rIns="76200" bIns="38100" anchor="ctr"/>
-          <a:lstStyle xmlns:a="http://schemas.openxmlformats.org/drawingml/2006/main"/>
-          <a:p xmlns:a="http://schemas.openxmlformats.org/drawingml/2006/main">
-            <a:pPr algn="ctr">
-              <a:defRPr sz="1575" b="1">
-                <a:solidFill>
-                  <a:srgbClr val="FFFFFF"/>
-                </a:solidFill>
-              </a:defRPr>
-            </a:pPr>
-            <a:r>
-              <a:rPr sz="1575" b="1">
-                <a:solidFill>
-                  <a:srgbClr val="FFFFFF"/>
-                </a:solidFill>
-                <a:latin typeface="Arial"/>
-                <a:ea typeface="Arial"/>
-                <a:cs typeface="Arial"/>
-              </a:rPr>
-              <a:t>6</a:t>
-            </a:r>
-          </a:p>
-        </p:txBody>
-      </p:sp>
-      <p:sp>
-        <p:nvSpPr>
-          <p:cNvPr id="17" name="p12-t-5">
-            <a:extLst xmlns:a="http://schemas.openxmlformats.org/drawingml/2006/main">
-              <a:ext uri="{FF2B5EF4-FFF2-40B4-BE49-F238E27FC236}">
-                <a16:creationId xmlns:a16="http://schemas.microsoft.com/office/drawing/2014/main" id="{81CA5618-055B-420A-9BC7-CD96117C84E3}"/>
-              </a:ext>
-            </a:extLst>
-          </p:cNvPr>
-          <p:cNvSpPr>
-            <a:spLocks xmlns:a="http://schemas.openxmlformats.org/drawingml/2006/main" noGrp="1"/>
-          </p:cNvSpPr>
-          <p:nvPr/>
-        </p:nvSpPr>
-        <p:spPr>
-          <a:xfrm xmlns:a="http://schemas.openxmlformats.org/drawingml/2006/main">
-            <a:off x="1276350" y="4019550"/>
-            <a:ext cx="6191250" cy="457200"/>
-          </a:xfrm>
-          <a:prstGeom xmlns:a="http://schemas.openxmlformats.org/drawingml/2006/main" prst="rect">
-            <a:avLst/>
-          </a:prstGeom>
-          <a:solidFill xmlns:a="http://schemas.openxmlformats.org/drawingml/2006/main">
-            <a:srgbClr val="FFFFFF"/>
-          </a:solidFill>
-          <a:ln xmlns:a="http://schemas.openxmlformats.org/drawingml/2006/main" w="0">
-            <a:noFill/>
-            <a:prstDash val="solid"/>
-          </a:ln>
-        </p:spPr>
-        <p:txBody>
-          <a:bodyPr xmlns:a="http://schemas.openxmlformats.org/drawingml/2006/main" lIns="76200" tIns="38100" rIns="76200" bIns="38100" anchor="ctr"/>
-          <a:lstStyle xmlns:a="http://schemas.openxmlformats.org/drawingml/2006/main"/>
-          <a:p xmlns:a="http://schemas.openxmlformats.org/drawingml/2006/main">
-            <a:pPr algn="l">
-              <a:defRPr sz="1500" b="1">
-                <a:solidFill>
-                  <a:srgbClr val="263746"/>
-                </a:solidFill>
-              </a:defRPr>
-            </a:pPr>
-            <a:r>
-              <a:rPr sz="1500" b="1">
-                <a:solidFill>
-                  <a:srgbClr val="263746"/>
-                </a:solidFill>
-                <a:latin typeface="Microsoft YaHei"/>
-                <a:ea typeface="Microsoft YaHei"/>
-                <a:cs typeface="Microsoft YaHei"/>
-              </a:rPr>
-              <a:t>适用范围与局限</a:t>
-            </a:r>
-          </a:p>
-        </p:txBody>
-      </p:sp>
-      <p:sp>
-        <p:nvSpPr>
-          <p:cNvPr id="18" name="p12-n-6">
-            <a:extLst xmlns:a="http://schemas.openxmlformats.org/drawingml/2006/main">
-              <a:ext uri="{FF2B5EF4-FFF2-40B4-BE49-F238E27FC236}">
-                <a16:creationId xmlns:a16="http://schemas.microsoft.com/office/drawing/2014/main" id="{DD52EBE4-BE36-475A-B795-026EAD59CF9C}"/>
-              </a:ext>
-            </a:extLst>
-          </p:cNvPr>
-          <p:cNvSpPr>
-            <a:spLocks xmlns:a="http://schemas.openxmlformats.org/drawingml/2006/main" noGrp="1"/>
-          </p:cNvSpPr>
-          <p:nvPr/>
-        </p:nvSpPr>
-        <p:spPr>
-          <a:xfrm xmlns:a="http://schemas.openxmlformats.org/drawingml/2006/main">
-            <a:off x="666750" y="4629150"/>
-            <a:ext cx="457200" cy="457200"/>
-          </a:xfrm>
-          <a:prstGeom xmlns:a="http://schemas.openxmlformats.org/drawingml/2006/main" prst="rect">
-            <a:avLst/>
-          </a:prstGeom>
-          <a:solidFill xmlns:a="http://schemas.openxmlformats.org/drawingml/2006/main">
-            <a:srgbClr val="C8161E"/>
-          </a:solidFill>
-          <a:ln xmlns:a="http://schemas.openxmlformats.org/drawingml/2006/main" w="0">
-            <a:noFill/>
-            <a:prstDash val="solid"/>
-          </a:ln>
-        </p:spPr>
-        <p:txBody>
-          <a:bodyPr xmlns:a="http://schemas.openxmlformats.org/drawingml/2006/main" lIns="76200" tIns="38100" rIns="76200" bIns="38100" anchor="ctr"/>
-          <a:lstStyle xmlns:a="http://schemas.openxmlformats.org/drawingml/2006/main"/>
-          <a:p xmlns:a="http://schemas.openxmlformats.org/drawingml/2006/main">
-            <a:pPr algn="ctr">
-              <a:defRPr sz="1575" b="1">
-                <a:solidFill>
-                  <a:srgbClr val="FFFFFF"/>
-                </a:solidFill>
-              </a:defRPr>
-            </a:pPr>
-            <a:r>
-              <a:rPr sz="1575" b="1">
-                <a:solidFill>
-                  <a:srgbClr val="FFFFFF"/>
-                </a:solidFill>
-                <a:latin typeface="Arial"/>
-                <a:ea typeface="Arial"/>
-                <a:cs typeface="Arial"/>
-              </a:rPr>
-              <a:t>7</a:t>
-            </a:r>
-          </a:p>
-        </p:txBody>
-      </p:sp>
-      <p:sp>
-        <p:nvSpPr>
-          <p:cNvPr id="19" name="p12-t-6">
-            <a:extLst xmlns:a="http://schemas.openxmlformats.org/drawingml/2006/main">
-              <a:ext uri="{FF2B5EF4-FFF2-40B4-BE49-F238E27FC236}">
-                <a16:creationId xmlns:a16="http://schemas.microsoft.com/office/drawing/2014/main" id="{CB502327-7BCE-4570-928D-9FE0C817FAAE}"/>
-              </a:ext>
-            </a:extLst>
-          </p:cNvPr>
-          <p:cNvSpPr>
-            <a:spLocks xmlns:a="http://schemas.openxmlformats.org/drawingml/2006/main" noGrp="1"/>
-          </p:cNvSpPr>
-          <p:nvPr/>
-        </p:nvSpPr>
-        <p:spPr>
-          <a:xfrm xmlns:a="http://schemas.openxmlformats.org/drawingml/2006/main">
-            <a:off x="1276350" y="4629150"/>
-            <a:ext cx="6191250" cy="457200"/>
-          </a:xfrm>
-          <a:prstGeom xmlns:a="http://schemas.openxmlformats.org/drawingml/2006/main" prst="rect">
-            <a:avLst/>
-          </a:prstGeom>
-          <a:solidFill xmlns:a="http://schemas.openxmlformats.org/drawingml/2006/main">
-            <a:srgbClr val="F3F6F7"/>
-          </a:solidFill>
-          <a:ln xmlns:a="http://schemas.openxmlformats.org/drawingml/2006/main" w="0">
-            <a:noFill/>
-            <a:prstDash val="solid"/>
-          </a:ln>
-        </p:spPr>
-        <p:txBody>
-          <a:bodyPr xmlns:a="http://schemas.openxmlformats.org/drawingml/2006/main" lIns="76200" tIns="38100" rIns="76200" bIns="38100" anchor="ctr"/>
-          <a:lstStyle xmlns:a="http://schemas.openxmlformats.org/drawingml/2006/main"/>
-          <a:p xmlns:a="http://schemas.openxmlformats.org/drawingml/2006/main">
-            <a:pPr algn="l">
-              <a:defRPr sz="1500" b="1">
-                <a:solidFill>
-                  <a:srgbClr val="263746"/>
-                </a:solidFill>
-              </a:defRPr>
-            </a:pPr>
-            <a:r>
-              <a:rPr sz="1500" b="1">
-                <a:solidFill>
-                  <a:srgbClr val="263746"/>
-                </a:solidFill>
-                <a:latin typeface="Microsoft YaHei"/>
-                <a:ea typeface="Microsoft YaHei"/>
-                <a:cs typeface="Microsoft YaHei"/>
-              </a:rPr>
-              <a:t>当前项目中的证据角色</a:t>
-            </a:r>
-          </a:p>
-        </p:txBody>
-      </p:sp>
-      <p:sp>
-        <p:nvSpPr>
-          <p:cNvPr id="20" name="p12-status-title">
-            <a:extLst xmlns:a="http://schemas.openxmlformats.org/drawingml/2006/main">
-              <a:ext uri="{FF2B5EF4-FFF2-40B4-BE49-F238E27FC236}">
-                <a16:creationId xmlns:a16="http://schemas.microsoft.com/office/drawing/2014/main" id="{41F4B55A-90AF-4618-B645-582D136C6C77}"/>
-              </a:ext>
-            </a:extLst>
-          </p:cNvPr>
-          <p:cNvSpPr>
-            <a:spLocks xmlns:a="http://schemas.openxmlformats.org/drawingml/2006/main" noGrp="1"/>
-          </p:cNvSpPr>
-          <p:nvPr/>
-        </p:nvSpPr>
-        <p:spPr>
-          <a:xfrm xmlns:a="http://schemas.openxmlformats.org/drawingml/2006/main">
-            <a:off x="8191500" y="1009650"/>
-            <a:ext cx="3048000" cy="476250"/>
-          </a:xfrm>
-          <a:prstGeom xmlns:a="http://schemas.openxmlformats.org/drawingml/2006/main" prst="rect">
-            <a:avLst/>
-          </a:prstGeom>
-          <a:noFill xmlns:a="http://schemas.openxmlformats.org/drawingml/2006/main"/>
-          <a:ln xmlns:a="http://schemas.openxmlformats.org/drawingml/2006/main" w="0">
-            <a:noFill/>
-            <a:prstDash val="solid"/>
-          </a:ln>
-        </p:spPr>
-        <p:txBody>
-          <a:bodyPr xmlns:a="http://schemas.openxmlformats.org/drawingml/2006/main" lIns="76200" tIns="38100" rIns="76200" bIns="38100" anchor="ctr"/>
-          <a:lstStyle xmlns:a="http://schemas.openxmlformats.org/drawingml/2006/main"/>
-          <a:p xmlns:a="http://schemas.openxmlformats.org/drawingml/2006/main">
-            <a:pPr algn="ctr">
-              <a:defRPr sz="1875" b="1">
-                <a:solidFill>
-                  <a:srgbClr val="18354E"/>
-                </a:solidFill>
-              </a:defRPr>
-            </a:pPr>
-            <a:r>
-              <a:rPr sz="1875" b="1">
-                <a:solidFill>
-                  <a:srgbClr val="18354E"/>
-                </a:solidFill>
-                <a:latin typeface="Microsoft YaHei"/>
-                <a:ea typeface="Microsoft YaHei"/>
-                <a:cs typeface="Microsoft YaHei"/>
-              </a:rPr>
-              <a:t>核验状态</a:t>
-            </a:r>
-          </a:p>
-        </p:txBody>
-      </p:sp>
-      <p:sp>
-        <p:nvSpPr>
-          <p:cNvPr id="21" name="p12-s-0">
-            <a:extLst xmlns:a="http://schemas.openxmlformats.org/drawingml/2006/main">
-              <a:ext uri="{FF2B5EF4-FFF2-40B4-BE49-F238E27FC236}">
-                <a16:creationId xmlns:a16="http://schemas.microsoft.com/office/drawing/2014/main" id="{897C9243-27B1-497A-A4BA-047EFE858501}"/>
-              </a:ext>
-            </a:extLst>
-          </p:cNvPr>
-          <p:cNvSpPr>
-            <a:spLocks xmlns:a="http://schemas.openxmlformats.org/drawingml/2006/main" noGrp="1"/>
-          </p:cNvSpPr>
-          <p:nvPr/>
-        </p:nvSpPr>
-        <p:spPr>
-          <a:xfrm xmlns:a="http://schemas.openxmlformats.org/drawingml/2006/main">
-            <a:off x="8096250" y="1657350"/>
-            <a:ext cx="3238500" cy="571500"/>
+              <a:t>3. 核对任务、设置、措辞强度与必要限定</a:t>
+            </a:r>
+          </a:p>
+        </p:txBody>
+      </p:sp>
+      <p:sp>
+        <p:nvSpPr>
+          <p:cNvPr id="12" name="p12-pending">
+            <a:extLst xmlns:a="http://schemas.openxmlformats.org/drawingml/2006/main">
+              <a:ext uri="{FF2B5EF4-FFF2-40B4-BE49-F238E27FC236}">
+                <a16:creationId xmlns:a16="http://schemas.microsoft.com/office/drawing/2014/main" id="{ADA0292B-E1BD-4FD0-8175-04475DCE7D80}"/>
+              </a:ext>
+            </a:extLst>
+          </p:cNvPr>
+          <p:cNvSpPr>
+            <a:spLocks xmlns:a="http://schemas.openxmlformats.org/drawingml/2006/main" noGrp="1"/>
+          </p:cNvSpPr>
+          <p:nvPr/>
+        </p:nvSpPr>
+        <p:spPr>
+          <a:xfrm xmlns:a="http://schemas.openxmlformats.org/drawingml/2006/main">
+            <a:off x="666750" y="4305300"/>
+            <a:ext cx="6667500" cy="476250"/>
           </a:xfrm>
           <a:prstGeom xmlns:a="http://schemas.openxmlformats.org/drawingml/2006/main" prst="rect">
             <a:avLst/>
@@ -6284,6 +5833,169 @@
           <a:lstStyle xmlns:a="http://schemas.openxmlformats.org/drawingml/2006/main"/>
           <a:p xmlns:a="http://schemas.openxmlformats.org/drawingml/2006/main">
             <a:pPr algn="ctr">
+              <a:defRPr sz="1575" b="1">
+                <a:solidFill>
+                  <a:srgbClr val="A86C12"/>
+                </a:solidFill>
+              </a:defRPr>
+            </a:pPr>
+            <a:r>
+              <a:rPr sz="1575" b="1">
+                <a:solidFill>
+                  <a:srgbClr val="A86C12"/>
+                </a:solidFill>
+                <a:latin typeface="Microsoft YaHei"/>
+                <a:ea typeface="Microsoft YaHei"/>
+                <a:cs typeface="Microsoft YaHei"/>
+              </a:rPr>
+              <a:t>只完成身份层 → pending｜默认探索线索</a:t>
+            </a:r>
+          </a:p>
+        </p:txBody>
+      </p:sp>
+      <p:sp>
+        <p:nvSpPr>
+          <p:cNvPr id="13" name="p12-handoff">
+            <a:extLst xmlns:a="http://schemas.openxmlformats.org/drawingml/2006/main">
+              <a:ext uri="{FF2B5EF4-FFF2-40B4-BE49-F238E27FC236}">
+                <a16:creationId xmlns:a16="http://schemas.microsoft.com/office/drawing/2014/main" id="{D7CD51BE-01A7-4610-81A1-5F670CA18413}"/>
+              </a:ext>
+            </a:extLst>
+          </p:cNvPr>
+          <p:cNvSpPr>
+            <a:spLocks xmlns:a="http://schemas.openxmlformats.org/drawingml/2006/main" noGrp="1"/>
+          </p:cNvSpPr>
+          <p:nvPr/>
+        </p:nvSpPr>
+        <p:spPr>
+          <a:xfrm xmlns:a="http://schemas.openxmlformats.org/drawingml/2006/main">
+            <a:off x="666750" y="4895850"/>
+            <a:ext cx="6667500" cy="476250"/>
+          </a:xfrm>
+          <a:prstGeom xmlns:a="http://schemas.openxmlformats.org/drawingml/2006/main" prst="rect">
+            <a:avLst/>
+          </a:prstGeom>
+          <a:solidFill xmlns:a="http://schemas.openxmlformats.org/drawingml/2006/main">
+            <a:srgbClr val="E8F0F6"/>
+          </a:solidFill>
+          <a:ln xmlns:a="http://schemas.openxmlformats.org/drawingml/2006/main" w="0">
+            <a:noFill/>
+            <a:prstDash val="solid"/>
+          </a:ln>
+        </p:spPr>
+        <p:txBody>
+          <a:bodyPr xmlns:a="http://schemas.openxmlformats.org/drawingml/2006/main" lIns="76200" tIns="38100" rIns="76200" bIns="38100" anchor="ctr"/>
+          <a:lstStyle xmlns:a="http://schemas.openxmlformats.org/drawingml/2006/main"/>
+          <a:p xmlns:a="http://schemas.openxmlformats.org/drawingml/2006/main">
+            <a:pPr algn="ctr">
+              <a:defRPr sz="1425" b="1">
+                <a:solidFill>
+                  <a:srgbClr val="18354E"/>
+                </a:solidFill>
+              </a:defRPr>
+            </a:pPr>
+            <a:r>
+              <a:rPr sz="1425" b="1">
+                <a:solidFill>
+                  <a:srgbClr val="18354E"/>
+                </a:solidFill>
+                <a:latin typeface="Microsoft YaHei"/>
+                <a:ea typeface="Microsoft YaHei"/>
+                <a:cs typeface="Microsoft YaHei"/>
+              </a:rPr>
+              <a:t>第 4 课移交：多条主张、位置、指标、对照、样本、贡献与局限</a:t>
+            </a:r>
+          </a:p>
+        </p:txBody>
+      </p:sp>
+      <p:sp>
+        <p:nvSpPr>
+          <p:cNvPr id="14" name="p12-status-title">
+            <a:extLst xmlns:a="http://schemas.openxmlformats.org/drawingml/2006/main">
+              <a:ext uri="{FF2B5EF4-FFF2-40B4-BE49-F238E27FC236}">
+                <a16:creationId xmlns:a16="http://schemas.microsoft.com/office/drawing/2014/main" id="{5CC1E760-0A33-4133-8705-CBB3E732E35B}"/>
+              </a:ext>
+            </a:extLst>
+          </p:cNvPr>
+          <p:cNvSpPr>
+            <a:spLocks xmlns:a="http://schemas.openxmlformats.org/drawingml/2006/main" noGrp="1"/>
+          </p:cNvSpPr>
+          <p:nvPr/>
+        </p:nvSpPr>
+        <p:spPr>
+          <a:xfrm xmlns:a="http://schemas.openxmlformats.org/drawingml/2006/main">
+            <a:off x="8096250" y="1009650"/>
+            <a:ext cx="3238500" cy="476250"/>
+          </a:xfrm>
+          <a:prstGeom xmlns:a="http://schemas.openxmlformats.org/drawingml/2006/main" prst="rect">
+            <a:avLst/>
+          </a:prstGeom>
+          <a:noFill xmlns:a="http://schemas.openxmlformats.org/drawingml/2006/main"/>
+          <a:ln xmlns:a="http://schemas.openxmlformats.org/drawingml/2006/main" w="0">
+            <a:noFill/>
+            <a:prstDash val="solid"/>
+          </a:ln>
+        </p:spPr>
+        <p:txBody>
+          <a:bodyPr xmlns:a="http://schemas.openxmlformats.org/drawingml/2006/main" lIns="76200" tIns="38100" rIns="76200" bIns="38100" anchor="ctr"/>
+          <a:lstStyle xmlns:a="http://schemas.openxmlformats.org/drawingml/2006/main"/>
+          <a:p xmlns:a="http://schemas.openxmlformats.org/drawingml/2006/main">
+            <a:pPr algn="ctr">
+              <a:defRPr sz="1800" b="1">
+                <a:solidFill>
+                  <a:srgbClr val="18354E"/>
+                </a:solidFill>
+              </a:defRPr>
+            </a:pPr>
+            <a:r>
+              <a:rPr sz="1800" b="1">
+                <a:solidFill>
+                  <a:srgbClr val="18354E"/>
+                </a:solidFill>
+                <a:latin typeface="Microsoft YaHei"/>
+                <a:ea typeface="Microsoft YaHei"/>
+                <a:cs typeface="Microsoft YaHei"/>
+              </a:rPr>
+              <a:t>四态与进入规则</a:t>
+            </a:r>
+          </a:p>
+        </p:txBody>
+      </p:sp>
+      <p:sp>
+        <p:nvSpPr>
+          <p:cNvPr id="15" name="p12-s-0">
+            <a:extLst xmlns:a="http://schemas.openxmlformats.org/drawingml/2006/main">
+              <a:ext uri="{FF2B5EF4-FFF2-40B4-BE49-F238E27FC236}">
+                <a16:creationId xmlns:a16="http://schemas.microsoft.com/office/drawing/2014/main" id="{9EB8737D-5840-4CAA-BFB6-AC77F8E51BEA}"/>
+              </a:ext>
+            </a:extLst>
+          </p:cNvPr>
+          <p:cNvSpPr>
+            <a:spLocks xmlns:a="http://schemas.openxmlformats.org/drawingml/2006/main" noGrp="1"/>
+          </p:cNvSpPr>
+          <p:nvPr/>
+        </p:nvSpPr>
+        <p:spPr>
+          <a:xfrm xmlns:a="http://schemas.openxmlformats.org/drawingml/2006/main">
+            <a:off x="8096250" y="1619250"/>
+            <a:ext cx="3238500" cy="533400"/>
+          </a:xfrm>
+          <a:prstGeom xmlns:a="http://schemas.openxmlformats.org/drawingml/2006/main" prst="rect">
+            <a:avLst/>
+          </a:prstGeom>
+          <a:solidFill xmlns:a="http://schemas.openxmlformats.org/drawingml/2006/main">
+            <a:srgbClr val="FAF0DD"/>
+          </a:solidFill>
+          <a:ln xmlns:a="http://schemas.openxmlformats.org/drawingml/2006/main" w="0">
+            <a:noFill/>
+            <a:prstDash val="solid"/>
+          </a:ln>
+        </p:spPr>
+        <p:txBody>
+          <a:bodyPr xmlns:a="http://schemas.openxmlformats.org/drawingml/2006/main" lIns="76200" tIns="38100" rIns="76200" bIns="38100" anchor="ctr"/>
+          <a:lstStyle xmlns:a="http://schemas.openxmlformats.org/drawingml/2006/main"/>
+          <a:p xmlns:a="http://schemas.openxmlformats.org/drawingml/2006/main">
+            <a:pPr algn="ctr">
               <a:defRPr sz="1500" b="1">
                 <a:solidFill>
                   <a:srgbClr val="A86C12"/>
@@ -6306,22 +6018,22 @@
       </p:sp>
       <p:sp>
         <p:nvSpPr>
-          <p:cNvPr id="22" name="p12-s-1">
-            <a:extLst xmlns:a="http://schemas.openxmlformats.org/drawingml/2006/main">
-              <a:ext uri="{FF2B5EF4-FFF2-40B4-BE49-F238E27FC236}">
-                <a16:creationId xmlns:a16="http://schemas.microsoft.com/office/drawing/2014/main" id="{FD5F4B93-DC0B-4345-B6FF-AC723440AD9E}"/>
-              </a:ext>
-            </a:extLst>
-          </p:cNvPr>
-          <p:cNvSpPr>
-            <a:spLocks xmlns:a="http://schemas.openxmlformats.org/drawingml/2006/main" noGrp="1"/>
-          </p:cNvSpPr>
-          <p:nvPr/>
-        </p:nvSpPr>
-        <p:spPr>
-          <a:xfrm xmlns:a="http://schemas.openxmlformats.org/drawingml/2006/main">
-            <a:off x="8096250" y="2457450"/>
-            <a:ext cx="3238500" cy="571500"/>
+          <p:cNvPr id="16" name="p12-s-1">
+            <a:extLst xmlns:a="http://schemas.openxmlformats.org/drawingml/2006/main">
+              <a:ext uri="{FF2B5EF4-FFF2-40B4-BE49-F238E27FC236}">
+                <a16:creationId xmlns:a16="http://schemas.microsoft.com/office/drawing/2014/main" id="{AA5FDE89-31A5-45BB-B0F7-8C0D498EDD00}"/>
+              </a:ext>
+            </a:extLst>
+          </p:cNvPr>
+          <p:cNvSpPr>
+            <a:spLocks xmlns:a="http://schemas.openxmlformats.org/drawingml/2006/main" noGrp="1"/>
+          </p:cNvSpPr>
+          <p:nvPr/>
+        </p:nvSpPr>
+        <p:spPr>
+          <a:xfrm xmlns:a="http://schemas.openxmlformats.org/drawingml/2006/main">
+            <a:off x="8096250" y="2343150"/>
+            <a:ext cx="3238500" cy="533400"/>
           </a:xfrm>
           <a:prstGeom xmlns:a="http://schemas.openxmlformats.org/drawingml/2006/main" prst="rect">
             <a:avLst/>
@@ -6361,22 +6073,22 @@
       </p:sp>
       <p:sp>
         <p:nvSpPr>
-          <p:cNvPr id="23" name="p12-s-2">
-            <a:extLst xmlns:a="http://schemas.openxmlformats.org/drawingml/2006/main">
-              <a:ext uri="{FF2B5EF4-FFF2-40B4-BE49-F238E27FC236}">
-                <a16:creationId xmlns:a16="http://schemas.microsoft.com/office/drawing/2014/main" id="{452D403F-37B8-4948-B88C-7589293DB4E6}"/>
-              </a:ext>
-            </a:extLst>
-          </p:cNvPr>
-          <p:cNvSpPr>
-            <a:spLocks xmlns:a="http://schemas.openxmlformats.org/drawingml/2006/main" noGrp="1"/>
-          </p:cNvSpPr>
-          <p:nvPr/>
-        </p:nvSpPr>
-        <p:spPr>
-          <a:xfrm xmlns:a="http://schemas.openxmlformats.org/drawingml/2006/main">
-            <a:off x="8096250" y="3257550"/>
-            <a:ext cx="3238500" cy="571500"/>
+          <p:cNvPr id="17" name="p12-s-2">
+            <a:extLst xmlns:a="http://schemas.openxmlformats.org/drawingml/2006/main">
+              <a:ext uri="{FF2B5EF4-FFF2-40B4-BE49-F238E27FC236}">
+                <a16:creationId xmlns:a16="http://schemas.microsoft.com/office/drawing/2014/main" id="{58498D12-5B34-4850-86DE-878B57CE4D7E}"/>
+              </a:ext>
+            </a:extLst>
+          </p:cNvPr>
+          <p:cNvSpPr>
+            <a:spLocks xmlns:a="http://schemas.openxmlformats.org/drawingml/2006/main" noGrp="1"/>
+          </p:cNvSpPr>
+          <p:nvPr/>
+        </p:nvSpPr>
+        <p:spPr>
+          <a:xfrm xmlns:a="http://schemas.openxmlformats.org/drawingml/2006/main">
+            <a:off x="8096250" y="3067050"/>
+            <a:ext cx="3238500" cy="533400"/>
           </a:xfrm>
           <a:prstGeom xmlns:a="http://schemas.openxmlformats.org/drawingml/2006/main" prst="rect">
             <a:avLst/>
@@ -6416,22 +6128,22 @@
       </p:sp>
       <p:sp>
         <p:nvSpPr>
-          <p:cNvPr id="24" name="p12-s-3">
-            <a:extLst xmlns:a="http://schemas.openxmlformats.org/drawingml/2006/main">
-              <a:ext uri="{FF2B5EF4-FFF2-40B4-BE49-F238E27FC236}">
-                <a16:creationId xmlns:a16="http://schemas.microsoft.com/office/drawing/2014/main" id="{3CE088EA-B020-42AB-B2F1-65A00AC5B74B}"/>
-              </a:ext>
-            </a:extLst>
-          </p:cNvPr>
-          <p:cNvSpPr>
-            <a:spLocks xmlns:a="http://schemas.openxmlformats.org/drawingml/2006/main" noGrp="1"/>
-          </p:cNvSpPr>
-          <p:nvPr/>
-        </p:nvSpPr>
-        <p:spPr>
-          <a:xfrm xmlns:a="http://schemas.openxmlformats.org/drawingml/2006/main">
-            <a:off x="8096250" y="4057650"/>
-            <a:ext cx="3238500" cy="571500"/>
+          <p:cNvPr id="18" name="p12-s-3">
+            <a:extLst xmlns:a="http://schemas.openxmlformats.org/drawingml/2006/main">
+              <a:ext uri="{FF2B5EF4-FFF2-40B4-BE49-F238E27FC236}">
+                <a16:creationId xmlns:a16="http://schemas.microsoft.com/office/drawing/2014/main" id="{23B06955-E7B1-4E8B-A932-6CD5F6ABB82E}"/>
+              </a:ext>
+            </a:extLst>
+          </p:cNvPr>
+          <p:cNvSpPr>
+            <a:spLocks xmlns:a="http://schemas.openxmlformats.org/drawingml/2006/main" noGrp="1"/>
+          </p:cNvSpPr>
+          <p:nvPr/>
+        </p:nvSpPr>
+        <p:spPr>
+          <a:xfrm xmlns:a="http://schemas.openxmlformats.org/drawingml/2006/main">
+            <a:off x="8096250" y="3790950"/>
+            <a:ext cx="3238500" cy="533400"/>
           </a:xfrm>
           <a:prstGeom xmlns:a="http://schemas.openxmlformats.org/drawingml/2006/main" prst="rect">
             <a:avLst/>
@@ -6471,22 +6183,22 @@
       </p:sp>
       <p:sp>
         <p:nvSpPr>
-          <p:cNvPr id="25" name="p12-bottom">
-            <a:extLst xmlns:a="http://schemas.openxmlformats.org/drawingml/2006/main">
-              <a:ext uri="{FF2B5EF4-FFF2-40B4-BE49-F238E27FC236}">
-                <a16:creationId xmlns:a16="http://schemas.microsoft.com/office/drawing/2014/main" id="{E4E9D5C4-4864-4506-9930-D48F3B97825D}"/>
-              </a:ext>
-            </a:extLst>
-          </p:cNvPr>
-          <p:cNvSpPr>
-            <a:spLocks xmlns:a="http://schemas.openxmlformats.org/drawingml/2006/main" noGrp="1"/>
-          </p:cNvSpPr>
-          <p:nvPr/>
-        </p:nvSpPr>
-        <p:spPr>
-          <a:xfrm xmlns:a="http://schemas.openxmlformats.org/drawingml/2006/main">
-            <a:off x="7581900" y="4819650"/>
-            <a:ext cx="4038600" cy="781050"/>
+          <p:cNvPr id="19" name="p12-bottom">
+            <a:extLst xmlns:a="http://schemas.openxmlformats.org/drawingml/2006/main">
+              <a:ext uri="{FF2B5EF4-FFF2-40B4-BE49-F238E27FC236}">
+                <a16:creationId xmlns:a16="http://schemas.microsoft.com/office/drawing/2014/main" id="{7FE664DE-E4FB-4668-AC2C-2E17236F2F08}"/>
+              </a:ext>
+            </a:extLst>
+          </p:cNvPr>
+          <p:cNvSpPr>
+            <a:spLocks xmlns:a="http://schemas.openxmlformats.org/drawingml/2006/main" noGrp="1"/>
+          </p:cNvSpPr>
+          <p:nvPr/>
+        </p:nvSpPr>
+        <p:spPr>
+          <a:xfrm xmlns:a="http://schemas.openxmlformats.org/drawingml/2006/main">
+            <a:off x="7620000" y="4667250"/>
+            <a:ext cx="4000500" cy="933450"/>
           </a:xfrm>
           <a:prstGeom xmlns:a="http://schemas.openxmlformats.org/drawingml/2006/main" prst="rect">
             <a:avLst/>
@@ -6523,7 +6235,7 @@
                 <a:ea typeface="Microsoft YaHei"/>
                 <a:cs typeface="Microsoft YaHei"/>
               </a:rPr>
-              <a:t>pending 仅线索区｜verified 可进主格｜caveat 必须保留限定且不能单独支撑 stable｜rejected 仅审计</a:t>
+              <a:t>pending 仅线索区｜verified 可进主格｜caveat 保留限定且不能单独支撑 stable｜rejected 仅审计</a:t>
             </a:r>
           </a:p>
         </p:txBody>
@@ -6625,7 +6337,7 @@
           <p:cNvPr id="6" name="p13-a-0">
             <a:extLst xmlns:a="http://schemas.openxmlformats.org/drawingml/2006/main">
               <a:ext uri="{FF2B5EF4-FFF2-40B4-BE49-F238E27FC236}">
-                <a16:creationId xmlns:a16="http://schemas.microsoft.com/office/drawing/2014/main" id="{7E1CD9CB-D1E3-4C8A-BFCE-A3E22373F377}"/>
+                <a16:creationId xmlns:a16="http://schemas.microsoft.com/office/drawing/2014/main" id="{BEFB0892-C89D-438C-A0B3-CD9FC19C189D}"/>
               </a:ext>
             </a:extLst>
           </p:cNvPr>
@@ -6678,7 +6390,7 @@
           <p:cNvPr id="7" name="p13-b-0">
             <a:extLst xmlns:a="http://schemas.openxmlformats.org/drawingml/2006/main">
               <a:ext uri="{FF2B5EF4-FFF2-40B4-BE49-F238E27FC236}">
-                <a16:creationId xmlns:a16="http://schemas.microsoft.com/office/drawing/2014/main" id="{7EC91B27-36FE-4153-B00C-E6E3675A7A2A}"/>
+                <a16:creationId xmlns:a16="http://schemas.microsoft.com/office/drawing/2014/main" id="{3F5E4991-7EDF-4C89-827F-F18E78A48FAD}"/>
               </a:ext>
             </a:extLst>
           </p:cNvPr>
@@ -6712,14 +6424,14 @@
                 <a:spcPct val="120000"/>
               </a:lnSpc>
               <a:buNone/>
-              <a:defRPr sz="1425" b="1">
+              <a:defRPr sz="1350" b="1">
                 <a:solidFill>
                   <a:srgbClr val="263746"/>
                 </a:solidFill>
               </a:defRPr>
             </a:pPr>
             <a:r>
-              <a:rPr sz="1425" b="1">
+              <a:rPr sz="1350" b="1">
                 <a:solidFill>
                   <a:srgbClr val="263746"/>
                 </a:solidFill>
@@ -6736,14 +6448,14 @@
                 <a:spcPct val="120000"/>
               </a:lnSpc>
               <a:buNone/>
-              <a:defRPr sz="1425" b="1">
+              <a:defRPr sz="1350" b="1">
                 <a:solidFill>
                   <a:srgbClr val="263746"/>
                 </a:solidFill>
               </a:defRPr>
             </a:pPr>
             <a:r>
-              <a:rPr sz="1425" b="1">
+              <a:rPr sz="1350" b="1">
                 <a:solidFill>
                   <a:srgbClr val="263746"/>
                 </a:solidFill>
@@ -6754,6 +6466,30 @@
               <a:t>query.title=How to Read a Paper</a:t>
             </a:r>
           </a:p>
+          <a:p xmlns:a="http://schemas.openxmlformats.org/drawingml/2006/main">
+            <a:pPr algn="ctr">
+              <a:lnSpc>
+                <a:spcPct val="120000"/>
+              </a:lnSpc>
+              <a:buNone/>
+              <a:defRPr sz="1350" b="1">
+                <a:solidFill>
+                  <a:srgbClr val="263746"/>
+                </a:solidFill>
+              </a:defRPr>
+            </a:pPr>
+            <a:r>
+              <a:rPr sz="1350" b="1">
+                <a:solidFill>
+                  <a:srgbClr val="263746"/>
+                </a:solidFill>
+                <a:latin typeface="Microsoft YaHei"/>
+                <a:ea typeface="Microsoft YaHei"/>
+                <a:cs typeface="Microsoft YaHei"/>
+              </a:rPr>
+              <a:t>&amp;query.author=Keshav&amp;rows=5</a:t>
+            </a:r>
+          </a:p>
         </p:txBody>
       </p:sp>
       <p:sp>
@@ -6761,7 +6497,7 @@
           <p:cNvPr id="8" name="p13-arr-0">
             <a:extLst xmlns:a="http://schemas.openxmlformats.org/drawingml/2006/main">
               <a:ext uri="{FF2B5EF4-FFF2-40B4-BE49-F238E27FC236}">
-                <a16:creationId xmlns:a16="http://schemas.microsoft.com/office/drawing/2014/main" id="{29236716-84A7-4BEB-BCB8-A95F2F92DCD7}"/>
+                <a16:creationId xmlns:a16="http://schemas.microsoft.com/office/drawing/2014/main" id="{53BCFAD0-DB78-4E5D-B6E0-0031B4793E0E}"/>
               </a:ext>
             </a:extLst>
           </p:cNvPr>
@@ -6814,7 +6550,7 @@
           <p:cNvPr id="9" name="p13-a-1">
             <a:extLst xmlns:a="http://schemas.openxmlformats.org/drawingml/2006/main">
               <a:ext uri="{FF2B5EF4-FFF2-40B4-BE49-F238E27FC236}">
-                <a16:creationId xmlns:a16="http://schemas.microsoft.com/office/drawing/2014/main" id="{3E8FCA98-1B39-4764-9BE3-772E3CC5B274}"/>
+                <a16:creationId xmlns:a16="http://schemas.microsoft.com/office/drawing/2014/main" id="{AD8DBAA8-0987-4602-8C2E-73AD49B29101}"/>
               </a:ext>
             </a:extLst>
           </p:cNvPr>
@@ -6867,7 +6603,7 @@
           <p:cNvPr id="10" name="p13-b-1">
             <a:extLst xmlns:a="http://schemas.openxmlformats.org/drawingml/2006/main">
               <a:ext uri="{FF2B5EF4-FFF2-40B4-BE49-F238E27FC236}">
-                <a16:creationId xmlns:a16="http://schemas.microsoft.com/office/drawing/2014/main" id="{CBD942C1-1365-45B0-B256-FD2F02EE332D}"/>
+                <a16:creationId xmlns:a16="http://schemas.microsoft.com/office/drawing/2014/main" id="{7B05C8A6-FB90-4BC8-AA2A-A169C8396018}"/>
               </a:ext>
             </a:extLst>
           </p:cNvPr>
@@ -6901,14 +6637,14 @@
                 <a:spcPct val="120000"/>
               </a:lnSpc>
               <a:buNone/>
-              <a:defRPr sz="1425" b="1">
+              <a:defRPr sz="1350" b="1">
                 <a:solidFill>
                   <a:srgbClr val="263746"/>
                 </a:solidFill>
               </a:defRPr>
             </a:pPr>
             <a:r>
-              <a:rPr sz="1425" b="1">
+              <a:rPr sz="1350" b="1">
                 <a:solidFill>
                   <a:srgbClr val="263746"/>
                 </a:solidFill>
@@ -6925,14 +6661,14 @@
                 <a:spcPct val="120000"/>
               </a:lnSpc>
               <a:buNone/>
-              <a:defRPr sz="1425" b="1">
+              <a:defRPr sz="1350" b="1">
                 <a:solidFill>
                   <a:srgbClr val="263746"/>
                 </a:solidFill>
               </a:defRPr>
             </a:pPr>
             <a:r>
-              <a:rPr sz="1425" b="1">
+              <a:rPr sz="1350" b="1">
                 <a:solidFill>
                   <a:srgbClr val="263746"/>
                 </a:solidFill>
@@ -6950,7 +6686,7 @@
           <p:cNvPr id="11" name="p13-arr-1">
             <a:extLst xmlns:a="http://schemas.openxmlformats.org/drawingml/2006/main">
               <a:ext uri="{FF2B5EF4-FFF2-40B4-BE49-F238E27FC236}">
-                <a16:creationId xmlns:a16="http://schemas.microsoft.com/office/drawing/2014/main" id="{F15D76AB-35D3-4161-9CCA-EC1384E921CC}"/>
+                <a16:creationId xmlns:a16="http://schemas.microsoft.com/office/drawing/2014/main" id="{1EBEB685-366D-4483-96FB-336391A3EC37}"/>
               </a:ext>
             </a:extLst>
           </p:cNvPr>
@@ -7003,7 +6739,7 @@
           <p:cNvPr id="12" name="p13-a-2">
             <a:extLst xmlns:a="http://schemas.openxmlformats.org/drawingml/2006/main">
               <a:ext uri="{FF2B5EF4-FFF2-40B4-BE49-F238E27FC236}">
-                <a16:creationId xmlns:a16="http://schemas.microsoft.com/office/drawing/2014/main" id="{88485487-1D55-4E33-870F-4F6DD80E30A3}"/>
+                <a16:creationId xmlns:a16="http://schemas.microsoft.com/office/drawing/2014/main" id="{1052E0D3-15EC-44A8-9DC0-33B51F7595DC}"/>
               </a:ext>
             </a:extLst>
           </p:cNvPr>
@@ -7056,7 +6792,7 @@
           <p:cNvPr id="13" name="p13-b-2">
             <a:extLst xmlns:a="http://schemas.openxmlformats.org/drawingml/2006/main">
               <a:ext uri="{FF2B5EF4-FFF2-40B4-BE49-F238E27FC236}">
-                <a16:creationId xmlns:a16="http://schemas.microsoft.com/office/drawing/2014/main" id="{8748E5B0-4C62-41C8-A58E-2F7C1090B41B}"/>
+                <a16:creationId xmlns:a16="http://schemas.microsoft.com/office/drawing/2014/main" id="{97078B77-7915-41EE-A3B3-8D155C0BE635}"/>
               </a:ext>
             </a:extLst>
           </p:cNvPr>
@@ -7090,14 +6826,14 @@
                 <a:spcPct val="120000"/>
               </a:lnSpc>
               <a:buNone/>
-              <a:defRPr sz="1425" b="1">
+              <a:defRPr sz="1350" b="1">
                 <a:solidFill>
                   <a:srgbClr val="263746"/>
                 </a:solidFill>
               </a:defRPr>
             </a:pPr>
             <a:r>
-              <a:rPr sz="1425" b="1">
+              <a:rPr sz="1350" b="1">
                 <a:solidFill>
                   <a:srgbClr val="263746"/>
                 </a:solidFill>
@@ -7115,7 +6851,7 @@
           <p:cNvPr id="14" name="p13-arr-2">
             <a:extLst xmlns:a="http://schemas.openxmlformats.org/drawingml/2006/main">
               <a:ext uri="{FF2B5EF4-FFF2-40B4-BE49-F238E27FC236}">
-                <a16:creationId xmlns:a16="http://schemas.microsoft.com/office/drawing/2014/main" id="{9AB6CA79-1BF1-4109-BDEF-24F27EB1B3C4}"/>
+                <a16:creationId xmlns:a16="http://schemas.microsoft.com/office/drawing/2014/main" id="{30BF1216-423D-4635-9CC2-AFB18F38BA5C}"/>
               </a:ext>
             </a:extLst>
           </p:cNvPr>
@@ -7168,7 +6904,7 @@
           <p:cNvPr id="15" name="p13-a-3">
             <a:extLst xmlns:a="http://schemas.openxmlformats.org/drawingml/2006/main">
               <a:ext uri="{FF2B5EF4-FFF2-40B4-BE49-F238E27FC236}">
-                <a16:creationId xmlns:a16="http://schemas.microsoft.com/office/drawing/2014/main" id="{90D8CC27-88B2-4EEB-97EE-64091B72A459}"/>
+                <a16:creationId xmlns:a16="http://schemas.microsoft.com/office/drawing/2014/main" id="{EE8078B9-00AE-4C59-B54E-8B806B5C8F7F}"/>
               </a:ext>
             </a:extLst>
           </p:cNvPr>
@@ -7221,7 +6957,7 @@
           <p:cNvPr id="16" name="p13-b-3">
             <a:extLst xmlns:a="http://schemas.openxmlformats.org/drawingml/2006/main">
               <a:ext uri="{FF2B5EF4-FFF2-40B4-BE49-F238E27FC236}">
-                <a16:creationId xmlns:a16="http://schemas.microsoft.com/office/drawing/2014/main" id="{972C26C1-9F5F-4493-893D-E68AE36ECACD}"/>
+                <a16:creationId xmlns:a16="http://schemas.microsoft.com/office/drawing/2014/main" id="{261C4BF3-B649-4278-B616-13939185E1BF}"/>
               </a:ext>
             </a:extLst>
           </p:cNvPr>
@@ -7255,14 +6991,14 @@
                 <a:spcPct val="120000"/>
               </a:lnSpc>
               <a:buNone/>
-              <a:defRPr sz="1425" b="1">
+              <a:defRPr sz="1350" b="1">
                 <a:solidFill>
                   <a:srgbClr val="263746"/>
                 </a:solidFill>
               </a:defRPr>
             </a:pPr>
             <a:r>
-              <a:rPr sz="1425" b="1">
+              <a:rPr sz="1350" b="1">
                 <a:solidFill>
                   <a:srgbClr val="263746"/>
                 </a:solidFill>
@@ -7279,14 +7015,14 @@
                 <a:spcPct val="120000"/>
               </a:lnSpc>
               <a:buNone/>
-              <a:defRPr sz="1425" b="1">
+              <a:defRPr sz="1350" b="1">
                 <a:solidFill>
                   <a:srgbClr val="263746"/>
                 </a:solidFill>
               </a:defRPr>
             </a:pPr>
             <a:r>
-              <a:rPr sz="1425" b="1">
+              <a:rPr sz="1350" b="1">
                 <a:solidFill>
                   <a:srgbClr val="263746"/>
                 </a:solidFill>
@@ -7304,7 +7040,7 @@
           <p:cNvPr id="17" name="p13-arr-3">
             <a:extLst xmlns:a="http://schemas.openxmlformats.org/drawingml/2006/main">
               <a:ext uri="{FF2B5EF4-FFF2-40B4-BE49-F238E27FC236}">
-                <a16:creationId xmlns:a16="http://schemas.microsoft.com/office/drawing/2014/main" id="{66A640C2-CCC7-41B2-8FB3-2FA3E67758BB}"/>
+                <a16:creationId xmlns:a16="http://schemas.microsoft.com/office/drawing/2014/main" id="{F8C6B29F-0285-4B8C-8A5E-FE5C5E951D9D}"/>
               </a:ext>
             </a:extLst>
           </p:cNvPr>
@@ -7357,7 +7093,7 @@
           <p:cNvPr id="18" name="p13-a-4">
             <a:extLst xmlns:a="http://schemas.openxmlformats.org/drawingml/2006/main">
               <a:ext uri="{FF2B5EF4-FFF2-40B4-BE49-F238E27FC236}">
-                <a16:creationId xmlns:a16="http://schemas.microsoft.com/office/drawing/2014/main" id="{20AF59B9-3F4F-4837-BCEB-40506AAA7DB1}"/>
+                <a16:creationId xmlns:a16="http://schemas.microsoft.com/office/drawing/2014/main" id="{3E6BC9E5-D524-40A6-9B5D-69E688EC72E0}"/>
               </a:ext>
             </a:extLst>
           </p:cNvPr>
@@ -7410,7 +7146,7 @@
           <p:cNvPr id="19" name="p13-b-4">
             <a:extLst xmlns:a="http://schemas.openxmlformats.org/drawingml/2006/main">
               <a:ext uri="{FF2B5EF4-FFF2-40B4-BE49-F238E27FC236}">
-                <a16:creationId xmlns:a16="http://schemas.microsoft.com/office/drawing/2014/main" id="{FEF9A76A-21A6-426D-8AC7-6351FE5D2A30}"/>
+                <a16:creationId xmlns:a16="http://schemas.microsoft.com/office/drawing/2014/main" id="{2D0DF90C-EE98-481F-B83D-9BE7EB7D929B}"/>
               </a:ext>
             </a:extLst>
           </p:cNvPr>
@@ -7444,14 +7180,14 @@
                 <a:spcPct val="120000"/>
               </a:lnSpc>
               <a:buNone/>
-              <a:defRPr sz="1425" b="1">
+              <a:defRPr sz="1350" b="1">
                 <a:solidFill>
                   <a:srgbClr val="263746"/>
                 </a:solidFill>
               </a:defRPr>
             </a:pPr>
             <a:r>
-              <a:rPr sz="1425" b="1">
+              <a:rPr sz="1350" b="1">
                 <a:solidFill>
                   <a:srgbClr val="263746"/>
                 </a:solidFill>
@@ -7468,14 +7204,14 @@
                 <a:spcPct val="120000"/>
               </a:lnSpc>
               <a:buNone/>
-              <a:defRPr sz="1425" b="1">
+              <a:defRPr sz="1350" b="1">
                 <a:solidFill>
                   <a:srgbClr val="263746"/>
                 </a:solidFill>
               </a:defRPr>
             </a:pPr>
             <a:r>
-              <a:rPr sz="1425" b="1">
+              <a:rPr sz="1350" b="1">
                 <a:solidFill>
                   <a:srgbClr val="263746"/>
                 </a:solidFill>
@@ -7483,7 +7219,7 @@
                 <a:ea typeface="Microsoft YaHei"/>
                 <a:cs typeface="Microsoft YaHei"/>
               </a:rPr>
-              <a:t>保留检索日期与响应</a:t>
+              <a:t>保留实际请求与原始返回</a:t>
             </a:r>
           </a:p>
         </p:txBody>
@@ -7493,7 +7229,7 @@
           <p:cNvPr id="20" name="p13-predict">
             <a:extLst xmlns:a="http://schemas.openxmlformats.org/drawingml/2006/main">
               <a:ext uri="{FF2B5EF4-FFF2-40B4-BE49-F238E27FC236}">
-                <a16:creationId xmlns:a16="http://schemas.microsoft.com/office/drawing/2014/main" id="{DB973EEC-8381-4285-8FE6-06053645B657}"/>
+                <a16:creationId xmlns:a16="http://schemas.microsoft.com/office/drawing/2014/main" id="{A263B387-E3FE-4A11-AF8B-B685FAE052EF}"/>
               </a:ext>
             </a:extLst>
           </p:cNvPr>
@@ -7644,7 +7380,7 @@
           <p:nvPr/>
         </p:nvPicPr>
         <p:blipFill>
-          <a:blip xmlns:r="http://schemas.openxmlformats.org/officeDocument/2006/relationships" xmlns:a="http://schemas.openxmlformats.org/drawingml/2006/main" r:embed="R5888944ff8fb4a34"/>
+          <a:blip xmlns:r="http://schemas.openxmlformats.org/officeDocument/2006/relationships" xmlns:a="http://schemas.openxmlformats.org/drawingml/2006/main" r:embed="R7f41c21263ce45f5"/>
           <a:stretch xmlns:a="http://schemas.openxmlformats.org/drawingml/2006/main"/>
         </p:blipFill>
         <p:spPr>
@@ -7662,7 +7398,7 @@
           <p:cNvPr id="7" name="p14-real">
             <a:extLst xmlns:a="http://schemas.openxmlformats.org/drawingml/2006/main">
               <a:ext uri="{FF2B5EF4-FFF2-40B4-BE49-F238E27FC236}">
-                <a16:creationId xmlns:a16="http://schemas.microsoft.com/office/drawing/2014/main" id="{A101ECF3-53DA-46DC-A054-0B3C54801A05}"/>
+                <a16:creationId xmlns:a16="http://schemas.microsoft.com/office/drawing/2014/main" id="{E202753C-9E54-41D4-8750-123C9C9B0D14}"/>
               </a:ext>
             </a:extLst>
           </p:cNvPr>
@@ -7717,7 +7453,7 @@
           <p:cNvPr id="8" name="p14-meta">
             <a:extLst xmlns:a="http://schemas.openxmlformats.org/drawingml/2006/main">
               <a:ext uri="{FF2B5EF4-FFF2-40B4-BE49-F238E27FC236}">
-                <a16:creationId xmlns:a16="http://schemas.microsoft.com/office/drawing/2014/main" id="{56314AD5-8751-456C-BB71-7F5D97A080A6}"/>
+                <a16:creationId xmlns:a16="http://schemas.microsoft.com/office/drawing/2014/main" id="{B6E8EE9E-C18D-413A-8FF7-F306FE87D2AB}"/>
               </a:ext>
             </a:extLst>
           </p:cNvPr>
@@ -7772,7 +7508,7 @@
           <p:cNvPr id="9" name="p14-h-0">
             <a:extLst xmlns:a="http://schemas.openxmlformats.org/drawingml/2006/main">
               <a:ext uri="{FF2B5EF4-FFF2-40B4-BE49-F238E27FC236}">
-                <a16:creationId xmlns:a16="http://schemas.microsoft.com/office/drawing/2014/main" id="{78B5EEEF-6F68-4A20-9B78-C45DFA2EB174}"/>
+                <a16:creationId xmlns:a16="http://schemas.microsoft.com/office/drawing/2014/main" id="{07FA391D-493B-4C16-885B-A655584D6E1B}"/>
               </a:ext>
             </a:extLst>
           </p:cNvPr>
@@ -7827,7 +7563,7 @@
           <p:cNvPr id="10" name="p14-h-1">
             <a:extLst xmlns:a="http://schemas.openxmlformats.org/drawingml/2006/main">
               <a:ext uri="{FF2B5EF4-FFF2-40B4-BE49-F238E27FC236}">
-                <a16:creationId xmlns:a16="http://schemas.microsoft.com/office/drawing/2014/main" id="{9A98173B-E995-4295-98A7-9223255AEB57}"/>
+                <a16:creationId xmlns:a16="http://schemas.microsoft.com/office/drawing/2014/main" id="{BB9B9981-9854-4073-B437-212F3CA13864}"/>
               </a:ext>
             </a:extLst>
           </p:cNvPr>
@@ -7882,7 +7618,7 @@
           <p:cNvPr id="11" name="p14-h-2">
             <a:extLst xmlns:a="http://schemas.openxmlformats.org/drawingml/2006/main">
               <a:ext uri="{FF2B5EF4-FFF2-40B4-BE49-F238E27FC236}">
-                <a16:creationId xmlns:a16="http://schemas.microsoft.com/office/drawing/2014/main" id="{563AAD06-26DC-4C06-9078-390F7BFD6E9E}"/>
+                <a16:creationId xmlns:a16="http://schemas.microsoft.com/office/drawing/2014/main" id="{4D723F50-506E-4ACE-BF27-6B0FEA2D369C}"/>
               </a:ext>
             </a:extLst>
           </p:cNvPr>
@@ -7937,7 +7673,7 @@
           <p:cNvPr id="12" name="p14-r0-0">
             <a:extLst xmlns:a="http://schemas.openxmlformats.org/drawingml/2006/main">
               <a:ext uri="{FF2B5EF4-FFF2-40B4-BE49-F238E27FC236}">
-                <a16:creationId xmlns:a16="http://schemas.microsoft.com/office/drawing/2014/main" id="{5DB58C13-BE37-4553-9BA2-41418FFD4848}"/>
+                <a16:creationId xmlns:a16="http://schemas.microsoft.com/office/drawing/2014/main" id="{D1D56B70-1D85-4DF2-8A5C-16F3922DC7CD}"/>
               </a:ext>
             </a:extLst>
           </p:cNvPr>
@@ -7998,7 +7734,7 @@
           <p:cNvPr id="13" name="p14-r0-1">
             <a:extLst xmlns:a="http://schemas.openxmlformats.org/drawingml/2006/main">
               <a:ext uri="{FF2B5EF4-FFF2-40B4-BE49-F238E27FC236}">
-                <a16:creationId xmlns:a16="http://schemas.microsoft.com/office/drawing/2014/main" id="{0F688DFB-E986-4CE0-837A-642E480CE847}"/>
+                <a16:creationId xmlns:a16="http://schemas.microsoft.com/office/drawing/2014/main" id="{DC1A31FD-A35A-4F79-B343-DC8AFB0682D4}"/>
               </a:ext>
             </a:extLst>
           </p:cNvPr>
@@ -8059,7 +7795,7 @@
           <p:cNvPr id="14" name="p14-r0-2">
             <a:extLst xmlns:a="http://schemas.openxmlformats.org/drawingml/2006/main">
               <a:ext uri="{FF2B5EF4-FFF2-40B4-BE49-F238E27FC236}">
-                <a16:creationId xmlns:a16="http://schemas.microsoft.com/office/drawing/2014/main" id="{2B569B82-0162-470B-A089-413472A617B6}"/>
+                <a16:creationId xmlns:a16="http://schemas.microsoft.com/office/drawing/2014/main" id="{321D324A-46EC-4BF3-8FAF-BA2EBBB1A0DF}"/>
               </a:ext>
             </a:extLst>
           </p:cNvPr>
@@ -8120,7 +7856,7 @@
           <p:cNvPr id="15" name="p14-r1-0">
             <a:extLst xmlns:a="http://schemas.openxmlformats.org/drawingml/2006/main">
               <a:ext uri="{FF2B5EF4-FFF2-40B4-BE49-F238E27FC236}">
-                <a16:creationId xmlns:a16="http://schemas.microsoft.com/office/drawing/2014/main" id="{FD4F4064-EA2D-437C-90A5-ED31FBB1E1E0}"/>
+                <a16:creationId xmlns:a16="http://schemas.microsoft.com/office/drawing/2014/main" id="{22906324-EB8D-41D5-B5DF-EF7DF00AB6C8}"/>
               </a:ext>
             </a:extLst>
           </p:cNvPr>
@@ -8181,7 +7917,7 @@
           <p:cNvPr id="16" name="p14-r1-1">
             <a:extLst xmlns:a="http://schemas.openxmlformats.org/drawingml/2006/main">
               <a:ext uri="{FF2B5EF4-FFF2-40B4-BE49-F238E27FC236}">
-                <a16:creationId xmlns:a16="http://schemas.microsoft.com/office/drawing/2014/main" id="{1F47B783-B398-4BBE-971B-158CB14531B9}"/>
+                <a16:creationId xmlns:a16="http://schemas.microsoft.com/office/drawing/2014/main" id="{3150BD70-FB49-4191-804B-872536CD65F2}"/>
               </a:ext>
             </a:extLst>
           </p:cNvPr>
@@ -8242,7 +7978,7 @@
           <p:cNvPr id="17" name="p14-r1-2">
             <a:extLst xmlns:a="http://schemas.openxmlformats.org/drawingml/2006/main">
               <a:ext uri="{FF2B5EF4-FFF2-40B4-BE49-F238E27FC236}">
-                <a16:creationId xmlns:a16="http://schemas.microsoft.com/office/drawing/2014/main" id="{274C720A-D250-4D06-A4C7-7E0A9F290669}"/>
+                <a16:creationId xmlns:a16="http://schemas.microsoft.com/office/drawing/2014/main" id="{D930A69C-8F76-4242-AD46-FF7E74FDC954}"/>
               </a:ext>
             </a:extLst>
           </p:cNvPr>
@@ -8303,7 +8039,7 @@
           <p:cNvPr id="18" name="p14-r2-0">
             <a:extLst xmlns:a="http://schemas.openxmlformats.org/drawingml/2006/main">
               <a:ext uri="{FF2B5EF4-FFF2-40B4-BE49-F238E27FC236}">
-                <a16:creationId xmlns:a16="http://schemas.microsoft.com/office/drawing/2014/main" id="{C59493A6-BCB0-42A4-87BB-F667BB0EFDA2}"/>
+                <a16:creationId xmlns:a16="http://schemas.microsoft.com/office/drawing/2014/main" id="{A750687E-EF99-460C-B6BD-6C4AAAEFDB3B}"/>
               </a:ext>
             </a:extLst>
           </p:cNvPr>
@@ -8364,7 +8100,7 @@
           <p:cNvPr id="19" name="p14-r2-1">
             <a:extLst xmlns:a="http://schemas.openxmlformats.org/drawingml/2006/main">
               <a:ext uri="{FF2B5EF4-FFF2-40B4-BE49-F238E27FC236}">
-                <a16:creationId xmlns:a16="http://schemas.microsoft.com/office/drawing/2014/main" id="{8776F001-CCD4-4F84-B934-6EA0749EBBDE}"/>
+                <a16:creationId xmlns:a16="http://schemas.microsoft.com/office/drawing/2014/main" id="{948B12EA-0291-4299-8F10-BAFF9A20FE16}"/>
               </a:ext>
             </a:extLst>
           </p:cNvPr>
@@ -8425,7 +8161,7 @@
           <p:cNvPr id="20" name="p14-r2-2">
             <a:extLst xmlns:a="http://schemas.openxmlformats.org/drawingml/2006/main">
               <a:ext uri="{FF2B5EF4-FFF2-40B4-BE49-F238E27FC236}">
-                <a16:creationId xmlns:a16="http://schemas.microsoft.com/office/drawing/2014/main" id="{DA0DFEDA-2859-41F9-8D25-A265B6C4460A}"/>
+                <a16:creationId xmlns:a16="http://schemas.microsoft.com/office/drawing/2014/main" id="{A311F91B-B757-4171-89FA-C1E5DD029C61}"/>
               </a:ext>
             </a:extLst>
           </p:cNvPr>
@@ -8486,7 +8222,7 @@
           <p:cNvPr id="21" name="p14-r3-0">
             <a:extLst xmlns:a="http://schemas.openxmlformats.org/drawingml/2006/main">
               <a:ext uri="{FF2B5EF4-FFF2-40B4-BE49-F238E27FC236}">
-                <a16:creationId xmlns:a16="http://schemas.microsoft.com/office/drawing/2014/main" id="{57A9F2A3-9969-4B53-9A9C-8BBFA5BA0F8D}"/>
+                <a16:creationId xmlns:a16="http://schemas.microsoft.com/office/drawing/2014/main" id="{0F22BA5C-25FF-4E5C-A0D7-C0ACAF4EF452}"/>
               </a:ext>
             </a:extLst>
           </p:cNvPr>
@@ -8547,7 +8283,7 @@
           <p:cNvPr id="22" name="p14-r3-1">
             <a:extLst xmlns:a="http://schemas.openxmlformats.org/drawingml/2006/main">
               <a:ext uri="{FF2B5EF4-FFF2-40B4-BE49-F238E27FC236}">
-                <a16:creationId xmlns:a16="http://schemas.microsoft.com/office/drawing/2014/main" id="{BF11AD4F-8D7D-4014-AF12-6BBC927A7F70}"/>
+                <a16:creationId xmlns:a16="http://schemas.microsoft.com/office/drawing/2014/main" id="{1AECAD08-D8F2-4875-9448-A806A8826F4F}"/>
               </a:ext>
             </a:extLst>
           </p:cNvPr>
@@ -8608,7 +8344,7 @@
           <p:cNvPr id="23" name="p14-r3-2">
             <a:extLst xmlns:a="http://schemas.openxmlformats.org/drawingml/2006/main">
               <a:ext uri="{FF2B5EF4-FFF2-40B4-BE49-F238E27FC236}">
-                <a16:creationId xmlns:a16="http://schemas.microsoft.com/office/drawing/2014/main" id="{A5293035-6B5E-4880-AD22-01F498387257}"/>
+                <a16:creationId xmlns:a16="http://schemas.microsoft.com/office/drawing/2014/main" id="{51A944E4-E5A1-462C-9947-9A7208069637}"/>
               </a:ext>
             </a:extLst>
           </p:cNvPr>
@@ -8669,7 +8405,7 @@
           <p:cNvPr id="24" name="p14-bottom">
             <a:extLst xmlns:a="http://schemas.openxmlformats.org/drawingml/2006/main">
               <a:ext uri="{FF2B5EF4-FFF2-40B4-BE49-F238E27FC236}">
-                <a16:creationId xmlns:a16="http://schemas.microsoft.com/office/drawing/2014/main" id="{1F339DB6-7FB6-4C77-8F89-4ECCDAAD2AD4}"/>
+                <a16:creationId xmlns:a16="http://schemas.microsoft.com/office/drawing/2014/main" id="{8FD88F84-F958-4D3C-9569-D5558224FAB0}"/>
               </a:ext>
             </a:extLst>
           </p:cNvPr>
@@ -8816,7 +8552,7 @@
           <p:cNvPr id="6" name="p15-entry-title">
             <a:extLst xmlns:a="http://schemas.openxmlformats.org/drawingml/2006/main">
               <a:ext uri="{FF2B5EF4-FFF2-40B4-BE49-F238E27FC236}">
-                <a16:creationId xmlns:a16="http://schemas.microsoft.com/office/drawing/2014/main" id="{5D4D89EB-B64A-41D6-8AF6-7822A556D567}"/>
+                <a16:creationId xmlns:a16="http://schemas.microsoft.com/office/drawing/2014/main" id="{B1328BC9-0474-4167-B382-96D907EF0891}"/>
               </a:ext>
             </a:extLst>
           </p:cNvPr>
@@ -8871,7 +8607,7 @@
           <p:cNvPr id="7" name="p15-h-0">
             <a:extLst xmlns:a="http://schemas.openxmlformats.org/drawingml/2006/main">
               <a:ext uri="{FF2B5EF4-FFF2-40B4-BE49-F238E27FC236}">
-                <a16:creationId xmlns:a16="http://schemas.microsoft.com/office/drawing/2014/main" id="{D40A1B5A-BC6C-43BF-B3C3-411217A2E85B}"/>
+                <a16:creationId xmlns:a16="http://schemas.microsoft.com/office/drawing/2014/main" id="{D0631A7D-6E44-404E-B299-62712B10A40E}"/>
               </a:ext>
             </a:extLst>
           </p:cNvPr>
@@ -8883,7 +8619,7 @@
         <p:spPr>
           <a:xfrm xmlns:a="http://schemas.openxmlformats.org/drawingml/2006/main">
             <a:off x="762000" y="1828800"/>
-            <a:ext cx="2095500" cy="457200"/>
+            <a:ext cx="2476500" cy="457200"/>
           </a:xfrm>
           <a:prstGeom xmlns:a="http://schemas.openxmlformats.org/drawingml/2006/main" prst="rect">
             <a:avLst/>
@@ -8926,19 +8662,19 @@
           <p:cNvPr id="8" name="p15-h-1">
             <a:extLst xmlns:a="http://schemas.openxmlformats.org/drawingml/2006/main">
               <a:ext uri="{FF2B5EF4-FFF2-40B4-BE49-F238E27FC236}">
-                <a16:creationId xmlns:a16="http://schemas.microsoft.com/office/drawing/2014/main" id="{92EE1E25-6E77-49E4-A6E8-783A87096AB7}"/>
-              </a:ext>
-            </a:extLst>
-          </p:cNvPr>
-          <p:cNvSpPr>
-            <a:spLocks xmlns:a="http://schemas.openxmlformats.org/drawingml/2006/main" noGrp="1"/>
-          </p:cNvSpPr>
-          <p:nvPr/>
-        </p:nvSpPr>
-        <p:spPr>
-          <a:xfrm xmlns:a="http://schemas.openxmlformats.org/drawingml/2006/main">
-            <a:off x="2857500" y="1828800"/>
-            <a:ext cx="8572500" cy="457200"/>
+                <a16:creationId xmlns:a16="http://schemas.microsoft.com/office/drawing/2014/main" id="{21C02EB1-7AD8-4A65-814A-68512E54ADF6}"/>
+              </a:ext>
+            </a:extLst>
+          </p:cNvPr>
+          <p:cNvSpPr>
+            <a:spLocks xmlns:a="http://schemas.openxmlformats.org/drawingml/2006/main" noGrp="1"/>
+          </p:cNvSpPr>
+          <p:nvPr/>
+        </p:nvSpPr>
+        <p:spPr>
+          <a:xfrm xmlns:a="http://schemas.openxmlformats.org/drawingml/2006/main">
+            <a:off x="3238500" y="1828800"/>
+            <a:ext cx="8191500" cy="457200"/>
           </a:xfrm>
           <a:prstGeom xmlns:a="http://schemas.openxmlformats.org/drawingml/2006/main" prst="rect">
             <a:avLst/>
@@ -8981,7 +8717,7 @@
           <p:cNvPr id="9" name="p15-r0-0">
             <a:extLst xmlns:a="http://schemas.openxmlformats.org/drawingml/2006/main">
               <a:ext uri="{FF2B5EF4-FFF2-40B4-BE49-F238E27FC236}">
-                <a16:creationId xmlns:a16="http://schemas.microsoft.com/office/drawing/2014/main" id="{B3835ADC-7A07-4087-BBD2-79D77449308F}"/>
+                <a16:creationId xmlns:a16="http://schemas.microsoft.com/office/drawing/2014/main" id="{B26B299C-5D8A-4282-A251-D74E5ABB6296}"/>
               </a:ext>
             </a:extLst>
           </p:cNvPr>
@@ -8993,7 +8729,7 @@
         <p:spPr>
           <a:xfrm xmlns:a="http://schemas.openxmlformats.org/drawingml/2006/main">
             <a:off x="762000" y="2286000"/>
-            <a:ext cx="2095500" cy="628650"/>
+            <a:ext cx="2476500" cy="628650"/>
           </a:xfrm>
           <a:prstGeom xmlns:a="http://schemas.openxmlformats.org/drawingml/2006/main" prst="rect">
             <a:avLst/>
@@ -9042,19 +8778,19 @@
           <p:cNvPr id="10" name="p15-r0-1">
             <a:extLst xmlns:a="http://schemas.openxmlformats.org/drawingml/2006/main">
               <a:ext uri="{FF2B5EF4-FFF2-40B4-BE49-F238E27FC236}">
-                <a16:creationId xmlns:a16="http://schemas.microsoft.com/office/drawing/2014/main" id="{9DE2DA60-77E4-4F28-B723-1822580DE137}"/>
-              </a:ext>
-            </a:extLst>
-          </p:cNvPr>
-          <p:cNvSpPr>
-            <a:spLocks xmlns:a="http://schemas.openxmlformats.org/drawingml/2006/main" noGrp="1"/>
-          </p:cNvSpPr>
-          <p:nvPr/>
-        </p:nvSpPr>
-        <p:spPr>
-          <a:xfrm xmlns:a="http://schemas.openxmlformats.org/drawingml/2006/main">
-            <a:off x="2857500" y="2286000"/>
-            <a:ext cx="8572500" cy="628650"/>
+                <a16:creationId xmlns:a16="http://schemas.microsoft.com/office/drawing/2014/main" id="{B423D789-25C2-44EE-9668-CDEAD72C045C}"/>
+              </a:ext>
+            </a:extLst>
+          </p:cNvPr>
+          <p:cNvSpPr>
+            <a:spLocks xmlns:a="http://schemas.openxmlformats.org/drawingml/2006/main" noGrp="1"/>
+          </p:cNvSpPr>
+          <p:nvPr/>
+        </p:nvSpPr>
+        <p:spPr>
+          <a:xfrm xmlns:a="http://schemas.openxmlformats.org/drawingml/2006/main">
+            <a:off x="3238500" y="2286000"/>
+            <a:ext cx="8191500" cy="628650"/>
           </a:xfrm>
           <a:prstGeom xmlns:a="http://schemas.openxmlformats.org/drawingml/2006/main" prst="rect">
             <a:avLst/>
@@ -9103,7 +8839,7 @@
           <p:cNvPr id="11" name="p15-r1-0">
             <a:extLst xmlns:a="http://schemas.openxmlformats.org/drawingml/2006/main">
               <a:ext uri="{FF2B5EF4-FFF2-40B4-BE49-F238E27FC236}">
-                <a16:creationId xmlns:a16="http://schemas.microsoft.com/office/drawing/2014/main" id="{6DC20F11-20BC-4B9C-B442-C3A4DBF13E0D}"/>
+                <a16:creationId xmlns:a16="http://schemas.microsoft.com/office/drawing/2014/main" id="{FE445179-AE23-4276-8689-76D23E57AAAB}"/>
               </a:ext>
             </a:extLst>
           </p:cNvPr>
@@ -9115,7 +8851,7 @@
         <p:spPr>
           <a:xfrm xmlns:a="http://schemas.openxmlformats.org/drawingml/2006/main">
             <a:off x="762000" y="2914650"/>
-            <a:ext cx="2095500" cy="628650"/>
+            <a:ext cx="2476500" cy="628650"/>
           </a:xfrm>
           <a:prstGeom xmlns:a="http://schemas.openxmlformats.org/drawingml/2006/main" prst="rect">
             <a:avLst/>
@@ -9154,7 +8890,7 @@
                 <a:ea typeface="Microsoft YaHei"/>
                 <a:cs typeface="Microsoft YaHei"/>
               </a:rPr>
-              <a:t>可用主张</a:t>
+              <a:t>对应问题/拟用主张</a:t>
             </a:r>
           </a:p>
         </p:txBody>
@@ -9164,19 +8900,19 @@
           <p:cNvPr id="12" name="p15-r1-1">
             <a:extLst xmlns:a="http://schemas.openxmlformats.org/drawingml/2006/main">
               <a:ext uri="{FF2B5EF4-FFF2-40B4-BE49-F238E27FC236}">
-                <a16:creationId xmlns:a16="http://schemas.microsoft.com/office/drawing/2014/main" id="{B00A11C6-BBFB-4BF4-B751-2808CC7B4448}"/>
-              </a:ext>
-            </a:extLst>
-          </p:cNvPr>
-          <p:cNvSpPr>
-            <a:spLocks xmlns:a="http://schemas.openxmlformats.org/drawingml/2006/main" noGrp="1"/>
-          </p:cNvSpPr>
-          <p:nvPr/>
-        </p:nvSpPr>
-        <p:spPr>
-          <a:xfrm xmlns:a="http://schemas.openxmlformats.org/drawingml/2006/main">
-            <a:off x="2857500" y="2914650"/>
-            <a:ext cx="8572500" cy="628650"/>
+                <a16:creationId xmlns:a16="http://schemas.microsoft.com/office/drawing/2014/main" id="{B2AD23E3-0FF4-422A-8620-7CB103023A52}"/>
+              </a:ext>
+            </a:extLst>
+          </p:cNvPr>
+          <p:cNvSpPr>
+            <a:spLocks xmlns:a="http://schemas.openxmlformats.org/drawingml/2006/main" noGrp="1"/>
+          </p:cNvSpPr>
+          <p:nvPr/>
+        </p:nvSpPr>
+        <p:spPr>
+          <a:xfrm xmlns:a="http://schemas.openxmlformats.org/drawingml/2006/main">
+            <a:off x="3238500" y="2914650"/>
+            <a:ext cx="8191500" cy="628650"/>
           </a:xfrm>
           <a:prstGeom xmlns:a="http://schemas.openxmlformats.org/drawingml/2006/main" prst="rect">
             <a:avLst/>
@@ -9215,7 +8951,7 @@
                 <a:ea typeface="Microsoft YaHei"/>
                 <a:cs typeface="Microsoft YaHei"/>
               </a:rPr>
-              <a:t>提出 three-pass approach，并给出三遍阅读目标与动作</a:t>
+              <a:t>是否降低遗漏率？／用于定义 three-pass approach</a:t>
             </a:r>
           </a:p>
         </p:txBody>
@@ -9225,7 +8961,7 @@
           <p:cNvPr id="13" name="p15-r2-0">
             <a:extLst xmlns:a="http://schemas.openxmlformats.org/drawingml/2006/main">
               <a:ext uri="{FF2B5EF4-FFF2-40B4-BE49-F238E27FC236}">
-                <a16:creationId xmlns:a16="http://schemas.microsoft.com/office/drawing/2014/main" id="{67C0316E-F149-4C8C-AAC6-64A10DBEA28E}"/>
+                <a16:creationId xmlns:a16="http://schemas.microsoft.com/office/drawing/2014/main" id="{B71841EA-989A-4D0E-B41F-DFBC7CE4BBF4}"/>
               </a:ext>
             </a:extLst>
           </p:cNvPr>
@@ -9237,7 +8973,7 @@
         <p:spPr>
           <a:xfrm xmlns:a="http://schemas.openxmlformats.org/drawingml/2006/main">
             <a:off x="762000" y="3543300"/>
-            <a:ext cx="2095500" cy="628650"/>
+            <a:ext cx="2476500" cy="628650"/>
           </a:xfrm>
           <a:prstGeom xmlns:a="http://schemas.openxmlformats.org/drawingml/2006/main" prst="rect">
             <a:avLst/>
@@ -9276,7 +9012,7 @@
                 <a:ea typeface="Microsoft YaHei"/>
                 <a:cs typeface="Microsoft YaHei"/>
               </a:rPr>
-              <a:t>证据角色</a:t>
+              <a:t>预期证据角色</a:t>
             </a:r>
           </a:p>
         </p:txBody>
@@ -9286,19 +9022,19 @@
           <p:cNvPr id="14" name="p15-r2-1">
             <a:extLst xmlns:a="http://schemas.openxmlformats.org/drawingml/2006/main">
               <a:ext uri="{FF2B5EF4-FFF2-40B4-BE49-F238E27FC236}">
-                <a16:creationId xmlns:a16="http://schemas.microsoft.com/office/drawing/2014/main" id="{F4DE113B-BBFF-4657-BAE4-D39D2F3EECB7}"/>
-              </a:ext>
-            </a:extLst>
-          </p:cNvPr>
-          <p:cNvSpPr>
-            <a:spLocks xmlns:a="http://schemas.openxmlformats.org/drawingml/2006/main" noGrp="1"/>
-          </p:cNvSpPr>
-          <p:nvPr/>
-        </p:nvSpPr>
-        <p:spPr>
-          <a:xfrm xmlns:a="http://schemas.openxmlformats.org/drawingml/2006/main">
-            <a:off x="2857500" y="3543300"/>
-            <a:ext cx="8572500" cy="628650"/>
+                <a16:creationId xmlns:a16="http://schemas.microsoft.com/office/drawing/2014/main" id="{69547407-DE86-4111-87CE-40E6A5F3DF94}"/>
+              </a:ext>
+            </a:extLst>
+          </p:cNvPr>
+          <p:cNvSpPr>
+            <a:spLocks xmlns:a="http://schemas.openxmlformats.org/drawingml/2006/main" noGrp="1"/>
+          </p:cNvSpPr>
+          <p:nvPr/>
+        </p:nvSpPr>
+        <p:spPr>
+          <a:xfrm xmlns:a="http://schemas.openxmlformats.org/drawingml/2006/main">
+            <a:off x="3238500" y="3543300"/>
+            <a:ext cx="8191500" cy="628650"/>
           </a:xfrm>
           <a:prstGeom xmlns:a="http://schemas.openxmlformats.org/drawingml/2006/main" prst="rect">
             <a:avLst/>
@@ -9337,7 +9073,7 @@
                 <a:ea typeface="Microsoft YaHei"/>
                 <a:cs typeface="Microsoft YaHei"/>
               </a:rPr>
-              <a:t>方法依据 / 实践框架，不是效果量主证据</a:t>
+              <a:t>探索线索；不是效果主证据</a:t>
             </a:r>
           </a:p>
         </p:txBody>
@@ -9347,7 +9083,7 @@
           <p:cNvPr id="15" name="p15-r3-0">
             <a:extLst xmlns:a="http://schemas.openxmlformats.org/drawingml/2006/main">
               <a:ext uri="{FF2B5EF4-FFF2-40B4-BE49-F238E27FC236}">
-                <a16:creationId xmlns:a16="http://schemas.microsoft.com/office/drawing/2014/main" id="{ABCA06E2-5192-4F02-A3A6-A53D53B1A8DB}"/>
+                <a16:creationId xmlns:a16="http://schemas.microsoft.com/office/drawing/2014/main" id="{2D81098A-3353-42E8-8A11-484A3F05983C}"/>
               </a:ext>
             </a:extLst>
           </p:cNvPr>
@@ -9359,7 +9095,7 @@
         <p:spPr>
           <a:xfrm xmlns:a="http://schemas.openxmlformats.org/drawingml/2006/main">
             <a:off x="762000" y="4171950"/>
-            <a:ext cx="2095500" cy="628650"/>
+            <a:ext cx="2476500" cy="628650"/>
           </a:xfrm>
           <a:prstGeom xmlns:a="http://schemas.openxmlformats.org/drawingml/2006/main" prst="rect">
             <a:avLst/>
@@ -9408,19 +9144,19 @@
           <p:cNvPr id="16" name="p15-r3-1">
             <a:extLst xmlns:a="http://schemas.openxmlformats.org/drawingml/2006/main">
               <a:ext uri="{FF2B5EF4-FFF2-40B4-BE49-F238E27FC236}">
-                <a16:creationId xmlns:a16="http://schemas.microsoft.com/office/drawing/2014/main" id="{CF9228D0-0906-4945-A4CD-DF23206D5423}"/>
-              </a:ext>
-            </a:extLst>
-          </p:cNvPr>
-          <p:cNvSpPr>
-            <a:spLocks xmlns:a="http://schemas.openxmlformats.org/drawingml/2006/main" noGrp="1"/>
-          </p:cNvSpPr>
-          <p:nvPr/>
-        </p:nvSpPr>
-        <p:spPr>
-          <a:xfrm xmlns:a="http://schemas.openxmlformats.org/drawingml/2006/main">
-            <a:off x="2857500" y="4171950"/>
-            <a:ext cx="8572500" cy="628650"/>
+                <a16:creationId xmlns:a16="http://schemas.microsoft.com/office/drawing/2014/main" id="{11C02242-AF61-4A92-BC8D-A12EC759B248}"/>
+              </a:ext>
+            </a:extLst>
+          </p:cNvPr>
+          <p:cNvSpPr>
+            <a:spLocks xmlns:a="http://schemas.openxmlformats.org/drawingml/2006/main" noGrp="1"/>
+          </p:cNvSpPr>
+          <p:nvPr/>
+        </p:nvSpPr>
+        <p:spPr>
+          <a:xfrm xmlns:a="http://schemas.openxmlformats.org/drawingml/2006/main">
+            <a:off x="3238500" y="4171950"/>
+            <a:ext cx="8191500" cy="628650"/>
           </a:xfrm>
           <a:prstGeom xmlns:a="http://schemas.openxmlformats.org/drawingml/2006/main" prst="rect">
             <a:avLst/>
@@ -9469,7 +9205,7 @@
           <p:cNvPr id="17" name="p15-path">
             <a:extLst xmlns:a="http://schemas.openxmlformats.org/drawingml/2006/main">
               <a:ext uri="{FF2B5EF4-FFF2-40B4-BE49-F238E27FC236}">
-                <a16:creationId xmlns:a16="http://schemas.microsoft.com/office/drawing/2014/main" id="{A7E3E1CA-0EEB-4DC0-9E17-EBD241CABAB1}"/>
+                <a16:creationId xmlns:a16="http://schemas.microsoft.com/office/drawing/2014/main" id="{2F44F946-33A9-4870-8E7A-9D7203538D07}"/>
               </a:ext>
             </a:extLst>
           </p:cNvPr>
@@ -9514,7 +9250,7 @@
                 <a:ea typeface="Microsoft YaHei"/>
                 <a:cs typeface="Microsoft YaHei"/>
               </a:rPr>
-              <a:t>caveat 条目可进入候选表或主格，但限定必须同行保留，且不得单独支撑 stable</a:t>
+              <a:t>角色与状态独立：已完成入口核验，但相对于当前效果问题仍是探索线索</a:t>
             </a:r>
           </a:p>
         </p:txBody>
@@ -9577,7 +9313,7 @@
                 <a:ea typeface="Microsoft YaHei"/>
                 <a:cs typeface="Microsoft YaHei"/>
               </a:rPr>
-              <a:t>虚构失败案例：不得引用</a:t>
+              <a:t>真实失败演示：教师自己的幻觉引用审计</a:t>
             </a:r>
             <a:endParaRPr/>
           </a:p>
@@ -9616,19 +9352,19 @@
           <p:cNvPr id="6" name="p16-boundary">
             <a:extLst xmlns:a="http://schemas.openxmlformats.org/drawingml/2006/main">
               <a:ext uri="{FF2B5EF4-FFF2-40B4-BE49-F238E27FC236}">
-                <a16:creationId xmlns:a16="http://schemas.microsoft.com/office/drawing/2014/main" id="{67955511-7642-4003-8855-14FC90F590CA}"/>
-              </a:ext>
-            </a:extLst>
-          </p:cNvPr>
-          <p:cNvSpPr>
-            <a:spLocks xmlns:a="http://schemas.openxmlformats.org/drawingml/2006/main" noGrp="1"/>
-          </p:cNvSpPr>
-          <p:nvPr/>
-        </p:nvSpPr>
-        <p:spPr>
-          <a:xfrm xmlns:a="http://schemas.openxmlformats.org/drawingml/2006/main">
-            <a:off x="914400" y="895350"/>
-            <a:ext cx="10363200" cy="457200"/>
+                <a16:creationId xmlns:a16="http://schemas.microsoft.com/office/drawing/2014/main" id="{0220CC15-94AC-4394-8BEA-97F274A2BB9E}"/>
+              </a:ext>
+            </a:extLst>
+          </p:cNvPr>
+          <p:cNvSpPr>
+            <a:spLocks xmlns:a="http://schemas.openxmlformats.org/drawingml/2006/main" noGrp="1"/>
+          </p:cNvSpPr>
+          <p:nvPr/>
+        </p:nvSpPr>
+        <p:spPr>
+          <a:xfrm xmlns:a="http://schemas.openxmlformats.org/drawingml/2006/main">
+            <a:off x="723900" y="857250"/>
+            <a:ext cx="10744200" cy="419100"/>
           </a:xfrm>
           <a:prstGeom xmlns:a="http://schemas.openxmlformats.org/drawingml/2006/main" prst="rect">
             <a:avLst/>
@@ -9646,14 +9382,14 @@
           <a:lstStyle xmlns:a="http://schemas.openxmlformats.org/drawingml/2006/main"/>
           <a:p xmlns:a="http://schemas.openxmlformats.org/drawingml/2006/main">
             <a:pPr algn="ctr">
-              <a:defRPr sz="1575" b="1">
+              <a:defRPr sz="1350" b="1">
                 <a:solidFill>
                   <a:srgbClr val="FFFFFF"/>
                 </a:solidFill>
               </a:defRPr>
             </a:pPr>
             <a:r>
-              <a:rPr sz="1575" b="1">
+              <a:rPr sz="1350" b="1">
                 <a:solidFill>
                   <a:srgbClr val="FFFFFF"/>
                 </a:solidFill>
@@ -9661,29 +9397,1199 @@
                 <a:ea typeface="Microsoft YaHei"/>
                 <a:cs typeface="Microsoft YaHei"/>
               </a:rPr>
-              <a:t>以下 5 条均为课程构造的占位引用，不对应真实论文、DOI 或实验结果</a:t>
-            </a:r>
-          </a:p>
-        </p:txBody>
-      </p:sp>
-      <p:sp>
-        <p:nvSpPr>
-          <p:cNvPr id="7" name="p16-bad">
-            <a:extLst xmlns:a="http://schemas.openxmlformats.org/drawingml/2006/main">
-              <a:ext uri="{FF2B5EF4-FFF2-40B4-BE49-F238E27FC236}">
-                <a16:creationId xmlns:a16="http://schemas.microsoft.com/office/drawing/2014/main" id="{E13B448F-F234-446A-8BAF-955AF6834D83}"/>
-              </a:ext>
-            </a:extLst>
-          </p:cNvPr>
-          <p:cNvSpPr>
-            <a:spLocks xmlns:a="http://schemas.openxmlformats.org/drawingml/2006/main" noGrp="1"/>
-          </p:cNvSpPr>
-          <p:nvPr/>
-        </p:nvSpPr>
-        <p:spPr>
-          <a:xfrm xmlns:a="http://schemas.openxmlformats.org/drawingml/2006/main">
-            <a:off x="762000" y="1504950"/>
-            <a:ext cx="3714750" cy="819150"/>
+              <a:t>案例边界：教师真实检索失败 trace（公开 arXiv 元数据，mi-search-trace-demo.md §6）；学生练习仍用讲义 §四·5 虚构案例</a:t>
+            </a:r>
+          </a:p>
+        </p:txBody>
+      </p:sp>
+      <p:sp>
+        <p:nvSpPr>
+          <p:cNvPr id="7" name="p16-intro">
+            <a:extLst xmlns:a="http://schemas.openxmlformats.org/drawingml/2006/main">
+              <a:ext uri="{FF2B5EF4-FFF2-40B4-BE49-F238E27FC236}">
+                <a16:creationId xmlns:a16="http://schemas.microsoft.com/office/drawing/2014/main" id="{5421C0E1-1778-4AB9-A793-C2B7EB394645}"/>
+              </a:ext>
+            </a:extLst>
+          </p:cNvPr>
+          <p:cNvSpPr>
+            <a:spLocks xmlns:a="http://schemas.openxmlformats.org/drawingml/2006/main" noGrp="1"/>
+          </p:cNvSpPr>
+          <p:nvPr/>
+        </p:nvSpPr>
+        <p:spPr>
+          <a:xfrm xmlns:a="http://schemas.openxmlformats.org/drawingml/2006/main">
+            <a:off x="723900" y="1352550"/>
+            <a:ext cx="10744200" cy="381000"/>
+          </a:xfrm>
+          <a:prstGeom xmlns:a="http://schemas.openxmlformats.org/drawingml/2006/main" prst="rect">
+            <a:avLst/>
+          </a:prstGeom>
+          <a:noFill xmlns:a="http://schemas.openxmlformats.org/drawingml/2006/main"/>
+          <a:ln xmlns:a="http://schemas.openxmlformats.org/drawingml/2006/main" w="0">
+            <a:noFill/>
+            <a:prstDash val="solid"/>
+          </a:ln>
+        </p:spPr>
+        <p:txBody>
+          <a:bodyPr xmlns:a="http://schemas.openxmlformats.org/drawingml/2006/main" lIns="76200" tIns="38100" rIns="76200" bIns="38100" anchor="ctr"/>
+          <a:lstStyle xmlns:a="http://schemas.openxmlformats.org/drawingml/2006/main"/>
+          <a:p xmlns:a="http://schemas.openxmlformats.org/drawingml/2006/main">
+            <a:pPr algn="ctr">
+              <a:defRPr sz="1500" b="1">
+                <a:solidFill>
+                  <a:srgbClr val="18354E"/>
+                </a:solidFill>
+              </a:defRPr>
+            </a:pPr>
+            <a:r>
+              <a:rPr sz="1500" b="1">
+                <a:solidFill>
+                  <a:srgbClr val="18354E"/>
+                </a:solidFill>
+                <a:latin typeface="Microsoft YaHei"/>
+                <a:ea typeface="Microsoft YaHei"/>
+                <a:cs typeface="Microsoft YaHei"/>
+              </a:rPr>
+              <a:t>教师 AI agent 凭记忆给出 11 个 MI 锚点 ID：抽查即错 6 个，其中 4 条彻底张冠李戴</a:t>
+            </a:r>
+          </a:p>
+        </p:txBody>
+      </p:sp>
+      <p:sp>
+        <p:nvSpPr>
+          <p:cNvPr id="8" name="p16-h-0">
+            <a:extLst xmlns:a="http://schemas.openxmlformats.org/drawingml/2006/main">
+              <a:ext uri="{FF2B5EF4-FFF2-40B4-BE49-F238E27FC236}">
+                <a16:creationId xmlns:a16="http://schemas.microsoft.com/office/drawing/2014/main" id="{B7B35477-0E65-446B-B134-40DB15D1292F}"/>
+              </a:ext>
+            </a:extLst>
+          </p:cNvPr>
+          <p:cNvSpPr>
+            <a:spLocks xmlns:a="http://schemas.openxmlformats.org/drawingml/2006/main" noGrp="1"/>
+          </p:cNvSpPr>
+          <p:nvPr/>
+        </p:nvSpPr>
+        <p:spPr>
+          <a:xfrm xmlns:a="http://schemas.openxmlformats.org/drawingml/2006/main">
+            <a:off x="762000" y="1790700"/>
+            <a:ext cx="4572000" cy="400050"/>
+          </a:xfrm>
+          <a:prstGeom xmlns:a="http://schemas.openxmlformats.org/drawingml/2006/main" prst="rect">
+            <a:avLst/>
+          </a:prstGeom>
+          <a:solidFill xmlns:a="http://schemas.openxmlformats.org/drawingml/2006/main">
+            <a:srgbClr val="18354E"/>
+          </a:solidFill>
+          <a:ln xmlns:a="http://schemas.openxmlformats.org/drawingml/2006/main" w="0">
+            <a:noFill/>
+            <a:prstDash val="solid"/>
+          </a:ln>
+        </p:spPr>
+        <p:txBody>
+          <a:bodyPr xmlns:a="http://schemas.openxmlformats.org/drawingml/2006/main" lIns="76200" tIns="38100" rIns="76200" bIns="38100" anchor="ctr"/>
+          <a:lstStyle xmlns:a="http://schemas.openxmlformats.org/drawingml/2006/main"/>
+          <a:p xmlns:a="http://schemas.openxmlformats.org/drawingml/2006/main">
+            <a:pPr algn="ctr">
+              <a:defRPr sz="1425" b="1">
+                <a:solidFill>
+                  <a:srgbClr val="FFFFFF"/>
+                </a:solidFill>
+              </a:defRPr>
+            </a:pPr>
+            <a:r>
+              <a:rPr sz="1425" b="1">
+                <a:solidFill>
+                  <a:srgbClr val="FFFFFF"/>
+                </a:solidFill>
+                <a:latin typeface="Microsoft YaHei"/>
+                <a:ea typeface="Microsoft YaHei"/>
+                <a:cs typeface="Microsoft YaHei"/>
+              </a:rPr>
+              <a:t>记忆条目</a:t>
+            </a:r>
+          </a:p>
+        </p:txBody>
+      </p:sp>
+      <p:sp>
+        <p:nvSpPr>
+          <p:cNvPr id="9" name="p16-h-1">
+            <a:extLst xmlns:a="http://schemas.openxmlformats.org/drawingml/2006/main">
+              <a:ext uri="{FF2B5EF4-FFF2-40B4-BE49-F238E27FC236}">
+                <a16:creationId xmlns:a16="http://schemas.microsoft.com/office/drawing/2014/main" id="{AC4C51ED-C4B4-4218-9219-2BBABE9374DE}"/>
+              </a:ext>
+            </a:extLst>
+          </p:cNvPr>
+          <p:cNvSpPr>
+            <a:spLocks xmlns:a="http://schemas.openxmlformats.org/drawingml/2006/main" noGrp="1"/>
+          </p:cNvSpPr>
+          <p:nvPr/>
+        </p:nvSpPr>
+        <p:spPr>
+          <a:xfrm xmlns:a="http://schemas.openxmlformats.org/drawingml/2006/main">
+            <a:off x="5334000" y="1790700"/>
+            <a:ext cx="3810000" cy="400050"/>
+          </a:xfrm>
+          <a:prstGeom xmlns:a="http://schemas.openxmlformats.org/drawingml/2006/main" prst="rect">
+            <a:avLst/>
+          </a:prstGeom>
+          <a:solidFill xmlns:a="http://schemas.openxmlformats.org/drawingml/2006/main">
+            <a:srgbClr val="18354E"/>
+          </a:solidFill>
+          <a:ln xmlns:a="http://schemas.openxmlformats.org/drawingml/2006/main" w="0">
+            <a:noFill/>
+            <a:prstDash val="solid"/>
+          </a:ln>
+        </p:spPr>
+        <p:txBody>
+          <a:bodyPr xmlns:a="http://schemas.openxmlformats.org/drawingml/2006/main" lIns="76200" tIns="38100" rIns="76200" bIns="38100" anchor="ctr"/>
+          <a:lstStyle xmlns:a="http://schemas.openxmlformats.org/drawingml/2006/main"/>
+          <a:p xmlns:a="http://schemas.openxmlformats.org/drawingml/2006/main">
+            <a:pPr algn="ctr">
+              <a:defRPr sz="1425" b="1">
+                <a:solidFill>
+                  <a:srgbClr val="FFFFFF"/>
+                </a:solidFill>
+              </a:defRPr>
+            </a:pPr>
+            <a:r>
+              <a:rPr sz="1425" b="1">
+                <a:solidFill>
+                  <a:srgbClr val="FFFFFF"/>
+                </a:solidFill>
+                <a:latin typeface="Microsoft YaHei"/>
+                <a:ea typeface="Microsoft YaHei"/>
+                <a:cs typeface="Microsoft YaHei"/>
+              </a:rPr>
+              <a:t>实为</a:t>
+            </a:r>
+          </a:p>
+        </p:txBody>
+      </p:sp>
+      <p:sp>
+        <p:nvSpPr>
+          <p:cNvPr id="10" name="p16-h-2">
+            <a:extLst xmlns:a="http://schemas.openxmlformats.org/drawingml/2006/main">
+              <a:ext uri="{FF2B5EF4-FFF2-40B4-BE49-F238E27FC236}">
+                <a16:creationId xmlns:a16="http://schemas.microsoft.com/office/drawing/2014/main" id="{E24A347B-85F7-4E09-A6EB-61A4EF694A56}"/>
+              </a:ext>
+            </a:extLst>
+          </p:cNvPr>
+          <p:cNvSpPr>
+            <a:spLocks xmlns:a="http://schemas.openxmlformats.org/drawingml/2006/main" noGrp="1"/>
+          </p:cNvSpPr>
+          <p:nvPr/>
+        </p:nvSpPr>
+        <p:spPr>
+          <a:xfrm xmlns:a="http://schemas.openxmlformats.org/drawingml/2006/main">
+            <a:off x="9144000" y="1790700"/>
+            <a:ext cx="2286000" cy="400050"/>
+          </a:xfrm>
+          <a:prstGeom xmlns:a="http://schemas.openxmlformats.org/drawingml/2006/main" prst="rect">
+            <a:avLst/>
+          </a:prstGeom>
+          <a:solidFill xmlns:a="http://schemas.openxmlformats.org/drawingml/2006/main">
+            <a:srgbClr val="C8161E"/>
+          </a:solidFill>
+          <a:ln xmlns:a="http://schemas.openxmlformats.org/drawingml/2006/main" w="0">
+            <a:noFill/>
+            <a:prstDash val="solid"/>
+          </a:ln>
+        </p:spPr>
+        <p:txBody>
+          <a:bodyPr xmlns:a="http://schemas.openxmlformats.org/drawingml/2006/main" lIns="76200" tIns="38100" rIns="76200" bIns="38100" anchor="ctr"/>
+          <a:lstStyle xmlns:a="http://schemas.openxmlformats.org/drawingml/2006/main"/>
+          <a:p xmlns:a="http://schemas.openxmlformats.org/drawingml/2006/main">
+            <a:pPr algn="ctr">
+              <a:defRPr sz="1425" b="1">
+                <a:solidFill>
+                  <a:srgbClr val="FFFFFF"/>
+                </a:solidFill>
+              </a:defRPr>
+            </a:pPr>
+            <a:r>
+              <a:rPr sz="1425" b="1">
+                <a:solidFill>
+                  <a:srgbClr val="FFFFFF"/>
+                </a:solidFill>
+                <a:latin typeface="Microsoft YaHei"/>
+                <a:ea typeface="Microsoft YaHei"/>
+                <a:cs typeface="Microsoft YaHei"/>
+              </a:rPr>
+              <a:t>处置</a:t>
+            </a:r>
+          </a:p>
+        </p:txBody>
+      </p:sp>
+      <p:sp>
+        <p:nvSpPr>
+          <p:cNvPr id="11" name="p16-r0-0">
+            <a:extLst xmlns:a="http://schemas.openxmlformats.org/drawingml/2006/main">
+              <a:ext uri="{FF2B5EF4-FFF2-40B4-BE49-F238E27FC236}">
+                <a16:creationId xmlns:a16="http://schemas.microsoft.com/office/drawing/2014/main" id="{B7D9D2BE-863C-4A8C-BE8F-B09CD5C50445}"/>
+              </a:ext>
+            </a:extLst>
+          </p:cNvPr>
+          <p:cNvSpPr>
+            <a:spLocks xmlns:a="http://schemas.openxmlformats.org/drawingml/2006/main" noGrp="1"/>
+          </p:cNvSpPr>
+          <p:nvPr/>
+        </p:nvSpPr>
+        <p:spPr>
+          <a:xfrm xmlns:a="http://schemas.openxmlformats.org/drawingml/2006/main">
+            <a:off x="762000" y="2190750"/>
+            <a:ext cx="4572000" cy="457200"/>
+          </a:xfrm>
+          <a:prstGeom xmlns:a="http://schemas.openxmlformats.org/drawingml/2006/main" prst="rect">
+            <a:avLst/>
+          </a:prstGeom>
+          <a:solidFill xmlns:a="http://schemas.openxmlformats.org/drawingml/2006/main">
+            <a:srgbClr val="F3F6F7"/>
+          </a:solidFill>
+          <a:ln xmlns:a="http://schemas.openxmlformats.org/drawingml/2006/main" w="9525">
+            <a:solidFill>
+              <a:srgbClr val="D6DDE2"/>
+            </a:solidFill>
+            <a:prstDash val="solid"/>
+          </a:ln>
+        </p:spPr>
+        <p:txBody>
+          <a:bodyPr xmlns:a="http://schemas.openxmlformats.org/drawingml/2006/main" lIns="76200" tIns="38100" rIns="76200" bIns="38100" anchor="ctr"/>
+          <a:lstStyle xmlns:a="http://schemas.openxmlformats.org/drawingml/2006/main"/>
+          <a:p xmlns:a="http://schemas.openxmlformats.org/drawingml/2006/main">
+            <a:pPr algn="ctr">
+              <a:lnSpc>
+                <a:spcPct val="105000"/>
+              </a:lnSpc>
+              <a:buNone/>
+              <a:defRPr sz="1350" b="1">
+                <a:solidFill>
+                  <a:srgbClr val="263746"/>
+                </a:solidFill>
+              </a:defRPr>
+            </a:pPr>
+            <a:r>
+              <a:rPr sz="1350" b="1">
+                <a:solidFill>
+                  <a:srgbClr val="263746"/>
+                </a:solidFill>
+                <a:latin typeface="Microsoft YaHei"/>
+                <a:ea typeface="Microsoft YaHei"/>
+                <a:cs typeface="Microsoft YaHei"/>
+              </a:rPr>
+              <a:t>2308.10939＝Attribution Patching</a:t>
+            </a:r>
+          </a:p>
+        </p:txBody>
+      </p:sp>
+      <p:sp>
+        <p:nvSpPr>
+          <p:cNvPr id="12" name="p16-r0-1">
+            <a:extLst xmlns:a="http://schemas.openxmlformats.org/drawingml/2006/main">
+              <a:ext uri="{FF2B5EF4-FFF2-40B4-BE49-F238E27FC236}">
+                <a16:creationId xmlns:a16="http://schemas.microsoft.com/office/drawing/2014/main" id="{4B4D2A27-828B-4828-9C85-386FF9E1A5A6}"/>
+              </a:ext>
+            </a:extLst>
+          </p:cNvPr>
+          <p:cNvSpPr>
+            <a:spLocks xmlns:a="http://schemas.openxmlformats.org/drawingml/2006/main" noGrp="1"/>
+          </p:cNvSpPr>
+          <p:nvPr/>
+        </p:nvSpPr>
+        <p:spPr>
+          <a:xfrm xmlns:a="http://schemas.openxmlformats.org/drawingml/2006/main">
+            <a:off x="5334000" y="2190750"/>
+            <a:ext cx="3810000" cy="457200"/>
+          </a:xfrm>
+          <a:prstGeom xmlns:a="http://schemas.openxmlformats.org/drawingml/2006/main" prst="rect">
+            <a:avLst/>
+          </a:prstGeom>
+          <a:solidFill xmlns:a="http://schemas.openxmlformats.org/drawingml/2006/main">
+            <a:srgbClr val="F3F6F7"/>
+          </a:solidFill>
+          <a:ln xmlns:a="http://schemas.openxmlformats.org/drawingml/2006/main" w="9525">
+            <a:solidFill>
+              <a:srgbClr val="D6DDE2"/>
+            </a:solidFill>
+            <a:prstDash val="solid"/>
+          </a:ln>
+        </p:spPr>
+        <p:txBody>
+          <a:bodyPr xmlns:a="http://schemas.openxmlformats.org/drawingml/2006/main" lIns="76200" tIns="38100" rIns="76200" bIns="38100" anchor="ctr"/>
+          <a:lstStyle xmlns:a="http://schemas.openxmlformats.org/drawingml/2006/main"/>
+          <a:p xmlns:a="http://schemas.openxmlformats.org/drawingml/2006/main">
+            <a:pPr algn="ctr">
+              <a:lnSpc>
+                <a:spcPct val="105000"/>
+              </a:lnSpc>
+              <a:buNone/>
+              <a:defRPr sz="1350" b="0">
+                <a:solidFill>
+                  <a:srgbClr val="263746"/>
+                </a:solidFill>
+              </a:defRPr>
+            </a:pPr>
+            <a:r>
+              <a:rPr sz="1350" b="0">
+                <a:solidFill>
+                  <a:srgbClr val="263746"/>
+                </a:solidFill>
+                <a:latin typeface="Microsoft YaHei"/>
+                <a:ea typeface="Microsoft YaHei"/>
+                <a:cs typeface="Microsoft YaHei"/>
+              </a:rPr>
+              <a:t>凝聚态物理论文</a:t>
+            </a:r>
+          </a:p>
+        </p:txBody>
+      </p:sp>
+      <p:sp>
+        <p:nvSpPr>
+          <p:cNvPr id="13" name="p16-r0-2">
+            <a:extLst xmlns:a="http://schemas.openxmlformats.org/drawingml/2006/main">
+              <a:ext uri="{FF2B5EF4-FFF2-40B4-BE49-F238E27FC236}">
+                <a16:creationId xmlns:a16="http://schemas.microsoft.com/office/drawing/2014/main" id="{7C656A1E-AAD2-471D-A2EE-A82E70B2CFC6}"/>
+              </a:ext>
+            </a:extLst>
+          </p:cNvPr>
+          <p:cNvSpPr>
+            <a:spLocks xmlns:a="http://schemas.openxmlformats.org/drawingml/2006/main" noGrp="1"/>
+          </p:cNvSpPr>
+          <p:nvPr/>
+        </p:nvSpPr>
+        <p:spPr>
+          <a:xfrm xmlns:a="http://schemas.openxmlformats.org/drawingml/2006/main">
+            <a:off x="9144000" y="2190750"/>
+            <a:ext cx="2286000" cy="457200"/>
+          </a:xfrm>
+          <a:prstGeom xmlns:a="http://schemas.openxmlformats.org/drawingml/2006/main" prst="rect">
+            <a:avLst/>
+          </a:prstGeom>
+          <a:solidFill xmlns:a="http://schemas.openxmlformats.org/drawingml/2006/main">
+            <a:srgbClr val="F3F6F7"/>
+          </a:solidFill>
+          <a:ln xmlns:a="http://schemas.openxmlformats.org/drawingml/2006/main" w="9525">
+            <a:solidFill>
+              <a:srgbClr val="D6DDE2"/>
+            </a:solidFill>
+            <a:prstDash val="solid"/>
+          </a:ln>
+        </p:spPr>
+        <p:txBody>
+          <a:bodyPr xmlns:a="http://schemas.openxmlformats.org/drawingml/2006/main" lIns="76200" tIns="38100" rIns="76200" bIns="38100" anchor="ctr"/>
+          <a:lstStyle xmlns:a="http://schemas.openxmlformats.org/drawingml/2006/main"/>
+          <a:p xmlns:a="http://schemas.openxmlformats.org/drawingml/2006/main">
+            <a:pPr algn="ctr">
+              <a:lnSpc>
+                <a:spcPct val="105000"/>
+              </a:lnSpc>
+              <a:buNone/>
+              <a:defRPr sz="1350" b="1">
+                <a:solidFill>
+                  <a:srgbClr val="C8161E"/>
+                </a:solidFill>
+              </a:defRPr>
+            </a:pPr>
+            <a:r>
+              <a:rPr sz="1350" b="1">
+                <a:solidFill>
+                  <a:srgbClr val="C8161E"/>
+                </a:solidFill>
+                <a:latin typeface="Arial"/>
+                <a:ea typeface="Arial"/>
+                <a:cs typeface="Arial"/>
+              </a:rPr>
+              <a:t>rejected</a:t>
+            </a:r>
+          </a:p>
+        </p:txBody>
+      </p:sp>
+      <p:sp>
+        <p:nvSpPr>
+          <p:cNvPr id="14" name="p16-r1-0">
+            <a:extLst xmlns:a="http://schemas.openxmlformats.org/drawingml/2006/main">
+              <a:ext uri="{FF2B5EF4-FFF2-40B4-BE49-F238E27FC236}">
+                <a16:creationId xmlns:a16="http://schemas.microsoft.com/office/drawing/2014/main" id="{D517EF15-5118-4605-A510-889777591AF2}"/>
+              </a:ext>
+            </a:extLst>
+          </p:cNvPr>
+          <p:cNvSpPr>
+            <a:spLocks xmlns:a="http://schemas.openxmlformats.org/drawingml/2006/main" noGrp="1"/>
+          </p:cNvSpPr>
+          <p:nvPr/>
+        </p:nvSpPr>
+        <p:spPr>
+          <a:xfrm xmlns:a="http://schemas.openxmlformats.org/drawingml/2006/main">
+            <a:off x="762000" y="2647950"/>
+            <a:ext cx="4572000" cy="457200"/>
+          </a:xfrm>
+          <a:prstGeom xmlns:a="http://schemas.openxmlformats.org/drawingml/2006/main" prst="rect">
+            <a:avLst/>
+          </a:prstGeom>
+          <a:solidFill xmlns:a="http://schemas.openxmlformats.org/drawingml/2006/main">
+            <a:srgbClr val="FFFFFF"/>
+          </a:solidFill>
+          <a:ln xmlns:a="http://schemas.openxmlformats.org/drawingml/2006/main" w="9525">
+            <a:solidFill>
+              <a:srgbClr val="D6DDE2"/>
+            </a:solidFill>
+            <a:prstDash val="solid"/>
+          </a:ln>
+        </p:spPr>
+        <p:txBody>
+          <a:bodyPr xmlns:a="http://schemas.openxmlformats.org/drawingml/2006/main" lIns="76200" tIns="38100" rIns="76200" bIns="38100" anchor="ctr"/>
+          <a:lstStyle xmlns:a="http://schemas.openxmlformats.org/drawingml/2006/main"/>
+          <a:p xmlns:a="http://schemas.openxmlformats.org/drawingml/2006/main">
+            <a:pPr algn="ctr">
+              <a:lnSpc>
+                <a:spcPct val="105000"/>
+              </a:lnSpc>
+              <a:buNone/>
+              <a:defRPr sz="1350" b="1">
+                <a:solidFill>
+                  <a:srgbClr val="263746"/>
+                </a:solidFill>
+              </a:defRPr>
+            </a:pPr>
+            <a:r>
+              <a:rPr sz="1350" b="1">
+                <a:solidFill>
+                  <a:srgbClr val="263746"/>
+                </a:solidFill>
+                <a:latin typeface="Microsoft YaHei"/>
+                <a:ea typeface="Microsoft YaHei"/>
+                <a:cs typeface="Microsoft YaHei"/>
+              </a:rPr>
+              <a:t>2203.13787＝Tuned Lens</a:t>
+            </a:r>
+          </a:p>
+        </p:txBody>
+      </p:sp>
+      <p:sp>
+        <p:nvSpPr>
+          <p:cNvPr id="15" name="p16-r1-1">
+            <a:extLst xmlns:a="http://schemas.openxmlformats.org/drawingml/2006/main">
+              <a:ext uri="{FF2B5EF4-FFF2-40B4-BE49-F238E27FC236}">
+                <a16:creationId xmlns:a16="http://schemas.microsoft.com/office/drawing/2014/main" id="{233CD55C-CA4C-4198-AFD1-4E8007D8D963}"/>
+              </a:ext>
+            </a:extLst>
+          </p:cNvPr>
+          <p:cNvSpPr>
+            <a:spLocks xmlns:a="http://schemas.openxmlformats.org/drawingml/2006/main" noGrp="1"/>
+          </p:cNvSpPr>
+          <p:nvPr/>
+        </p:nvSpPr>
+        <p:spPr>
+          <a:xfrm xmlns:a="http://schemas.openxmlformats.org/drawingml/2006/main">
+            <a:off x="5334000" y="2647950"/>
+            <a:ext cx="3810000" cy="457200"/>
+          </a:xfrm>
+          <a:prstGeom xmlns:a="http://schemas.openxmlformats.org/drawingml/2006/main" prst="rect">
+            <a:avLst/>
+          </a:prstGeom>
+          <a:solidFill xmlns:a="http://schemas.openxmlformats.org/drawingml/2006/main">
+            <a:srgbClr val="FFFFFF"/>
+          </a:solidFill>
+          <a:ln xmlns:a="http://schemas.openxmlformats.org/drawingml/2006/main" w="9525">
+            <a:solidFill>
+              <a:srgbClr val="D6DDE2"/>
+            </a:solidFill>
+            <a:prstDash val="solid"/>
+          </a:ln>
+        </p:spPr>
+        <p:txBody>
+          <a:bodyPr xmlns:a="http://schemas.openxmlformats.org/drawingml/2006/main" lIns="76200" tIns="38100" rIns="76200" bIns="38100" anchor="ctr"/>
+          <a:lstStyle xmlns:a="http://schemas.openxmlformats.org/drawingml/2006/main"/>
+          <a:p xmlns:a="http://schemas.openxmlformats.org/drawingml/2006/main">
+            <a:pPr algn="ctr">
+              <a:lnSpc>
+                <a:spcPct val="105000"/>
+              </a:lnSpc>
+              <a:buNone/>
+              <a:defRPr sz="1350" b="0">
+                <a:solidFill>
+                  <a:srgbClr val="263746"/>
+                </a:solidFill>
+              </a:defRPr>
+            </a:pPr>
+            <a:r>
+              <a:rPr sz="1350" b="0">
+                <a:solidFill>
+                  <a:srgbClr val="263746"/>
+                </a:solidFill>
+                <a:latin typeface="Microsoft YaHei"/>
+                <a:ea typeface="Microsoft YaHei"/>
+                <a:cs typeface="Microsoft YaHei"/>
+              </a:rPr>
+              <a:t>混合序列预测论文</a:t>
+            </a:r>
+          </a:p>
+        </p:txBody>
+      </p:sp>
+      <p:sp>
+        <p:nvSpPr>
+          <p:cNvPr id="16" name="p16-r1-2">
+            <a:extLst xmlns:a="http://schemas.openxmlformats.org/drawingml/2006/main">
+              <a:ext uri="{FF2B5EF4-FFF2-40B4-BE49-F238E27FC236}">
+                <a16:creationId xmlns:a16="http://schemas.microsoft.com/office/drawing/2014/main" id="{FCBA3548-C195-47C1-9037-F4886310658F}"/>
+              </a:ext>
+            </a:extLst>
+          </p:cNvPr>
+          <p:cNvSpPr>
+            <a:spLocks xmlns:a="http://schemas.openxmlformats.org/drawingml/2006/main" noGrp="1"/>
+          </p:cNvSpPr>
+          <p:nvPr/>
+        </p:nvSpPr>
+        <p:spPr>
+          <a:xfrm xmlns:a="http://schemas.openxmlformats.org/drawingml/2006/main">
+            <a:off x="9144000" y="2647950"/>
+            <a:ext cx="2286000" cy="457200"/>
+          </a:xfrm>
+          <a:prstGeom xmlns:a="http://schemas.openxmlformats.org/drawingml/2006/main" prst="rect">
+            <a:avLst/>
+          </a:prstGeom>
+          <a:solidFill xmlns:a="http://schemas.openxmlformats.org/drawingml/2006/main">
+            <a:srgbClr val="FFFFFF"/>
+          </a:solidFill>
+          <a:ln xmlns:a="http://schemas.openxmlformats.org/drawingml/2006/main" w="9525">
+            <a:solidFill>
+              <a:srgbClr val="D6DDE2"/>
+            </a:solidFill>
+            <a:prstDash val="solid"/>
+          </a:ln>
+        </p:spPr>
+        <p:txBody>
+          <a:bodyPr xmlns:a="http://schemas.openxmlformats.org/drawingml/2006/main" lIns="76200" tIns="38100" rIns="76200" bIns="38100" anchor="ctr"/>
+          <a:lstStyle xmlns:a="http://schemas.openxmlformats.org/drawingml/2006/main"/>
+          <a:p xmlns:a="http://schemas.openxmlformats.org/drawingml/2006/main">
+            <a:pPr algn="ctr">
+              <a:lnSpc>
+                <a:spcPct val="105000"/>
+              </a:lnSpc>
+              <a:buNone/>
+              <a:defRPr sz="1350" b="1">
+                <a:solidFill>
+                  <a:srgbClr val="C8161E"/>
+                </a:solidFill>
+              </a:defRPr>
+            </a:pPr>
+            <a:r>
+              <a:rPr sz="1350" b="1">
+                <a:solidFill>
+                  <a:srgbClr val="C8161E"/>
+                </a:solidFill>
+                <a:latin typeface="Arial"/>
+                <a:ea typeface="Arial"/>
+                <a:cs typeface="Arial"/>
+              </a:rPr>
+              <a:t>rejected</a:t>
+            </a:r>
+          </a:p>
+        </p:txBody>
+      </p:sp>
+      <p:sp>
+        <p:nvSpPr>
+          <p:cNvPr id="17" name="p16-r2-0">
+            <a:extLst xmlns:a="http://schemas.openxmlformats.org/drawingml/2006/main">
+              <a:ext uri="{FF2B5EF4-FFF2-40B4-BE49-F238E27FC236}">
+                <a16:creationId xmlns:a16="http://schemas.microsoft.com/office/drawing/2014/main" id="{2F4F00F9-80C2-4CFD-A180-B8192622F9B5}"/>
+              </a:ext>
+            </a:extLst>
+          </p:cNvPr>
+          <p:cNvSpPr>
+            <a:spLocks xmlns:a="http://schemas.openxmlformats.org/drawingml/2006/main" noGrp="1"/>
+          </p:cNvSpPr>
+          <p:nvPr/>
+        </p:nvSpPr>
+        <p:spPr>
+          <a:xfrm xmlns:a="http://schemas.openxmlformats.org/drawingml/2006/main">
+            <a:off x="762000" y="3105150"/>
+            <a:ext cx="4572000" cy="457200"/>
+          </a:xfrm>
+          <a:prstGeom xmlns:a="http://schemas.openxmlformats.org/drawingml/2006/main" prst="rect">
+            <a:avLst/>
+          </a:prstGeom>
+          <a:solidFill xmlns:a="http://schemas.openxmlformats.org/drawingml/2006/main">
+            <a:srgbClr val="F3F6F7"/>
+          </a:solidFill>
+          <a:ln xmlns:a="http://schemas.openxmlformats.org/drawingml/2006/main" w="9525">
+            <a:solidFill>
+              <a:srgbClr val="D6DDE2"/>
+            </a:solidFill>
+            <a:prstDash val="solid"/>
+          </a:ln>
+        </p:spPr>
+        <p:txBody>
+          <a:bodyPr xmlns:a="http://schemas.openxmlformats.org/drawingml/2006/main" lIns="76200" tIns="38100" rIns="76200" bIns="38100" anchor="ctr"/>
+          <a:lstStyle xmlns:a="http://schemas.openxmlformats.org/drawingml/2006/main"/>
+          <a:p xmlns:a="http://schemas.openxmlformats.org/drawingml/2006/main">
+            <a:pPr algn="ctr">
+              <a:lnSpc>
+                <a:spcPct val="105000"/>
+              </a:lnSpc>
+              <a:buNone/>
+              <a:defRPr sz="1350" b="1">
+                <a:solidFill>
+                  <a:srgbClr val="263746"/>
+                </a:solidFill>
+              </a:defRPr>
+            </a:pPr>
+            <a:r>
+              <a:rPr sz="1350" b="1">
+                <a:solidFill>
+                  <a:srgbClr val="263746"/>
+                </a:solidFill>
+                <a:latin typeface="Microsoft YaHei"/>
+                <a:ea typeface="Microsoft YaHei"/>
+                <a:cs typeface="Microsoft YaHei"/>
+              </a:rPr>
+              <a:t>2309.10655＝Emergent Linear Representations</a:t>
+            </a:r>
+          </a:p>
+        </p:txBody>
+      </p:sp>
+      <p:sp>
+        <p:nvSpPr>
+          <p:cNvPr id="18" name="p16-r2-1">
+            <a:extLst xmlns:a="http://schemas.openxmlformats.org/drawingml/2006/main">
+              <a:ext uri="{FF2B5EF4-FFF2-40B4-BE49-F238E27FC236}">
+                <a16:creationId xmlns:a16="http://schemas.microsoft.com/office/drawing/2014/main" id="{77147C4B-C5E0-419C-AE27-A6F95262AA04}"/>
+              </a:ext>
+            </a:extLst>
+          </p:cNvPr>
+          <p:cNvSpPr>
+            <a:spLocks xmlns:a="http://schemas.openxmlformats.org/drawingml/2006/main" noGrp="1"/>
+          </p:cNvSpPr>
+          <p:nvPr/>
+        </p:nvSpPr>
+        <p:spPr>
+          <a:xfrm xmlns:a="http://schemas.openxmlformats.org/drawingml/2006/main">
+            <a:off x="5334000" y="3105150"/>
+            <a:ext cx="3810000" cy="457200"/>
+          </a:xfrm>
+          <a:prstGeom xmlns:a="http://schemas.openxmlformats.org/drawingml/2006/main" prst="rect">
+            <a:avLst/>
+          </a:prstGeom>
+          <a:solidFill xmlns:a="http://schemas.openxmlformats.org/drawingml/2006/main">
+            <a:srgbClr val="F3F6F7"/>
+          </a:solidFill>
+          <a:ln xmlns:a="http://schemas.openxmlformats.org/drawingml/2006/main" w="9525">
+            <a:solidFill>
+              <a:srgbClr val="D6DDE2"/>
+            </a:solidFill>
+            <a:prstDash val="solid"/>
+          </a:ln>
+        </p:spPr>
+        <p:txBody>
+          <a:bodyPr xmlns:a="http://schemas.openxmlformats.org/drawingml/2006/main" lIns="76200" tIns="38100" rIns="76200" bIns="38100" anchor="ctr"/>
+          <a:lstStyle xmlns:a="http://schemas.openxmlformats.org/drawingml/2006/main"/>
+          <a:p xmlns:a="http://schemas.openxmlformats.org/drawingml/2006/main">
+            <a:pPr algn="ctr">
+              <a:lnSpc>
+                <a:spcPct val="105000"/>
+              </a:lnSpc>
+              <a:buNone/>
+              <a:defRPr sz="1350" b="0">
+                <a:solidFill>
+                  <a:srgbClr val="263746"/>
+                </a:solidFill>
+              </a:defRPr>
+            </a:pPr>
+            <a:r>
+              <a:rPr sz="1350" b="0">
+                <a:solidFill>
+                  <a:srgbClr val="263746"/>
+                </a:solidFill>
+                <a:latin typeface="Microsoft YaHei"/>
+                <a:ea typeface="Microsoft YaHei"/>
+                <a:cs typeface="Microsoft YaHei"/>
+              </a:rPr>
+              <a:t>路径规划论文</a:t>
+            </a:r>
+          </a:p>
+        </p:txBody>
+      </p:sp>
+      <p:sp>
+        <p:nvSpPr>
+          <p:cNvPr id="19" name="p16-r2-2">
+            <a:extLst xmlns:a="http://schemas.openxmlformats.org/drawingml/2006/main">
+              <a:ext uri="{FF2B5EF4-FFF2-40B4-BE49-F238E27FC236}">
+                <a16:creationId xmlns:a16="http://schemas.microsoft.com/office/drawing/2014/main" id="{2B11A12A-7ADD-4E27-A828-AFCFD40BE84D}"/>
+              </a:ext>
+            </a:extLst>
+          </p:cNvPr>
+          <p:cNvSpPr>
+            <a:spLocks xmlns:a="http://schemas.openxmlformats.org/drawingml/2006/main" noGrp="1"/>
+          </p:cNvSpPr>
+          <p:nvPr/>
+        </p:nvSpPr>
+        <p:spPr>
+          <a:xfrm xmlns:a="http://schemas.openxmlformats.org/drawingml/2006/main">
+            <a:off x="9144000" y="3105150"/>
+            <a:ext cx="2286000" cy="457200"/>
+          </a:xfrm>
+          <a:prstGeom xmlns:a="http://schemas.openxmlformats.org/drawingml/2006/main" prst="rect">
+            <a:avLst/>
+          </a:prstGeom>
+          <a:solidFill xmlns:a="http://schemas.openxmlformats.org/drawingml/2006/main">
+            <a:srgbClr val="F3F6F7"/>
+          </a:solidFill>
+          <a:ln xmlns:a="http://schemas.openxmlformats.org/drawingml/2006/main" w="9525">
+            <a:solidFill>
+              <a:srgbClr val="D6DDE2"/>
+            </a:solidFill>
+            <a:prstDash val="solid"/>
+          </a:ln>
+        </p:spPr>
+        <p:txBody>
+          <a:bodyPr xmlns:a="http://schemas.openxmlformats.org/drawingml/2006/main" lIns="76200" tIns="38100" rIns="76200" bIns="38100" anchor="ctr"/>
+          <a:lstStyle xmlns:a="http://schemas.openxmlformats.org/drawingml/2006/main"/>
+          <a:p xmlns:a="http://schemas.openxmlformats.org/drawingml/2006/main">
+            <a:pPr algn="ctr">
+              <a:lnSpc>
+                <a:spcPct val="105000"/>
+              </a:lnSpc>
+              <a:buNone/>
+              <a:defRPr sz="1350" b="1">
+                <a:solidFill>
+                  <a:srgbClr val="C8161E"/>
+                </a:solidFill>
+              </a:defRPr>
+            </a:pPr>
+            <a:r>
+              <a:rPr sz="1350" b="1">
+                <a:solidFill>
+                  <a:srgbClr val="C8161E"/>
+                </a:solidFill>
+                <a:latin typeface="Arial"/>
+                <a:ea typeface="Arial"/>
+                <a:cs typeface="Arial"/>
+              </a:rPr>
+              <a:t>rejected</a:t>
+            </a:r>
+          </a:p>
+        </p:txBody>
+      </p:sp>
+      <p:sp>
+        <p:nvSpPr>
+          <p:cNvPr id="20" name="p16-r3-0">
+            <a:extLst xmlns:a="http://schemas.openxmlformats.org/drawingml/2006/main">
+              <a:ext uri="{FF2B5EF4-FFF2-40B4-BE49-F238E27FC236}">
+                <a16:creationId xmlns:a16="http://schemas.microsoft.com/office/drawing/2014/main" id="{DAA439B7-30CA-4A30-8D1C-9FA1F31EC3DB}"/>
+              </a:ext>
+            </a:extLst>
+          </p:cNvPr>
+          <p:cNvSpPr>
+            <a:spLocks xmlns:a="http://schemas.openxmlformats.org/drawingml/2006/main" noGrp="1"/>
+          </p:cNvSpPr>
+          <p:nvPr/>
+        </p:nvSpPr>
+        <p:spPr>
+          <a:xfrm xmlns:a="http://schemas.openxmlformats.org/drawingml/2006/main">
+            <a:off x="762000" y="3562350"/>
+            <a:ext cx="4572000" cy="457200"/>
+          </a:xfrm>
+          <a:prstGeom xmlns:a="http://schemas.openxmlformats.org/drawingml/2006/main" prst="rect">
+            <a:avLst/>
+          </a:prstGeom>
+          <a:solidFill xmlns:a="http://schemas.openxmlformats.org/drawingml/2006/main">
+            <a:srgbClr val="FFFFFF"/>
+          </a:solidFill>
+          <a:ln xmlns:a="http://schemas.openxmlformats.org/drawingml/2006/main" w="9525">
+            <a:solidFill>
+              <a:srgbClr val="D6DDE2"/>
+            </a:solidFill>
+            <a:prstDash val="solid"/>
+          </a:ln>
+        </p:spPr>
+        <p:txBody>
+          <a:bodyPr xmlns:a="http://schemas.openxmlformats.org/drawingml/2006/main" lIns="76200" tIns="38100" rIns="76200" bIns="38100" anchor="ctr"/>
+          <a:lstStyle xmlns:a="http://schemas.openxmlformats.org/drawingml/2006/main"/>
+          <a:p xmlns:a="http://schemas.openxmlformats.org/drawingml/2006/main">
+            <a:pPr algn="ctr">
+              <a:lnSpc>
+                <a:spcPct val="105000"/>
+              </a:lnSpc>
+              <a:buNone/>
+              <a:defRPr sz="1350" b="1">
+                <a:solidFill>
+                  <a:srgbClr val="263746"/>
+                </a:solidFill>
+              </a:defRPr>
+            </a:pPr>
+            <a:r>
+              <a:rPr sz="1350" b="1">
+                <a:solidFill>
+                  <a:srgbClr val="263746"/>
+                </a:solidFill>
+                <a:latin typeface="Microsoft YaHei"/>
+                <a:ea typeface="Microsoft YaHei"/>
+                <a:cs typeface="Microsoft YaHei"/>
+              </a:rPr>
+              <a:t>2407.14400＝Gemma Scope</a:t>
+            </a:r>
+          </a:p>
+        </p:txBody>
+      </p:sp>
+      <p:sp>
+        <p:nvSpPr>
+          <p:cNvPr id="21" name="p16-r3-1">
+            <a:extLst xmlns:a="http://schemas.openxmlformats.org/drawingml/2006/main">
+              <a:ext uri="{FF2B5EF4-FFF2-40B4-BE49-F238E27FC236}">
+                <a16:creationId xmlns:a16="http://schemas.microsoft.com/office/drawing/2014/main" id="{AEF245C1-6D50-42E1-A0C6-1E894DFF91ED}"/>
+              </a:ext>
+            </a:extLst>
+          </p:cNvPr>
+          <p:cNvSpPr>
+            <a:spLocks xmlns:a="http://schemas.openxmlformats.org/drawingml/2006/main" noGrp="1"/>
+          </p:cNvSpPr>
+          <p:nvPr/>
+        </p:nvSpPr>
+        <p:spPr>
+          <a:xfrm xmlns:a="http://schemas.openxmlformats.org/drawingml/2006/main">
+            <a:off x="5334000" y="3562350"/>
+            <a:ext cx="3810000" cy="457200"/>
+          </a:xfrm>
+          <a:prstGeom xmlns:a="http://schemas.openxmlformats.org/drawingml/2006/main" prst="rect">
+            <a:avLst/>
+          </a:prstGeom>
+          <a:solidFill xmlns:a="http://schemas.openxmlformats.org/drawingml/2006/main">
+            <a:srgbClr val="FFFFFF"/>
+          </a:solidFill>
+          <a:ln xmlns:a="http://schemas.openxmlformats.org/drawingml/2006/main" w="9525">
+            <a:solidFill>
+              <a:srgbClr val="D6DDE2"/>
+            </a:solidFill>
+            <a:prstDash val="solid"/>
+          </a:ln>
+        </p:spPr>
+        <p:txBody>
+          <a:bodyPr xmlns:a="http://schemas.openxmlformats.org/drawingml/2006/main" lIns="76200" tIns="38100" rIns="76200" bIns="38100" anchor="ctr"/>
+          <a:lstStyle xmlns:a="http://schemas.openxmlformats.org/drawingml/2006/main"/>
+          <a:p xmlns:a="http://schemas.openxmlformats.org/drawingml/2006/main">
+            <a:pPr algn="ctr">
+              <a:lnSpc>
+                <a:spcPct val="105000"/>
+              </a:lnSpc>
+              <a:buNone/>
+              <a:defRPr sz="1350" b="0">
+                <a:solidFill>
+                  <a:srgbClr val="263746"/>
+                </a:solidFill>
+              </a:defRPr>
+            </a:pPr>
+            <a:r>
+              <a:rPr sz="1350" b="0">
+                <a:solidFill>
+                  <a:srgbClr val="263746"/>
+                </a:solidFill>
+                <a:latin typeface="Microsoft YaHei"/>
+                <a:ea typeface="Microsoft YaHei"/>
+                <a:cs typeface="Microsoft YaHei"/>
+              </a:rPr>
+              <a:t>O-RAN 网络预测论文</a:t>
+            </a:r>
+          </a:p>
+        </p:txBody>
+      </p:sp>
+      <p:sp>
+        <p:nvSpPr>
+          <p:cNvPr id="22" name="p16-r3-2">
+            <a:extLst xmlns:a="http://schemas.openxmlformats.org/drawingml/2006/main">
+              <a:ext uri="{FF2B5EF4-FFF2-40B4-BE49-F238E27FC236}">
+                <a16:creationId xmlns:a16="http://schemas.microsoft.com/office/drawing/2014/main" id="{B31DEA40-F959-459F-AB5E-D2AC5724C356}"/>
+              </a:ext>
+            </a:extLst>
+          </p:cNvPr>
+          <p:cNvSpPr>
+            <a:spLocks xmlns:a="http://schemas.openxmlformats.org/drawingml/2006/main" noGrp="1"/>
+          </p:cNvSpPr>
+          <p:nvPr/>
+        </p:nvSpPr>
+        <p:spPr>
+          <a:xfrm xmlns:a="http://schemas.openxmlformats.org/drawingml/2006/main">
+            <a:off x="9144000" y="3562350"/>
+            <a:ext cx="2286000" cy="457200"/>
+          </a:xfrm>
+          <a:prstGeom xmlns:a="http://schemas.openxmlformats.org/drawingml/2006/main" prst="rect">
+            <a:avLst/>
+          </a:prstGeom>
+          <a:solidFill xmlns:a="http://schemas.openxmlformats.org/drawingml/2006/main">
+            <a:srgbClr val="FFFFFF"/>
+          </a:solidFill>
+          <a:ln xmlns:a="http://schemas.openxmlformats.org/drawingml/2006/main" w="9525">
+            <a:solidFill>
+              <a:srgbClr val="D6DDE2"/>
+            </a:solidFill>
+            <a:prstDash val="solid"/>
+          </a:ln>
+        </p:spPr>
+        <p:txBody>
+          <a:bodyPr xmlns:a="http://schemas.openxmlformats.org/drawingml/2006/main" lIns="76200" tIns="38100" rIns="76200" bIns="38100" anchor="ctr"/>
+          <a:lstStyle xmlns:a="http://schemas.openxmlformats.org/drawingml/2006/main"/>
+          <a:p xmlns:a="http://schemas.openxmlformats.org/drawingml/2006/main">
+            <a:pPr algn="ctr">
+              <a:lnSpc>
+                <a:spcPct val="105000"/>
+              </a:lnSpc>
+              <a:buNone/>
+              <a:defRPr sz="1350" b="1">
+                <a:solidFill>
+                  <a:srgbClr val="C8161E"/>
+                </a:solidFill>
+              </a:defRPr>
+            </a:pPr>
+            <a:r>
+              <a:rPr sz="1350" b="1">
+                <a:solidFill>
+                  <a:srgbClr val="C8161E"/>
+                </a:solidFill>
+                <a:latin typeface="Arial"/>
+                <a:ea typeface="Arial"/>
+                <a:cs typeface="Arial"/>
+              </a:rPr>
+              <a:t>rejected</a:t>
+            </a:r>
+          </a:p>
+        </p:txBody>
+      </p:sp>
+      <p:sp>
+        <p:nvSpPr>
+          <p:cNvPr id="23" name="p16-recover">
+            <a:extLst xmlns:a="http://schemas.openxmlformats.org/drawingml/2006/main">
+              <a:ext uri="{FF2B5EF4-FFF2-40B4-BE49-F238E27FC236}">
+                <a16:creationId xmlns:a16="http://schemas.microsoft.com/office/drawing/2014/main" id="{D5BFC5A6-5B1A-4888-A1A8-0A99E4F4A4A7}"/>
+              </a:ext>
+            </a:extLst>
+          </p:cNvPr>
+          <p:cNvSpPr>
+            <a:spLocks xmlns:a="http://schemas.openxmlformats.org/drawingml/2006/main" noGrp="1"/>
+          </p:cNvSpPr>
+          <p:nvPr/>
+        </p:nvSpPr>
+        <p:spPr>
+          <a:xfrm xmlns:a="http://schemas.openxmlformats.org/drawingml/2006/main">
+            <a:off x="762000" y="4114800"/>
+            <a:ext cx="10668000" cy="476250"/>
+          </a:xfrm>
+          <a:prstGeom xmlns:a="http://schemas.openxmlformats.org/drawingml/2006/main" prst="rect">
+            <a:avLst/>
+          </a:prstGeom>
+          <a:solidFill xmlns:a="http://schemas.openxmlformats.org/drawingml/2006/main">
+            <a:srgbClr val="E7F2ED"/>
+          </a:solidFill>
+          <a:ln xmlns:a="http://schemas.openxmlformats.org/drawingml/2006/main" w="0">
+            <a:noFill/>
+            <a:prstDash val="solid"/>
+          </a:ln>
+        </p:spPr>
+        <p:txBody>
+          <a:bodyPr xmlns:a="http://schemas.openxmlformats.org/drawingml/2006/main" lIns="76200" tIns="38100" rIns="76200" bIns="38100" anchor="ctr"/>
+          <a:lstStyle xmlns:a="http://schemas.openxmlformats.org/drawingml/2006/main"/>
+          <a:p xmlns:a="http://schemas.openxmlformats.org/drawingml/2006/main">
+            <a:pPr algn="ctr">
+              <a:defRPr sz="1350" b="1">
+                <a:solidFill>
+                  <a:srgbClr val="28745A"/>
+                </a:solidFill>
+              </a:defRPr>
+            </a:pPr>
+            <a:r>
+              <a:rPr sz="1350" b="1">
+                <a:solidFill>
+                  <a:srgbClr val="28745A"/>
+                </a:solidFill>
+                <a:latin typeface="Microsoft YaHei"/>
+                <a:ea typeface="Microsoft YaHei"/>
+                <a:cs typeface="Microsoft YaHei"/>
+              </a:rPr>
+              <a:t>恢复路径：ti: 题名检索恢复正确 ID（2310.10348 ／ 2303.08112 ／ 2309.00941 ／ 2408.05147）｜失败留档，不重跑到无痕</a:t>
+            </a:r>
+          </a:p>
+        </p:txBody>
+      </p:sp>
+      <p:sp>
+        <p:nvSpPr>
+          <p:cNvPr id="24" name="p16-q-0">
+            <a:extLst xmlns:a="http://schemas.openxmlformats.org/drawingml/2006/main">
+              <a:ext uri="{FF2B5EF4-FFF2-40B4-BE49-F238E27FC236}">
+                <a16:creationId xmlns:a16="http://schemas.microsoft.com/office/drawing/2014/main" id="{F042FE58-C0C9-478E-BFE4-7D08CE0B4F64}"/>
+              </a:ext>
+            </a:extLst>
+          </p:cNvPr>
+          <p:cNvSpPr>
+            <a:spLocks xmlns:a="http://schemas.openxmlformats.org/drawingml/2006/main" noGrp="1"/>
+          </p:cNvSpPr>
+          <p:nvPr/>
+        </p:nvSpPr>
+        <p:spPr>
+          <a:xfrm xmlns:a="http://schemas.openxmlformats.org/drawingml/2006/main">
+            <a:off x="857250" y="4743450"/>
+            <a:ext cx="4953000" cy="495300"/>
+          </a:xfrm>
+          <a:prstGeom xmlns:a="http://schemas.openxmlformats.org/drawingml/2006/main" prst="rect">
+            <a:avLst/>
+          </a:prstGeom>
+          <a:solidFill xmlns:a="http://schemas.openxmlformats.org/drawingml/2006/main">
+            <a:srgbClr val="E8F0F6"/>
+          </a:solidFill>
+          <a:ln xmlns:a="http://schemas.openxmlformats.org/drawingml/2006/main" w="0">
+            <a:noFill/>
+            <a:prstDash val="solid"/>
+          </a:ln>
+        </p:spPr>
+        <p:txBody>
+          <a:bodyPr xmlns:a="http://schemas.openxmlformats.org/drawingml/2006/main" lIns="76200" tIns="38100" rIns="76200" bIns="38100" anchor="ctr"/>
+          <a:lstStyle xmlns:a="http://schemas.openxmlformats.org/drawingml/2006/main"/>
+          <a:p xmlns:a="http://schemas.openxmlformats.org/drawingml/2006/main">
+            <a:pPr algn="ctr">
+              <a:defRPr sz="1425" b="1">
+                <a:solidFill>
+                  <a:srgbClr val="18354E"/>
+                </a:solidFill>
+              </a:defRPr>
+            </a:pPr>
+            <a:r>
+              <a:rPr sz="1425" b="1">
+                <a:solidFill>
+                  <a:srgbClr val="18354E"/>
+                </a:solidFill>
+                <a:latin typeface="Microsoft YaHei"/>
+                <a:ea typeface="Microsoft YaHei"/>
+                <a:cs typeface="Microsoft YaHei"/>
+              </a:rPr>
+              <a:t>1. 为什么先写问题再搜？</a:t>
+            </a:r>
+          </a:p>
+        </p:txBody>
+      </p:sp>
+      <p:sp>
+        <p:nvSpPr>
+          <p:cNvPr id="25" name="p16-q-1">
+            <a:extLst xmlns:a="http://schemas.openxmlformats.org/drawingml/2006/main">
+              <a:ext uri="{FF2B5EF4-FFF2-40B4-BE49-F238E27FC236}">
+                <a16:creationId xmlns:a16="http://schemas.microsoft.com/office/drawing/2014/main" id="{B56F940A-1C06-45AE-B9C6-599E28D2E65F}"/>
+              </a:ext>
+            </a:extLst>
+          </p:cNvPr>
+          <p:cNvSpPr>
+            <a:spLocks xmlns:a="http://schemas.openxmlformats.org/drawingml/2006/main" noGrp="1"/>
+          </p:cNvSpPr>
+          <p:nvPr/>
+        </p:nvSpPr>
+        <p:spPr>
+          <a:xfrm xmlns:a="http://schemas.openxmlformats.org/drawingml/2006/main">
+            <a:off x="6191250" y="4743450"/>
+            <a:ext cx="4953000" cy="495300"/>
+          </a:xfrm>
+          <a:prstGeom xmlns:a="http://schemas.openxmlformats.org/drawingml/2006/main" prst="rect">
+            <a:avLst/>
+          </a:prstGeom>
+          <a:solidFill xmlns:a="http://schemas.openxmlformats.org/drawingml/2006/main">
+            <a:srgbClr val="E8F0F6"/>
+          </a:solidFill>
+          <a:ln xmlns:a="http://schemas.openxmlformats.org/drawingml/2006/main" w="0">
+            <a:noFill/>
+            <a:prstDash val="solid"/>
+          </a:ln>
+        </p:spPr>
+        <p:txBody>
+          <a:bodyPr xmlns:a="http://schemas.openxmlformats.org/drawingml/2006/main" lIns="76200" tIns="38100" rIns="76200" bIns="38100" anchor="ctr"/>
+          <a:lstStyle xmlns:a="http://schemas.openxmlformats.org/drawingml/2006/main"/>
+          <a:p xmlns:a="http://schemas.openxmlformats.org/drawingml/2006/main">
+            <a:pPr algn="ctr">
+              <a:defRPr sz="1425" b="1">
+                <a:solidFill>
+                  <a:srgbClr val="18354E"/>
+                </a:solidFill>
+              </a:defRPr>
+            </a:pPr>
+            <a:r>
+              <a:rPr sz="1425" b="1">
+                <a:solidFill>
+                  <a:srgbClr val="18354E"/>
+                </a:solidFill>
+                <a:latin typeface="Microsoft YaHei"/>
+                <a:ea typeface="Microsoft YaHei"/>
+                <a:cs typeface="Microsoft YaHei"/>
+              </a:rPr>
+              <a:t>2. 纳入 / 排除何时写？</a:t>
+            </a:r>
+          </a:p>
+        </p:txBody>
+      </p:sp>
+      <p:sp>
+        <p:nvSpPr>
+          <p:cNvPr id="26" name="p16-q-2">
+            <a:extLst xmlns:a="http://schemas.openxmlformats.org/drawingml/2006/main">
+              <a:ext uri="{FF2B5EF4-FFF2-40B4-BE49-F238E27FC236}">
+                <a16:creationId xmlns:a16="http://schemas.microsoft.com/office/drawing/2014/main" id="{AAD49AA4-6B3B-45DE-9434-30462CB1CC86}"/>
+              </a:ext>
+            </a:extLst>
+          </p:cNvPr>
+          <p:cNvSpPr>
+            <a:spLocks xmlns:a="http://schemas.openxmlformats.org/drawingml/2006/main" noGrp="1"/>
+          </p:cNvSpPr>
+          <p:nvPr/>
+        </p:nvSpPr>
+        <p:spPr>
+          <a:xfrm xmlns:a="http://schemas.openxmlformats.org/drawingml/2006/main">
+            <a:off x="857250" y="5334000"/>
+            <a:ext cx="4953000" cy="495300"/>
+          </a:xfrm>
+          <a:prstGeom xmlns:a="http://schemas.openxmlformats.org/drawingml/2006/main" prst="rect">
+            <a:avLst/>
+          </a:prstGeom>
+          <a:solidFill xmlns:a="http://schemas.openxmlformats.org/drawingml/2006/main">
+            <a:srgbClr val="E8F0F6"/>
+          </a:solidFill>
+          <a:ln xmlns:a="http://schemas.openxmlformats.org/drawingml/2006/main" w="0">
+            <a:noFill/>
+            <a:prstDash val="solid"/>
+          </a:ln>
+        </p:spPr>
+        <p:txBody>
+          <a:bodyPr xmlns:a="http://schemas.openxmlformats.org/drawingml/2006/main" lIns="76200" tIns="38100" rIns="76200" bIns="38100" anchor="ctr"/>
+          <a:lstStyle xmlns:a="http://schemas.openxmlformats.org/drawingml/2006/main"/>
+          <a:p xmlns:a="http://schemas.openxmlformats.org/drawingml/2006/main">
+            <a:pPr algn="ctr">
+              <a:defRPr sz="1425" b="1">
+                <a:solidFill>
+                  <a:srgbClr val="18354E"/>
+                </a:solidFill>
+              </a:defRPr>
+            </a:pPr>
+            <a:r>
+              <a:rPr sz="1425" b="1">
+                <a:solidFill>
+                  <a:srgbClr val="18354E"/>
+                </a:solidFill>
+                <a:latin typeface="Microsoft YaHei"/>
+                <a:ea typeface="Microsoft YaHei"/>
+                <a:cs typeface="Microsoft YaHei"/>
+              </a:rPr>
+              <a:t>3. 角色、状态、决定各答什么？</a:t>
+            </a:r>
+          </a:p>
+        </p:txBody>
+      </p:sp>
+      <p:sp>
+        <p:nvSpPr>
+          <p:cNvPr id="27" name="p16-q-3">
+            <a:extLst xmlns:a="http://schemas.openxmlformats.org/drawingml/2006/main">
+              <a:ext uri="{FF2B5EF4-FFF2-40B4-BE49-F238E27FC236}">
+                <a16:creationId xmlns:a16="http://schemas.microsoft.com/office/drawing/2014/main" id="{A4AE8258-3514-4F93-996F-0F5AE1DCCB44}"/>
+              </a:ext>
+            </a:extLst>
+          </p:cNvPr>
+          <p:cNvSpPr>
+            <a:spLocks xmlns:a="http://schemas.openxmlformats.org/drawingml/2006/main" noGrp="1"/>
+          </p:cNvSpPr>
+          <p:nvPr/>
+        </p:nvSpPr>
+        <p:spPr>
+          <a:xfrm xmlns:a="http://schemas.openxmlformats.org/drawingml/2006/main">
+            <a:off x="6191250" y="5334000"/>
+            <a:ext cx="4953000" cy="495300"/>
           </a:xfrm>
           <a:prstGeom xmlns:a="http://schemas.openxmlformats.org/drawingml/2006/main" prst="rect">
             <a:avLst/>
@@ -9701,14 +10607,14 @@
           <a:lstStyle xmlns:a="http://schemas.openxmlformats.org/drawingml/2006/main"/>
           <a:p xmlns:a="http://schemas.openxmlformats.org/drawingml/2006/main">
             <a:pPr algn="ctr">
-              <a:defRPr sz="1875" b="1">
+              <a:defRPr sz="1425" b="1">
                 <a:solidFill>
                   <a:srgbClr val="C8161E"/>
                 </a:solidFill>
               </a:defRPr>
             </a:pPr>
             <a:r>
-              <a:rPr sz="1875" b="1">
+              <a:rPr sz="1425" b="1">
                 <a:solidFill>
                   <a:srgbClr val="C8161E"/>
                 </a:solidFill>
@@ -9716,29 +10622,29 @@
                 <a:ea typeface="Microsoft YaHei"/>
                 <a:cs typeface="Microsoft YaHei"/>
               </a:rPr>
-              <a:t>直接复制 AI 报告的 5 条虚构引文</a:t>
-            </a:r>
-          </a:p>
-        </p:txBody>
-      </p:sp>
-      <p:sp>
-        <p:nvSpPr>
-          <p:cNvPr id="8" name="p16-a">
-            <a:extLst xmlns:a="http://schemas.openxmlformats.org/drawingml/2006/main">
-              <a:ext uri="{FF2B5EF4-FFF2-40B4-BE49-F238E27FC236}">
-                <a16:creationId xmlns:a16="http://schemas.microsoft.com/office/drawing/2014/main" id="{2031A32B-1DF9-4248-9942-B9FC43943CF9}"/>
-              </a:ext>
-            </a:extLst>
-          </p:cNvPr>
-          <p:cNvSpPr>
-            <a:spLocks xmlns:a="http://schemas.openxmlformats.org/drawingml/2006/main" noGrp="1"/>
-          </p:cNvSpPr>
-          <p:nvPr/>
-        </p:nvSpPr>
-        <p:spPr>
-          <a:xfrm xmlns:a="http://schemas.openxmlformats.org/drawingml/2006/main">
-            <a:off x="4667250" y="1409700"/>
-            <a:ext cx="590550" cy="419100"/>
+              <a:t>4. caveat 如何保留限定？</a:t>
+            </a:r>
+          </a:p>
+        </p:txBody>
+      </p:sp>
+      <p:sp>
+        <p:nvSpPr>
+          <p:cNvPr id="28" name="p16-bottom">
+            <a:extLst xmlns:a="http://schemas.openxmlformats.org/drawingml/2006/main">
+              <a:ext uri="{FF2B5EF4-FFF2-40B4-BE49-F238E27FC236}">
+                <a16:creationId xmlns:a16="http://schemas.microsoft.com/office/drawing/2014/main" id="{1FA9CF6F-17B9-4CD8-A266-7B6177B0EFAE}"/>
+              </a:ext>
+            </a:extLst>
+          </p:cNvPr>
+          <p:cNvSpPr>
+            <a:spLocks xmlns:a="http://schemas.openxmlformats.org/drawingml/2006/main" noGrp="1"/>
+          </p:cNvSpPr>
+          <p:nvPr/>
+        </p:nvSpPr>
+        <p:spPr>
+          <a:xfrm xmlns:a="http://schemas.openxmlformats.org/drawingml/2006/main">
+            <a:off x="2952750" y="5962650"/>
+            <a:ext cx="6286500" cy="323850"/>
           </a:xfrm>
           <a:prstGeom xmlns:a="http://schemas.openxmlformats.org/drawingml/2006/main" prst="rect">
             <a:avLst/>
@@ -9754,431 +10660,22 @@
           <a:lstStyle xmlns:a="http://schemas.openxmlformats.org/drawingml/2006/main"/>
           <a:p xmlns:a="http://schemas.openxmlformats.org/drawingml/2006/main">
             <a:pPr algn="ctr">
-              <a:defRPr sz="2250" b="1">
+              <a:defRPr sz="1425" b="1">
                 <a:solidFill>
                   <a:srgbClr val="C8161E"/>
                 </a:solidFill>
               </a:defRPr>
             </a:pPr>
             <a:r>
-              <a:rPr sz="2250" b="1">
+              <a:rPr sz="1425" b="1">
                 <a:solidFill>
                   <a:srgbClr val="C8161E"/>
                 </a:solidFill>
-                <a:latin typeface="Arial"/>
-                <a:ea typeface="Arial"/>
-                <a:cs typeface="Arial"/>
-              </a:rPr>
-              <a:t>→</a:t>
-            </a:r>
-          </a:p>
-        </p:txBody>
-      </p:sp>
-      <p:sp>
-        <p:nvSpPr>
-          <p:cNvPr id="9" name="p16-errors">
-            <a:extLst xmlns:a="http://schemas.openxmlformats.org/drawingml/2006/main">
-              <a:ext uri="{FF2B5EF4-FFF2-40B4-BE49-F238E27FC236}">
-                <a16:creationId xmlns:a16="http://schemas.microsoft.com/office/drawing/2014/main" id="{A61F11A8-096D-49C9-B1FD-4DF289E15186}"/>
-              </a:ext>
-            </a:extLst>
-          </p:cNvPr>
-          <p:cNvSpPr>
-            <a:spLocks xmlns:a="http://schemas.openxmlformats.org/drawingml/2006/main" noGrp="1"/>
-          </p:cNvSpPr>
-          <p:nvPr/>
-        </p:nvSpPr>
-        <p:spPr>
-          <a:xfrm xmlns:a="http://schemas.openxmlformats.org/drawingml/2006/main">
-            <a:off x="5448300" y="1466850"/>
-            <a:ext cx="6000750" cy="857250"/>
-          </a:xfrm>
-          <a:prstGeom xmlns:a="http://schemas.openxmlformats.org/drawingml/2006/main" prst="rect">
-            <a:avLst/>
-          </a:prstGeom>
-          <a:solidFill xmlns:a="http://schemas.openxmlformats.org/drawingml/2006/main">
-            <a:srgbClr val="F3F6F7"/>
-          </a:solidFill>
-          <a:ln xmlns:a="http://schemas.openxmlformats.org/drawingml/2006/main" w="0">
-            <a:noFill/>
-            <a:prstDash val="solid"/>
-          </a:ln>
-        </p:spPr>
-        <p:txBody>
-          <a:bodyPr xmlns:a="http://schemas.openxmlformats.org/drawingml/2006/main" lIns="76200" tIns="38100" rIns="76200" bIns="38100" anchor="ctr"/>
-          <a:lstStyle xmlns:a="http://schemas.openxmlformats.org/drawingml/2006/main"/>
-          <a:p xmlns:a="http://schemas.openxmlformats.org/drawingml/2006/main">
-            <a:pPr algn="ctr">
-              <a:lnSpc>
-                <a:spcPct val="120000"/>
-              </a:lnSpc>
-              <a:buNone/>
-              <a:defRPr sz="1800" b="1">
-                <a:solidFill>
-                  <a:srgbClr val="263746"/>
-                </a:solidFill>
-              </a:defRPr>
-            </a:pPr>
-            <a:r>
-              <a:rPr sz="1800" b="1">
-                <a:solidFill>
-                  <a:srgbClr val="263746"/>
-                </a:solidFill>
-                <a:latin typeface="Microsoft YaHei"/>
-                <a:ea typeface="Microsoft YaHei"/>
-                <a:cs typeface="Microsoft YaHei"/>
-              </a:rPr>
-              <a:t>虚构｜张冠李戴｜过度改写</a:t>
-            </a:r>
-          </a:p>
-          <a:p xmlns:a="http://schemas.openxmlformats.org/drawingml/2006/main">
-            <a:pPr algn="ctr">
-              <a:lnSpc>
-                <a:spcPct val="120000"/>
-              </a:lnSpc>
-              <a:buNone/>
-              <a:defRPr sz="1800" b="1">
-                <a:solidFill>
-                  <a:srgbClr val="263746"/>
-                </a:solidFill>
-              </a:defRPr>
-            </a:pPr>
-            <a:r>
-              <a:rPr sz="1800" b="1">
-                <a:solidFill>
-                  <a:srgbClr val="263746"/>
-                </a:solidFill>
-                <a:latin typeface="Microsoft YaHei"/>
-                <a:ea typeface="Microsoft YaHei"/>
-                <a:cs typeface="Microsoft YaHei"/>
-              </a:rPr>
-              <a:t>限定丢失｜来源不可追溯</a:t>
-            </a:r>
-          </a:p>
-        </p:txBody>
-      </p:sp>
-      <p:sp>
-        <p:nvSpPr>
-          <p:cNvPr id="10" name="p16-title">
-            <a:extLst xmlns:a="http://schemas.openxmlformats.org/drawingml/2006/main">
-              <a:ext uri="{FF2B5EF4-FFF2-40B4-BE49-F238E27FC236}">
-                <a16:creationId xmlns:a16="http://schemas.microsoft.com/office/drawing/2014/main" id="{F2D95430-D4CC-4909-ABE0-E46D28BE2BF4}"/>
-              </a:ext>
-            </a:extLst>
-          </p:cNvPr>
-          <p:cNvSpPr>
-            <a:spLocks xmlns:a="http://schemas.openxmlformats.org/drawingml/2006/main" noGrp="1"/>
-          </p:cNvSpPr>
-          <p:nvPr/>
-        </p:nvSpPr>
-        <p:spPr>
-          <a:xfrm xmlns:a="http://schemas.openxmlformats.org/drawingml/2006/main">
-            <a:off x="857250" y="2724150"/>
-            <a:ext cx="2667000" cy="476250"/>
-          </a:xfrm>
-          <a:prstGeom xmlns:a="http://schemas.openxmlformats.org/drawingml/2006/main" prst="rect">
-            <a:avLst/>
-          </a:prstGeom>
-          <a:noFill xmlns:a="http://schemas.openxmlformats.org/drawingml/2006/main"/>
-          <a:ln xmlns:a="http://schemas.openxmlformats.org/drawingml/2006/main" w="0">
-            <a:noFill/>
-            <a:prstDash val="solid"/>
-          </a:ln>
-        </p:spPr>
-        <p:txBody>
-          <a:bodyPr xmlns:a="http://schemas.openxmlformats.org/drawingml/2006/main" lIns="76200" tIns="38100" rIns="76200" bIns="38100" anchor="ctr"/>
-          <a:lstStyle xmlns:a="http://schemas.openxmlformats.org/drawingml/2006/main"/>
-          <a:p xmlns:a="http://schemas.openxmlformats.org/drawingml/2006/main">
-            <a:pPr algn="l">
-              <a:defRPr sz="1875" b="1">
-                <a:solidFill>
-                  <a:srgbClr val="18354E"/>
-                </a:solidFill>
-              </a:defRPr>
-            </a:pPr>
-            <a:r>
-              <a:rPr sz="1875" b="1">
-                <a:solidFill>
-                  <a:srgbClr val="18354E"/>
-                </a:solidFill>
-                <a:latin typeface="Microsoft YaHei"/>
-                <a:ea typeface="Microsoft YaHei"/>
-                <a:cs typeface="Microsoft YaHei"/>
-              </a:rPr>
-              <a:t>四个判断点</a:t>
-            </a:r>
-          </a:p>
-        </p:txBody>
-      </p:sp>
-      <p:sp>
-        <p:nvSpPr>
-          <p:cNvPr id="11" name="p16-q-0">
-            <a:extLst xmlns:a="http://schemas.openxmlformats.org/drawingml/2006/main">
-              <a:ext uri="{FF2B5EF4-FFF2-40B4-BE49-F238E27FC236}">
-                <a16:creationId xmlns:a16="http://schemas.microsoft.com/office/drawing/2014/main" id="{3B2EB5D0-923F-463C-8CE2-A6D540E704E9}"/>
-              </a:ext>
-            </a:extLst>
-          </p:cNvPr>
-          <p:cNvSpPr>
-            <a:spLocks xmlns:a="http://schemas.openxmlformats.org/drawingml/2006/main" noGrp="1"/>
-          </p:cNvSpPr>
-          <p:nvPr/>
-        </p:nvSpPr>
-        <p:spPr>
-          <a:xfrm xmlns:a="http://schemas.openxmlformats.org/drawingml/2006/main">
-            <a:off x="857250" y="3352800"/>
-            <a:ext cx="4953000" cy="628650"/>
-          </a:xfrm>
-          <a:prstGeom xmlns:a="http://schemas.openxmlformats.org/drawingml/2006/main" prst="rect">
-            <a:avLst/>
-          </a:prstGeom>
-          <a:solidFill xmlns:a="http://schemas.openxmlformats.org/drawingml/2006/main">
-            <a:srgbClr val="E8F0F6"/>
-          </a:solidFill>
-          <a:ln xmlns:a="http://schemas.openxmlformats.org/drawingml/2006/main" w="0">
-            <a:noFill/>
-            <a:prstDash val="solid"/>
-          </a:ln>
-        </p:spPr>
-        <p:txBody>
-          <a:bodyPr xmlns:a="http://schemas.openxmlformats.org/drawingml/2006/main" lIns="76200" tIns="38100" rIns="76200" bIns="38100" anchor="ctr"/>
-          <a:lstStyle xmlns:a="http://schemas.openxmlformats.org/drawingml/2006/main"/>
-          <a:p xmlns:a="http://schemas.openxmlformats.org/drawingml/2006/main">
-            <a:pPr algn="ctr">
-              <a:defRPr sz="1575" b="1">
-                <a:solidFill>
-                  <a:srgbClr val="18354E"/>
-                </a:solidFill>
-              </a:defRPr>
-            </a:pPr>
-            <a:r>
-              <a:rPr sz="1575" b="1">
-                <a:solidFill>
-                  <a:srgbClr val="18354E"/>
-                </a:solidFill>
-                <a:latin typeface="Microsoft YaHei"/>
-                <a:ea typeface="Microsoft YaHei"/>
-                <a:cs typeface="Microsoft YaHei"/>
-              </a:rPr>
-              <a:t>1. 为什么先写问题再搜？</a:t>
-            </a:r>
-          </a:p>
-        </p:txBody>
-      </p:sp>
-      <p:sp>
-        <p:nvSpPr>
-          <p:cNvPr id="12" name="p16-q-1">
-            <a:extLst xmlns:a="http://schemas.openxmlformats.org/drawingml/2006/main">
-              <a:ext uri="{FF2B5EF4-FFF2-40B4-BE49-F238E27FC236}">
-                <a16:creationId xmlns:a16="http://schemas.microsoft.com/office/drawing/2014/main" id="{81798757-4254-4462-9236-F38A6CAD0C33}"/>
-              </a:ext>
-            </a:extLst>
-          </p:cNvPr>
-          <p:cNvSpPr>
-            <a:spLocks xmlns:a="http://schemas.openxmlformats.org/drawingml/2006/main" noGrp="1"/>
-          </p:cNvSpPr>
-          <p:nvPr/>
-        </p:nvSpPr>
-        <p:spPr>
-          <a:xfrm xmlns:a="http://schemas.openxmlformats.org/drawingml/2006/main">
-            <a:off x="6191250" y="3352800"/>
-            <a:ext cx="4953000" cy="628650"/>
-          </a:xfrm>
-          <a:prstGeom xmlns:a="http://schemas.openxmlformats.org/drawingml/2006/main" prst="rect">
-            <a:avLst/>
-          </a:prstGeom>
-          <a:solidFill xmlns:a="http://schemas.openxmlformats.org/drawingml/2006/main">
-            <a:srgbClr val="E8F0F6"/>
-          </a:solidFill>
-          <a:ln xmlns:a="http://schemas.openxmlformats.org/drawingml/2006/main" w="0">
-            <a:noFill/>
-            <a:prstDash val="solid"/>
-          </a:ln>
-        </p:spPr>
-        <p:txBody>
-          <a:bodyPr xmlns:a="http://schemas.openxmlformats.org/drawingml/2006/main" lIns="76200" tIns="38100" rIns="76200" bIns="38100" anchor="ctr"/>
-          <a:lstStyle xmlns:a="http://schemas.openxmlformats.org/drawingml/2006/main"/>
-          <a:p xmlns:a="http://schemas.openxmlformats.org/drawingml/2006/main">
-            <a:pPr algn="ctr">
-              <a:defRPr sz="1575" b="1">
-                <a:solidFill>
-                  <a:srgbClr val="18354E"/>
-                </a:solidFill>
-              </a:defRPr>
-            </a:pPr>
-            <a:r>
-              <a:rPr sz="1575" b="1">
-                <a:solidFill>
-                  <a:srgbClr val="18354E"/>
-                </a:solidFill>
-                <a:latin typeface="Microsoft YaHei"/>
-                <a:ea typeface="Microsoft YaHei"/>
-                <a:cs typeface="Microsoft YaHei"/>
-              </a:rPr>
-              <a:t>2. 纳入 / 排除何时写？</a:t>
-            </a:r>
-          </a:p>
-        </p:txBody>
-      </p:sp>
-      <p:sp>
-        <p:nvSpPr>
-          <p:cNvPr id="13" name="p16-q-2">
-            <a:extLst xmlns:a="http://schemas.openxmlformats.org/drawingml/2006/main">
-              <a:ext uri="{FF2B5EF4-FFF2-40B4-BE49-F238E27FC236}">
-                <a16:creationId xmlns:a16="http://schemas.microsoft.com/office/drawing/2014/main" id="{1272F9A0-42E2-4D9C-B5BD-083FC928D794}"/>
-              </a:ext>
-            </a:extLst>
-          </p:cNvPr>
-          <p:cNvSpPr>
-            <a:spLocks xmlns:a="http://schemas.openxmlformats.org/drawingml/2006/main" noGrp="1"/>
-          </p:cNvSpPr>
-          <p:nvPr/>
-        </p:nvSpPr>
-        <p:spPr>
-          <a:xfrm xmlns:a="http://schemas.openxmlformats.org/drawingml/2006/main">
-            <a:off x="857250" y="4229100"/>
-            <a:ext cx="4953000" cy="628650"/>
-          </a:xfrm>
-          <a:prstGeom xmlns:a="http://schemas.openxmlformats.org/drawingml/2006/main" prst="rect">
-            <a:avLst/>
-          </a:prstGeom>
-          <a:solidFill xmlns:a="http://schemas.openxmlformats.org/drawingml/2006/main">
-            <a:srgbClr val="E8F0F6"/>
-          </a:solidFill>
-          <a:ln xmlns:a="http://schemas.openxmlformats.org/drawingml/2006/main" w="0">
-            <a:noFill/>
-            <a:prstDash val="solid"/>
-          </a:ln>
-        </p:spPr>
-        <p:txBody>
-          <a:bodyPr xmlns:a="http://schemas.openxmlformats.org/drawingml/2006/main" lIns="76200" tIns="38100" rIns="76200" bIns="38100" anchor="ctr"/>
-          <a:lstStyle xmlns:a="http://schemas.openxmlformats.org/drawingml/2006/main"/>
-          <a:p xmlns:a="http://schemas.openxmlformats.org/drawingml/2006/main">
-            <a:pPr algn="ctr">
-              <a:defRPr sz="1575" b="1">
-                <a:solidFill>
-                  <a:srgbClr val="18354E"/>
-                </a:solidFill>
-              </a:defRPr>
-            </a:pPr>
-            <a:r>
-              <a:rPr sz="1575" b="1">
-                <a:solidFill>
-                  <a:srgbClr val="18354E"/>
-                </a:solidFill>
-                <a:latin typeface="Microsoft YaHei"/>
-                <a:ea typeface="Microsoft YaHei"/>
-                <a:cs typeface="Microsoft YaHei"/>
-              </a:rPr>
-              <a:t>3. AI 引文何时仍是线索？</a:t>
-            </a:r>
-          </a:p>
-        </p:txBody>
-      </p:sp>
-      <p:sp>
-        <p:nvSpPr>
-          <p:cNvPr id="14" name="p16-q-3">
-            <a:extLst xmlns:a="http://schemas.openxmlformats.org/drawingml/2006/main">
-              <a:ext uri="{FF2B5EF4-FFF2-40B4-BE49-F238E27FC236}">
-                <a16:creationId xmlns:a16="http://schemas.microsoft.com/office/drawing/2014/main" id="{26B04052-3FB9-4402-B17D-3242337FC2B9}"/>
-              </a:ext>
-            </a:extLst>
-          </p:cNvPr>
-          <p:cNvSpPr>
-            <a:spLocks xmlns:a="http://schemas.openxmlformats.org/drawingml/2006/main" noGrp="1"/>
-          </p:cNvSpPr>
-          <p:nvPr/>
-        </p:nvSpPr>
-        <p:spPr>
-          <a:xfrm xmlns:a="http://schemas.openxmlformats.org/drawingml/2006/main">
-            <a:off x="6191250" y="4229100"/>
-            <a:ext cx="4953000" cy="628650"/>
-          </a:xfrm>
-          <a:prstGeom xmlns:a="http://schemas.openxmlformats.org/drawingml/2006/main" prst="rect">
-            <a:avLst/>
-          </a:prstGeom>
-          <a:solidFill xmlns:a="http://schemas.openxmlformats.org/drawingml/2006/main">
-            <a:srgbClr val="F8E9EA"/>
-          </a:solidFill>
-          <a:ln xmlns:a="http://schemas.openxmlformats.org/drawingml/2006/main" w="0">
-            <a:noFill/>
-            <a:prstDash val="solid"/>
-          </a:ln>
-        </p:spPr>
-        <p:txBody>
-          <a:bodyPr xmlns:a="http://schemas.openxmlformats.org/drawingml/2006/main" lIns="76200" tIns="38100" rIns="76200" bIns="38100" anchor="ctr"/>
-          <a:lstStyle xmlns:a="http://schemas.openxmlformats.org/drawingml/2006/main"/>
-          <a:p xmlns:a="http://schemas.openxmlformats.org/drawingml/2006/main">
-            <a:pPr algn="ctr">
-              <a:defRPr sz="1575" b="1">
-                <a:solidFill>
-                  <a:srgbClr val="C8161E"/>
-                </a:solidFill>
-              </a:defRPr>
-            </a:pPr>
-            <a:r>
-              <a:rPr sz="1575" b="1">
-                <a:solidFill>
-                  <a:srgbClr val="C8161E"/>
-                </a:solidFill>
-                <a:latin typeface="Microsoft YaHei"/>
-                <a:ea typeface="Microsoft YaHei"/>
-                <a:cs typeface="Microsoft YaHei"/>
-              </a:rPr>
-              <a:t>4. caveat 如何进入候选表？</a:t>
-            </a:r>
-          </a:p>
-        </p:txBody>
-      </p:sp>
-      <p:sp>
-        <p:nvSpPr>
-          <p:cNvPr id="15" name="p16-bottom">
-            <a:extLst xmlns:a="http://schemas.openxmlformats.org/drawingml/2006/main">
-              <a:ext uri="{FF2B5EF4-FFF2-40B4-BE49-F238E27FC236}">
-                <a16:creationId xmlns:a16="http://schemas.microsoft.com/office/drawing/2014/main" id="{B89777E0-7BF2-4A67-A7C8-39A9805320D6}"/>
-              </a:ext>
-            </a:extLst>
-          </p:cNvPr>
-          <p:cNvSpPr>
-            <a:spLocks xmlns:a="http://schemas.openxmlformats.org/drawingml/2006/main" noGrp="1"/>
-          </p:cNvSpPr>
-          <p:nvPr/>
-        </p:nvSpPr>
-        <p:spPr>
-          <a:xfrm xmlns:a="http://schemas.openxmlformats.org/drawingml/2006/main">
-            <a:off x="2667000" y="5238750"/>
-            <a:ext cx="6858000" cy="381000"/>
-          </a:xfrm>
-          <a:prstGeom xmlns:a="http://schemas.openxmlformats.org/drawingml/2006/main" prst="rect">
-            <a:avLst/>
-          </a:prstGeom>
-          <a:noFill xmlns:a="http://schemas.openxmlformats.org/drawingml/2006/main"/>
-          <a:ln xmlns:a="http://schemas.openxmlformats.org/drawingml/2006/main" w="0">
-            <a:noFill/>
-            <a:prstDash val="solid"/>
-          </a:ln>
-        </p:spPr>
-        <p:txBody>
-          <a:bodyPr xmlns:a="http://schemas.openxmlformats.org/drawingml/2006/main" lIns="76200" tIns="38100" rIns="76200" bIns="38100" anchor="ctr"/>
-          <a:lstStyle xmlns:a="http://schemas.openxmlformats.org/drawingml/2006/main"/>
-          <a:p xmlns:a="http://schemas.openxmlformats.org/drawingml/2006/main">
-            <a:pPr algn="ctr">
-              <a:defRPr sz="1650" b="1">
-                <a:solidFill>
-                  <a:srgbClr val="C8161E"/>
-                </a:solidFill>
-              </a:defRPr>
-            </a:pPr>
-            <a:r>
-              <a:rPr sz="1650" b="1">
-                <a:solidFill>
-                  <a:srgbClr val="C8161E"/>
-                </a:solidFill>
-                <a:latin typeface="Microsoft YaHei"/>
-                <a:ea typeface="Microsoft YaHei"/>
-                <a:cs typeface="Microsoft YaHei"/>
-              </a:rPr>
-              <a:t>失败不重跑到成功；把核验步骤写回受限流程。</a:t>
+                <a:latin typeface="Microsoft YaHei"/>
+                <a:ea typeface="Microsoft YaHei"/>
+                <a:cs typeface="Microsoft YaHei"/>
+              </a:rPr>
+              <a:t>记忆与模型输出只能作线索；rejected 永不入候选表。</a:t>
             </a:r>
           </a:p>
         </p:txBody>
@@ -10280,7 +10777,7 @@
           <p:cNvPr id="6" name="p17-time">
             <a:extLst xmlns:a="http://schemas.openxmlformats.org/drawingml/2006/main">
               <a:ext uri="{FF2B5EF4-FFF2-40B4-BE49-F238E27FC236}">
-                <a16:creationId xmlns:a16="http://schemas.microsoft.com/office/drawing/2014/main" id="{0ECCB4B1-3478-4B4D-821F-88C5F579E256}"/>
+                <a16:creationId xmlns:a16="http://schemas.microsoft.com/office/drawing/2014/main" id="{BF30F210-C609-48BB-AB4A-74C6E7BBBEE3}"/>
               </a:ext>
             </a:extLst>
           </p:cNvPr>
@@ -10333,7 +10830,7 @@
           <p:cNvPr id="7" name="p17-n-0">
             <a:extLst xmlns:a="http://schemas.openxmlformats.org/drawingml/2006/main">
               <a:ext uri="{FF2B5EF4-FFF2-40B4-BE49-F238E27FC236}">
-                <a16:creationId xmlns:a16="http://schemas.microsoft.com/office/drawing/2014/main" id="{0BE0DA5C-A211-4C76-8395-CAC0223A98DA}"/>
+                <a16:creationId xmlns:a16="http://schemas.microsoft.com/office/drawing/2014/main" id="{45C28544-AA01-4E50-BA94-DDF84647530F}"/>
               </a:ext>
             </a:extLst>
           </p:cNvPr>
@@ -10386,7 +10883,7 @@
           <p:cNvPr id="8" name="p17-t-0">
             <a:extLst xmlns:a="http://schemas.openxmlformats.org/drawingml/2006/main">
               <a:ext uri="{FF2B5EF4-FFF2-40B4-BE49-F238E27FC236}">
-                <a16:creationId xmlns:a16="http://schemas.microsoft.com/office/drawing/2014/main" id="{C3A6C13A-4F0D-4FE5-BC6B-7AFC9D774CA8}"/>
+                <a16:creationId xmlns:a16="http://schemas.microsoft.com/office/drawing/2014/main" id="{16812AC3-F18D-4EBD-B58D-0484D1AE808F}"/>
               </a:ext>
             </a:extLst>
           </p:cNvPr>
@@ -10414,14 +10911,14 @@
           <a:lstStyle xmlns:a="http://schemas.openxmlformats.org/drawingml/2006/main"/>
           <a:p xmlns:a="http://schemas.openxmlformats.org/drawingml/2006/main">
             <a:pPr algn="l">
-              <a:defRPr sz="1575" b="1">
+              <a:defRPr sz="1500" b="1">
                 <a:solidFill>
                   <a:srgbClr val="263746"/>
                 </a:solidFill>
               </a:defRPr>
             </a:pPr>
             <a:r>
-              <a:rPr sz="1575" b="1">
+              <a:rPr sz="1500" b="1">
                 <a:solidFill>
                   <a:srgbClr val="263746"/>
                 </a:solidFill>
@@ -10429,7 +10926,7 @@
                 <a:ea typeface="Microsoft YaHei"/>
                 <a:cs typeface="Microsoft YaHei"/>
               </a:rPr>
-              <a:t>写问题并抽关键词</a:t>
+              <a:t>写问题（或沿用贯穿案例）</a:t>
             </a:r>
           </a:p>
         </p:txBody>
@@ -10439,7 +10936,7 @@
           <p:cNvPr id="9" name="p17-n-1">
             <a:extLst xmlns:a="http://schemas.openxmlformats.org/drawingml/2006/main">
               <a:ext uri="{FF2B5EF4-FFF2-40B4-BE49-F238E27FC236}">
-                <a16:creationId xmlns:a16="http://schemas.microsoft.com/office/drawing/2014/main" id="{FE0FA3C2-5497-4032-BE24-D05AC8B52E54}"/>
+                <a16:creationId xmlns:a16="http://schemas.microsoft.com/office/drawing/2014/main" id="{7D9572D3-6939-42EB-8614-3291CAB1A398}"/>
               </a:ext>
             </a:extLst>
           </p:cNvPr>
@@ -10492,7 +10989,7 @@
           <p:cNvPr id="10" name="p17-t-1">
             <a:extLst xmlns:a="http://schemas.openxmlformats.org/drawingml/2006/main">
               <a:ext uri="{FF2B5EF4-FFF2-40B4-BE49-F238E27FC236}">
-                <a16:creationId xmlns:a16="http://schemas.microsoft.com/office/drawing/2014/main" id="{C9C89818-9779-4B32-B87F-2AE3AA371EE8}"/>
+                <a16:creationId xmlns:a16="http://schemas.microsoft.com/office/drawing/2014/main" id="{72CDBC5B-1932-4284-9ABC-65C43F2546A0}"/>
               </a:ext>
             </a:extLst>
           </p:cNvPr>
@@ -10520,14 +11017,14 @@
           <a:lstStyle xmlns:a="http://schemas.openxmlformats.org/drawingml/2006/main"/>
           <a:p xmlns:a="http://schemas.openxmlformats.org/drawingml/2006/main">
             <a:pPr algn="l">
-              <a:defRPr sz="1575" b="1">
+              <a:defRPr sz="1350" b="1">
                 <a:solidFill>
                   <a:srgbClr val="263746"/>
                 </a:solidFill>
               </a:defRPr>
             </a:pPr>
             <a:r>
-              <a:rPr sz="1575" b="1">
+              <a:rPr sz="1350" b="1">
                 <a:solidFill>
                   <a:srgbClr val="263746"/>
                 </a:solidFill>
@@ -10535,7 +11032,7 @@
                 <a:ea typeface="Microsoft YaHei"/>
                 <a:cs typeface="Microsoft YaHei"/>
               </a:rPr>
-              <a:t>构造检索式</a:t>
+              <a:t>抽 5 个关键词＋同义/上位词</a:t>
             </a:r>
           </a:p>
         </p:txBody>
@@ -10545,7 +11042,7 @@
           <p:cNvPr id="11" name="p17-n-2">
             <a:extLst xmlns:a="http://schemas.openxmlformats.org/drawingml/2006/main">
               <a:ext uri="{FF2B5EF4-FFF2-40B4-BE49-F238E27FC236}">
-                <a16:creationId xmlns:a16="http://schemas.microsoft.com/office/drawing/2014/main" id="{17616D32-0F97-475F-9F08-9568CD1FE973}"/>
+                <a16:creationId xmlns:a16="http://schemas.microsoft.com/office/drawing/2014/main" id="{9B9B8B79-EEDA-4D16-A390-A2269AC7AA72}"/>
               </a:ext>
             </a:extLst>
           </p:cNvPr>
@@ -10598,7 +11095,7 @@
           <p:cNvPr id="12" name="p17-t-2">
             <a:extLst xmlns:a="http://schemas.openxmlformats.org/drawingml/2006/main">
               <a:ext uri="{FF2B5EF4-FFF2-40B4-BE49-F238E27FC236}">
-                <a16:creationId xmlns:a16="http://schemas.microsoft.com/office/drawing/2014/main" id="{4C282693-6867-459D-87DC-63033F4CB36B}"/>
+                <a16:creationId xmlns:a16="http://schemas.microsoft.com/office/drawing/2014/main" id="{C2B66D7A-189A-426E-AB0C-D77102ED3448}"/>
               </a:ext>
             </a:extLst>
           </p:cNvPr>
@@ -10626,14 +11123,14 @@
           <a:lstStyle xmlns:a="http://schemas.openxmlformats.org/drawingml/2006/main"/>
           <a:p xmlns:a="http://schemas.openxmlformats.org/drawingml/2006/main">
             <a:pPr algn="l">
-              <a:defRPr sz="1575" b="1">
+              <a:defRPr sz="1500" b="1">
                 <a:solidFill>
                   <a:srgbClr val="263746"/>
                 </a:solidFill>
               </a:defRPr>
             </a:pPr>
             <a:r>
-              <a:rPr sz="1575" b="1">
+              <a:rPr sz="1500" b="1">
                 <a:solidFill>
                   <a:srgbClr val="263746"/>
                 </a:solidFill>
@@ -10641,7 +11138,7 @@
                 <a:ea typeface="Microsoft YaHei"/>
                 <a:cs typeface="Microsoft YaHei"/>
               </a:rPr>
-              <a:t>保存 1 条检索记录</a:t>
+              <a:t>构造一条检索式</a:t>
             </a:r>
           </a:p>
         </p:txBody>
@@ -10651,7 +11148,7 @@
           <p:cNvPr id="13" name="p17-n-3">
             <a:extLst xmlns:a="http://schemas.openxmlformats.org/drawingml/2006/main">
               <a:ext uri="{FF2B5EF4-FFF2-40B4-BE49-F238E27FC236}">
-                <a16:creationId xmlns:a16="http://schemas.microsoft.com/office/drawing/2014/main" id="{513888A4-C9EA-41CF-93E7-7B86D9EFC05E}"/>
+                <a16:creationId xmlns:a16="http://schemas.microsoft.com/office/drawing/2014/main" id="{AFD9E0BA-5BAA-4434-AD38-74585311A3D9}"/>
               </a:ext>
             </a:extLst>
           </p:cNvPr>
@@ -10704,7 +11201,7 @@
           <p:cNvPr id="14" name="p17-t-3">
             <a:extLst xmlns:a="http://schemas.openxmlformats.org/drawingml/2006/main">
               <a:ext uri="{FF2B5EF4-FFF2-40B4-BE49-F238E27FC236}">
-                <a16:creationId xmlns:a16="http://schemas.microsoft.com/office/drawing/2014/main" id="{219105CF-1B4D-4CC7-94CE-9C6766418811}"/>
+                <a16:creationId xmlns:a16="http://schemas.microsoft.com/office/drawing/2014/main" id="{1CA665E6-71B5-4293-A469-F8346653B4F0}"/>
               </a:ext>
             </a:extLst>
           </p:cNvPr>
@@ -10732,14 +11229,14 @@
           <a:lstStyle xmlns:a="http://schemas.openxmlformats.org/drawingml/2006/main"/>
           <a:p xmlns:a="http://schemas.openxmlformats.org/drawingml/2006/main">
             <a:pPr algn="l">
-              <a:defRPr sz="1575" b="1">
+              <a:defRPr sz="1350" b="1">
                 <a:solidFill>
                   <a:srgbClr val="263746"/>
                 </a:solidFill>
               </a:defRPr>
             </a:pPr>
             <a:r>
-              <a:rPr sz="1575" b="1">
+              <a:rPr sz="1350" b="1">
                 <a:solidFill>
                   <a:srgbClr val="263746"/>
                 </a:solidFill>
@@ -10747,7 +11244,7 @@
                 <a:ea typeface="Microsoft YaHei"/>
                 <a:cs typeface="Microsoft YaHei"/>
               </a:rPr>
-              <a:t>审计至少 2 条来源</a:t>
+              <a:t>让 AI 生成 3-5 条文献线索</a:t>
             </a:r>
           </a:p>
         </p:txBody>
@@ -10757,7 +11254,7 @@
           <p:cNvPr id="15" name="p17-n-4">
             <a:extLst xmlns:a="http://schemas.openxmlformats.org/drawingml/2006/main">
               <a:ext uri="{FF2B5EF4-FFF2-40B4-BE49-F238E27FC236}">
-                <a16:creationId xmlns:a16="http://schemas.microsoft.com/office/drawing/2014/main" id="{816D308E-AD74-422E-99AE-7723BE917F65}"/>
+                <a16:creationId xmlns:a16="http://schemas.microsoft.com/office/drawing/2014/main" id="{64F53F29-3A1A-441F-89C8-DA612CAAB86F}"/>
               </a:ext>
             </a:extLst>
           </p:cNvPr>
@@ -10810,7 +11307,7 @@
           <p:cNvPr id="16" name="p17-t-4">
             <a:extLst xmlns:a="http://schemas.openxmlformats.org/drawingml/2006/main">
               <a:ext uri="{FF2B5EF4-FFF2-40B4-BE49-F238E27FC236}">
-                <a16:creationId xmlns:a16="http://schemas.microsoft.com/office/drawing/2014/main" id="{EFFFF8D0-0250-4527-80B0-6A89CBF18D32}"/>
+                <a16:creationId xmlns:a16="http://schemas.microsoft.com/office/drawing/2014/main" id="{E8BCD25A-249B-4D7C-A889-84C35EFC8C23}"/>
               </a:ext>
             </a:extLst>
           </p:cNvPr>
@@ -10838,14 +11335,14 @@
           <a:lstStyle xmlns:a="http://schemas.openxmlformats.org/drawingml/2006/main"/>
           <a:p xmlns:a="http://schemas.openxmlformats.org/drawingml/2006/main">
             <a:pPr algn="l">
-              <a:defRPr sz="1575" b="1">
+              <a:defRPr sz="1500" b="1">
                 <a:solidFill>
                   <a:srgbClr val="263746"/>
                 </a:solidFill>
               </a:defRPr>
             </a:pPr>
             <a:r>
-              <a:rPr sz="1575" b="1">
+              <a:rPr sz="1500" b="1">
                 <a:solidFill>
                   <a:srgbClr val="263746"/>
                 </a:solidFill>
@@ -10853,7 +11350,7 @@
                 <a:ea typeface="Microsoft YaHei"/>
                 <a:cs typeface="Microsoft YaHei"/>
               </a:rPr>
-              <a:t>保留 1 条 pending/rejected</a:t>
+              <a:t>对至少 2 条执行入口核验</a:t>
             </a:r>
           </a:p>
         </p:txBody>
@@ -10863,7 +11360,7 @@
           <p:cNvPr id="17" name="p17-n-5">
             <a:extLst xmlns:a="http://schemas.openxmlformats.org/drawingml/2006/main">
               <a:ext uri="{FF2B5EF4-FFF2-40B4-BE49-F238E27FC236}">
-                <a16:creationId xmlns:a16="http://schemas.microsoft.com/office/drawing/2014/main" id="{85ABA1DD-68D7-40B0-898A-413EB0E3F554}"/>
+                <a16:creationId xmlns:a16="http://schemas.microsoft.com/office/drawing/2014/main" id="{4A5F5886-1DE3-42F6-AE73-A1A6C3472327}"/>
               </a:ext>
             </a:extLst>
           </p:cNvPr>
@@ -10916,7 +11413,7 @@
           <p:cNvPr id="18" name="p17-t-5">
             <a:extLst xmlns:a="http://schemas.openxmlformats.org/drawingml/2006/main">
               <a:ext uri="{FF2B5EF4-FFF2-40B4-BE49-F238E27FC236}">
-                <a16:creationId xmlns:a16="http://schemas.microsoft.com/office/drawing/2014/main" id="{63585F72-9080-4D2C-B72C-BAB01C764E8C}"/>
+                <a16:creationId xmlns:a16="http://schemas.microsoft.com/office/drawing/2014/main" id="{577B9614-D6F9-4185-A9D3-A86E60791851}"/>
               </a:ext>
             </a:extLst>
           </p:cNvPr>
@@ -10944,14 +11441,14 @@
           <a:lstStyle xmlns:a="http://schemas.openxmlformats.org/drawingml/2006/main"/>
           <a:p xmlns:a="http://schemas.openxmlformats.org/drawingml/2006/main">
             <a:pPr algn="l">
-              <a:defRPr sz="1575" b="1">
+              <a:defRPr sz="1350" b="1">
                 <a:solidFill>
                   <a:srgbClr val="263746"/>
                 </a:solidFill>
               </a:defRPr>
             </a:pPr>
             <a:r>
-              <a:rPr sz="1575" b="1">
+              <a:rPr sz="1350" b="1">
                 <a:solidFill>
                   <a:srgbClr val="263746"/>
                 </a:solidFill>
@@ -10959,7 +11456,7 @@
                 <a:ea typeface="Microsoft YaHei"/>
                 <a:cs typeface="Microsoft YaHei"/>
               </a:rPr>
-              <a:t>写入 1 条 verified/caveat</a:t>
+              <a:t>审计至少 2 条，留 pending/rejected</a:t>
             </a:r>
           </a:p>
         </p:txBody>
@@ -10969,7 +11466,7 @@
           <p:cNvPr id="19" name="p17-n-6">
             <a:extLst xmlns:a="http://schemas.openxmlformats.org/drawingml/2006/main">
               <a:ext uri="{FF2B5EF4-FFF2-40B4-BE49-F238E27FC236}">
-                <a16:creationId xmlns:a16="http://schemas.microsoft.com/office/drawing/2014/main" id="{83406C42-275A-4B3A-9520-5CCA6140086B}"/>
+                <a16:creationId xmlns:a16="http://schemas.microsoft.com/office/drawing/2014/main" id="{61ADA968-83E6-4C7B-AACF-ADD436D1369C}"/>
               </a:ext>
             </a:extLst>
           </p:cNvPr>
@@ -11022,7 +11519,7 @@
           <p:cNvPr id="20" name="p17-t-6">
             <a:extLst xmlns:a="http://schemas.openxmlformats.org/drawingml/2006/main">
               <a:ext uri="{FF2B5EF4-FFF2-40B4-BE49-F238E27FC236}">
-                <a16:creationId xmlns:a16="http://schemas.microsoft.com/office/drawing/2014/main" id="{4EEF6E61-7426-4925-AAA0-991722D5F58D}"/>
+                <a16:creationId xmlns:a16="http://schemas.microsoft.com/office/drawing/2014/main" id="{AE986987-E9CF-4C87-A2E1-CAD21AABF090}"/>
               </a:ext>
             </a:extLst>
           </p:cNvPr>
@@ -11050,14 +11547,14 @@
           <a:lstStyle xmlns:a="http://schemas.openxmlformats.org/drawingml/2006/main"/>
           <a:p xmlns:a="http://schemas.openxmlformats.org/drawingml/2006/main">
             <a:pPr algn="l">
-              <a:defRPr sz="1575" b="1">
+              <a:defRPr sz="1500" b="1">
                 <a:solidFill>
                   <a:srgbClr val="263746"/>
                 </a:solidFill>
               </a:defRPr>
             </a:pPr>
             <a:r>
-              <a:rPr sz="1575" b="1">
+              <a:rPr sz="1500" b="1">
                 <a:solidFill>
                   <a:srgbClr val="263746"/>
                 </a:solidFill>
@@ -11075,7 +11572,7 @@
           <p:cNvPr id="21" name="p17-n-7">
             <a:extLst xmlns:a="http://schemas.openxmlformats.org/drawingml/2006/main">
               <a:ext uri="{FF2B5EF4-FFF2-40B4-BE49-F238E27FC236}">
-                <a16:creationId xmlns:a16="http://schemas.microsoft.com/office/drawing/2014/main" id="{729DEB1B-D828-46AF-94A8-D25829D73F4D}"/>
+                <a16:creationId xmlns:a16="http://schemas.microsoft.com/office/drawing/2014/main" id="{47212304-CDAE-4842-BACF-28BD62FDC521}"/>
               </a:ext>
             </a:extLst>
           </p:cNvPr>
@@ -11128,7 +11625,7 @@
           <p:cNvPr id="22" name="p17-t-7">
             <a:extLst xmlns:a="http://schemas.openxmlformats.org/drawingml/2006/main">
               <a:ext uri="{FF2B5EF4-FFF2-40B4-BE49-F238E27FC236}">
-                <a16:creationId xmlns:a16="http://schemas.microsoft.com/office/drawing/2014/main" id="{C8DD235B-1AEC-4E25-8766-6D27E5920E9E}"/>
+                <a16:creationId xmlns:a16="http://schemas.microsoft.com/office/drawing/2014/main" id="{7F7588A2-4AD0-481B-A39D-AF4EE136CAC9}"/>
               </a:ext>
             </a:extLst>
           </p:cNvPr>
@@ -11156,14 +11653,14 @@
           <a:lstStyle xmlns:a="http://schemas.openxmlformats.org/drawingml/2006/main"/>
           <a:p xmlns:a="http://schemas.openxmlformats.org/drawingml/2006/main">
             <a:pPr algn="l">
-              <a:defRPr sz="1575" b="1">
+              <a:defRPr sz="1500" b="1">
                 <a:solidFill>
                   <a:srgbClr val="263746"/>
                 </a:solidFill>
               </a:defRPr>
             </a:pPr>
             <a:r>
-              <a:rPr sz="1575" b="1">
+              <a:rPr sz="1500" b="1">
                 <a:solidFill>
                   <a:srgbClr val="263746"/>
                 </a:solidFill>
@@ -11181,7 +11678,7 @@
           <p:cNvPr id="23" name="p17-choice">
             <a:extLst xmlns:a="http://schemas.openxmlformats.org/drawingml/2006/main">
               <a:ext uri="{FF2B5EF4-FFF2-40B4-BE49-F238E27FC236}">
-                <a16:creationId xmlns:a16="http://schemas.microsoft.com/office/drawing/2014/main" id="{0541807B-4257-4973-AE84-D3D875C9B22F}"/>
+                <a16:creationId xmlns:a16="http://schemas.microsoft.com/office/drawing/2014/main" id="{D5859FC7-EF3E-424E-BE26-66F921BE0B22}"/>
               </a:ext>
             </a:extLst>
           </p:cNvPr>
@@ -11365,7 +11862,7 @@
           <p:cNvPr id="24" name="p17-bottom">
             <a:extLst xmlns:a="http://schemas.openxmlformats.org/drawingml/2006/main">
               <a:ext uri="{FF2B5EF4-FFF2-40B4-BE49-F238E27FC236}">
-                <a16:creationId xmlns:a16="http://schemas.microsoft.com/office/drawing/2014/main" id="{AA7C408A-5A82-49C4-82C4-4E3A5C351F6F}"/>
+                <a16:creationId xmlns:a16="http://schemas.microsoft.com/office/drawing/2014/main" id="{318F6C64-9004-4579-AB07-33A63E32469A}"/>
               </a:ext>
             </a:extLst>
           </p:cNvPr>
@@ -11510,7 +12007,7 @@
           <p:cNvPr id="6" name="p18-time">
             <a:extLst xmlns:a="http://schemas.openxmlformats.org/drawingml/2006/main">
               <a:ext uri="{FF2B5EF4-FFF2-40B4-BE49-F238E27FC236}">
-                <a16:creationId xmlns:a16="http://schemas.microsoft.com/office/drawing/2014/main" id="{BB5537F6-2E8A-46C2-881E-53F6F1F75CCF}"/>
+                <a16:creationId xmlns:a16="http://schemas.microsoft.com/office/drawing/2014/main" id="{7FB29177-1C3F-4145-9F39-A6243F0CCF3C}"/>
               </a:ext>
             </a:extLst>
           </p:cNvPr>
@@ -11563,7 +12060,7 @@
           <p:cNvPr id="7" name="p18-left-title">
             <a:extLst xmlns:a="http://schemas.openxmlformats.org/drawingml/2006/main">
               <a:ext uri="{FF2B5EF4-FFF2-40B4-BE49-F238E27FC236}">
-                <a16:creationId xmlns:a16="http://schemas.microsoft.com/office/drawing/2014/main" id="{089835B0-D148-4A78-A8F9-93CAB449F015}"/>
+                <a16:creationId xmlns:a16="http://schemas.microsoft.com/office/drawing/2014/main" id="{B5AB10A1-08AA-4FD7-A4F4-155D6199AA2C}"/>
               </a:ext>
             </a:extLst>
           </p:cNvPr>
@@ -11616,7 +12113,7 @@
           <p:cNvPr id="8" name="p18-left">
             <a:extLst xmlns:a="http://schemas.openxmlformats.org/drawingml/2006/main">
               <a:ext uri="{FF2B5EF4-FFF2-40B4-BE49-F238E27FC236}">
-                <a16:creationId xmlns:a16="http://schemas.microsoft.com/office/drawing/2014/main" id="{AACDA740-0CC4-40BE-B44A-5EC866806CF5}"/>
+                <a16:creationId xmlns:a16="http://schemas.microsoft.com/office/drawing/2014/main" id="{F9897267-FF9E-4FB4-9009-3867BD8969FA}"/>
               </a:ext>
             </a:extLst>
           </p:cNvPr>
@@ -11845,7 +12342,7 @@
           <p:cNvPr id="9" name="p18-right-title">
             <a:extLst xmlns:a="http://schemas.openxmlformats.org/drawingml/2006/main">
               <a:ext uri="{FF2B5EF4-FFF2-40B4-BE49-F238E27FC236}">
-                <a16:creationId xmlns:a16="http://schemas.microsoft.com/office/drawing/2014/main" id="{BC2D24CF-50AC-42F4-B0CE-FFB12482DA76}"/>
+                <a16:creationId xmlns:a16="http://schemas.microsoft.com/office/drawing/2014/main" id="{E0D22040-A52A-41C2-BDF3-FC14D7ADDCEC}"/>
               </a:ext>
             </a:extLst>
           </p:cNvPr>
@@ -11872,15 +12369,15 @@
           <a:bodyPr xmlns:a="http://schemas.openxmlformats.org/drawingml/2006/main" lIns="76200" tIns="38100" rIns="76200" bIns="38100" anchor="ctr"/>
           <a:lstStyle xmlns:a="http://schemas.openxmlformats.org/drawingml/2006/main"/>
           <a:p xmlns:a="http://schemas.openxmlformats.org/drawingml/2006/main">
-            <a:pPr algn="l">
-              <a:defRPr sz="1800" b="1">
+            <a:pPr algn="ctr">
+              <a:defRPr sz="1500" b="1">
                 <a:solidFill>
                   <a:srgbClr val="C8161E"/>
                 </a:solidFill>
               </a:defRPr>
             </a:pPr>
             <a:r>
-              <a:rPr sz="1800" b="1">
+              <a:rPr sz="1500" b="1">
                 <a:solidFill>
                   <a:srgbClr val="C8161E"/>
                 </a:solidFill>
@@ -11888,7 +12385,7 @@
                 <a:ea typeface="Microsoft YaHei"/>
                 <a:cs typeface="Microsoft YaHei"/>
               </a:rPr>
-              <a:t>候选文献表</a:t>
+              <a:t>候选文献表（十字段，只放纳入且非 rejected 条目）</a:t>
             </a:r>
           </a:p>
         </p:txBody>
@@ -11898,7 +12395,7 @@
           <p:cNvPr id="10" name="p18-right">
             <a:extLst xmlns:a="http://schemas.openxmlformats.org/drawingml/2006/main">
               <a:ext uri="{FF2B5EF4-FFF2-40B4-BE49-F238E27FC236}">
-                <a16:creationId xmlns:a16="http://schemas.microsoft.com/office/drawing/2014/main" id="{8CC67B80-1F3E-45B0-8B0E-752E41FA3BAB}"/>
+                <a16:creationId xmlns:a16="http://schemas.microsoft.com/office/drawing/2014/main" id="{3D3E2A82-E90A-4BEA-8AD2-E5346A98C5B0}"/>
               </a:ext>
             </a:extLst>
           </p:cNvPr>
@@ -11910,7 +12407,7 @@
         <p:spPr>
           <a:xfrm xmlns:a="http://schemas.openxmlformats.org/drawingml/2006/main">
             <a:off x="6096000" y="1562100"/>
-            <a:ext cx="5429250" cy="2247900"/>
+            <a:ext cx="5429250" cy="1676400"/>
           </a:xfrm>
           <a:prstGeom xmlns:a="http://schemas.openxmlformats.org/drawingml/2006/main" prst="rect">
             <a:avLst/>
@@ -11926,22 +12423,22 @@
           </a:ln>
         </p:spPr>
         <p:txBody>
-          <a:bodyPr xmlns:a="http://schemas.openxmlformats.org/drawingml/2006/main" lIns="190500" tIns="152400" rIns="190500" bIns="152400" anchor="t"/>
+          <a:bodyPr xmlns:a="http://schemas.openxmlformats.org/drawingml/2006/main" lIns="190500" tIns="133350" rIns="190500" bIns="133350" anchor="t"/>
           <a:lstStyle xmlns:a="http://schemas.openxmlformats.org/drawingml/2006/main"/>
           <a:p xmlns:a="http://schemas.openxmlformats.org/drawingml/2006/main">
             <a:pPr algn="l">
               <a:lnSpc>
-                <a:spcPct val="125000"/>
+                <a:spcPct val="122000"/>
               </a:lnSpc>
               <a:buNone/>
-              <a:defRPr sz="1500" b="0">
+              <a:defRPr sz="1350" b="0">
                 <a:solidFill>
                   <a:srgbClr val="263746"/>
                 </a:solidFill>
               </a:defRPr>
             </a:pPr>
             <a:r>
-              <a:rPr sz="1500" b="0">
+              <a:rPr sz="1350" b="0">
                 <a:solidFill>
                   <a:srgbClr val="263746"/>
                 </a:solidFill>
@@ -11949,23 +12446,23 @@
                 <a:ea typeface="Consolas"/>
                 <a:cs typeface="Consolas"/>
               </a:rPr>
-              <a:t>| 编号 | 题名（核验后） |</a:t>
+              <a:t>| 编号 | 题名（核验后） | 作者 | 年份 |</a:t>
             </a:r>
           </a:p>
           <a:p xmlns:a="http://schemas.openxmlformats.org/drawingml/2006/main">
             <a:pPr algn="l">
               <a:lnSpc>
-                <a:spcPct val="125000"/>
+                <a:spcPct val="122000"/>
               </a:lnSpc>
               <a:buNone/>
-              <a:defRPr sz="1500" b="0">
+              <a:defRPr sz="1350" b="0">
                 <a:solidFill>
                   <a:srgbClr val="263746"/>
                 </a:solidFill>
               </a:defRPr>
             </a:pPr>
             <a:r>
-              <a:rPr sz="1500" b="0">
+              <a:rPr sz="1350" b="0">
                 <a:solidFill>
                   <a:srgbClr val="263746"/>
                 </a:solidFill>
@@ -11973,23 +12470,23 @@
                 <a:ea typeface="Consolas"/>
                 <a:cs typeface="Consolas"/>
               </a:rPr>
-              <a:t>| 作者 | 年份 |</a:t>
+              <a:t>| 稳定来源 | 对应问题/拟用主张 |</a:t>
             </a:r>
           </a:p>
           <a:p xmlns:a="http://schemas.openxmlformats.org/drawingml/2006/main">
             <a:pPr algn="l">
               <a:lnSpc>
-                <a:spcPct val="125000"/>
+                <a:spcPct val="122000"/>
               </a:lnSpc>
               <a:buNone/>
-              <a:defRPr sz="1500" b="0">
+              <a:defRPr sz="1350" b="0">
                 <a:solidFill>
                   <a:srgbClr val="263746"/>
                 </a:solidFill>
               </a:defRPr>
             </a:pPr>
             <a:r>
-              <a:rPr sz="1500" b="0">
+              <a:rPr sz="1350" b="0">
                 <a:solidFill>
                   <a:srgbClr val="263746"/>
                 </a:solidFill>
@@ -11997,23 +12494,23 @@
                 <a:ea typeface="Consolas"/>
                 <a:cs typeface="Consolas"/>
               </a:rPr>
-              <a:t>| 正式来源 | 证据角色 |</a:t>
+              <a:t>| 预期证据角色 | 纳入理由 |</a:t>
             </a:r>
           </a:p>
           <a:p xmlns:a="http://schemas.openxmlformats.org/drawingml/2006/main">
             <a:pPr algn="l">
               <a:lnSpc>
-                <a:spcPct val="125000"/>
+                <a:spcPct val="122000"/>
               </a:lnSpc>
               <a:buNone/>
-              <a:defRPr sz="1500" b="0">
+              <a:defRPr sz="1350" b="0">
                 <a:solidFill>
                   <a:srgbClr val="263746"/>
                 </a:solidFill>
               </a:defRPr>
             </a:pPr>
             <a:r>
-              <a:rPr sz="1500" b="0">
+              <a:rPr sz="1350" b="0">
                 <a:solidFill>
                   <a:srgbClr val="263746"/>
                 </a:solidFill>
@@ -12021,53 +12518,112 @@
                 <a:ea typeface="Consolas"/>
                 <a:cs typeface="Consolas"/>
               </a:rPr>
-              <a:t>| 纳入 / 排除 | 理由 |</a:t>
-            </a:r>
-          </a:p>
-          <a:p xmlns:a="http://schemas.openxmlformats.org/drawingml/2006/main">
-            <a:pPr algn="l">
+              <a:t>| 核验状态 | caveat/允许主张 |</a:t>
+            </a:r>
+          </a:p>
+        </p:txBody>
+      </p:sp>
+      <p:sp>
+        <p:nvSpPr>
+          <p:cNvPr id="11" name="p18-extra">
+            <a:extLst xmlns:a="http://schemas.openxmlformats.org/drawingml/2006/main">
+              <a:ext uri="{FF2B5EF4-FFF2-40B4-BE49-F238E27FC236}">
+                <a16:creationId xmlns:a16="http://schemas.microsoft.com/office/drawing/2014/main" id="{3958DEF8-588B-4F7D-A2B1-53D91F7F299A}"/>
+              </a:ext>
+            </a:extLst>
+          </p:cNvPr>
+          <p:cNvSpPr>
+            <a:spLocks xmlns:a="http://schemas.openxmlformats.org/drawingml/2006/main" noGrp="1"/>
+          </p:cNvSpPr>
+          <p:nvPr/>
+        </p:nvSpPr>
+        <p:spPr>
+          <a:xfrm xmlns:a="http://schemas.openxmlformats.org/drawingml/2006/main">
+            <a:off x="6096000" y="3352800"/>
+            <a:ext cx="5429250" cy="704850"/>
+          </a:xfrm>
+          <a:prstGeom xmlns:a="http://schemas.openxmlformats.org/drawingml/2006/main" prst="rect">
+            <a:avLst/>
+          </a:prstGeom>
+          <a:solidFill xmlns:a="http://schemas.openxmlformats.org/drawingml/2006/main">
+            <a:srgbClr val="F3F6F7"/>
+          </a:solidFill>
+          <a:ln xmlns:a="http://schemas.openxmlformats.org/drawingml/2006/main" w="0">
+            <a:noFill/>
+            <a:prstDash val="solid"/>
+          </a:ln>
+        </p:spPr>
+        <p:txBody>
+          <a:bodyPr xmlns:a="http://schemas.openxmlformats.org/drawingml/2006/main" lIns="76200" tIns="38100" rIns="76200" bIns="38100" anchor="ctr"/>
+          <a:lstStyle xmlns:a="http://schemas.openxmlformats.org/drawingml/2006/main"/>
+          <a:p xmlns:a="http://schemas.openxmlformats.org/drawingml/2006/main">
+            <a:pPr algn="ctr">
               <a:lnSpc>
-                <a:spcPct val="125000"/>
+                <a:spcPct val="118000"/>
               </a:lnSpc>
               <a:buNone/>
-              <a:defRPr sz="1500" b="0">
+              <a:defRPr sz="1350" b="1">
                 <a:solidFill>
                   <a:srgbClr val="263746"/>
                 </a:solidFill>
               </a:defRPr>
             </a:pPr>
             <a:r>
-              <a:rPr sz="1500" b="0">
+              <a:rPr sz="1350" b="1">
                 <a:solidFill>
                   <a:srgbClr val="263746"/>
                 </a:solidFill>
-                <a:latin typeface="Consolas"/>
-                <a:ea typeface="Consolas"/>
-                <a:cs typeface="Consolas"/>
-              </a:rPr>
-              <a:t>| 核验状态 |</a:t>
-            </a:r>
-          </a:p>
-        </p:txBody>
-      </p:sp>
-      <p:sp>
-        <p:nvSpPr>
-          <p:cNvPr id="11" name="p18-path">
-            <a:extLst xmlns:a="http://schemas.openxmlformats.org/drawingml/2006/main">
-              <a:ext uri="{FF2B5EF4-FFF2-40B4-BE49-F238E27FC236}">
-                <a16:creationId xmlns:a16="http://schemas.microsoft.com/office/drawing/2014/main" id="{68115FF5-0EF7-4B6C-83CE-49689DA4C845}"/>
-              </a:ext>
-            </a:extLst>
-          </p:cNvPr>
-          <p:cNvSpPr>
-            <a:spLocks xmlns:a="http://schemas.openxmlformats.org/drawingml/2006/main" noGrp="1"/>
-          </p:cNvSpPr>
-          <p:nvPr/>
-        </p:nvSpPr>
-        <p:spPr>
-          <a:xfrm xmlns:a="http://schemas.openxmlformats.org/drawingml/2006/main">
-            <a:off x="6096000" y="4038600"/>
-            <a:ext cx="5429250" cy="781050"/>
+                <a:latin typeface="Microsoft YaHei"/>
+                <a:ea typeface="Microsoft YaHei"/>
+                <a:cs typeface="Microsoft YaHei"/>
+              </a:rPr>
+              <a:t>另建：检索与筛选记录（含排除理由）｜来源审计记录（含 rejected）</a:t>
+            </a:r>
+          </a:p>
+          <a:p xmlns:a="http://schemas.openxmlformats.org/drawingml/2006/main">
+            <a:pPr algn="ctr">
+              <a:lnSpc>
+                <a:spcPct val="118000"/>
+              </a:lnSpc>
+              <a:buNone/>
+              <a:defRPr sz="1350" b="1">
+                <a:solidFill>
+                  <a:srgbClr val="263746"/>
+                </a:solidFill>
+              </a:defRPr>
+            </a:pPr>
+            <a:r>
+              <a:rPr sz="1350" b="1">
+                <a:solidFill>
+                  <a:srgbClr val="263746"/>
+                </a:solidFill>
+                <a:latin typeface="Microsoft YaHei"/>
+                <a:ea typeface="Microsoft YaHei"/>
+                <a:cs typeface="Microsoft YaHei"/>
+              </a:rPr>
+              <a:t>统一写入：notes/literature-search.md</a:t>
+            </a:r>
+          </a:p>
+        </p:txBody>
+      </p:sp>
+      <p:sp>
+        <p:nvSpPr>
+          <p:cNvPr id="12" name="p18-path">
+            <a:extLst xmlns:a="http://schemas.openxmlformats.org/drawingml/2006/main">
+              <a:ext uri="{FF2B5EF4-FFF2-40B4-BE49-F238E27FC236}">
+                <a16:creationId xmlns:a16="http://schemas.microsoft.com/office/drawing/2014/main" id="{F0FD6C15-54AE-4B74-8CF3-046144B289CB}"/>
+              </a:ext>
+            </a:extLst>
+          </p:cNvPr>
+          <p:cNvSpPr>
+            <a:spLocks xmlns:a="http://schemas.openxmlformats.org/drawingml/2006/main" noGrp="1"/>
+          </p:cNvSpPr>
+          <p:nvPr/>
+        </p:nvSpPr>
+        <p:spPr>
+          <a:xfrm xmlns:a="http://schemas.openxmlformats.org/drawingml/2006/main">
+            <a:off x="6096000" y="4171950"/>
+            <a:ext cx="5429250" cy="647700"/>
           </a:xfrm>
           <a:prstGeom xmlns:a="http://schemas.openxmlformats.org/drawingml/2006/main" prst="rect">
             <a:avLst/>
@@ -12085,14 +12641,14 @@
           <a:lstStyle xmlns:a="http://schemas.openxmlformats.org/drawingml/2006/main"/>
           <a:p xmlns:a="http://schemas.openxmlformats.org/drawingml/2006/main">
             <a:pPr algn="ctr">
-              <a:defRPr sz="1500" b="1">
+              <a:defRPr sz="1425" b="1">
                 <a:solidFill>
                   <a:srgbClr val="18354E"/>
                 </a:solidFill>
               </a:defRPr>
             </a:pPr>
             <a:r>
-              <a:rPr sz="1500" b="1">
+              <a:rPr sz="1425" b="1">
                 <a:solidFill>
                   <a:srgbClr val="18354E"/>
                 </a:solidFill>
@@ -12105,14 +12661,14 @@
           </a:p>
           <a:p xmlns:a="http://schemas.openxmlformats.org/drawingml/2006/main">
             <a:pPr algn="ctr">
-              <a:defRPr sz="1500" b="1">
+              <a:defRPr sz="1425" b="1">
                 <a:solidFill>
                   <a:srgbClr val="18354E"/>
                 </a:solidFill>
               </a:defRPr>
             </a:pPr>
             <a:r>
-              <a:rPr sz="1500" b="1">
+              <a:rPr sz="1425" b="1">
                 <a:solidFill>
                   <a:srgbClr val="18354E"/>
                 </a:solidFill>
@@ -12127,10 +12683,10 @@
       </p:sp>
       <p:sp>
         <p:nvSpPr>
-          <p:cNvPr id="12" name="p18-bottom">
-            <a:extLst xmlns:a="http://schemas.openxmlformats.org/drawingml/2006/main">
-              <a:ext uri="{FF2B5EF4-FFF2-40B4-BE49-F238E27FC236}">
-                <a16:creationId xmlns:a16="http://schemas.microsoft.com/office/drawing/2014/main" id="{E241461C-0DFB-4878-B10B-F62EC4282CF8}"/>
+          <p:cNvPr id="13" name="p18-bottom">
+            <a:extLst xmlns:a="http://schemas.openxmlformats.org/drawingml/2006/main">
+              <a:ext uri="{FF2B5EF4-FFF2-40B4-BE49-F238E27FC236}">
+                <a16:creationId xmlns:a16="http://schemas.microsoft.com/office/drawing/2014/main" id="{6E90866F-7080-4730-A1CC-A71E187E5BE3}"/>
               </a:ext>
             </a:extLst>
           </p:cNvPr>
@@ -12275,7 +12831,7 @@
           <p:cNvPr id="6" name="p19-mode">
             <a:extLst xmlns:a="http://schemas.openxmlformats.org/drawingml/2006/main">
               <a:ext uri="{FF2B5EF4-FFF2-40B4-BE49-F238E27FC236}">
-                <a16:creationId xmlns:a16="http://schemas.microsoft.com/office/drawing/2014/main" id="{9C67E598-A308-40CD-9ADD-1F8619E0EAD1}"/>
+                <a16:creationId xmlns:a16="http://schemas.microsoft.com/office/drawing/2014/main" id="{E23DBB3F-55E9-4C92-9F1F-0BBC9D4EC926}"/>
               </a:ext>
             </a:extLst>
           </p:cNvPr>
@@ -12328,7 +12884,7 @@
           <p:cNvPr id="7" name="p19-qn-0">
             <a:extLst xmlns:a="http://schemas.openxmlformats.org/drawingml/2006/main">
               <a:ext uri="{FF2B5EF4-FFF2-40B4-BE49-F238E27FC236}">
-                <a16:creationId xmlns:a16="http://schemas.microsoft.com/office/drawing/2014/main" id="{438120E6-A296-4B4B-909F-90A06FF80381}"/>
+                <a16:creationId xmlns:a16="http://schemas.microsoft.com/office/drawing/2014/main" id="{8F8A7F9B-DE30-43A3-97DC-EC64BA0BA01B}"/>
               </a:ext>
             </a:extLst>
           </p:cNvPr>
@@ -12381,7 +12937,7 @@
           <p:cNvPr id="8" name="p19-q-0">
             <a:extLst xmlns:a="http://schemas.openxmlformats.org/drawingml/2006/main">
               <a:ext uri="{FF2B5EF4-FFF2-40B4-BE49-F238E27FC236}">
-                <a16:creationId xmlns:a16="http://schemas.microsoft.com/office/drawing/2014/main" id="{E6FC83AC-B16B-40F1-8FFE-F331378390AC}"/>
+                <a16:creationId xmlns:a16="http://schemas.microsoft.com/office/drawing/2014/main" id="{98B3039F-0465-403F-AC09-953C751DD1FB}"/>
               </a:ext>
             </a:extLst>
           </p:cNvPr>
@@ -12464,7 +13020,7 @@
           <p:cNvPr id="9" name="p19-qn-1">
             <a:extLst xmlns:a="http://schemas.openxmlformats.org/drawingml/2006/main">
               <a:ext uri="{FF2B5EF4-FFF2-40B4-BE49-F238E27FC236}">
-                <a16:creationId xmlns:a16="http://schemas.microsoft.com/office/drawing/2014/main" id="{8CE35E77-EC22-424B-B3E1-218F51E9F2C3}"/>
+                <a16:creationId xmlns:a16="http://schemas.microsoft.com/office/drawing/2014/main" id="{7425F305-79B1-4C32-B89D-FDB2EFCA1735}"/>
               </a:ext>
             </a:extLst>
           </p:cNvPr>
@@ -12517,7 +13073,7 @@
           <p:cNvPr id="10" name="p19-q-1">
             <a:extLst xmlns:a="http://schemas.openxmlformats.org/drawingml/2006/main">
               <a:ext uri="{FF2B5EF4-FFF2-40B4-BE49-F238E27FC236}">
-                <a16:creationId xmlns:a16="http://schemas.microsoft.com/office/drawing/2014/main" id="{702BE61B-D817-4A31-8CFD-9F0645C35724}"/>
+                <a16:creationId xmlns:a16="http://schemas.microsoft.com/office/drawing/2014/main" id="{1251D06D-2D84-432C-94D5-1E3F8443B96C}"/>
               </a:ext>
             </a:extLst>
           </p:cNvPr>
@@ -12566,7 +13122,7 @@
                 <a:ea typeface="Microsoft YaHei"/>
                 <a:cs typeface="Microsoft YaHei"/>
               </a:rPr>
-              <a:t>证据角色清楚吗？</a:t>
+              <a:t>预期角色有对应问题/拟用主张吗？</a:t>
             </a:r>
           </a:p>
           <a:p xmlns:a="http://schemas.openxmlformats.org/drawingml/2006/main">
@@ -12590,7 +13146,7 @@
                 <a:ea typeface="Microsoft YaHei"/>
                 <a:cs typeface="Microsoft YaHei"/>
               </a:rPr>
-              <a:t>每条 verified 标了角色吗？</a:t>
+              <a:t>是否与状态、筛选决定分开？</a:t>
             </a:r>
           </a:p>
         </p:txBody>
@@ -12600,7 +13156,7 @@
           <p:cNvPr id="11" name="p19-qn-2">
             <a:extLst xmlns:a="http://schemas.openxmlformats.org/drawingml/2006/main">
               <a:ext uri="{FF2B5EF4-FFF2-40B4-BE49-F238E27FC236}">
-                <a16:creationId xmlns:a16="http://schemas.microsoft.com/office/drawing/2014/main" id="{083FF1BD-2376-4504-ABAF-F154D3517406}"/>
+                <a16:creationId xmlns:a16="http://schemas.microsoft.com/office/drawing/2014/main" id="{747B1D60-2EDA-4E9F-8242-DF8AF2F57783}"/>
               </a:ext>
             </a:extLst>
           </p:cNvPr>
@@ -12653,7 +13209,7 @@
           <p:cNvPr id="12" name="p19-q-2">
             <a:extLst xmlns:a="http://schemas.openxmlformats.org/drawingml/2006/main">
               <a:ext uri="{FF2B5EF4-FFF2-40B4-BE49-F238E27FC236}">
-                <a16:creationId xmlns:a16="http://schemas.microsoft.com/office/drawing/2014/main" id="{B865F0D7-C93F-4A7F-AA40-847DF65F61F1}"/>
+                <a16:creationId xmlns:a16="http://schemas.microsoft.com/office/drawing/2014/main" id="{AEC4FA15-8B39-4169-8E3F-14584072E424}"/>
               </a:ext>
             </a:extLst>
           </p:cNvPr>
@@ -12702,7 +13258,7 @@
                 <a:ea typeface="Microsoft YaHei"/>
                 <a:cs typeface="Microsoft YaHei"/>
               </a:rPr>
-              <a:t>AI 输出回原文了吗？</a:t>
+              <a:t>身份与一条拟用主张回原文了吗？</a:t>
             </a:r>
           </a:p>
           <a:p xmlns:a="http://schemas.openxmlformats.org/drawingml/2006/main">
@@ -12726,7 +13282,7 @@
                 <a:ea typeface="Microsoft YaHei"/>
                 <a:cs typeface="Microsoft YaHei"/>
               </a:rPr>
-              <a:t>rejected / pending 有理由吗？</a:t>
+              <a:t>rejected / pending 理由成立吗？</a:t>
             </a:r>
           </a:p>
         </p:txBody>
@@ -12736,7 +13292,7 @@
           <p:cNvPr id="13" name="p19-state">
             <a:extLst xmlns:a="http://schemas.openxmlformats.org/drawingml/2006/main">
               <a:ext uri="{FF2B5EF4-FFF2-40B4-BE49-F238E27FC236}">
-                <a16:creationId xmlns:a16="http://schemas.microsoft.com/office/drawing/2014/main" id="{9A7C31BC-8E1E-4D9A-864C-6D370810CFF0}"/>
+                <a16:creationId xmlns:a16="http://schemas.microsoft.com/office/drawing/2014/main" id="{F88448D1-E9A3-4CBA-A71E-640AA67A9227}"/>
               </a:ext>
             </a:extLst>
           </p:cNvPr>
@@ -12872,7 +13428,7 @@
           <p:cNvPr id="14" name="p19-bottom">
             <a:extLst xmlns:a="http://schemas.openxmlformats.org/drawingml/2006/main">
               <a:ext uri="{FF2B5EF4-FFF2-40B4-BE49-F238E27FC236}">
-                <a16:creationId xmlns:a16="http://schemas.microsoft.com/office/drawing/2014/main" id="{1DA1BD68-6587-4357-8A3C-104C3FA25063}"/>
+                <a16:creationId xmlns:a16="http://schemas.microsoft.com/office/drawing/2014/main" id="{266891A0-9F96-4FF7-BDF5-6249C5C18AD1}"/>
               </a:ext>
             </a:extLst>
           </p:cNvPr>
@@ -13017,7 +13573,7 @@
           <p:cNvPr id="6" name="p02-left-title">
             <a:extLst xmlns:a="http://schemas.openxmlformats.org/drawingml/2006/main">
               <a:ext uri="{FF2B5EF4-FFF2-40B4-BE49-F238E27FC236}">
-                <a16:creationId xmlns:a16="http://schemas.microsoft.com/office/drawing/2014/main" id="{84A5E762-1611-496D-A1A8-C4B00F5BC75E}"/>
+                <a16:creationId xmlns:a16="http://schemas.microsoft.com/office/drawing/2014/main" id="{B86F6C93-DA40-4FD1-8534-49EC24850192}"/>
               </a:ext>
             </a:extLst>
           </p:cNvPr>
@@ -13070,7 +13626,7 @@
           <p:cNvPr id="7" name="p02-l-0">
             <a:extLst xmlns:a="http://schemas.openxmlformats.org/drawingml/2006/main">
               <a:ext uri="{FF2B5EF4-FFF2-40B4-BE49-F238E27FC236}">
-                <a16:creationId xmlns:a16="http://schemas.microsoft.com/office/drawing/2014/main" id="{56D02CD2-CA1C-437E-B03B-A9BB12194991}"/>
+                <a16:creationId xmlns:a16="http://schemas.microsoft.com/office/drawing/2014/main" id="{8B615ED7-B2DA-46AF-B304-060041640652}"/>
               </a:ext>
             </a:extLst>
           </p:cNvPr>
@@ -13125,7 +13681,7 @@
           <p:cNvPr id="8" name="p02-l-1">
             <a:extLst xmlns:a="http://schemas.openxmlformats.org/drawingml/2006/main">
               <a:ext uri="{FF2B5EF4-FFF2-40B4-BE49-F238E27FC236}">
-                <a16:creationId xmlns:a16="http://schemas.microsoft.com/office/drawing/2014/main" id="{FB46987E-70BF-4992-96EB-FBBB94ABBF14}"/>
+                <a16:creationId xmlns:a16="http://schemas.microsoft.com/office/drawing/2014/main" id="{141BC58A-79E3-4AD0-BD7D-684679AC166C}"/>
               </a:ext>
             </a:extLst>
           </p:cNvPr>
@@ -13180,7 +13736,7 @@
           <p:cNvPr id="9" name="p02-l-2">
             <a:extLst xmlns:a="http://schemas.openxmlformats.org/drawingml/2006/main">
               <a:ext uri="{FF2B5EF4-FFF2-40B4-BE49-F238E27FC236}">
-                <a16:creationId xmlns:a16="http://schemas.microsoft.com/office/drawing/2014/main" id="{D40C324C-7EC2-4B77-B392-428F22E87444}"/>
+                <a16:creationId xmlns:a16="http://schemas.microsoft.com/office/drawing/2014/main" id="{7B5F2DEA-ACAB-4790-B0A2-1ECAD64CE9B4}"/>
               </a:ext>
             </a:extLst>
           </p:cNvPr>
@@ -13235,7 +13791,7 @@
           <p:cNvPr id="10" name="p02-gap">
             <a:extLst xmlns:a="http://schemas.openxmlformats.org/drawingml/2006/main">
               <a:ext uri="{FF2B5EF4-FFF2-40B4-BE49-F238E27FC236}">
-                <a16:creationId xmlns:a16="http://schemas.microsoft.com/office/drawing/2014/main" id="{BBBD2D3B-7399-4B04-98A1-26FEB8A85EFD}"/>
+                <a16:creationId xmlns:a16="http://schemas.microsoft.com/office/drawing/2014/main" id="{FE2797DF-CF49-4099-8C92-15778D6CD5AB}"/>
               </a:ext>
             </a:extLst>
           </p:cNvPr>
@@ -13266,7 +13822,7 @@
           <p:cNvPr id="11" name="p02-gap-label">
             <a:extLst xmlns:a="http://schemas.openxmlformats.org/drawingml/2006/main">
               <a:ext uri="{FF2B5EF4-FFF2-40B4-BE49-F238E27FC236}">
-                <a16:creationId xmlns:a16="http://schemas.microsoft.com/office/drawing/2014/main" id="{5358EE48-2F35-47C4-A901-FCEF15D037A2}"/>
+                <a16:creationId xmlns:a16="http://schemas.microsoft.com/office/drawing/2014/main" id="{2E66A198-A840-463F-84A0-906D5ED83010}"/>
               </a:ext>
             </a:extLst>
           </p:cNvPr>
@@ -13321,7 +13877,7 @@
           <p:cNvPr id="12" name="p02-right-title">
             <a:extLst xmlns:a="http://schemas.openxmlformats.org/drawingml/2006/main">
               <a:ext uri="{FF2B5EF4-FFF2-40B4-BE49-F238E27FC236}">
-                <a16:creationId xmlns:a16="http://schemas.microsoft.com/office/drawing/2014/main" id="{631A70E8-EADA-4B08-97A3-FFE2D1C00A62}"/>
+                <a16:creationId xmlns:a16="http://schemas.microsoft.com/office/drawing/2014/main" id="{8EA6849E-C429-42B6-8D70-E2D38FD05D9E}"/>
               </a:ext>
             </a:extLst>
           </p:cNvPr>
@@ -13374,7 +13930,7 @@
           <p:cNvPr id="13" name="p02-r-0">
             <a:extLst xmlns:a="http://schemas.openxmlformats.org/drawingml/2006/main">
               <a:ext uri="{FF2B5EF4-FFF2-40B4-BE49-F238E27FC236}">
-                <a16:creationId xmlns:a16="http://schemas.microsoft.com/office/drawing/2014/main" id="{4FB75B34-0E55-4568-B68B-D0C133F8DCB1}"/>
+                <a16:creationId xmlns:a16="http://schemas.microsoft.com/office/drawing/2014/main" id="{9C8E0DDB-32AF-4D0E-BB40-2D9BEF769EC2}"/>
               </a:ext>
             </a:extLst>
           </p:cNvPr>
@@ -13429,7 +13985,7 @@
           <p:cNvPr id="14" name="p02-r-1">
             <a:extLst xmlns:a="http://schemas.openxmlformats.org/drawingml/2006/main">
               <a:ext uri="{FF2B5EF4-FFF2-40B4-BE49-F238E27FC236}">
-                <a16:creationId xmlns:a16="http://schemas.microsoft.com/office/drawing/2014/main" id="{E320E69F-EF1B-4886-8464-7B0E159030C9}"/>
+                <a16:creationId xmlns:a16="http://schemas.microsoft.com/office/drawing/2014/main" id="{D234A2E7-B71A-41A4-8ED3-9CF1B063F630}"/>
               </a:ext>
             </a:extLst>
           </p:cNvPr>
@@ -13484,7 +14040,7 @@
           <p:cNvPr id="15" name="p02-r-2">
             <a:extLst xmlns:a="http://schemas.openxmlformats.org/drawingml/2006/main">
               <a:ext uri="{FF2B5EF4-FFF2-40B4-BE49-F238E27FC236}">
-                <a16:creationId xmlns:a16="http://schemas.microsoft.com/office/drawing/2014/main" id="{5E2A3041-DAB7-4168-B78C-E80F4111D4D5}"/>
+                <a16:creationId xmlns:a16="http://schemas.microsoft.com/office/drawing/2014/main" id="{4052334C-7025-4D90-B0F1-0AE304D280ED}"/>
               </a:ext>
             </a:extLst>
           </p:cNvPr>
@@ -13539,7 +14095,7 @@
           <p:cNvPr id="16" name="p02-bottom">
             <a:extLst xmlns:a="http://schemas.openxmlformats.org/drawingml/2006/main">
               <a:ext uri="{FF2B5EF4-FFF2-40B4-BE49-F238E27FC236}">
-                <a16:creationId xmlns:a16="http://schemas.microsoft.com/office/drawing/2014/main" id="{6873C0D4-57D9-4173-9A5A-7E6C6B2109BF}"/>
+                <a16:creationId xmlns:a16="http://schemas.microsoft.com/office/drawing/2014/main" id="{6CD53776-F350-44C6-BA1B-424FE036221C}"/>
               </a:ext>
             </a:extLst>
           </p:cNvPr>
@@ -13645,7 +14201,7 @@
                 <a:ea typeface="Microsoft YaHei"/>
                 <a:cs typeface="Microsoft YaHei"/>
               </a:rPr>
-              <a:t>退出卡与第 4 课预告</a:t>
+              <a:t>本讲知识点总结：检索是证据入口</a:t>
             </a:r>
             <a:endParaRPr/>
           </a:p>
@@ -13681,22 +14237,77 @@
       </p:sp>
       <p:sp>
         <p:nvSpPr>
-          <p:cNvPr id="6" name="p20-exit-title">
-            <a:extLst xmlns:a="http://schemas.openxmlformats.org/drawingml/2006/main">
-              <a:ext uri="{FF2B5EF4-FFF2-40B4-BE49-F238E27FC236}">
-                <a16:creationId xmlns:a16="http://schemas.microsoft.com/office/drawing/2014/main" id="{734F0913-D379-401F-99A2-44496F0DFF71}"/>
-              </a:ext>
-            </a:extLst>
-          </p:cNvPr>
-          <p:cNvSpPr>
-            <a:spLocks xmlns:a="http://schemas.openxmlformats.org/drawingml/2006/main" noGrp="1"/>
-          </p:cNvSpPr>
-          <p:nvPr/>
-        </p:nvSpPr>
-        <p:spPr>
-          <a:xfrm xmlns:a="http://schemas.openxmlformats.org/drawingml/2006/main">
-            <a:off x="685800" y="1066800"/>
-            <a:ext cx="4476750" cy="476250"/>
+          <p:cNvPr id="6" name="p20-chain-0">
+            <a:extLst xmlns:a="http://schemas.openxmlformats.org/drawingml/2006/main">
+              <a:ext uri="{FF2B5EF4-FFF2-40B4-BE49-F238E27FC236}">
+                <a16:creationId xmlns:a16="http://schemas.microsoft.com/office/drawing/2014/main" id="{AE19A307-408B-4572-B23B-AC343A5F9C61}"/>
+              </a:ext>
+            </a:extLst>
+          </p:cNvPr>
+          <p:cNvSpPr>
+            <a:spLocks xmlns:a="http://schemas.openxmlformats.org/drawingml/2006/main" noGrp="1"/>
+          </p:cNvSpPr>
+          <p:nvPr/>
+        </p:nvSpPr>
+        <p:spPr>
+          <a:xfrm xmlns:a="http://schemas.openxmlformats.org/drawingml/2006/main">
+            <a:off x="704850" y="1066800"/>
+            <a:ext cx="2381250" cy="628650"/>
+          </a:xfrm>
+          <a:prstGeom xmlns:a="http://schemas.openxmlformats.org/drawingml/2006/main" prst="rect">
+            <a:avLst/>
+          </a:prstGeom>
+          <a:solidFill xmlns:a="http://schemas.openxmlformats.org/drawingml/2006/main">
+            <a:srgbClr val="E8F0F6"/>
+          </a:solidFill>
+          <a:ln xmlns:a="http://schemas.openxmlformats.org/drawingml/2006/main" w="0">
+            <a:noFill/>
+            <a:prstDash val="solid"/>
+          </a:ln>
+        </p:spPr>
+        <p:txBody>
+          <a:bodyPr xmlns:a="http://schemas.openxmlformats.org/drawingml/2006/main" lIns="76200" tIns="38100" rIns="76200" bIns="38100" anchor="ctr"/>
+          <a:lstStyle xmlns:a="http://schemas.openxmlformats.org/drawingml/2006/main"/>
+          <a:p xmlns:a="http://schemas.openxmlformats.org/drawingml/2006/main">
+            <a:pPr algn="ctr">
+              <a:defRPr sz="1650" b="1">
+                <a:solidFill>
+                  <a:srgbClr val="18354E"/>
+                </a:solidFill>
+              </a:defRPr>
+            </a:pPr>
+            <a:r>
+              <a:rPr sz="1650" b="1">
+                <a:solidFill>
+                  <a:srgbClr val="18354E"/>
+                </a:solidFill>
+                <a:latin typeface="Microsoft YaHei"/>
+                <a:ea typeface="Microsoft YaHei"/>
+                <a:cs typeface="Microsoft YaHei"/>
+              </a:rPr>
+              <a:t>问题初稿</a:t>
+            </a:r>
+          </a:p>
+        </p:txBody>
+      </p:sp>
+      <p:sp>
+        <p:nvSpPr>
+          <p:cNvPr id="7" name="p20-arrow-0">
+            <a:extLst xmlns:a="http://schemas.openxmlformats.org/drawingml/2006/main">
+              <a:ext uri="{FF2B5EF4-FFF2-40B4-BE49-F238E27FC236}">
+                <a16:creationId xmlns:a16="http://schemas.microsoft.com/office/drawing/2014/main" id="{2022807B-4C31-4D89-ABF1-B68A086F4496}"/>
+              </a:ext>
+            </a:extLst>
+          </p:cNvPr>
+          <p:cNvSpPr>
+            <a:spLocks xmlns:a="http://schemas.openxmlformats.org/drawingml/2006/main" noGrp="1"/>
+          </p:cNvSpPr>
+          <p:nvPr/>
+        </p:nvSpPr>
+        <p:spPr>
+          <a:xfrm xmlns:a="http://schemas.openxmlformats.org/drawingml/2006/main">
+            <a:off x="3105150" y="1162050"/>
+            <a:ext cx="419100" cy="419100"/>
           </a:xfrm>
           <a:prstGeom xmlns:a="http://schemas.openxmlformats.org/drawingml/2006/main" prst="rect">
             <a:avLst/>
@@ -13711,6 +14322,972 @@
           <a:bodyPr xmlns:a="http://schemas.openxmlformats.org/drawingml/2006/main" lIns="76200" tIns="38100" rIns="76200" bIns="38100" anchor="ctr"/>
           <a:lstStyle xmlns:a="http://schemas.openxmlformats.org/drawingml/2006/main"/>
           <a:p xmlns:a="http://schemas.openxmlformats.org/drawingml/2006/main">
+            <a:pPr algn="ctr">
+              <a:defRPr sz="2250" b="1">
+                <a:solidFill>
+                  <a:srgbClr val="C8161E"/>
+                </a:solidFill>
+              </a:defRPr>
+            </a:pPr>
+            <a:r>
+              <a:rPr sz="2250" b="1">
+                <a:solidFill>
+                  <a:srgbClr val="C8161E"/>
+                </a:solidFill>
+                <a:latin typeface="Arial"/>
+                <a:ea typeface="Arial"/>
+                <a:cs typeface="Arial"/>
+              </a:rPr>
+              <a:t>→</a:t>
+            </a:r>
+          </a:p>
+        </p:txBody>
+      </p:sp>
+      <p:sp>
+        <p:nvSpPr>
+          <p:cNvPr id="8" name="p20-chain-1">
+            <a:extLst xmlns:a="http://schemas.openxmlformats.org/drawingml/2006/main">
+              <a:ext uri="{FF2B5EF4-FFF2-40B4-BE49-F238E27FC236}">
+                <a16:creationId xmlns:a16="http://schemas.microsoft.com/office/drawing/2014/main" id="{1C010645-A05C-410C-8097-088F69537675}"/>
+              </a:ext>
+            </a:extLst>
+          </p:cNvPr>
+          <p:cNvSpPr>
+            <a:spLocks xmlns:a="http://schemas.openxmlformats.org/drawingml/2006/main" noGrp="1"/>
+          </p:cNvSpPr>
+          <p:nvPr/>
+        </p:nvSpPr>
+        <p:spPr>
+          <a:xfrm xmlns:a="http://schemas.openxmlformats.org/drawingml/2006/main">
+            <a:off x="3562350" y="1066800"/>
+            <a:ext cx="2381250" cy="628650"/>
+          </a:xfrm>
+          <a:prstGeom xmlns:a="http://schemas.openxmlformats.org/drawingml/2006/main" prst="rect">
+            <a:avLst/>
+          </a:prstGeom>
+          <a:solidFill xmlns:a="http://schemas.openxmlformats.org/drawingml/2006/main">
+            <a:srgbClr val="E8F0F6"/>
+          </a:solidFill>
+          <a:ln xmlns:a="http://schemas.openxmlformats.org/drawingml/2006/main" w="0">
+            <a:noFill/>
+            <a:prstDash val="solid"/>
+          </a:ln>
+        </p:spPr>
+        <p:txBody>
+          <a:bodyPr xmlns:a="http://schemas.openxmlformats.org/drawingml/2006/main" lIns="76200" tIns="38100" rIns="76200" bIns="38100" anchor="ctr"/>
+          <a:lstStyle xmlns:a="http://schemas.openxmlformats.org/drawingml/2006/main"/>
+          <a:p xmlns:a="http://schemas.openxmlformats.org/drawingml/2006/main">
+            <a:pPr algn="ctr">
+              <a:defRPr sz="1650" b="1">
+                <a:solidFill>
+                  <a:srgbClr val="18354E"/>
+                </a:solidFill>
+              </a:defRPr>
+            </a:pPr>
+            <a:r>
+              <a:rPr sz="1650" b="1">
+                <a:solidFill>
+                  <a:srgbClr val="18354E"/>
+                </a:solidFill>
+                <a:latin typeface="Microsoft YaHei"/>
+                <a:ea typeface="Microsoft YaHei"/>
+                <a:cs typeface="Microsoft YaHei"/>
+              </a:rPr>
+              <a:t>关键词／检索式</a:t>
+            </a:r>
+          </a:p>
+        </p:txBody>
+      </p:sp>
+      <p:sp>
+        <p:nvSpPr>
+          <p:cNvPr id="9" name="p20-arrow-1">
+            <a:extLst xmlns:a="http://schemas.openxmlformats.org/drawingml/2006/main">
+              <a:ext uri="{FF2B5EF4-FFF2-40B4-BE49-F238E27FC236}">
+                <a16:creationId xmlns:a16="http://schemas.microsoft.com/office/drawing/2014/main" id="{BC16DCE3-BBDC-4653-B5E2-31AE6E97949A}"/>
+              </a:ext>
+            </a:extLst>
+          </p:cNvPr>
+          <p:cNvSpPr>
+            <a:spLocks xmlns:a="http://schemas.openxmlformats.org/drawingml/2006/main" noGrp="1"/>
+          </p:cNvSpPr>
+          <p:nvPr/>
+        </p:nvSpPr>
+        <p:spPr>
+          <a:xfrm xmlns:a="http://schemas.openxmlformats.org/drawingml/2006/main">
+            <a:off x="5962650" y="1162050"/>
+            <a:ext cx="419100" cy="419100"/>
+          </a:xfrm>
+          <a:prstGeom xmlns:a="http://schemas.openxmlformats.org/drawingml/2006/main" prst="rect">
+            <a:avLst/>
+          </a:prstGeom>
+          <a:noFill xmlns:a="http://schemas.openxmlformats.org/drawingml/2006/main"/>
+          <a:ln xmlns:a="http://schemas.openxmlformats.org/drawingml/2006/main" w="0">
+            <a:noFill/>
+            <a:prstDash val="solid"/>
+          </a:ln>
+        </p:spPr>
+        <p:txBody>
+          <a:bodyPr xmlns:a="http://schemas.openxmlformats.org/drawingml/2006/main" lIns="76200" tIns="38100" rIns="76200" bIns="38100" anchor="ctr"/>
+          <a:lstStyle xmlns:a="http://schemas.openxmlformats.org/drawingml/2006/main"/>
+          <a:p xmlns:a="http://schemas.openxmlformats.org/drawingml/2006/main">
+            <a:pPr algn="ctr">
+              <a:defRPr sz="2250" b="1">
+                <a:solidFill>
+                  <a:srgbClr val="C8161E"/>
+                </a:solidFill>
+              </a:defRPr>
+            </a:pPr>
+            <a:r>
+              <a:rPr sz="2250" b="1">
+                <a:solidFill>
+                  <a:srgbClr val="C8161E"/>
+                </a:solidFill>
+                <a:latin typeface="Arial"/>
+                <a:ea typeface="Arial"/>
+                <a:cs typeface="Arial"/>
+              </a:rPr>
+              <a:t>→</a:t>
+            </a:r>
+          </a:p>
+        </p:txBody>
+      </p:sp>
+      <p:sp>
+        <p:nvSpPr>
+          <p:cNvPr id="10" name="p20-chain-2">
+            <a:extLst xmlns:a="http://schemas.openxmlformats.org/drawingml/2006/main">
+              <a:ext uri="{FF2B5EF4-FFF2-40B4-BE49-F238E27FC236}">
+                <a16:creationId xmlns:a16="http://schemas.microsoft.com/office/drawing/2014/main" id="{8E52326C-69CA-4D55-8A3B-90C4F1AF2E61}"/>
+              </a:ext>
+            </a:extLst>
+          </p:cNvPr>
+          <p:cNvSpPr>
+            <a:spLocks xmlns:a="http://schemas.openxmlformats.org/drawingml/2006/main" noGrp="1"/>
+          </p:cNvSpPr>
+          <p:nvPr/>
+        </p:nvSpPr>
+        <p:spPr>
+          <a:xfrm xmlns:a="http://schemas.openxmlformats.org/drawingml/2006/main">
+            <a:off x="6419850" y="1066800"/>
+            <a:ext cx="2381250" cy="628650"/>
+          </a:xfrm>
+          <a:prstGeom xmlns:a="http://schemas.openxmlformats.org/drawingml/2006/main" prst="rect">
+            <a:avLst/>
+          </a:prstGeom>
+          <a:solidFill xmlns:a="http://schemas.openxmlformats.org/drawingml/2006/main">
+            <a:srgbClr val="E8F0F6"/>
+          </a:solidFill>
+          <a:ln xmlns:a="http://schemas.openxmlformats.org/drawingml/2006/main" w="0">
+            <a:noFill/>
+            <a:prstDash val="solid"/>
+          </a:ln>
+        </p:spPr>
+        <p:txBody>
+          <a:bodyPr xmlns:a="http://schemas.openxmlformats.org/drawingml/2006/main" lIns="76200" tIns="38100" rIns="76200" bIns="38100" anchor="ctr"/>
+          <a:lstStyle xmlns:a="http://schemas.openxmlformats.org/drawingml/2006/main"/>
+          <a:p xmlns:a="http://schemas.openxmlformats.org/drawingml/2006/main">
+            <a:pPr algn="ctr">
+              <a:defRPr sz="1650" b="1">
+                <a:solidFill>
+                  <a:srgbClr val="18354E"/>
+                </a:solidFill>
+              </a:defRPr>
+            </a:pPr>
+            <a:r>
+              <a:rPr sz="1650" b="1">
+                <a:solidFill>
+                  <a:srgbClr val="18354E"/>
+                </a:solidFill>
+                <a:latin typeface="Microsoft YaHei"/>
+                <a:ea typeface="Microsoft YaHei"/>
+                <a:cs typeface="Microsoft YaHei"/>
+              </a:rPr>
+              <a:t>来源审计</a:t>
+            </a:r>
+          </a:p>
+        </p:txBody>
+      </p:sp>
+      <p:sp>
+        <p:nvSpPr>
+          <p:cNvPr id="11" name="p20-arrow-2">
+            <a:extLst xmlns:a="http://schemas.openxmlformats.org/drawingml/2006/main">
+              <a:ext uri="{FF2B5EF4-FFF2-40B4-BE49-F238E27FC236}">
+                <a16:creationId xmlns:a16="http://schemas.microsoft.com/office/drawing/2014/main" id="{49222B46-6AF1-4341-9740-9005C59A4A24}"/>
+              </a:ext>
+            </a:extLst>
+          </p:cNvPr>
+          <p:cNvSpPr>
+            <a:spLocks xmlns:a="http://schemas.openxmlformats.org/drawingml/2006/main" noGrp="1"/>
+          </p:cNvSpPr>
+          <p:nvPr/>
+        </p:nvSpPr>
+        <p:spPr>
+          <a:xfrm xmlns:a="http://schemas.openxmlformats.org/drawingml/2006/main">
+            <a:off x="8820150" y="1162050"/>
+            <a:ext cx="419100" cy="419100"/>
+          </a:xfrm>
+          <a:prstGeom xmlns:a="http://schemas.openxmlformats.org/drawingml/2006/main" prst="rect">
+            <a:avLst/>
+          </a:prstGeom>
+          <a:noFill xmlns:a="http://schemas.openxmlformats.org/drawingml/2006/main"/>
+          <a:ln xmlns:a="http://schemas.openxmlformats.org/drawingml/2006/main" w="0">
+            <a:noFill/>
+            <a:prstDash val="solid"/>
+          </a:ln>
+        </p:spPr>
+        <p:txBody>
+          <a:bodyPr xmlns:a="http://schemas.openxmlformats.org/drawingml/2006/main" lIns="76200" tIns="38100" rIns="76200" bIns="38100" anchor="ctr"/>
+          <a:lstStyle xmlns:a="http://schemas.openxmlformats.org/drawingml/2006/main"/>
+          <a:p xmlns:a="http://schemas.openxmlformats.org/drawingml/2006/main">
+            <a:pPr algn="ctr">
+              <a:defRPr sz="2250" b="1">
+                <a:solidFill>
+                  <a:srgbClr val="C8161E"/>
+                </a:solidFill>
+              </a:defRPr>
+            </a:pPr>
+            <a:r>
+              <a:rPr sz="2250" b="1">
+                <a:solidFill>
+                  <a:srgbClr val="C8161E"/>
+                </a:solidFill>
+                <a:latin typeface="Arial"/>
+                <a:ea typeface="Arial"/>
+                <a:cs typeface="Arial"/>
+              </a:rPr>
+              <a:t>→</a:t>
+            </a:r>
+          </a:p>
+        </p:txBody>
+      </p:sp>
+      <p:sp>
+        <p:nvSpPr>
+          <p:cNvPr id="12" name="p20-chain-3">
+            <a:extLst xmlns:a="http://schemas.openxmlformats.org/drawingml/2006/main">
+              <a:ext uri="{FF2B5EF4-FFF2-40B4-BE49-F238E27FC236}">
+                <a16:creationId xmlns:a16="http://schemas.microsoft.com/office/drawing/2014/main" id="{463DA0BF-8986-4938-9DD8-5684B6EB3072}"/>
+              </a:ext>
+            </a:extLst>
+          </p:cNvPr>
+          <p:cNvSpPr>
+            <a:spLocks xmlns:a="http://schemas.openxmlformats.org/drawingml/2006/main" noGrp="1"/>
+          </p:cNvSpPr>
+          <p:nvPr/>
+        </p:nvSpPr>
+        <p:spPr>
+          <a:xfrm xmlns:a="http://schemas.openxmlformats.org/drawingml/2006/main">
+            <a:off x="9277350" y="1066800"/>
+            <a:ext cx="2381250" cy="628650"/>
+          </a:xfrm>
+          <a:prstGeom xmlns:a="http://schemas.openxmlformats.org/drawingml/2006/main" prst="rect">
+            <a:avLst/>
+          </a:prstGeom>
+          <a:solidFill xmlns:a="http://schemas.openxmlformats.org/drawingml/2006/main">
+            <a:srgbClr val="F8E9EA"/>
+          </a:solidFill>
+          <a:ln xmlns:a="http://schemas.openxmlformats.org/drawingml/2006/main" w="0">
+            <a:noFill/>
+            <a:prstDash val="solid"/>
+          </a:ln>
+        </p:spPr>
+        <p:txBody>
+          <a:bodyPr xmlns:a="http://schemas.openxmlformats.org/drawingml/2006/main" lIns="76200" tIns="38100" rIns="76200" bIns="38100" anchor="ctr"/>
+          <a:lstStyle xmlns:a="http://schemas.openxmlformats.org/drawingml/2006/main"/>
+          <a:p xmlns:a="http://schemas.openxmlformats.org/drawingml/2006/main">
+            <a:pPr algn="ctr">
+              <a:defRPr sz="1650" b="1">
+                <a:solidFill>
+                  <a:srgbClr val="C8161E"/>
+                </a:solidFill>
+              </a:defRPr>
+            </a:pPr>
+            <a:r>
+              <a:rPr sz="1650" b="1">
+                <a:solidFill>
+                  <a:srgbClr val="C8161E"/>
+                </a:solidFill>
+                <a:latin typeface="Microsoft YaHei"/>
+                <a:ea typeface="Microsoft YaHei"/>
+                <a:cs typeface="Microsoft YaHei"/>
+              </a:rPr>
+              <a:t>候选文献表</a:t>
+            </a:r>
+          </a:p>
+        </p:txBody>
+      </p:sp>
+      <p:sp>
+        <p:nvSpPr>
+          <p:cNvPr id="13" name="p20-row-label-0">
+            <a:extLst xmlns:a="http://schemas.openxmlformats.org/drawingml/2006/main">
+              <a:ext uri="{FF2B5EF4-FFF2-40B4-BE49-F238E27FC236}">
+                <a16:creationId xmlns:a16="http://schemas.microsoft.com/office/drawing/2014/main" id="{82095874-B45D-4E0E-B01C-0E62910BAFD1}"/>
+              </a:ext>
+            </a:extLst>
+          </p:cNvPr>
+          <p:cNvSpPr>
+            <a:spLocks xmlns:a="http://schemas.openxmlformats.org/drawingml/2006/main" noGrp="1"/>
+          </p:cNvSpPr>
+          <p:nvPr/>
+        </p:nvSpPr>
+        <p:spPr>
+          <a:xfrm xmlns:a="http://schemas.openxmlformats.org/drawingml/2006/main">
+            <a:off x="723900" y="2095500"/>
+            <a:ext cx="1104900" cy="628650"/>
+          </a:xfrm>
+          <a:prstGeom xmlns:a="http://schemas.openxmlformats.org/drawingml/2006/main" prst="rect">
+            <a:avLst/>
+          </a:prstGeom>
+          <a:solidFill xmlns:a="http://schemas.openxmlformats.org/drawingml/2006/main">
+            <a:srgbClr val="E8F0F6"/>
+          </a:solidFill>
+          <a:ln xmlns:a="http://schemas.openxmlformats.org/drawingml/2006/main" w="0">
+            <a:noFill/>
+            <a:prstDash val="solid"/>
+          </a:ln>
+        </p:spPr>
+        <p:txBody>
+          <a:bodyPr xmlns:a="http://schemas.openxmlformats.org/drawingml/2006/main" lIns="76200" tIns="38100" rIns="76200" bIns="38100" anchor="ctr"/>
+          <a:lstStyle xmlns:a="http://schemas.openxmlformats.org/drawingml/2006/main"/>
+          <a:p xmlns:a="http://schemas.openxmlformats.org/drawingml/2006/main">
+            <a:pPr algn="ctr">
+              <a:defRPr sz="1800" b="1">
+                <a:solidFill>
+                  <a:srgbClr val="18354E"/>
+                </a:solidFill>
+              </a:defRPr>
+            </a:pPr>
+            <a:r>
+              <a:rPr sz="1800" b="1">
+                <a:solidFill>
+                  <a:srgbClr val="18354E"/>
+                </a:solidFill>
+                <a:latin typeface="Microsoft YaHei"/>
+                <a:ea typeface="Microsoft YaHei"/>
+                <a:cs typeface="Microsoft YaHei"/>
+              </a:rPr>
+              <a:t>角色</a:t>
+            </a:r>
+          </a:p>
+        </p:txBody>
+      </p:sp>
+      <p:sp>
+        <p:nvSpPr>
+          <p:cNvPr id="14" name="p20-row-basis-0">
+            <a:extLst xmlns:a="http://schemas.openxmlformats.org/drawingml/2006/main">
+              <a:ext uri="{FF2B5EF4-FFF2-40B4-BE49-F238E27FC236}">
+                <a16:creationId xmlns:a16="http://schemas.microsoft.com/office/drawing/2014/main" id="{5E6CF279-098E-4550-93C3-E6386C7F313E}"/>
+              </a:ext>
+            </a:extLst>
+          </p:cNvPr>
+          <p:cNvSpPr>
+            <a:spLocks xmlns:a="http://schemas.openxmlformats.org/drawingml/2006/main" noGrp="1"/>
+          </p:cNvSpPr>
+          <p:nvPr/>
+        </p:nvSpPr>
+        <p:spPr>
+          <a:xfrm xmlns:a="http://schemas.openxmlformats.org/drawingml/2006/main">
+            <a:off x="1962150" y="2095500"/>
+            <a:ext cx="2686050" cy="628650"/>
+          </a:xfrm>
+          <a:prstGeom xmlns:a="http://schemas.openxmlformats.org/drawingml/2006/main" prst="rect">
+            <a:avLst/>
+          </a:prstGeom>
+          <a:solidFill xmlns:a="http://schemas.openxmlformats.org/drawingml/2006/main">
+            <a:srgbClr val="E8F0F6"/>
+          </a:solidFill>
+          <a:ln xmlns:a="http://schemas.openxmlformats.org/drawingml/2006/main" w="0">
+            <a:noFill/>
+            <a:prstDash val="solid"/>
+          </a:ln>
+        </p:spPr>
+        <p:txBody>
+          <a:bodyPr xmlns:a="http://schemas.openxmlformats.org/drawingml/2006/main" lIns="76200" tIns="38100" rIns="76200" bIns="38100" anchor="ctr"/>
+          <a:lstStyle xmlns:a="http://schemas.openxmlformats.org/drawingml/2006/main"/>
+          <a:p xmlns:a="http://schemas.openxmlformats.org/drawingml/2006/main">
+            <a:pPr algn="ctr">
+              <a:defRPr sz="1500" b="1">
+                <a:solidFill>
+                  <a:srgbClr val="667684"/>
+                </a:solidFill>
+              </a:defRPr>
+            </a:pPr>
+            <a:r>
+              <a:rPr sz="1500" b="1">
+                <a:solidFill>
+                  <a:srgbClr val="667684"/>
+                </a:solidFill>
+                <a:latin typeface="Microsoft YaHei"/>
+                <a:ea typeface="Microsoft YaHei"/>
+                <a:cs typeface="Microsoft YaHei"/>
+              </a:rPr>
+              <a:t>相对于问题或拟用主张</a:t>
+            </a:r>
+          </a:p>
+        </p:txBody>
+      </p:sp>
+      <p:sp>
+        <p:nvSpPr>
+          <p:cNvPr id="15" name="p20-row-content-0">
+            <a:extLst xmlns:a="http://schemas.openxmlformats.org/drawingml/2006/main">
+              <a:ext uri="{FF2B5EF4-FFF2-40B4-BE49-F238E27FC236}">
+                <a16:creationId xmlns:a16="http://schemas.microsoft.com/office/drawing/2014/main" id="{97A1FE06-0442-4720-B027-F44E4E1924C8}"/>
+              </a:ext>
+            </a:extLst>
+          </p:cNvPr>
+          <p:cNvSpPr>
+            <a:spLocks xmlns:a="http://schemas.openxmlformats.org/drawingml/2006/main" noGrp="1"/>
+          </p:cNvSpPr>
+          <p:nvPr/>
+        </p:nvSpPr>
+        <p:spPr>
+          <a:xfrm xmlns:a="http://schemas.openxmlformats.org/drawingml/2006/main">
+            <a:off x="4762500" y="2095500"/>
+            <a:ext cx="6705600" cy="628650"/>
+          </a:xfrm>
+          <a:prstGeom xmlns:a="http://schemas.openxmlformats.org/drawingml/2006/main" prst="rect">
+            <a:avLst/>
+          </a:prstGeom>
+          <a:solidFill xmlns:a="http://schemas.openxmlformats.org/drawingml/2006/main">
+            <a:srgbClr val="E8F0F6"/>
+          </a:solidFill>
+          <a:ln xmlns:a="http://schemas.openxmlformats.org/drawingml/2006/main" w="0">
+            <a:noFill/>
+            <a:prstDash val="solid"/>
+          </a:ln>
+        </p:spPr>
+        <p:txBody>
+          <a:bodyPr xmlns:a="http://schemas.openxmlformats.org/drawingml/2006/main" lIns="76200" tIns="38100" rIns="76200" bIns="38100" anchor="ctr"/>
+          <a:lstStyle xmlns:a="http://schemas.openxmlformats.org/drawingml/2006/main"/>
+          <a:p xmlns:a="http://schemas.openxmlformats.org/drawingml/2006/main">
+            <a:pPr algn="ctr">
+              <a:defRPr sz="1575" b="1">
+                <a:solidFill>
+                  <a:srgbClr val="263746"/>
+                </a:solidFill>
+              </a:defRPr>
+            </a:pPr>
+            <a:r>
+              <a:rPr sz="1575" b="1">
+                <a:solidFill>
+                  <a:srgbClr val="263746"/>
+                </a:solidFill>
+                <a:latin typeface="Microsoft YaHei"/>
+                <a:ea typeface="Microsoft YaHei"/>
+                <a:cs typeface="Microsoft YaHei"/>
+              </a:rPr>
+              <a:t>主／补充／对比／探索线索</a:t>
+            </a:r>
+          </a:p>
+        </p:txBody>
+      </p:sp>
+      <p:sp>
+        <p:nvSpPr>
+          <p:cNvPr id="16" name="p20-row-label-1">
+            <a:extLst xmlns:a="http://schemas.openxmlformats.org/drawingml/2006/main">
+              <a:ext uri="{FF2B5EF4-FFF2-40B4-BE49-F238E27FC236}">
+                <a16:creationId xmlns:a16="http://schemas.microsoft.com/office/drawing/2014/main" id="{EA954134-5B65-4EA5-8B3B-2E8580AC9256}"/>
+              </a:ext>
+            </a:extLst>
+          </p:cNvPr>
+          <p:cNvSpPr>
+            <a:spLocks xmlns:a="http://schemas.openxmlformats.org/drawingml/2006/main" noGrp="1"/>
+          </p:cNvSpPr>
+          <p:nvPr/>
+        </p:nvSpPr>
+        <p:spPr>
+          <a:xfrm xmlns:a="http://schemas.openxmlformats.org/drawingml/2006/main">
+            <a:off x="723900" y="2990850"/>
+            <a:ext cx="1104900" cy="628650"/>
+          </a:xfrm>
+          <a:prstGeom xmlns:a="http://schemas.openxmlformats.org/drawingml/2006/main" prst="rect">
+            <a:avLst/>
+          </a:prstGeom>
+          <a:solidFill xmlns:a="http://schemas.openxmlformats.org/drawingml/2006/main">
+            <a:srgbClr val="E7F2ED"/>
+          </a:solidFill>
+          <a:ln xmlns:a="http://schemas.openxmlformats.org/drawingml/2006/main" w="0">
+            <a:noFill/>
+            <a:prstDash val="solid"/>
+          </a:ln>
+        </p:spPr>
+        <p:txBody>
+          <a:bodyPr xmlns:a="http://schemas.openxmlformats.org/drawingml/2006/main" lIns="76200" tIns="38100" rIns="76200" bIns="38100" anchor="ctr"/>
+          <a:lstStyle xmlns:a="http://schemas.openxmlformats.org/drawingml/2006/main"/>
+          <a:p xmlns:a="http://schemas.openxmlformats.org/drawingml/2006/main">
+            <a:pPr algn="ctr">
+              <a:defRPr sz="1800" b="1">
+                <a:solidFill>
+                  <a:srgbClr val="28745A"/>
+                </a:solidFill>
+              </a:defRPr>
+            </a:pPr>
+            <a:r>
+              <a:rPr sz="1800" b="1">
+                <a:solidFill>
+                  <a:srgbClr val="28745A"/>
+                </a:solidFill>
+                <a:latin typeface="Microsoft YaHei"/>
+                <a:ea typeface="Microsoft YaHei"/>
+                <a:cs typeface="Microsoft YaHei"/>
+              </a:rPr>
+              <a:t>状态</a:t>
+            </a:r>
+          </a:p>
+        </p:txBody>
+      </p:sp>
+      <p:sp>
+        <p:nvSpPr>
+          <p:cNvPr id="17" name="p20-row-basis-1">
+            <a:extLst xmlns:a="http://schemas.openxmlformats.org/drawingml/2006/main">
+              <a:ext uri="{FF2B5EF4-FFF2-40B4-BE49-F238E27FC236}">
+                <a16:creationId xmlns:a16="http://schemas.microsoft.com/office/drawing/2014/main" id="{1EA280A0-549E-48A2-B477-9DE3B7293CEB}"/>
+              </a:ext>
+            </a:extLst>
+          </p:cNvPr>
+          <p:cNvSpPr>
+            <a:spLocks xmlns:a="http://schemas.openxmlformats.org/drawingml/2006/main" noGrp="1"/>
+          </p:cNvSpPr>
+          <p:nvPr/>
+        </p:nvSpPr>
+        <p:spPr>
+          <a:xfrm xmlns:a="http://schemas.openxmlformats.org/drawingml/2006/main">
+            <a:off x="1962150" y="2990850"/>
+            <a:ext cx="2686050" cy="628650"/>
+          </a:xfrm>
+          <a:prstGeom xmlns:a="http://schemas.openxmlformats.org/drawingml/2006/main" prst="rect">
+            <a:avLst/>
+          </a:prstGeom>
+          <a:solidFill xmlns:a="http://schemas.openxmlformats.org/drawingml/2006/main">
+            <a:srgbClr val="E7F2ED"/>
+          </a:solidFill>
+          <a:ln xmlns:a="http://schemas.openxmlformats.org/drawingml/2006/main" w="0">
+            <a:noFill/>
+            <a:prstDash val="solid"/>
+          </a:ln>
+        </p:spPr>
+        <p:txBody>
+          <a:bodyPr xmlns:a="http://schemas.openxmlformats.org/drawingml/2006/main" lIns="76200" tIns="38100" rIns="76200" bIns="38100" anchor="ctr"/>
+          <a:lstStyle xmlns:a="http://schemas.openxmlformats.org/drawingml/2006/main"/>
+          <a:p xmlns:a="http://schemas.openxmlformats.org/drawingml/2006/main">
+            <a:pPr algn="ctr">
+              <a:defRPr sz="1500" b="1">
+                <a:solidFill>
+                  <a:srgbClr val="667684"/>
+                </a:solidFill>
+              </a:defRPr>
+            </a:pPr>
+            <a:r>
+              <a:rPr sz="1500" b="1">
+                <a:solidFill>
+                  <a:srgbClr val="667684"/>
+                </a:solidFill>
+                <a:latin typeface="Microsoft YaHei"/>
+                <a:ea typeface="Microsoft YaHei"/>
+                <a:cs typeface="Microsoft YaHei"/>
+              </a:rPr>
+              <a:t>回原文裁定</a:t>
+            </a:r>
+          </a:p>
+        </p:txBody>
+      </p:sp>
+      <p:sp>
+        <p:nvSpPr>
+          <p:cNvPr id="18" name="p20-row-content-1">
+            <a:extLst xmlns:a="http://schemas.openxmlformats.org/drawingml/2006/main">
+              <a:ext uri="{FF2B5EF4-FFF2-40B4-BE49-F238E27FC236}">
+                <a16:creationId xmlns:a16="http://schemas.microsoft.com/office/drawing/2014/main" id="{B23CC6F0-F9BA-4477-AA5E-422FD0B051C7}"/>
+              </a:ext>
+            </a:extLst>
+          </p:cNvPr>
+          <p:cNvSpPr>
+            <a:spLocks xmlns:a="http://schemas.openxmlformats.org/drawingml/2006/main" noGrp="1"/>
+          </p:cNvSpPr>
+          <p:nvPr/>
+        </p:nvSpPr>
+        <p:spPr>
+          <a:xfrm xmlns:a="http://schemas.openxmlformats.org/drawingml/2006/main">
+            <a:off x="4762500" y="2990850"/>
+            <a:ext cx="6705600" cy="628650"/>
+          </a:xfrm>
+          <a:prstGeom xmlns:a="http://schemas.openxmlformats.org/drawingml/2006/main" prst="rect">
+            <a:avLst/>
+          </a:prstGeom>
+          <a:solidFill xmlns:a="http://schemas.openxmlformats.org/drawingml/2006/main">
+            <a:srgbClr val="E7F2ED"/>
+          </a:solidFill>
+          <a:ln xmlns:a="http://schemas.openxmlformats.org/drawingml/2006/main" w="0">
+            <a:noFill/>
+            <a:prstDash val="solid"/>
+          </a:ln>
+        </p:spPr>
+        <p:txBody>
+          <a:bodyPr xmlns:a="http://schemas.openxmlformats.org/drawingml/2006/main" lIns="76200" tIns="38100" rIns="76200" bIns="38100" anchor="ctr"/>
+          <a:lstStyle xmlns:a="http://schemas.openxmlformats.org/drawingml/2006/main"/>
+          <a:p xmlns:a="http://schemas.openxmlformats.org/drawingml/2006/main">
+            <a:pPr algn="ctr">
+              <a:defRPr sz="1350" b="1">
+                <a:solidFill>
+                  <a:srgbClr val="263746"/>
+                </a:solidFill>
+              </a:defRPr>
+            </a:pPr>
+            <a:r>
+              <a:rPr sz="1350" b="1">
+                <a:solidFill>
+                  <a:srgbClr val="263746"/>
+                </a:solidFill>
+                <a:latin typeface="Arial"/>
+                <a:ea typeface="Arial"/>
+                <a:cs typeface="Arial"/>
+              </a:rPr>
+              <a:t>pending／verified／verified-with-caveat／rejected</a:t>
+            </a:r>
+          </a:p>
+        </p:txBody>
+      </p:sp>
+      <p:sp>
+        <p:nvSpPr>
+          <p:cNvPr id="19" name="p20-row-label-2">
+            <a:extLst xmlns:a="http://schemas.openxmlformats.org/drawingml/2006/main">
+              <a:ext uri="{FF2B5EF4-FFF2-40B4-BE49-F238E27FC236}">
+                <a16:creationId xmlns:a16="http://schemas.microsoft.com/office/drawing/2014/main" id="{4DE34388-B32C-452B-9263-B9C4B397AAD6}"/>
+              </a:ext>
+            </a:extLst>
+          </p:cNvPr>
+          <p:cNvSpPr>
+            <a:spLocks xmlns:a="http://schemas.openxmlformats.org/drawingml/2006/main" noGrp="1"/>
+          </p:cNvSpPr>
+          <p:nvPr/>
+        </p:nvSpPr>
+        <p:spPr>
+          <a:xfrm xmlns:a="http://schemas.openxmlformats.org/drawingml/2006/main">
+            <a:off x="723900" y="3886200"/>
+            <a:ext cx="1104900" cy="628650"/>
+          </a:xfrm>
+          <a:prstGeom xmlns:a="http://schemas.openxmlformats.org/drawingml/2006/main" prst="rect">
+            <a:avLst/>
+          </a:prstGeom>
+          <a:solidFill xmlns:a="http://schemas.openxmlformats.org/drawingml/2006/main">
+            <a:srgbClr val="FAF0DD"/>
+          </a:solidFill>
+          <a:ln xmlns:a="http://schemas.openxmlformats.org/drawingml/2006/main" w="0">
+            <a:noFill/>
+            <a:prstDash val="solid"/>
+          </a:ln>
+        </p:spPr>
+        <p:txBody>
+          <a:bodyPr xmlns:a="http://schemas.openxmlformats.org/drawingml/2006/main" lIns="76200" tIns="38100" rIns="76200" bIns="38100" anchor="ctr"/>
+          <a:lstStyle xmlns:a="http://schemas.openxmlformats.org/drawingml/2006/main"/>
+          <a:p xmlns:a="http://schemas.openxmlformats.org/drawingml/2006/main">
+            <a:pPr algn="ctr">
+              <a:defRPr sz="1800" b="1">
+                <a:solidFill>
+                  <a:srgbClr val="A86C12"/>
+                </a:solidFill>
+              </a:defRPr>
+            </a:pPr>
+            <a:r>
+              <a:rPr sz="1800" b="1">
+                <a:solidFill>
+                  <a:srgbClr val="A86C12"/>
+                </a:solidFill>
+                <a:latin typeface="Microsoft YaHei"/>
+                <a:ea typeface="Microsoft YaHei"/>
+                <a:cs typeface="Microsoft YaHei"/>
+              </a:rPr>
+              <a:t>决定</a:t>
+            </a:r>
+          </a:p>
+        </p:txBody>
+      </p:sp>
+      <p:sp>
+        <p:nvSpPr>
+          <p:cNvPr id="20" name="p20-row-basis-2">
+            <a:extLst xmlns:a="http://schemas.openxmlformats.org/drawingml/2006/main">
+              <a:ext uri="{FF2B5EF4-FFF2-40B4-BE49-F238E27FC236}">
+                <a16:creationId xmlns:a16="http://schemas.microsoft.com/office/drawing/2014/main" id="{4BBA7023-5814-4886-BC2D-AEFD1941A675}"/>
+              </a:ext>
+            </a:extLst>
+          </p:cNvPr>
+          <p:cNvSpPr>
+            <a:spLocks xmlns:a="http://schemas.openxmlformats.org/drawingml/2006/main" noGrp="1"/>
+          </p:cNvSpPr>
+          <p:nvPr/>
+        </p:nvSpPr>
+        <p:spPr>
+          <a:xfrm xmlns:a="http://schemas.openxmlformats.org/drawingml/2006/main">
+            <a:off x="1962150" y="3886200"/>
+            <a:ext cx="2686050" cy="628650"/>
+          </a:xfrm>
+          <a:prstGeom xmlns:a="http://schemas.openxmlformats.org/drawingml/2006/main" prst="rect">
+            <a:avLst/>
+          </a:prstGeom>
+          <a:solidFill xmlns:a="http://schemas.openxmlformats.org/drawingml/2006/main">
+            <a:srgbClr val="FAF0DD"/>
+          </a:solidFill>
+          <a:ln xmlns:a="http://schemas.openxmlformats.org/drawingml/2006/main" w="0">
+            <a:noFill/>
+            <a:prstDash val="solid"/>
+          </a:ln>
+        </p:spPr>
+        <p:txBody>
+          <a:bodyPr xmlns:a="http://schemas.openxmlformats.org/drawingml/2006/main" lIns="76200" tIns="38100" rIns="76200" bIns="38100" anchor="ctr"/>
+          <a:lstStyle xmlns:a="http://schemas.openxmlformats.org/drawingml/2006/main"/>
+          <a:p xmlns:a="http://schemas.openxmlformats.org/drawingml/2006/main">
+            <a:pPr algn="ctr">
+              <a:defRPr sz="1500" b="1">
+                <a:solidFill>
+                  <a:srgbClr val="667684"/>
+                </a:solidFill>
+              </a:defRPr>
+            </a:pPr>
+            <a:r>
+              <a:rPr sz="1500" b="1">
+                <a:solidFill>
+                  <a:srgbClr val="667684"/>
+                </a:solidFill>
+                <a:latin typeface="Microsoft YaHei"/>
+                <a:ea typeface="Microsoft YaHei"/>
+                <a:cs typeface="Microsoft YaHei"/>
+              </a:rPr>
+              <a:t>人工记录</a:t>
+            </a:r>
+          </a:p>
+        </p:txBody>
+      </p:sp>
+      <p:sp>
+        <p:nvSpPr>
+          <p:cNvPr id="21" name="p20-row-content-2">
+            <a:extLst xmlns:a="http://schemas.openxmlformats.org/drawingml/2006/main">
+              <a:ext uri="{FF2B5EF4-FFF2-40B4-BE49-F238E27FC236}">
+                <a16:creationId xmlns:a16="http://schemas.microsoft.com/office/drawing/2014/main" id="{3F13F11D-7B1A-400E-984D-E48F24F23D4C}"/>
+              </a:ext>
+            </a:extLst>
+          </p:cNvPr>
+          <p:cNvSpPr>
+            <a:spLocks xmlns:a="http://schemas.openxmlformats.org/drawingml/2006/main" noGrp="1"/>
+          </p:cNvSpPr>
+          <p:nvPr/>
+        </p:nvSpPr>
+        <p:spPr>
+          <a:xfrm xmlns:a="http://schemas.openxmlformats.org/drawingml/2006/main">
+            <a:off x="4762500" y="3886200"/>
+            <a:ext cx="6705600" cy="628650"/>
+          </a:xfrm>
+          <a:prstGeom xmlns:a="http://schemas.openxmlformats.org/drawingml/2006/main" prst="rect">
+            <a:avLst/>
+          </a:prstGeom>
+          <a:solidFill xmlns:a="http://schemas.openxmlformats.org/drawingml/2006/main">
+            <a:srgbClr val="FAF0DD"/>
+          </a:solidFill>
+          <a:ln xmlns:a="http://schemas.openxmlformats.org/drawingml/2006/main" w="0">
+            <a:noFill/>
+            <a:prstDash val="solid"/>
+          </a:ln>
+        </p:spPr>
+        <p:txBody>
+          <a:bodyPr xmlns:a="http://schemas.openxmlformats.org/drawingml/2006/main" lIns="76200" tIns="38100" rIns="76200" bIns="38100" anchor="ctr"/>
+          <a:lstStyle xmlns:a="http://schemas.openxmlformats.org/drawingml/2006/main"/>
+          <a:p xmlns:a="http://schemas.openxmlformats.org/drawingml/2006/main">
+            <a:pPr algn="ctr">
+              <a:defRPr sz="1575" b="1">
+                <a:solidFill>
+                  <a:srgbClr val="263746"/>
+                </a:solidFill>
+              </a:defRPr>
+            </a:pPr>
+            <a:r>
+              <a:rPr sz="1575" b="1">
+                <a:solidFill>
+                  <a:srgbClr val="263746"/>
+                </a:solidFill>
+                <a:latin typeface="Microsoft YaHei"/>
+                <a:ea typeface="Microsoft YaHei"/>
+                <a:cs typeface="Microsoft YaHei"/>
+              </a:rPr>
+              <a:t>纳入／排除及理由；冲突证据保留</a:t>
+            </a:r>
+          </a:p>
+        </p:txBody>
+      </p:sp>
+      <p:sp>
+        <p:nvSpPr>
+          <p:cNvPr id="22" name="p20-boundary">
+            <a:extLst xmlns:a="http://schemas.openxmlformats.org/drawingml/2006/main">
+              <a:ext uri="{FF2B5EF4-FFF2-40B4-BE49-F238E27FC236}">
+                <a16:creationId xmlns:a16="http://schemas.microsoft.com/office/drawing/2014/main" id="{E1DB6FBD-4936-47CC-A081-E426CBD38D38}"/>
+              </a:ext>
+            </a:extLst>
+          </p:cNvPr>
+          <p:cNvSpPr>
+            <a:spLocks xmlns:a="http://schemas.openxmlformats.org/drawingml/2006/main" noGrp="1"/>
+          </p:cNvSpPr>
+          <p:nvPr/>
+        </p:nvSpPr>
+        <p:spPr>
+          <a:xfrm xmlns:a="http://schemas.openxmlformats.org/drawingml/2006/main">
+            <a:off x="1200150" y="4991100"/>
+            <a:ext cx="9791700" cy="628650"/>
+          </a:xfrm>
+          <a:prstGeom xmlns:a="http://schemas.openxmlformats.org/drawingml/2006/main" prst="rect">
+            <a:avLst/>
+          </a:prstGeom>
+          <a:solidFill xmlns:a="http://schemas.openxmlformats.org/drawingml/2006/main">
+            <a:srgbClr val="F8E9EA"/>
+          </a:solidFill>
+          <a:ln xmlns:a="http://schemas.openxmlformats.org/drawingml/2006/main" w="0">
+            <a:noFill/>
+            <a:prstDash val="solid"/>
+          </a:ln>
+        </p:spPr>
+        <p:txBody>
+          <a:bodyPr xmlns:a="http://schemas.openxmlformats.org/drawingml/2006/main" lIns="76200" tIns="38100" rIns="76200" bIns="38100" anchor="ctr"/>
+          <a:lstStyle xmlns:a="http://schemas.openxmlformats.org/drawingml/2006/main"/>
+          <a:p xmlns:a="http://schemas.openxmlformats.org/drawingml/2006/main">
+            <a:pPr algn="ctr">
+              <a:defRPr sz="1725" b="1">
+                <a:solidFill>
+                  <a:srgbClr val="C8161E"/>
+                </a:solidFill>
+              </a:defRPr>
+            </a:pPr>
+            <a:r>
+              <a:rPr sz="1725" b="1">
+                <a:solidFill>
+                  <a:srgbClr val="C8161E"/>
+                </a:solidFill>
+                <a:latin typeface="Microsoft YaHei"/>
+                <a:ea typeface="Microsoft YaHei"/>
+                <a:cs typeface="Microsoft YaHei"/>
+              </a:rPr>
+              <a:t>AI 可以扩展、检索、整理和提出建议；学生确认问题、主张、角色与纳入决定。</a:t>
+            </a:r>
+          </a:p>
+        </p:txBody>
+      </p:sp>
+    </p:spTree>
+    <p:extLst>
+      <p:ext uri="{BB962C8B-B14F-4D97-AF65-F5344CB8AC3E}">
+        <p14:creationId xmlns:p14="http://schemas.microsoft.com/office/powerpoint/2010/main" val="1443728403"/>
+      </p:ext>
+    </p:extLst>
+  </p:cSld>
+</p:sld>
+</file>
+
+<file path=ppt/slides/slide21.xml><?xml version="1.0" encoding="utf-8"?>
+<p:sld xmlns:p="http://schemas.openxmlformats.org/presentationml/2006/main">
+  <p:cSld>
+    <p:spTree>
+      <p:nvGrpSpPr>
+        <p:cNvPr id="1" name=""/>
+        <p:cNvGrpSpPr/>
+        <p:nvPr/>
+      </p:nvGrpSpPr>
+      <p:grpSpPr>
+        <a:xfrm xmlns:a="http://schemas.openxmlformats.org/drawingml/2006/main"/>
+      </p:grpSpPr>
+      <p:sp>
+        <p:nvSpPr>
+          <p:cNvPr id="4" name="Text Placeholder 3">
+            <a:extLst xmlns:a="http://schemas.openxmlformats.org/drawingml/2006/main">
+              <a:ext uri="{FF2B5EF4-FFF2-40B4-BE49-F238E27FC236}">
+                <a16:creationId xmlns:a16="http://schemas.microsoft.com/office/drawing/2014/main" id="{4D941B40-7A0A-534E-3563-CA11753C8E3F}"/>
+              </a:ext>
+            </a:extLst>
+          </p:cNvPr>
+          <p:cNvSpPr>
+            <a:spLocks xmlns:a="http://schemas.openxmlformats.org/drawingml/2006/main" noGrp="1"/>
+          </p:cNvSpPr>
+          <p:nvPr>
+            <p:ph type="body" idx="14"/>
+          </p:nvPr>
+        </p:nvSpPr>
+        <p:spPr>
+          <a:xfrm xmlns:a="http://schemas.openxmlformats.org/drawingml/2006/main">
+            <a:off x="1028700" y="28575"/>
+            <a:ext cx="10668000" cy="628650"/>
+          </a:xfrm>
+        </p:spPr>
+        <p:txBody>
+          <a:bodyPr xmlns:a="http://schemas.openxmlformats.org/drawingml/2006/main" lIns="76200" tIns="0" rIns="76200" bIns="0" anchor="ctr"/>
+          <a:lstStyle xmlns:a="http://schemas.openxmlformats.org/drawingml/2006/main"/>
+          <a:p xmlns:a="http://schemas.openxmlformats.org/drawingml/2006/main">
+            <a:pPr algn="l"/>
+            <a:r>
+              <a:rPr sz="2250" b="1">
+                <a:solidFill>
+                  <a:srgbClr val="FFFFFF"/>
+                </a:solidFill>
+                <a:latin typeface="Microsoft YaHei"/>
+                <a:ea typeface="Microsoft YaHei"/>
+                <a:cs typeface="Microsoft YaHei"/>
+              </a:rPr>
+              <a:t>退出卡与第 4 课预告</a:t>
+            </a:r>
+            <a:endParaRPr/>
+          </a:p>
+        </p:txBody>
+      </p:sp>
+      <p:sp>
+        <p:nvSpPr>
+          <p:cNvPr id="5" name="Slide Number Placeholder 4">
+            <a:extLst xmlns:a="http://schemas.openxmlformats.org/drawingml/2006/main">
+              <a:ext uri="{FF2B5EF4-FFF2-40B4-BE49-F238E27FC236}">
+                <a16:creationId xmlns:a16="http://schemas.microsoft.com/office/drawing/2014/main" id="{EBA5909F-738E-F60C-BE8C-B3F1D94548E5}"/>
+              </a:ext>
+            </a:extLst>
+          </p:cNvPr>
+          <p:cNvSpPr>
+            <a:spLocks xmlns:a="http://schemas.openxmlformats.org/drawingml/2006/main" noGrp="1"/>
+          </p:cNvSpPr>
+          <p:nvPr>
+            <p:ph type="sldNum" idx="10"/>
+          </p:nvPr>
+        </p:nvSpPr>
+        <p:spPr/>
+        <p:txBody>
+          <a:bodyPr xmlns:a="http://schemas.openxmlformats.org/drawingml/2006/main"/>
+          <a:lstStyle xmlns:a="http://schemas.openxmlformats.org/drawingml/2006/main"/>
+          <a:p xmlns:a="http://schemas.openxmlformats.org/drawingml/2006/main">
+            <a:fld id="{F6DF2BE2-2DFA-1C03-677D-BDC2260D6D92}" type="slidenum">
+              <a:t>21</a:t>
+            </a:fld>
+            <a:endParaRPr/>
+          </a:p>
+        </p:txBody>
+      </p:sp>
+      <p:sp>
+        <p:nvSpPr>
+          <p:cNvPr id="6" name="p21-exit-title">
+            <a:extLst xmlns:a="http://schemas.openxmlformats.org/drawingml/2006/main">
+              <a:ext uri="{FF2B5EF4-FFF2-40B4-BE49-F238E27FC236}">
+                <a16:creationId xmlns:a16="http://schemas.microsoft.com/office/drawing/2014/main" id="{3E6F4D12-65F3-407F-BEA8-B4CDA3E5FDFB}"/>
+              </a:ext>
+            </a:extLst>
+          </p:cNvPr>
+          <p:cNvSpPr>
+            <a:spLocks xmlns:a="http://schemas.openxmlformats.org/drawingml/2006/main" noGrp="1"/>
+          </p:cNvSpPr>
+          <p:nvPr/>
+        </p:nvSpPr>
+        <p:spPr>
+          <a:xfrm xmlns:a="http://schemas.openxmlformats.org/drawingml/2006/main">
+            <a:off x="685800" y="1066800"/>
+            <a:ext cx="4476750" cy="476250"/>
+          </a:xfrm>
+          <a:prstGeom xmlns:a="http://schemas.openxmlformats.org/drawingml/2006/main" prst="rect">
+            <a:avLst/>
+          </a:prstGeom>
+          <a:noFill xmlns:a="http://schemas.openxmlformats.org/drawingml/2006/main"/>
+          <a:ln xmlns:a="http://schemas.openxmlformats.org/drawingml/2006/main" w="0">
+            <a:noFill/>
+            <a:prstDash val="solid"/>
+          </a:ln>
+        </p:spPr>
+        <p:txBody>
+          <a:bodyPr xmlns:a="http://schemas.openxmlformats.org/drawingml/2006/main" lIns="76200" tIns="38100" rIns="76200" bIns="38100" anchor="ctr"/>
+          <a:lstStyle xmlns:a="http://schemas.openxmlformats.org/drawingml/2006/main"/>
+          <a:p xmlns:a="http://schemas.openxmlformats.org/drawingml/2006/main">
             <a:pPr algn="l">
               <a:defRPr sz="2025" b="1">
                 <a:solidFill>
@@ -13734,10 +15311,10 @@
       </p:sp>
       <p:sp>
         <p:nvSpPr>
-          <p:cNvPr id="7" name="p20-i-0">
-            <a:extLst xmlns:a="http://schemas.openxmlformats.org/drawingml/2006/main">
-              <a:ext uri="{FF2B5EF4-FFF2-40B4-BE49-F238E27FC236}">
-                <a16:creationId xmlns:a16="http://schemas.microsoft.com/office/drawing/2014/main" id="{6FB6CBB5-C80D-4C9C-951C-158357A9A547}"/>
+          <p:cNvPr id="7" name="p21-i-0">
+            <a:extLst xmlns:a="http://schemas.openxmlformats.org/drawingml/2006/main">
+              <a:ext uri="{FF2B5EF4-FFF2-40B4-BE49-F238E27FC236}">
+                <a16:creationId xmlns:a16="http://schemas.microsoft.com/office/drawing/2014/main" id="{569A6DB5-E5A2-4F53-BC7F-BF358D65A634}"/>
               </a:ext>
             </a:extLst>
           </p:cNvPr>
@@ -13789,10 +15366,10 @@
       </p:sp>
       <p:sp>
         <p:nvSpPr>
-          <p:cNvPr id="8" name="p20-i-1">
-            <a:extLst xmlns:a="http://schemas.openxmlformats.org/drawingml/2006/main">
-              <a:ext uri="{FF2B5EF4-FFF2-40B4-BE49-F238E27FC236}">
-                <a16:creationId xmlns:a16="http://schemas.microsoft.com/office/drawing/2014/main" id="{4B13DBA2-9437-4E8E-AEC6-69211062F5EE}"/>
+          <p:cNvPr id="8" name="p21-i-1">
+            <a:extLst xmlns:a="http://schemas.openxmlformats.org/drawingml/2006/main">
+              <a:ext uri="{FF2B5EF4-FFF2-40B4-BE49-F238E27FC236}">
+                <a16:creationId xmlns:a16="http://schemas.microsoft.com/office/drawing/2014/main" id="{4DEAFBD9-E8B6-44B6-924F-47A9EEA16DA2}"/>
               </a:ext>
             </a:extLst>
           </p:cNvPr>
@@ -13844,10 +15421,10 @@
       </p:sp>
       <p:sp>
         <p:nvSpPr>
-          <p:cNvPr id="9" name="p20-i-2">
-            <a:extLst xmlns:a="http://schemas.openxmlformats.org/drawingml/2006/main">
-              <a:ext uri="{FF2B5EF4-FFF2-40B4-BE49-F238E27FC236}">
-                <a16:creationId xmlns:a16="http://schemas.microsoft.com/office/drawing/2014/main" id="{1E816C64-FCE0-497D-A395-51086EEFB444}"/>
+          <p:cNvPr id="9" name="p21-i-2">
+            <a:extLst xmlns:a="http://schemas.openxmlformats.org/drawingml/2006/main">
+              <a:ext uri="{FF2B5EF4-FFF2-40B4-BE49-F238E27FC236}">
+                <a16:creationId xmlns:a16="http://schemas.microsoft.com/office/drawing/2014/main" id="{74B33F52-BBFE-4074-8799-A413A153B52F}"/>
               </a:ext>
             </a:extLst>
           </p:cNvPr>
@@ -13899,10 +15476,10 @@
       </p:sp>
       <p:sp>
         <p:nvSpPr>
-          <p:cNvPr id="10" name="p20-i-3">
-            <a:extLst xmlns:a="http://schemas.openxmlformats.org/drawingml/2006/main">
-              <a:ext uri="{FF2B5EF4-FFF2-40B4-BE49-F238E27FC236}">
-                <a16:creationId xmlns:a16="http://schemas.microsoft.com/office/drawing/2014/main" id="{DF70A616-40C5-4912-864D-479D5BDAACFB}"/>
+          <p:cNvPr id="10" name="p21-i-3">
+            <a:extLst xmlns:a="http://schemas.openxmlformats.org/drawingml/2006/main">
+              <a:ext uri="{FF2B5EF4-FFF2-40B4-BE49-F238E27FC236}">
+                <a16:creationId xmlns:a16="http://schemas.microsoft.com/office/drawing/2014/main" id="{B3901F59-3996-4917-BCAC-34892DC1ADF1}"/>
               </a:ext>
             </a:extLst>
           </p:cNvPr>
@@ -13954,10 +15531,10 @@
       </p:sp>
       <p:sp>
         <p:nvSpPr>
-          <p:cNvPr id="11" name="p20-i-4">
-            <a:extLst xmlns:a="http://schemas.openxmlformats.org/drawingml/2006/main">
-              <a:ext uri="{FF2B5EF4-FFF2-40B4-BE49-F238E27FC236}">
-                <a16:creationId xmlns:a16="http://schemas.microsoft.com/office/drawing/2014/main" id="{B6714D77-4BFD-40E6-A8A5-4D4AAF5B43BC}"/>
+          <p:cNvPr id="11" name="p21-i-4">
+            <a:extLst xmlns:a="http://schemas.openxmlformats.org/drawingml/2006/main">
+              <a:ext uri="{FF2B5EF4-FFF2-40B4-BE49-F238E27FC236}">
+                <a16:creationId xmlns:a16="http://schemas.microsoft.com/office/drawing/2014/main" id="{3F9B6E8F-207E-472F-ABAD-3D29525C75CC}"/>
               </a:ext>
             </a:extLst>
           </p:cNvPr>
@@ -14009,10 +15586,10 @@
       </p:sp>
       <p:sp>
         <p:nvSpPr>
-          <p:cNvPr id="12" name="p20-path-title">
-            <a:extLst xmlns:a="http://schemas.openxmlformats.org/drawingml/2006/main">
-              <a:ext uri="{FF2B5EF4-FFF2-40B4-BE49-F238E27FC236}">
-                <a16:creationId xmlns:a16="http://schemas.microsoft.com/office/drawing/2014/main" id="{FE6F2B45-BDDE-44A6-84F3-BBB22D8C9417}"/>
+          <p:cNvPr id="12" name="p21-path-title">
+            <a:extLst xmlns:a="http://schemas.openxmlformats.org/drawingml/2006/main">
+              <a:ext uri="{FF2B5EF4-FFF2-40B4-BE49-F238E27FC236}">
+                <a16:creationId xmlns:a16="http://schemas.microsoft.com/office/drawing/2014/main" id="{B4740EFC-5694-4EE9-BC38-8DEA5FB94422}"/>
               </a:ext>
             </a:extLst>
           </p:cNvPr>
@@ -14062,10 +15639,10 @@
       </p:sp>
       <p:sp>
         <p:nvSpPr>
-          <p:cNvPr id="13" name="p20-p-0">
-            <a:extLst xmlns:a="http://schemas.openxmlformats.org/drawingml/2006/main">
-              <a:ext uri="{FF2B5EF4-FFF2-40B4-BE49-F238E27FC236}">
-                <a16:creationId xmlns:a16="http://schemas.microsoft.com/office/drawing/2014/main" id="{31AC2DC2-2916-4F9E-9315-95C3B06CEC91}"/>
+          <p:cNvPr id="13" name="p21-p-0">
+            <a:extLst xmlns:a="http://schemas.openxmlformats.org/drawingml/2006/main">
+              <a:ext uri="{FF2B5EF4-FFF2-40B4-BE49-F238E27FC236}">
+                <a16:creationId xmlns:a16="http://schemas.microsoft.com/office/drawing/2014/main" id="{4D7D6240-3422-4351-8C9F-3EE3981EA447}"/>
               </a:ext>
             </a:extLst>
           </p:cNvPr>
@@ -14145,10 +15722,10 @@
       </p:sp>
       <p:sp>
         <p:nvSpPr>
-          <p:cNvPr id="14" name="p20-down-0">
-            <a:extLst xmlns:a="http://schemas.openxmlformats.org/drawingml/2006/main">
-              <a:ext uri="{FF2B5EF4-FFF2-40B4-BE49-F238E27FC236}">
-                <a16:creationId xmlns:a16="http://schemas.microsoft.com/office/drawing/2014/main" id="{81A7E2A8-CD04-4CC6-B1F5-E5FE8062E771}"/>
+          <p:cNvPr id="14" name="p21-down-0">
+            <a:extLst xmlns:a="http://schemas.openxmlformats.org/drawingml/2006/main">
+              <a:ext uri="{FF2B5EF4-FFF2-40B4-BE49-F238E27FC236}">
+                <a16:creationId xmlns:a16="http://schemas.microsoft.com/office/drawing/2014/main" id="{ABAB0C36-4DB7-434F-98B7-CCC630D328BC}"/>
               </a:ext>
             </a:extLst>
           </p:cNvPr>
@@ -14198,10 +15775,10 @@
       </p:sp>
       <p:sp>
         <p:nvSpPr>
-          <p:cNvPr id="15" name="p20-p-1">
-            <a:extLst xmlns:a="http://schemas.openxmlformats.org/drawingml/2006/main">
-              <a:ext uri="{FF2B5EF4-FFF2-40B4-BE49-F238E27FC236}">
-                <a16:creationId xmlns:a16="http://schemas.microsoft.com/office/drawing/2014/main" id="{02928590-9F2D-4E74-A479-2B6050978994}"/>
+          <p:cNvPr id="15" name="p21-p-1">
+            <a:extLst xmlns:a="http://schemas.openxmlformats.org/drawingml/2006/main">
+              <a:ext uri="{FF2B5EF4-FFF2-40B4-BE49-F238E27FC236}">
+                <a16:creationId xmlns:a16="http://schemas.microsoft.com/office/drawing/2014/main" id="{2CF028EB-BC0A-4D35-9E03-3391BAF19B4C}"/>
               </a:ext>
             </a:extLst>
           </p:cNvPr>
@@ -14281,10 +15858,10 @@
       </p:sp>
       <p:sp>
         <p:nvSpPr>
-          <p:cNvPr id="16" name="p20-down-1">
-            <a:extLst xmlns:a="http://schemas.openxmlformats.org/drawingml/2006/main">
-              <a:ext uri="{FF2B5EF4-FFF2-40B4-BE49-F238E27FC236}">
-                <a16:creationId xmlns:a16="http://schemas.microsoft.com/office/drawing/2014/main" id="{BB7D4C56-7D28-4D35-95BC-3A98FF6EBD0B}"/>
+          <p:cNvPr id="16" name="p21-down-1">
+            <a:extLst xmlns:a="http://schemas.openxmlformats.org/drawingml/2006/main">
+              <a:ext uri="{FF2B5EF4-FFF2-40B4-BE49-F238E27FC236}">
+                <a16:creationId xmlns:a16="http://schemas.microsoft.com/office/drawing/2014/main" id="{23C43463-D164-4DE3-A082-F9E36B6CE5EE}"/>
               </a:ext>
             </a:extLst>
           </p:cNvPr>
@@ -14334,10 +15911,10 @@
       </p:sp>
       <p:sp>
         <p:nvSpPr>
-          <p:cNvPr id="17" name="p20-p-2">
-            <a:extLst xmlns:a="http://schemas.openxmlformats.org/drawingml/2006/main">
-              <a:ext uri="{FF2B5EF4-FFF2-40B4-BE49-F238E27FC236}">
-                <a16:creationId xmlns:a16="http://schemas.microsoft.com/office/drawing/2014/main" id="{27129D3B-7CE5-473E-98FB-8D95D93804E9}"/>
+          <p:cNvPr id="17" name="p21-p-2">
+            <a:extLst xmlns:a="http://schemas.openxmlformats.org/drawingml/2006/main">
+              <a:ext uri="{FF2B5EF4-FFF2-40B4-BE49-F238E27FC236}">
+                <a16:creationId xmlns:a16="http://schemas.microsoft.com/office/drawing/2014/main" id="{474EBFFC-3908-4792-9A15-A9C57FF54543}"/>
               </a:ext>
             </a:extLst>
           </p:cNvPr>
@@ -14417,10 +15994,10 @@
       </p:sp>
       <p:sp>
         <p:nvSpPr>
-          <p:cNvPr id="18" name="p20-reading">
-            <a:extLst xmlns:a="http://schemas.openxmlformats.org/drawingml/2006/main">
-              <a:ext uri="{FF2B5EF4-FFF2-40B4-BE49-F238E27FC236}">
-                <a16:creationId xmlns:a16="http://schemas.microsoft.com/office/drawing/2014/main" id="{768255EB-0151-40C9-A683-D740C0F9025F}"/>
+          <p:cNvPr id="18" name="p21-reading">
+            <a:extLst xmlns:a="http://schemas.openxmlformats.org/drawingml/2006/main">
+              <a:ext uri="{FF2B5EF4-FFF2-40B4-BE49-F238E27FC236}">
+                <a16:creationId xmlns:a16="http://schemas.microsoft.com/office/drawing/2014/main" id="{8365E35F-EDB3-4E3C-8668-E90147D71B46}"/>
               </a:ext>
             </a:extLst>
           </p:cNvPr>
@@ -14472,10 +16049,10 @@
       </p:sp>
       <p:sp>
         <p:nvSpPr>
-          <p:cNvPr id="19" name="p20-bottom">
-            <a:extLst xmlns:a="http://schemas.openxmlformats.org/drawingml/2006/main">
-              <a:ext uri="{FF2B5EF4-FFF2-40B4-BE49-F238E27FC236}">
-                <a16:creationId xmlns:a16="http://schemas.microsoft.com/office/drawing/2014/main" id="{5E9F175D-994E-406E-B794-2B3BEC70E19C}"/>
+          <p:cNvPr id="19" name="p21-bottom">
+            <a:extLst xmlns:a="http://schemas.openxmlformats.org/drawingml/2006/main">
+              <a:ext uri="{FF2B5EF4-FFF2-40B4-BE49-F238E27FC236}">
+                <a16:creationId xmlns:a16="http://schemas.microsoft.com/office/drawing/2014/main" id="{FEA4B2AD-F092-4A51-B254-7514E55EA3AB}"/>
               </a:ext>
             </a:extLst>
           </p:cNvPr>
@@ -14620,7 +16197,7 @@
           <p:cNvPr id="6" name="p03-n-0">
             <a:extLst xmlns:a="http://schemas.openxmlformats.org/drawingml/2006/main">
               <a:ext uri="{FF2B5EF4-FFF2-40B4-BE49-F238E27FC236}">
-                <a16:creationId xmlns:a16="http://schemas.microsoft.com/office/drawing/2014/main" id="{514411B0-806F-4AC1-8764-DFB2FC545AEB}"/>
+                <a16:creationId xmlns:a16="http://schemas.microsoft.com/office/drawing/2014/main" id="{B3B76BC3-939C-4485-8B23-D18C0D6AF6C2}"/>
               </a:ext>
             </a:extLst>
           </p:cNvPr>
@@ -14673,7 +16250,7 @@
           <p:cNvPr id="7" name="p03-g-0">
             <a:extLst xmlns:a="http://schemas.openxmlformats.org/drawingml/2006/main">
               <a:ext uri="{FF2B5EF4-FFF2-40B4-BE49-F238E27FC236}">
-                <a16:creationId xmlns:a16="http://schemas.microsoft.com/office/drawing/2014/main" id="{6508703F-5EFE-4557-837A-BD2097B44A29}"/>
+                <a16:creationId xmlns:a16="http://schemas.microsoft.com/office/drawing/2014/main" id="{D0A09225-CF40-4ECD-9D0B-1EDB7CA1989D}"/>
               </a:ext>
             </a:extLst>
           </p:cNvPr>
@@ -14726,7 +16303,7 @@
           <p:cNvPr id="8" name="p03-n-1">
             <a:extLst xmlns:a="http://schemas.openxmlformats.org/drawingml/2006/main">
               <a:ext uri="{FF2B5EF4-FFF2-40B4-BE49-F238E27FC236}">
-                <a16:creationId xmlns:a16="http://schemas.microsoft.com/office/drawing/2014/main" id="{428B3031-72B4-4F0D-BE06-90840AC509AE}"/>
+                <a16:creationId xmlns:a16="http://schemas.microsoft.com/office/drawing/2014/main" id="{5CD80A05-0CF3-4620-9145-E1F849097289}"/>
               </a:ext>
             </a:extLst>
           </p:cNvPr>
@@ -14779,7 +16356,7 @@
           <p:cNvPr id="9" name="p03-g-1">
             <a:extLst xmlns:a="http://schemas.openxmlformats.org/drawingml/2006/main">
               <a:ext uri="{FF2B5EF4-FFF2-40B4-BE49-F238E27FC236}">
-                <a16:creationId xmlns:a16="http://schemas.microsoft.com/office/drawing/2014/main" id="{55E9F0B6-AC41-4E81-9475-E2993DD7BD56}"/>
+                <a16:creationId xmlns:a16="http://schemas.microsoft.com/office/drawing/2014/main" id="{6D8CAB38-6940-40E6-BDB4-57523EFC388C}"/>
               </a:ext>
             </a:extLst>
           </p:cNvPr>
@@ -14832,7 +16409,7 @@
           <p:cNvPr id="10" name="p03-n-2">
             <a:extLst xmlns:a="http://schemas.openxmlformats.org/drawingml/2006/main">
               <a:ext uri="{FF2B5EF4-FFF2-40B4-BE49-F238E27FC236}">
-                <a16:creationId xmlns:a16="http://schemas.microsoft.com/office/drawing/2014/main" id="{F8FE3DED-F3D2-4271-B6CF-40EC1A71C388}"/>
+                <a16:creationId xmlns:a16="http://schemas.microsoft.com/office/drawing/2014/main" id="{F07C9C26-E6ED-4B5A-9123-FE53EF4D9FD7}"/>
               </a:ext>
             </a:extLst>
           </p:cNvPr>
@@ -14885,7 +16462,7 @@
           <p:cNvPr id="11" name="p03-g-2">
             <a:extLst xmlns:a="http://schemas.openxmlformats.org/drawingml/2006/main">
               <a:ext uri="{FF2B5EF4-FFF2-40B4-BE49-F238E27FC236}">
-                <a16:creationId xmlns:a16="http://schemas.microsoft.com/office/drawing/2014/main" id="{C19DA36C-15B1-4835-9F24-BC8541602276}"/>
+                <a16:creationId xmlns:a16="http://schemas.microsoft.com/office/drawing/2014/main" id="{BDA4BA0C-BCDC-462D-8ECD-E015CA3F6921}"/>
               </a:ext>
             </a:extLst>
           </p:cNvPr>
@@ -14938,7 +16515,7 @@
           <p:cNvPr id="12" name="p03-n-3">
             <a:extLst xmlns:a="http://schemas.openxmlformats.org/drawingml/2006/main">
               <a:ext uri="{FF2B5EF4-FFF2-40B4-BE49-F238E27FC236}">
-                <a16:creationId xmlns:a16="http://schemas.microsoft.com/office/drawing/2014/main" id="{9D882163-08AD-4919-AD15-52B694442E54}"/>
+                <a16:creationId xmlns:a16="http://schemas.microsoft.com/office/drawing/2014/main" id="{1FB22CF3-6D33-44D8-8719-1A6E4904C731}"/>
               </a:ext>
             </a:extLst>
           </p:cNvPr>
@@ -14991,7 +16568,7 @@
           <p:cNvPr id="13" name="p03-g-3">
             <a:extLst xmlns:a="http://schemas.openxmlformats.org/drawingml/2006/main">
               <a:ext uri="{FF2B5EF4-FFF2-40B4-BE49-F238E27FC236}">
-                <a16:creationId xmlns:a16="http://schemas.microsoft.com/office/drawing/2014/main" id="{C81B0AA2-F806-43DA-9331-54F6FB3527B8}"/>
+                <a16:creationId xmlns:a16="http://schemas.microsoft.com/office/drawing/2014/main" id="{B3180C43-9742-4A25-9818-95F42C5256FA}"/>
               </a:ext>
             </a:extLst>
           </p:cNvPr>
@@ -15044,7 +16621,7 @@
           <p:cNvPr id="14" name="p03-output">
             <a:extLst xmlns:a="http://schemas.openxmlformats.org/drawingml/2006/main">
               <a:ext uri="{FF2B5EF4-FFF2-40B4-BE49-F238E27FC236}">
-                <a16:creationId xmlns:a16="http://schemas.microsoft.com/office/drawing/2014/main" id="{323E8F16-4D8E-457C-9948-CFF4EEF80904}"/>
+                <a16:creationId xmlns:a16="http://schemas.microsoft.com/office/drawing/2014/main" id="{CA49808D-4206-41F9-A2ED-5CD3B8019DD0}"/>
               </a:ext>
             </a:extLst>
           </p:cNvPr>
@@ -15097,7 +16674,7 @@
           <p:cNvPr id="15" name="p03-output-body">
             <a:extLst xmlns:a="http://schemas.openxmlformats.org/drawingml/2006/main">
               <a:ext uri="{FF2B5EF4-FFF2-40B4-BE49-F238E27FC236}">
-                <a16:creationId xmlns:a16="http://schemas.microsoft.com/office/drawing/2014/main" id="{1561A07D-E6B5-49C0-9494-2CA8DA18FBC7}"/>
+                <a16:creationId xmlns:a16="http://schemas.microsoft.com/office/drawing/2014/main" id="{80C7CAF9-38A3-44FF-A81C-C3F5F28B752B}"/>
               </a:ext>
             </a:extLst>
           </p:cNvPr>
@@ -15300,7 +16877,7 @@
           <p:cNvPr id="16" name="p03-bottom">
             <a:extLst xmlns:a="http://schemas.openxmlformats.org/drawingml/2006/main">
               <a:ext uri="{FF2B5EF4-FFF2-40B4-BE49-F238E27FC236}">
-                <a16:creationId xmlns:a16="http://schemas.microsoft.com/office/drawing/2014/main" id="{104DAE93-14B2-4B76-9DB4-5B9369EA5D8E}"/>
+                <a16:creationId xmlns:a16="http://schemas.microsoft.com/office/drawing/2014/main" id="{70FAFA27-133A-461A-9019-7130D2F68EA2}"/>
               </a:ext>
             </a:extLst>
           </p:cNvPr>
@@ -15445,7 +17022,7 @@
           <p:cNvPr id="6" name="p04-bad">
             <a:extLst xmlns:a="http://schemas.openxmlformats.org/drawingml/2006/main">
               <a:ext uri="{FF2B5EF4-FFF2-40B4-BE49-F238E27FC236}">
-                <a16:creationId xmlns:a16="http://schemas.microsoft.com/office/drawing/2014/main" id="{D1058642-F301-4EE5-8CAD-07F0698A41B0}"/>
+                <a16:creationId xmlns:a16="http://schemas.microsoft.com/office/drawing/2014/main" id="{846A7662-80D0-4623-9916-4828437E3310}"/>
               </a:ext>
             </a:extLst>
           </p:cNvPr>
@@ -15528,7 +17105,7 @@
           <p:cNvPr id="7" name="p04-x">
             <a:extLst xmlns:a="http://schemas.openxmlformats.org/drawingml/2006/main">
               <a:ext uri="{FF2B5EF4-FFF2-40B4-BE49-F238E27FC236}">
-                <a16:creationId xmlns:a16="http://schemas.microsoft.com/office/drawing/2014/main" id="{E24BEAB4-1435-47F8-A512-EA9DF476ED2E}"/>
+                <a16:creationId xmlns:a16="http://schemas.microsoft.com/office/drawing/2014/main" id="{385DB041-DAC8-40FE-8DFF-74F7F1A049D9}"/>
               </a:ext>
             </a:extLst>
           </p:cNvPr>
@@ -15581,7 +17158,7 @@
           <p:cNvPr id="8" name="p04-good">
             <a:extLst xmlns:a="http://schemas.openxmlformats.org/drawingml/2006/main">
               <a:ext uri="{FF2B5EF4-FFF2-40B4-BE49-F238E27FC236}">
-                <a16:creationId xmlns:a16="http://schemas.microsoft.com/office/drawing/2014/main" id="{1A289439-F288-49E3-A6B5-B854CCA9D922}"/>
+                <a16:creationId xmlns:a16="http://schemas.microsoft.com/office/drawing/2014/main" id="{9B3C2D66-6A69-421E-9665-0F287735DD36}"/>
               </a:ext>
             </a:extLst>
           </p:cNvPr>
@@ -15636,7 +17213,7 @@
           <p:cNvPr id="9" name="p04-errors">
             <a:extLst xmlns:a="http://schemas.openxmlformats.org/drawingml/2006/main">
               <a:ext uri="{FF2B5EF4-FFF2-40B4-BE49-F238E27FC236}">
-                <a16:creationId xmlns:a16="http://schemas.microsoft.com/office/drawing/2014/main" id="{0BECCCFB-D7D5-4298-9A69-CA2BC4990996}"/>
+                <a16:creationId xmlns:a16="http://schemas.microsoft.com/office/drawing/2014/main" id="{1D005447-AA9E-45F0-93F9-0B4D2319F2B0}"/>
               </a:ext>
             </a:extLst>
           </p:cNvPr>
@@ -15691,7 +17268,7 @@
           <p:cNvPr id="10" name="p04-bottom">
             <a:extLst xmlns:a="http://schemas.openxmlformats.org/drawingml/2006/main">
               <a:ext uri="{FF2B5EF4-FFF2-40B4-BE49-F238E27FC236}">
-                <a16:creationId xmlns:a16="http://schemas.microsoft.com/office/drawing/2014/main" id="{6A9DBA45-7885-49C0-8419-754A7B7EB65B}"/>
+                <a16:creationId xmlns:a16="http://schemas.microsoft.com/office/drawing/2014/main" id="{A0102083-E100-4B25-A8B2-084346CC561C}"/>
               </a:ext>
             </a:extLst>
           </p:cNvPr>
@@ -15836,7 +17413,7 @@
           <p:cNvPr id="6" name="p05-h-0">
             <a:extLst xmlns:a="http://schemas.openxmlformats.org/drawingml/2006/main">
               <a:ext uri="{FF2B5EF4-FFF2-40B4-BE49-F238E27FC236}">
-                <a16:creationId xmlns:a16="http://schemas.microsoft.com/office/drawing/2014/main" id="{43EA654E-3988-4077-9A34-96DF0038E7AD}"/>
+                <a16:creationId xmlns:a16="http://schemas.microsoft.com/office/drawing/2014/main" id="{D7E30299-12F2-43F7-B064-037ACDAF086A}"/>
               </a:ext>
             </a:extLst>
           </p:cNvPr>
@@ -15891,7 +17468,7 @@
           <p:cNvPr id="7" name="p05-h-1">
             <a:extLst xmlns:a="http://schemas.openxmlformats.org/drawingml/2006/main">
               <a:ext uri="{FF2B5EF4-FFF2-40B4-BE49-F238E27FC236}">
-                <a16:creationId xmlns:a16="http://schemas.microsoft.com/office/drawing/2014/main" id="{EA98844E-738A-4238-8FF1-4D692C1A8C55}"/>
+                <a16:creationId xmlns:a16="http://schemas.microsoft.com/office/drawing/2014/main" id="{B9E96DC6-38DB-4FEF-BC19-F3E415884A4F}"/>
               </a:ext>
             </a:extLst>
           </p:cNvPr>
@@ -15946,7 +17523,7 @@
           <p:cNvPr id="8" name="p05-h-2">
             <a:extLst xmlns:a="http://schemas.openxmlformats.org/drawingml/2006/main">
               <a:ext uri="{FF2B5EF4-FFF2-40B4-BE49-F238E27FC236}">
-                <a16:creationId xmlns:a16="http://schemas.microsoft.com/office/drawing/2014/main" id="{D97A1E63-D593-4527-8AB1-0F46310D50E2}"/>
+                <a16:creationId xmlns:a16="http://schemas.microsoft.com/office/drawing/2014/main" id="{DA4AEAF7-9F7F-4824-A00E-603FE3DBF8F5}"/>
               </a:ext>
             </a:extLst>
           </p:cNvPr>
@@ -15991,7 +17568,7 @@
                 <a:ea typeface="Microsoft YaHei"/>
                 <a:cs typeface="Microsoft YaHei"/>
               </a:rPr>
-              <a:t>典型角色</a:t>
+              <a:t>用途／核验重点</a:t>
             </a:r>
           </a:p>
         </p:txBody>
@@ -16001,7 +17578,7 @@
           <p:cNvPr id="9" name="p05-r0-0">
             <a:extLst xmlns:a="http://schemas.openxmlformats.org/drawingml/2006/main">
               <a:ext uri="{FF2B5EF4-FFF2-40B4-BE49-F238E27FC236}">
-                <a16:creationId xmlns:a16="http://schemas.microsoft.com/office/drawing/2014/main" id="{F18FC195-7683-4599-9680-1689A4187195}"/>
+                <a16:creationId xmlns:a16="http://schemas.microsoft.com/office/drawing/2014/main" id="{30AB98F4-962A-4AD9-87D3-D1A1B17403CE}"/>
               </a:ext>
             </a:extLst>
           </p:cNvPr>
@@ -16062,7 +17639,7 @@
           <p:cNvPr id="10" name="p05-r0-1">
             <a:extLst xmlns:a="http://schemas.openxmlformats.org/drawingml/2006/main">
               <a:ext uri="{FF2B5EF4-FFF2-40B4-BE49-F238E27FC236}">
-                <a16:creationId xmlns:a16="http://schemas.microsoft.com/office/drawing/2014/main" id="{84D32E92-4956-4E0A-9D90-F5BF566D1487}"/>
+                <a16:creationId xmlns:a16="http://schemas.microsoft.com/office/drawing/2014/main" id="{E94524F8-837D-4018-A7B9-44AD87D8CE22}"/>
               </a:ext>
             </a:extLst>
           </p:cNvPr>
@@ -16123,7 +17700,7 @@
           <p:cNvPr id="11" name="p05-r0-2">
             <a:extLst xmlns:a="http://schemas.openxmlformats.org/drawingml/2006/main">
               <a:ext uri="{FF2B5EF4-FFF2-40B4-BE49-F238E27FC236}">
-                <a16:creationId xmlns:a16="http://schemas.microsoft.com/office/drawing/2014/main" id="{D30E1650-3609-4D22-9B23-815BA955710F}"/>
+                <a16:creationId xmlns:a16="http://schemas.microsoft.com/office/drawing/2014/main" id="{3C959C32-8753-4232-8B71-68B5012061F8}"/>
               </a:ext>
             </a:extLst>
           </p:cNvPr>
@@ -16174,7 +17751,7 @@
                 <a:ea typeface="Microsoft YaHei"/>
                 <a:cs typeface="Microsoft YaHei"/>
               </a:rPr>
-              <a:t>主证据 / 对比</a:t>
+              <a:t>任务、设置、主张、限定</a:t>
             </a:r>
           </a:p>
         </p:txBody>
@@ -16184,7 +17761,7 @@
           <p:cNvPr id="12" name="p05-r1-0">
             <a:extLst xmlns:a="http://schemas.openxmlformats.org/drawingml/2006/main">
               <a:ext uri="{FF2B5EF4-FFF2-40B4-BE49-F238E27FC236}">
-                <a16:creationId xmlns:a16="http://schemas.microsoft.com/office/drawing/2014/main" id="{53CE8964-28C5-45BC-AD10-B12B94CE60A2}"/>
+                <a16:creationId xmlns:a16="http://schemas.microsoft.com/office/drawing/2014/main" id="{D8C7E6F0-4A94-48FD-929F-F74D55A33E64}"/>
               </a:ext>
             </a:extLst>
           </p:cNvPr>
@@ -16245,7 +17822,7 @@
           <p:cNvPr id="13" name="p05-r1-1">
             <a:extLst xmlns:a="http://schemas.openxmlformats.org/drawingml/2006/main">
               <a:ext uri="{FF2B5EF4-FFF2-40B4-BE49-F238E27FC236}">
-                <a16:creationId xmlns:a16="http://schemas.microsoft.com/office/drawing/2014/main" id="{BCF2E6D6-CD89-4B55-8EBB-F0CD06FD818C}"/>
+                <a16:creationId xmlns:a16="http://schemas.microsoft.com/office/drawing/2014/main" id="{04262571-BC87-46C6-A372-7E3A26511B75}"/>
               </a:ext>
             </a:extLst>
           </p:cNvPr>
@@ -16306,7 +17883,7 @@
           <p:cNvPr id="14" name="p05-r1-2">
             <a:extLst xmlns:a="http://schemas.openxmlformats.org/drawingml/2006/main">
               <a:ext uri="{FF2B5EF4-FFF2-40B4-BE49-F238E27FC236}">
-                <a16:creationId xmlns:a16="http://schemas.microsoft.com/office/drawing/2014/main" id="{39FEC19C-4564-465E-B33D-1DB911E06C9F}"/>
+                <a16:creationId xmlns:a16="http://schemas.microsoft.com/office/drawing/2014/main" id="{C1BA8620-B768-4E11-9424-A455F4C56A2B}"/>
               </a:ext>
             </a:extLst>
           </p:cNvPr>
@@ -16357,7 +17934,7 @@
                 <a:ea typeface="Microsoft YaHei"/>
                 <a:cs typeface="Microsoft YaHei"/>
               </a:rPr>
-              <a:t>主证据 / 补充</a:t>
+              <a:t>版本、章节、适用范围</a:t>
             </a:r>
           </a:p>
         </p:txBody>
@@ -16367,7 +17944,7 @@
           <p:cNvPr id="15" name="p05-r2-0">
             <a:extLst xmlns:a="http://schemas.openxmlformats.org/drawingml/2006/main">
               <a:ext uri="{FF2B5EF4-FFF2-40B4-BE49-F238E27FC236}">
-                <a16:creationId xmlns:a16="http://schemas.microsoft.com/office/drawing/2014/main" id="{DF0ED3D4-72FD-4A4F-BC4A-60716D3D3DA6}"/>
+                <a16:creationId xmlns:a16="http://schemas.microsoft.com/office/drawing/2014/main" id="{0A15CC61-10DC-4ACA-BA2D-E4E590599938}"/>
               </a:ext>
             </a:extLst>
           </p:cNvPr>
@@ -16428,7 +18005,7 @@
           <p:cNvPr id="16" name="p05-r2-1">
             <a:extLst xmlns:a="http://schemas.openxmlformats.org/drawingml/2006/main">
               <a:ext uri="{FF2B5EF4-FFF2-40B4-BE49-F238E27FC236}">
-                <a16:creationId xmlns:a16="http://schemas.microsoft.com/office/drawing/2014/main" id="{08054B5F-3CE2-43F3-9CE1-424A5635DE74}"/>
+                <a16:creationId xmlns:a16="http://schemas.microsoft.com/office/drawing/2014/main" id="{66A976C9-10CD-48E1-AE5C-1587C7057BAA}"/>
               </a:ext>
             </a:extLst>
           </p:cNvPr>
@@ -16489,7 +18066,7 @@
           <p:cNvPr id="17" name="p05-r2-2">
             <a:extLst xmlns:a="http://schemas.openxmlformats.org/drawingml/2006/main">
               <a:ext uri="{FF2B5EF4-FFF2-40B4-BE49-F238E27FC236}">
-                <a16:creationId xmlns:a16="http://schemas.microsoft.com/office/drawing/2014/main" id="{DDB7ABBA-8869-4DC7-B030-3EBC07335C97}"/>
+                <a16:creationId xmlns:a16="http://schemas.microsoft.com/office/drawing/2014/main" id="{1B6B7072-B32D-40BF-970C-4ED4C6E79D96}"/>
               </a:ext>
             </a:extLst>
           </p:cNvPr>
@@ -16540,7 +18117,7 @@
                 <a:ea typeface="Microsoft YaHei"/>
                 <a:cs typeface="Microsoft YaHei"/>
               </a:rPr>
-              <a:t>方法依据</a:t>
+              <a:t>发布机构、版本、对象</a:t>
             </a:r>
           </a:p>
         </p:txBody>
@@ -16550,7 +18127,7 @@
           <p:cNvPr id="18" name="p05-r3-0">
             <a:extLst xmlns:a="http://schemas.openxmlformats.org/drawingml/2006/main">
               <a:ext uri="{FF2B5EF4-FFF2-40B4-BE49-F238E27FC236}">
-                <a16:creationId xmlns:a16="http://schemas.microsoft.com/office/drawing/2014/main" id="{4CFD7B73-2904-433D-82E9-BFF3AAEF07EE}"/>
+                <a16:creationId xmlns:a16="http://schemas.microsoft.com/office/drawing/2014/main" id="{14F7A49F-7DB0-4954-A695-CC255EEC54B4}"/>
               </a:ext>
             </a:extLst>
           </p:cNvPr>
@@ -16611,7 +18188,7 @@
           <p:cNvPr id="19" name="p05-r3-1">
             <a:extLst xmlns:a="http://schemas.openxmlformats.org/drawingml/2006/main">
               <a:ext uri="{FF2B5EF4-FFF2-40B4-BE49-F238E27FC236}">
-                <a16:creationId xmlns:a16="http://schemas.microsoft.com/office/drawing/2014/main" id="{03972344-06A6-4D4C-932E-D58011EFBF89}"/>
+                <a16:creationId xmlns:a16="http://schemas.microsoft.com/office/drawing/2014/main" id="{E8207018-C3EE-46D1-A88D-428115B02D73}"/>
               </a:ext>
             </a:extLst>
           </p:cNvPr>
@@ -16672,7 +18249,7 @@
           <p:cNvPr id="20" name="p05-r3-2">
             <a:extLst xmlns:a="http://schemas.openxmlformats.org/drawingml/2006/main">
               <a:ext uri="{FF2B5EF4-FFF2-40B4-BE49-F238E27FC236}">
-                <a16:creationId xmlns:a16="http://schemas.microsoft.com/office/drawing/2014/main" id="{1550F092-F882-48D6-8A27-5CF5450A83F5}"/>
+                <a16:creationId xmlns:a16="http://schemas.microsoft.com/office/drawing/2014/main" id="{B6A91368-9907-48A6-9FAA-FBF209163B33}"/>
               </a:ext>
             </a:extLst>
           </p:cNvPr>
@@ -16723,7 +18300,7 @@
                 <a:ea typeface="Microsoft YaHei"/>
                 <a:cs typeface="Microsoft YaHei"/>
               </a:rPr>
-              <a:t>复现 / 验证</a:t>
+              <a:t>身份、commit、许可、版本</a:t>
             </a:r>
           </a:p>
         </p:txBody>
@@ -16733,7 +18310,7 @@
           <p:cNvPr id="21" name="p05-r4-0">
             <a:extLst xmlns:a="http://schemas.openxmlformats.org/drawingml/2006/main">
               <a:ext uri="{FF2B5EF4-FFF2-40B4-BE49-F238E27FC236}">
-                <a16:creationId xmlns:a16="http://schemas.microsoft.com/office/drawing/2014/main" id="{6CF45B89-C412-43F8-A56F-3F5A586B8DCC}"/>
+                <a16:creationId xmlns:a16="http://schemas.microsoft.com/office/drawing/2014/main" id="{8C079C17-97E4-457F-9F6E-5E535D4A4317}"/>
               </a:ext>
             </a:extLst>
           </p:cNvPr>
@@ -16794,7 +18371,7 @@
           <p:cNvPr id="22" name="p05-r4-1">
             <a:extLst xmlns:a="http://schemas.openxmlformats.org/drawingml/2006/main">
               <a:ext uri="{FF2B5EF4-FFF2-40B4-BE49-F238E27FC236}">
-                <a16:creationId xmlns:a16="http://schemas.microsoft.com/office/drawing/2014/main" id="{D67FA0F5-6DD1-4906-A722-2059A47F2491}"/>
+                <a16:creationId xmlns:a16="http://schemas.microsoft.com/office/drawing/2014/main" id="{63DF8574-CD86-435C-B1FE-7C29E58F6A07}"/>
               </a:ext>
             </a:extLst>
           </p:cNvPr>
@@ -16855,7 +18432,7 @@
           <p:cNvPr id="23" name="p05-r4-2">
             <a:extLst xmlns:a="http://schemas.openxmlformats.org/drawingml/2006/main">
               <a:ext uri="{FF2B5EF4-FFF2-40B4-BE49-F238E27FC236}">
-                <a16:creationId xmlns:a16="http://schemas.microsoft.com/office/drawing/2014/main" id="{C258E3AA-F33F-43EC-8F6B-2163F8176070}"/>
+                <a16:creationId xmlns:a16="http://schemas.microsoft.com/office/drawing/2014/main" id="{10C32474-D9BF-437F-A3FD-695C3C6FB52A}"/>
               </a:ext>
             </a:extLst>
           </p:cNvPr>
@@ -16906,7 +18483,7 @@
                 <a:ea typeface="Microsoft YaHei"/>
                 <a:cs typeface="Microsoft YaHei"/>
               </a:rPr>
-              <a:t>实践证据</a:t>
+              <a:t>官方身份、版本、时效</a:t>
             </a:r>
           </a:p>
         </p:txBody>
@@ -16916,7 +18493,7 @@
           <p:cNvPr id="24" name="p05-r5-0">
             <a:extLst xmlns:a="http://schemas.openxmlformats.org/drawingml/2006/main">
               <a:ext uri="{FF2B5EF4-FFF2-40B4-BE49-F238E27FC236}">
-                <a16:creationId xmlns:a16="http://schemas.microsoft.com/office/drawing/2014/main" id="{03711B86-1030-4C79-AF41-08F07DA31075}"/>
+                <a16:creationId xmlns:a16="http://schemas.microsoft.com/office/drawing/2014/main" id="{C9DED33D-1CA5-42F2-9894-09FF8C8D1E95}"/>
               </a:ext>
             </a:extLst>
           </p:cNvPr>
@@ -16977,7 +18554,7 @@
           <p:cNvPr id="25" name="p05-r5-1">
             <a:extLst xmlns:a="http://schemas.openxmlformats.org/drawingml/2006/main">
               <a:ext uri="{FF2B5EF4-FFF2-40B4-BE49-F238E27FC236}">
-                <a16:creationId xmlns:a16="http://schemas.microsoft.com/office/drawing/2014/main" id="{6C500B33-3BBA-4146-A625-6F2C822BF102}"/>
+                <a16:creationId xmlns:a16="http://schemas.microsoft.com/office/drawing/2014/main" id="{E1AE2DC5-2968-45D3-9639-AA1233D034A9}"/>
               </a:ext>
             </a:extLst>
           </p:cNvPr>
@@ -17038,7 +18615,7 @@
           <p:cNvPr id="26" name="p05-r5-2">
             <a:extLst xmlns:a="http://schemas.openxmlformats.org/drawingml/2006/main">
               <a:ext uri="{FF2B5EF4-FFF2-40B4-BE49-F238E27FC236}">
-                <a16:creationId xmlns:a16="http://schemas.microsoft.com/office/drawing/2014/main" id="{5788BC37-7CF4-4478-A171-2CFE26D1A794}"/>
+                <a16:creationId xmlns:a16="http://schemas.microsoft.com/office/drawing/2014/main" id="{C838EAC5-87A6-4331-83D0-D0FB512450CB}"/>
               </a:ext>
             </a:extLst>
           </p:cNvPr>
@@ -17089,7 +18666,7 @@
                 <a:ea typeface="Microsoft YaHei"/>
                 <a:cs typeface="Microsoft YaHei"/>
               </a:rPr>
-              <a:t>探索线索</a:t>
+              <a:t>主体、上下文、可追溯性</a:t>
             </a:r>
           </a:p>
         </p:txBody>
@@ -17099,7 +18676,7 @@
           <p:cNvPr id="27" name="p05-r6-0">
             <a:extLst xmlns:a="http://schemas.openxmlformats.org/drawingml/2006/main">
               <a:ext uri="{FF2B5EF4-FFF2-40B4-BE49-F238E27FC236}">
-                <a16:creationId xmlns:a16="http://schemas.microsoft.com/office/drawing/2014/main" id="{9A468EB4-98DC-4222-A8AF-8DF4FE4A46CC}"/>
+                <a16:creationId xmlns:a16="http://schemas.microsoft.com/office/drawing/2014/main" id="{8F01E1F1-F789-4B61-9397-109B43A3BA23}"/>
               </a:ext>
             </a:extLst>
           </p:cNvPr>
@@ -17160,7 +18737,7 @@
           <p:cNvPr id="28" name="p05-r6-1">
             <a:extLst xmlns:a="http://schemas.openxmlformats.org/drawingml/2006/main">
               <a:ext uri="{FF2B5EF4-FFF2-40B4-BE49-F238E27FC236}">
-                <a16:creationId xmlns:a16="http://schemas.microsoft.com/office/drawing/2014/main" id="{7AAE2EE2-7AB9-4332-BBF3-3F886C5964F5}"/>
+                <a16:creationId xmlns:a16="http://schemas.microsoft.com/office/drawing/2014/main" id="{64FA3D1D-763F-4F9E-BDDB-3311350A2E25}"/>
               </a:ext>
             </a:extLst>
           </p:cNvPr>
@@ -17221,7 +18798,7 @@
           <p:cNvPr id="29" name="p05-r6-2">
             <a:extLst xmlns:a="http://schemas.openxmlformats.org/drawingml/2006/main">
               <a:ext uri="{FF2B5EF4-FFF2-40B4-BE49-F238E27FC236}">
-                <a16:creationId xmlns:a16="http://schemas.microsoft.com/office/drawing/2014/main" id="{F122AB0E-4EC6-4CB7-963E-AD76D0A993D5}"/>
+                <a16:creationId xmlns:a16="http://schemas.microsoft.com/office/drawing/2014/main" id="{29B80489-3D86-4FC3-85D4-173090F9221B}"/>
               </a:ext>
             </a:extLst>
           </p:cNvPr>
@@ -17272,7 +18849,7 @@
                 <a:ea typeface="Microsoft YaHei"/>
                 <a:cs typeface="Microsoft YaHei"/>
               </a:rPr>
-              <a:t>探索线索</a:t>
+              <a:t>仅作发现线索，回正式来源</a:t>
             </a:r>
           </a:p>
         </p:txBody>
@@ -17282,19 +18859,19 @@
           <p:cNvPr id="30" name="p05-bottom">
             <a:extLst xmlns:a="http://schemas.openxmlformats.org/drawingml/2006/main">
               <a:ext uri="{FF2B5EF4-FFF2-40B4-BE49-F238E27FC236}">
-                <a16:creationId xmlns:a16="http://schemas.microsoft.com/office/drawing/2014/main" id="{D01D1EB0-4462-4965-B3B9-4904B0763EDA}"/>
-              </a:ext>
-            </a:extLst>
-          </p:cNvPr>
-          <p:cNvSpPr>
-            <a:spLocks xmlns:a="http://schemas.openxmlformats.org/drawingml/2006/main" noGrp="1"/>
-          </p:cNvSpPr>
-          <p:nvPr/>
-        </p:nvSpPr>
-        <p:spPr>
-          <a:xfrm xmlns:a="http://schemas.openxmlformats.org/drawingml/2006/main">
-            <a:off x="1676400" y="5429250"/>
-            <a:ext cx="8839200" cy="361950"/>
+                <a16:creationId xmlns:a16="http://schemas.microsoft.com/office/drawing/2014/main" id="{EB759AB0-3D2F-4334-B52A-B074D697230A}"/>
+              </a:ext>
+            </a:extLst>
+          </p:cNvPr>
+          <p:cNvSpPr>
+            <a:spLocks xmlns:a="http://schemas.openxmlformats.org/drawingml/2006/main" noGrp="1"/>
+          </p:cNvSpPr>
+          <p:nvPr/>
+        </p:nvSpPr>
+        <p:spPr>
+          <a:xfrm xmlns:a="http://schemas.openxmlformats.org/drawingml/2006/main">
+            <a:off x="1143000" y="5429250"/>
+            <a:ext cx="9906000" cy="361950"/>
           </a:xfrm>
           <a:prstGeom xmlns:a="http://schemas.openxmlformats.org/drawingml/2006/main" prst="rect">
             <a:avLst/>
@@ -17310,14 +18887,14 @@
           <a:lstStyle xmlns:a="http://schemas.openxmlformats.org/drawingml/2006/main"/>
           <a:p xmlns:a="http://schemas.openxmlformats.org/drawingml/2006/main">
             <a:pPr algn="ctr">
-              <a:defRPr sz="1575" b="1">
+              <a:defRPr sz="1500" b="1">
                 <a:solidFill>
                   <a:srgbClr val="C8161E"/>
                 </a:solidFill>
               </a:defRPr>
             </a:pPr>
             <a:r>
-              <a:rPr sz="1575" b="1">
+              <a:rPr sz="1500" b="1">
                 <a:solidFill>
                   <a:srgbClr val="C8161E"/>
                 </a:solidFill>
@@ -17325,7 +18902,7 @@
                 <a:ea typeface="Microsoft YaHei"/>
                 <a:cs typeface="Microsoft YaHei"/>
               </a:rPr>
-              <a:t>来源类型不自动决定可信度；关键结论必须回到可核验一手材料。</a:t>
+              <a:t>来源类型不自动决定可信度或证据角色；角色要相对于当前问题或拟用主张判断。</a:t>
             </a:r>
           </a:p>
         </p:txBody>
@@ -17388,7 +18965,7 @@
                 <a:ea typeface="Microsoft YaHei"/>
                 <a:cs typeface="Microsoft YaHei"/>
               </a:rPr>
-              <a:t>先写问题，再搜材料</a:t>
+              <a:t>先写问题初稿，再搜材料</a:t>
             </a:r>
             <a:endParaRPr/>
           </a:p>
@@ -17427,7 +19004,7 @@
           <p:cNvPr id="6" name="p06-topic">
             <a:extLst xmlns:a="http://schemas.openxmlformats.org/drawingml/2006/main">
               <a:ext uri="{FF2B5EF4-FFF2-40B4-BE49-F238E27FC236}">
-                <a16:creationId xmlns:a16="http://schemas.microsoft.com/office/drawing/2014/main" id="{0FD5329D-C328-4967-88B9-CE5CE07110C1}"/>
+                <a16:creationId xmlns:a16="http://schemas.microsoft.com/office/drawing/2014/main" id="{A1ADCD63-19A3-4C1E-BD97-981395C5EAF9}"/>
               </a:ext>
             </a:extLst>
           </p:cNvPr>
@@ -17502,7 +19079,7 @@
           <p:cNvPr id="7" name="p06-a1">
             <a:extLst xmlns:a="http://schemas.openxmlformats.org/drawingml/2006/main">
               <a:ext uri="{FF2B5EF4-FFF2-40B4-BE49-F238E27FC236}">
-                <a16:creationId xmlns:a16="http://schemas.microsoft.com/office/drawing/2014/main" id="{182BBB1C-2E5B-4D5E-AA2F-616D4775FEAA}"/>
+                <a16:creationId xmlns:a16="http://schemas.microsoft.com/office/drawing/2014/main" id="{96780875-A8DF-42BF-BCB0-7F2AA90D0F25}"/>
               </a:ext>
             </a:extLst>
           </p:cNvPr>
@@ -17555,7 +19132,7 @@
           <p:cNvPr id="8" name="p06-question">
             <a:extLst xmlns:a="http://schemas.openxmlformats.org/drawingml/2006/main">
               <a:ext uri="{FF2B5EF4-FFF2-40B4-BE49-F238E27FC236}">
-                <a16:creationId xmlns:a16="http://schemas.microsoft.com/office/drawing/2014/main" id="{DF0FD123-82A6-4BBF-9F19-0EACFADFB5D8}"/>
+                <a16:creationId xmlns:a16="http://schemas.microsoft.com/office/drawing/2014/main" id="{FC640077-5586-48B1-811C-AB0478BDDC69}"/>
               </a:ext>
             </a:extLst>
           </p:cNvPr>
@@ -17604,7 +19181,7 @@
                 <a:ea typeface="Microsoft YaHei"/>
                 <a:cs typeface="Microsoft YaHei"/>
               </a:rPr>
-              <a:t>可操作问题</a:t>
+              <a:t>可检索的问题初稿</a:t>
             </a:r>
           </a:p>
           <a:p xmlns:a="http://schemas.openxmlformats.org/drawingml/2006/main">
@@ -17638,7 +19215,7 @@
           <p:cNvPr id="9" name="p06-a2">
             <a:extLst xmlns:a="http://schemas.openxmlformats.org/drawingml/2006/main">
               <a:ext uri="{FF2B5EF4-FFF2-40B4-BE49-F238E27FC236}">
-                <a16:creationId xmlns:a16="http://schemas.microsoft.com/office/drawing/2014/main" id="{5FF0BF3C-1EF0-4A03-A52D-CE1EEE6567DF}"/>
+                <a16:creationId xmlns:a16="http://schemas.microsoft.com/office/drawing/2014/main" id="{E940276E-C6C9-4661-A2D1-9DE0F39F2520}"/>
               </a:ext>
             </a:extLst>
           </p:cNvPr>
@@ -17691,7 +19268,7 @@
           <p:cNvPr id="10" name="p06-words">
             <a:extLst xmlns:a="http://schemas.openxmlformats.org/drawingml/2006/main">
               <a:ext uri="{FF2B5EF4-FFF2-40B4-BE49-F238E27FC236}">
-                <a16:creationId xmlns:a16="http://schemas.microsoft.com/office/drawing/2014/main" id="{B7BB5018-1F10-49DD-8198-BC5273453252}"/>
+                <a16:creationId xmlns:a16="http://schemas.microsoft.com/office/drawing/2014/main" id="{9A23AAF0-CDC5-4223-AE16-6B077BFB38F9}"/>
               </a:ext>
             </a:extLst>
           </p:cNvPr>
@@ -17806,7 +19383,7 @@
           <p:cNvPr id="11" name="p06-expand">
             <a:extLst xmlns:a="http://schemas.openxmlformats.org/drawingml/2006/main">
               <a:ext uri="{FF2B5EF4-FFF2-40B4-BE49-F238E27FC236}">
-                <a16:creationId xmlns:a16="http://schemas.microsoft.com/office/drawing/2014/main" id="{091DDD3C-FED7-4DB9-968C-5A0DF501C2E6}"/>
+                <a16:creationId xmlns:a16="http://schemas.microsoft.com/office/drawing/2014/main" id="{664B33AE-67DA-4B4C-8A91-3090EA0DA676}"/>
               </a:ext>
             </a:extLst>
           </p:cNvPr>
@@ -17953,7 +19530,7 @@
           <p:cNvPr id="6" name="p07-code">
             <a:extLst xmlns:a="http://schemas.openxmlformats.org/drawingml/2006/main">
               <a:ext uri="{FF2B5EF4-FFF2-40B4-BE49-F238E27FC236}">
-                <a16:creationId xmlns:a16="http://schemas.microsoft.com/office/drawing/2014/main" id="{7F0094AF-B0BE-4BFC-880F-4C7BD656ABE7}"/>
+                <a16:creationId xmlns:a16="http://schemas.microsoft.com/office/drawing/2014/main" id="{71ABA5B9-AD66-4690-A7F5-271983F1C8E0}"/>
               </a:ext>
             </a:extLst>
           </p:cNvPr>
@@ -18062,7 +19639,7 @@
           <p:cNvPr id="7" name="p07-tag-0">
             <a:extLst xmlns:a="http://schemas.openxmlformats.org/drawingml/2006/main">
               <a:ext uri="{FF2B5EF4-FFF2-40B4-BE49-F238E27FC236}">
-                <a16:creationId xmlns:a16="http://schemas.microsoft.com/office/drawing/2014/main" id="{573DCFE3-6DF4-4667-89EC-3DF849F0958F}"/>
+                <a16:creationId xmlns:a16="http://schemas.microsoft.com/office/drawing/2014/main" id="{F3A7E550-EA6C-4795-87E1-FAC7D7F7AF66}"/>
               </a:ext>
             </a:extLst>
           </p:cNvPr>
@@ -18117,7 +19694,7 @@
           <p:cNvPr id="8" name="p07-tag-1">
             <a:extLst xmlns:a="http://schemas.openxmlformats.org/drawingml/2006/main">
               <a:ext uri="{FF2B5EF4-FFF2-40B4-BE49-F238E27FC236}">
-                <a16:creationId xmlns:a16="http://schemas.microsoft.com/office/drawing/2014/main" id="{0CE2112C-7461-42ED-8161-CD471C2617D1}"/>
+                <a16:creationId xmlns:a16="http://schemas.microsoft.com/office/drawing/2014/main" id="{0C5E9218-DCAE-4C48-BFBC-86396D09FEE4}"/>
               </a:ext>
             </a:extLst>
           </p:cNvPr>
@@ -18172,7 +19749,7 @@
           <p:cNvPr id="9" name="p07-tag-2">
             <a:extLst xmlns:a="http://schemas.openxmlformats.org/drawingml/2006/main">
               <a:ext uri="{FF2B5EF4-FFF2-40B4-BE49-F238E27FC236}">
-                <a16:creationId xmlns:a16="http://schemas.microsoft.com/office/drawing/2014/main" id="{7F657574-9276-439B-A4C1-E8B63384FC0E}"/>
+                <a16:creationId xmlns:a16="http://schemas.microsoft.com/office/drawing/2014/main" id="{7602B6D5-31AD-46FD-A8F9-D4C4C0857399}"/>
               </a:ext>
             </a:extLst>
           </p:cNvPr>
@@ -18227,7 +19804,7 @@
           <p:cNvPr id="10" name="p07-tag-3">
             <a:extLst xmlns:a="http://schemas.openxmlformats.org/drawingml/2006/main">
               <a:ext uri="{FF2B5EF4-FFF2-40B4-BE49-F238E27FC236}">
-                <a16:creationId xmlns:a16="http://schemas.microsoft.com/office/drawing/2014/main" id="{2396633B-FCC8-4CBD-A154-BD1CE21175A3}"/>
+                <a16:creationId xmlns:a16="http://schemas.microsoft.com/office/drawing/2014/main" id="{57A5981F-132F-4254-944A-63A677BAA227}"/>
               </a:ext>
             </a:extLst>
           </p:cNvPr>
@@ -18282,7 +19859,7 @@
           <p:cNvPr id="11" name="p07-tag-4">
             <a:extLst xmlns:a="http://schemas.openxmlformats.org/drawingml/2006/main">
               <a:ext uri="{FF2B5EF4-FFF2-40B4-BE49-F238E27FC236}">
-                <a16:creationId xmlns:a16="http://schemas.microsoft.com/office/drawing/2014/main" id="{1FD0FD71-5A70-4F0F-BE01-F2650DDBCA24}"/>
+                <a16:creationId xmlns:a16="http://schemas.microsoft.com/office/drawing/2014/main" id="{5653CE68-8E60-4BBE-883D-739C8B307D3F}"/>
               </a:ext>
             </a:extLst>
           </p:cNvPr>
@@ -18337,7 +19914,7 @@
           <p:cNvPr id="12" name="p07-record">
             <a:extLst xmlns:a="http://schemas.openxmlformats.org/drawingml/2006/main">
               <a:ext uri="{FF2B5EF4-FFF2-40B4-BE49-F238E27FC236}">
-                <a16:creationId xmlns:a16="http://schemas.microsoft.com/office/drawing/2014/main" id="{ABF6CB6D-E03D-4BC2-AC07-136AC44BD927}"/>
+                <a16:creationId xmlns:a16="http://schemas.microsoft.com/office/drawing/2014/main" id="{DD6A6DFA-A6D0-4744-A5F2-EF4D4BE59EC3}"/>
               </a:ext>
             </a:extLst>
           </p:cNvPr>
@@ -18392,7 +19969,7 @@
           <p:cNvPr id="13" name="p07-bottom">
             <a:extLst xmlns:a="http://schemas.openxmlformats.org/drawingml/2006/main">
               <a:ext uri="{FF2B5EF4-FFF2-40B4-BE49-F238E27FC236}">
-                <a16:creationId xmlns:a16="http://schemas.microsoft.com/office/drawing/2014/main" id="{893E9CE5-72B2-456C-A91A-90980BC96DE7}"/>
+                <a16:creationId xmlns:a16="http://schemas.microsoft.com/office/drawing/2014/main" id="{F6F4F06E-B594-44F5-8497-9DF0F2B9CC6B}"/>
               </a:ext>
             </a:extLst>
           </p:cNvPr>
@@ -18537,7 +20114,7 @@
           <p:cNvPr id="6" name="p08-a-0">
             <a:extLst xmlns:a="http://schemas.openxmlformats.org/drawingml/2006/main">
               <a:ext uri="{FF2B5EF4-FFF2-40B4-BE49-F238E27FC236}">
-                <a16:creationId xmlns:a16="http://schemas.microsoft.com/office/drawing/2014/main" id="{5C28ABE6-4C37-4ED8-B7B4-37AB69F19F2A}"/>
+                <a16:creationId xmlns:a16="http://schemas.microsoft.com/office/drawing/2014/main" id="{ACA9528F-63F9-44BE-AE3E-17CB2D67EA80}"/>
               </a:ext>
             </a:extLst>
           </p:cNvPr>
@@ -18592,7 +20169,7 @@
           <p:cNvPr id="7" name="p08-arrow-0">
             <a:extLst xmlns:a="http://schemas.openxmlformats.org/drawingml/2006/main">
               <a:ext uri="{FF2B5EF4-FFF2-40B4-BE49-F238E27FC236}">
-                <a16:creationId xmlns:a16="http://schemas.microsoft.com/office/drawing/2014/main" id="{369D18AF-C04D-46DE-BA4A-A8A888D70A0B}"/>
+                <a16:creationId xmlns:a16="http://schemas.microsoft.com/office/drawing/2014/main" id="{4B33EF8D-35CD-4C25-A489-49C92BCD0C98}"/>
               </a:ext>
             </a:extLst>
           </p:cNvPr>
@@ -18645,7 +20222,7 @@
           <p:cNvPr id="8" name="p08-b-0">
             <a:extLst xmlns:a="http://schemas.openxmlformats.org/drawingml/2006/main">
               <a:ext uri="{FF2B5EF4-FFF2-40B4-BE49-F238E27FC236}">
-                <a16:creationId xmlns:a16="http://schemas.microsoft.com/office/drawing/2014/main" id="{D170426F-7B0A-48C4-BAB2-CE7C2FCE9FB9}"/>
+                <a16:creationId xmlns:a16="http://schemas.microsoft.com/office/drawing/2014/main" id="{A15BF739-FC90-428D-B77F-027086528057}"/>
               </a:ext>
             </a:extLst>
           </p:cNvPr>
@@ -18700,7 +20277,7 @@
           <p:cNvPr id="9" name="p08-a-1">
             <a:extLst xmlns:a="http://schemas.openxmlformats.org/drawingml/2006/main">
               <a:ext uri="{FF2B5EF4-FFF2-40B4-BE49-F238E27FC236}">
-                <a16:creationId xmlns:a16="http://schemas.microsoft.com/office/drawing/2014/main" id="{CED0CB33-D1DB-4826-9D7D-8108671982FD}"/>
+                <a16:creationId xmlns:a16="http://schemas.microsoft.com/office/drawing/2014/main" id="{5454FAA6-A8FB-438C-B6D5-A562060CBE0F}"/>
               </a:ext>
             </a:extLst>
           </p:cNvPr>
@@ -18755,7 +20332,7 @@
           <p:cNvPr id="10" name="p08-arrow-1">
             <a:extLst xmlns:a="http://schemas.openxmlformats.org/drawingml/2006/main">
               <a:ext uri="{FF2B5EF4-FFF2-40B4-BE49-F238E27FC236}">
-                <a16:creationId xmlns:a16="http://schemas.microsoft.com/office/drawing/2014/main" id="{CE177FFB-FFCE-4FEC-AC36-8C92C5E4ED0C}"/>
+                <a16:creationId xmlns:a16="http://schemas.microsoft.com/office/drawing/2014/main" id="{9C9CF989-BA89-4EE3-A353-A2B89FFCB28C}"/>
               </a:ext>
             </a:extLst>
           </p:cNvPr>
@@ -18808,7 +20385,7 @@
           <p:cNvPr id="11" name="p08-b-1">
             <a:extLst xmlns:a="http://schemas.openxmlformats.org/drawingml/2006/main">
               <a:ext uri="{FF2B5EF4-FFF2-40B4-BE49-F238E27FC236}">
-                <a16:creationId xmlns:a16="http://schemas.microsoft.com/office/drawing/2014/main" id="{9807D0B8-E664-4C61-9BFE-93C9F99D8FB3}"/>
+                <a16:creationId xmlns:a16="http://schemas.microsoft.com/office/drawing/2014/main" id="{1BE8E42E-A647-42E5-B5FC-EA462D1F5E68}"/>
               </a:ext>
             </a:extLst>
           </p:cNvPr>
@@ -18863,7 +20440,7 @@
           <p:cNvPr id="12" name="p08-a-2">
             <a:extLst xmlns:a="http://schemas.openxmlformats.org/drawingml/2006/main">
               <a:ext uri="{FF2B5EF4-FFF2-40B4-BE49-F238E27FC236}">
-                <a16:creationId xmlns:a16="http://schemas.microsoft.com/office/drawing/2014/main" id="{6F35F6CD-C5C8-434D-8B9E-EF57F75684A0}"/>
+                <a16:creationId xmlns:a16="http://schemas.microsoft.com/office/drawing/2014/main" id="{D988B21F-590F-4E96-A7CA-6C7A8036438C}"/>
               </a:ext>
             </a:extLst>
           </p:cNvPr>
@@ -18918,7 +20495,7 @@
           <p:cNvPr id="13" name="p08-arrow-2">
             <a:extLst xmlns:a="http://schemas.openxmlformats.org/drawingml/2006/main">
               <a:ext uri="{FF2B5EF4-FFF2-40B4-BE49-F238E27FC236}">
-                <a16:creationId xmlns:a16="http://schemas.microsoft.com/office/drawing/2014/main" id="{5F786AB4-5329-43F1-92F4-403E9E100F2E}"/>
+                <a16:creationId xmlns:a16="http://schemas.microsoft.com/office/drawing/2014/main" id="{F2A0EBA2-D38A-4978-A764-FBFD8FEA386A}"/>
               </a:ext>
             </a:extLst>
           </p:cNvPr>
@@ -18971,7 +20548,7 @@
           <p:cNvPr id="14" name="p08-b-2">
             <a:extLst xmlns:a="http://schemas.openxmlformats.org/drawingml/2006/main">
               <a:ext uri="{FF2B5EF4-FFF2-40B4-BE49-F238E27FC236}">
-                <a16:creationId xmlns:a16="http://schemas.microsoft.com/office/drawing/2014/main" id="{4A939DB0-4114-4E57-B6CC-9DF51F351006}"/>
+                <a16:creationId xmlns:a16="http://schemas.microsoft.com/office/drawing/2014/main" id="{8943167E-47E4-407F-899C-872CE074C8A0}"/>
               </a:ext>
             </a:extLst>
           </p:cNvPr>
@@ -19026,7 +20603,7 @@
           <p:cNvPr id="15" name="p08-a-3">
             <a:extLst xmlns:a="http://schemas.openxmlformats.org/drawingml/2006/main">
               <a:ext uri="{FF2B5EF4-FFF2-40B4-BE49-F238E27FC236}">
-                <a16:creationId xmlns:a16="http://schemas.microsoft.com/office/drawing/2014/main" id="{23130F0D-CABA-4888-A703-9C1C7D0659C8}"/>
+                <a16:creationId xmlns:a16="http://schemas.microsoft.com/office/drawing/2014/main" id="{CFD0DF20-C5B0-4363-9384-E6C65B7870F5}"/>
               </a:ext>
             </a:extLst>
           </p:cNvPr>
@@ -19081,7 +20658,7 @@
           <p:cNvPr id="16" name="p08-arrow-3">
             <a:extLst xmlns:a="http://schemas.openxmlformats.org/drawingml/2006/main">
               <a:ext uri="{FF2B5EF4-FFF2-40B4-BE49-F238E27FC236}">
-                <a16:creationId xmlns:a16="http://schemas.microsoft.com/office/drawing/2014/main" id="{627F3514-37A9-4898-A749-8EB5818F0CA4}"/>
+                <a16:creationId xmlns:a16="http://schemas.microsoft.com/office/drawing/2014/main" id="{E9E1C422-4ED3-4E59-BB99-9EF424D2047D}"/>
               </a:ext>
             </a:extLst>
           </p:cNvPr>
@@ -19134,7 +20711,7 @@
           <p:cNvPr id="17" name="p08-b-3">
             <a:extLst xmlns:a="http://schemas.openxmlformats.org/drawingml/2006/main">
               <a:ext uri="{FF2B5EF4-FFF2-40B4-BE49-F238E27FC236}">
-                <a16:creationId xmlns:a16="http://schemas.microsoft.com/office/drawing/2014/main" id="{EE6A20A1-E551-401A-9514-071946B67B0E}"/>
+                <a16:creationId xmlns:a16="http://schemas.microsoft.com/office/drawing/2014/main" id="{3A07AAFA-F808-4D24-9B9A-9E29742EF393}"/>
               </a:ext>
             </a:extLst>
           </p:cNvPr>
@@ -19189,7 +20766,7 @@
           <p:cNvPr id="18" name="p08-a-4">
             <a:extLst xmlns:a="http://schemas.openxmlformats.org/drawingml/2006/main">
               <a:ext uri="{FF2B5EF4-FFF2-40B4-BE49-F238E27FC236}">
-                <a16:creationId xmlns:a16="http://schemas.microsoft.com/office/drawing/2014/main" id="{E669227C-1E56-4109-871F-97EBE03C5FD7}"/>
+                <a16:creationId xmlns:a16="http://schemas.microsoft.com/office/drawing/2014/main" id="{99737C1A-CFEF-48CF-B53E-016ABE700728}"/>
               </a:ext>
             </a:extLst>
           </p:cNvPr>
@@ -19244,7 +20821,7 @@
           <p:cNvPr id="19" name="p08-arrow-4">
             <a:extLst xmlns:a="http://schemas.openxmlformats.org/drawingml/2006/main">
               <a:ext uri="{FF2B5EF4-FFF2-40B4-BE49-F238E27FC236}">
-                <a16:creationId xmlns:a16="http://schemas.microsoft.com/office/drawing/2014/main" id="{42647014-3A06-4667-8D31-1FE91A07D142}"/>
+                <a16:creationId xmlns:a16="http://schemas.microsoft.com/office/drawing/2014/main" id="{15C11CE9-7477-49CC-8404-C281C4DA49D3}"/>
               </a:ext>
             </a:extLst>
           </p:cNvPr>
@@ -19297,7 +20874,7 @@
           <p:cNvPr id="20" name="p08-b-4">
             <a:extLst xmlns:a="http://schemas.openxmlformats.org/drawingml/2006/main">
               <a:ext uri="{FF2B5EF4-FFF2-40B4-BE49-F238E27FC236}">
-                <a16:creationId xmlns:a16="http://schemas.microsoft.com/office/drawing/2014/main" id="{01BE622E-81FA-4D28-8B6B-EB6BB5F06AA5}"/>
+                <a16:creationId xmlns:a16="http://schemas.microsoft.com/office/drawing/2014/main" id="{4D95846E-DABF-4848-85E6-D6A846C47F80}"/>
               </a:ext>
             </a:extLst>
           </p:cNvPr>
@@ -19342,7 +20919,7 @@
                 <a:ea typeface="Microsoft YaHei"/>
                 <a:cs typeface="Microsoft YaHei"/>
               </a:rPr>
-              <a:t>是否对应问题与机制</a:t>
+              <a:t>对应当前问题或拟用主张</a:t>
             </a:r>
           </a:p>
         </p:txBody>
@@ -19352,7 +20929,7 @@
           <p:cNvPr id="21" name="p08-bottom">
             <a:extLst xmlns:a="http://schemas.openxmlformats.org/drawingml/2006/main">
               <a:ext uri="{FF2B5EF4-FFF2-40B4-BE49-F238E27FC236}">
-                <a16:creationId xmlns:a16="http://schemas.microsoft.com/office/drawing/2014/main" id="{D0CE0309-921E-4934-8AC7-7E009913D83C}"/>
+                <a16:creationId xmlns:a16="http://schemas.microsoft.com/office/drawing/2014/main" id="{62B81B0E-1048-452F-9D29-2579ACFC849D}"/>
               </a:ext>
             </a:extLst>
           </p:cNvPr>
@@ -19497,7 +21074,7 @@
           <p:cNvPr id="6" name="p09-main">
             <a:extLst xmlns:a="http://schemas.openxmlformats.org/drawingml/2006/main">
               <a:ext uri="{FF2B5EF4-FFF2-40B4-BE49-F238E27FC236}">
-                <a16:creationId xmlns:a16="http://schemas.microsoft.com/office/drawing/2014/main" id="{60AB76B1-E1AA-4768-A58C-B7317CE6AAA9}"/>
+                <a16:creationId xmlns:a16="http://schemas.microsoft.com/office/drawing/2014/main" id="{BCD27B3E-C815-4D05-AC4D-583488101ABF}"/>
               </a:ext>
             </a:extLst>
           </p:cNvPr>
@@ -19552,19 +21129,19 @@
           <p:cNvPr id="7" name="p09-def">
             <a:extLst xmlns:a="http://schemas.openxmlformats.org/drawingml/2006/main">
               <a:ext uri="{FF2B5EF4-FFF2-40B4-BE49-F238E27FC236}">
-                <a16:creationId xmlns:a16="http://schemas.microsoft.com/office/drawing/2014/main" id="{4F364857-886E-4C49-B9D8-01CA90DAFED3}"/>
-              </a:ext>
-            </a:extLst>
-          </p:cNvPr>
-          <p:cNvSpPr>
-            <a:spLocks xmlns:a="http://schemas.openxmlformats.org/drawingml/2006/main" noGrp="1"/>
-          </p:cNvSpPr>
-          <p:nvPr/>
-        </p:nvSpPr>
-        <p:spPr>
-          <a:xfrm xmlns:a="http://schemas.openxmlformats.org/drawingml/2006/main">
-            <a:off x="1809750" y="2571750"/>
-            <a:ext cx="8572500" cy="1104900"/>
+                <a16:creationId xmlns:a16="http://schemas.microsoft.com/office/drawing/2014/main" id="{5588EB12-1F53-4299-A3ED-C4B09F570B53}"/>
+              </a:ext>
+            </a:extLst>
+          </p:cNvPr>
+          <p:cNvSpPr>
+            <a:spLocks xmlns:a="http://schemas.openxmlformats.org/drawingml/2006/main" noGrp="1"/>
+          </p:cNvSpPr>
+          <p:nvPr/>
+        </p:nvSpPr>
+        <p:spPr>
+          <a:xfrm xmlns:a="http://schemas.openxmlformats.org/drawingml/2006/main">
+            <a:off x="1428750" y="2571750"/>
+            <a:ext cx="9334500" cy="1104900"/>
           </a:xfrm>
           <a:prstGeom xmlns:a="http://schemas.openxmlformats.org/drawingml/2006/main" prst="rect">
             <a:avLst/>
@@ -19584,14 +21161,14 @@
                 <a:spcPct val="130000"/>
               </a:lnSpc>
               <a:buNone/>
-              <a:defRPr sz="2175" b="1">
+              <a:defRPr sz="1950" b="1">
                 <a:solidFill>
                   <a:srgbClr val="18354E"/>
                 </a:solidFill>
               </a:defRPr>
             </a:pPr>
             <a:r>
-              <a:rPr sz="2175" b="1">
+              <a:rPr sz="1950" b="1">
                 <a:solidFill>
                   <a:srgbClr val="18354E"/>
                 </a:solidFill>
@@ -19599,7 +21176,7 @@
                 <a:ea typeface="Microsoft YaHei"/>
                 <a:cs typeface="Microsoft YaHei"/>
               </a:rPr>
-              <a:t>直接支持或反驳当前机制假设</a:t>
+              <a:t>在可比条件下直接支持或反驳当前问题或拟用主张</a:t>
             </a:r>
           </a:p>
           <a:p xmlns:a="http://schemas.openxmlformats.org/drawingml/2006/main">
@@ -19608,14 +21185,14 @@
                 <a:spcPct val="130000"/>
               </a:lnSpc>
               <a:buNone/>
-              <a:defRPr sz="2175" b="1">
+              <a:defRPr sz="1950" b="1">
                 <a:solidFill>
                   <a:srgbClr val="18354E"/>
                 </a:solidFill>
               </a:defRPr>
             </a:pPr>
             <a:r>
-              <a:rPr sz="2175" b="1">
+              <a:rPr sz="1950" b="1">
                 <a:solidFill>
                   <a:srgbClr val="18354E"/>
                 </a:solidFill>
@@ -19623,7 +21200,7 @@
                 <a:ea typeface="Microsoft YaHei"/>
                 <a:cs typeface="Microsoft YaHei"/>
               </a:rPr>
-              <a:t>来自可核验的一手来源</a:t>
+              <a:t>角色先作预期标注，精读后可修正</a:t>
             </a:r>
           </a:p>
         </p:txBody>
@@ -19633,7 +21210,7 @@
           <p:cNvPr id="8" name="p09-can">
             <a:extLst xmlns:a="http://schemas.openxmlformats.org/drawingml/2006/main">
               <a:ext uri="{FF2B5EF4-FFF2-40B4-BE49-F238E27FC236}">
-                <a16:creationId xmlns:a16="http://schemas.microsoft.com/office/drawing/2014/main" id="{71A0FA33-5D8E-4C25-97F4-5471D5CBA52B}"/>
+                <a16:creationId xmlns:a16="http://schemas.microsoft.com/office/drawing/2014/main" id="{D26AE5FF-EC6B-44DD-9C0F-6E12473FFFF5}"/>
               </a:ext>
             </a:extLst>
           </p:cNvPr>
@@ -19688,7 +21265,7 @@
           <p:cNvPr id="9" name="p09-cannot">
             <a:extLst xmlns:a="http://schemas.openxmlformats.org/drawingml/2006/main">
               <a:ext uri="{FF2B5EF4-FFF2-40B4-BE49-F238E27FC236}">
-                <a16:creationId xmlns:a16="http://schemas.microsoft.com/office/drawing/2014/main" id="{EEECCC07-8849-483E-9AB4-DD4E3A8330B5}"/>
+                <a16:creationId xmlns:a16="http://schemas.microsoft.com/office/drawing/2014/main" id="{999F4B60-1FA6-459C-8F2D-899F4C97A763}"/>
               </a:ext>
             </a:extLst>
           </p:cNvPr>
@@ -19743,19 +21320,19 @@
           <p:cNvPr id="10" name="p09-bottom">
             <a:extLst xmlns:a="http://schemas.openxmlformats.org/drawingml/2006/main">
               <a:ext uri="{FF2B5EF4-FFF2-40B4-BE49-F238E27FC236}">
-                <a16:creationId xmlns:a16="http://schemas.microsoft.com/office/drawing/2014/main" id="{CC041FFF-B566-4CD2-8627-A9020B921CC4}"/>
-              </a:ext>
-            </a:extLst>
-          </p:cNvPr>
-          <p:cNvSpPr>
-            <a:spLocks xmlns:a="http://schemas.openxmlformats.org/drawingml/2006/main" noGrp="1"/>
-          </p:cNvSpPr>
-          <p:nvPr/>
-        </p:nvSpPr>
-        <p:spPr>
-          <a:xfrm xmlns:a="http://schemas.openxmlformats.org/drawingml/2006/main">
-            <a:off x="4000500" y="5219700"/>
-            <a:ext cx="4191000" cy="381000"/>
+                <a16:creationId xmlns:a16="http://schemas.microsoft.com/office/drawing/2014/main" id="{872D49D7-F3D0-432E-91B8-E25367956F37}"/>
+              </a:ext>
+            </a:extLst>
+          </p:cNvPr>
+          <p:cNvSpPr>
+            <a:spLocks xmlns:a="http://schemas.openxmlformats.org/drawingml/2006/main" noGrp="1"/>
+          </p:cNvSpPr>
+          <p:nvPr/>
+        </p:nvSpPr>
+        <p:spPr>
+          <a:xfrm xmlns:a="http://schemas.openxmlformats.org/drawingml/2006/main">
+            <a:off x="3333750" y="5219700"/>
+            <a:ext cx="5524500" cy="381000"/>
           </a:xfrm>
           <a:prstGeom xmlns:a="http://schemas.openxmlformats.org/drawingml/2006/main" prst="rect">
             <a:avLst/>
@@ -19786,7 +21363,7 @@
                 <a:ea typeface="Microsoft YaHei"/>
                 <a:cs typeface="Microsoft YaHei"/>
               </a:rPr>
-              <a:t>一条材料至少标一个角色。</a:t>
+              <a:t>每个角色都要写明参照的问题或拟用主张。</a:t>
             </a:r>
           </a:p>
         </p:txBody>
